--- a/s04/descargables/S04_ALU_01_Presentacion.pptx
+++ b/s04/descargables/S04_ALU_01_Presentacion.pptx
@@ -47,9 +47,10 @@
     <p:sldId id="295" r:id="rId41"/>
     <p:sldId id="296" r:id="rId42"/>
     <p:sldId id="297" r:id="rId43"/>
+    <p:sldId id="298" r:id="rId44"/>
   </p:sldIdLst>
   <p:notesMasterIdLst>
-    <p:notesMasterId r:id="rId44"/>
+    <p:notesMasterId r:id="rId45"/>
   </p:notesMasterIdLst>
   <p:sldSz cx="9144000" cy="5143500"/>
   <p:notesSz cx="5143500" cy="9144000"/>
@@ -3735,6 +3736,94 @@
             <a:fld id="{F7021451-1387-4CA6-816F-3879F97B5CBC}" type="slidenum">
               <a:rPr lang="en-US"/>
               <a:t>42</a:t>
+            </a:fld>
+            <a:endParaRPr lang="en-US"/>
+          </a:p>
+        </p:txBody>
+      </p:sp>
+    </p:spTree>
+    <p:extLst>
+      <p:ext uri="{BB962C8B-B14F-4D97-AF65-F5344CB8AC3E}">
+        <p14:creationId xmlns:p14="http://schemas.microsoft.com/office/powerpoint/2010/main" val="1024086991"/>
+      </p:ext>
+    </p:extLst>
+  </p:cSld>
+  <p:clrMapOvr>
+    <a:masterClrMapping/>
+  </p:clrMapOvr>
+</p:notes>
+</file>
+
+<file path=ppt/notesSlides/notesSlide43.xml><?xml version="1.0" encoding="utf-8"?>
+<p:notes xmlns:a="http://schemas.openxmlformats.org/drawingml/2006/main" xmlns:r="http://schemas.openxmlformats.org/officeDocument/2006/relationships" xmlns:p="http://schemas.openxmlformats.org/presentationml/2006/main">
+  <p:cSld>
+    <p:spTree>
+      <p:nvGrpSpPr>
+        <p:cNvPr id="1" name=""/>
+        <p:cNvGrpSpPr/>
+        <p:nvPr/>
+      </p:nvGrpSpPr>
+      <p:grpSpPr>
+        <a:xfrm>
+          <a:off x="0" y="0"/>
+          <a:ext cx="0" cy="0"/>
+          <a:chOff x="0" y="0"/>
+          <a:chExt cx="0" cy="0"/>
+        </a:xfrm>
+      </p:grpSpPr>
+      <p:sp>
+        <p:nvSpPr>
+          <p:cNvPr id="2" name="Slide Image Placeholder 1"/>
+          <p:cNvSpPr>
+            <a:spLocks noGrp="1" noRot="1" noChangeAspect="1"/>
+          </p:cNvSpPr>
+          <p:nvPr>
+            <p:ph type="sldImg"/>
+          </p:nvPr>
+        </p:nvSpPr>
+        <p:spPr/>
+      </p:sp>
+      <p:sp>
+        <p:nvSpPr>
+          <p:cNvPr id="3" name="Notes Placeholder 2"/>
+          <p:cNvSpPr>
+            <a:spLocks noGrp="1"/>
+          </p:cNvSpPr>
+          <p:nvPr>
+            <p:ph type="body" idx="1"/>
+          </p:nvPr>
+        </p:nvSpPr>
+        <p:spPr/>
+        <p:txBody>
+          <a:bodyPr/>
+          <a:lstStyle/>
+          <a:p>
+            <a:r>
+              <a:rPr lang="en-US" dirty="0"/>
+              <a:t/>
+            </a:r>
+            <a:endParaRPr lang="en-US" dirty="0"/>
+          </a:p>
+        </p:txBody>
+      </p:sp>
+      <p:sp>
+        <p:nvSpPr>
+          <p:cNvPr id="4" name="Slide Number Placeholder 3"/>
+          <p:cNvSpPr>
+            <a:spLocks noGrp="1"/>
+          </p:cNvSpPr>
+          <p:nvPr>
+            <p:ph type="sldNum" sz="quarter" idx="10"/>
+          </p:nvPr>
+        </p:nvSpPr>
+        <p:spPr/>
+        <p:txBody>
+          <a:bodyPr/>
+          <a:lstStyle/>
+          <a:p>
+            <a:fld id="{F7021451-1387-4CA6-816F-3879F97B5CBC}" type="slidenum">
+              <a:rPr lang="en-US"/>
+              <a:t>43</a:t>
             </a:fld>
             <a:endParaRPr lang="en-US"/>
           </a:p>
@@ -10195,7 +10284,7 @@
                 <a:ea typeface="Arial" pitchFamily="34" charset="-122"/>
                 <a:cs typeface="Arial" pitchFamily="34" charset="-120"/>
               </a:rPr>
-              <a:t>El cuarto es el que casi nadie tiene configurado. La lista la publica la UIF en el Portal. · RCG 23 Bis 4</a:t>
+              <a:t>Y el 23 Ter 2 nombra DOS delitos: el 400 Bis y el 139 Quáter. Un sistema que sólo mide monto cubre la mitad: el financiamiento al terrorismo se ve por contraparte, destino y listas, no por importe.</a:t>
             </a:r>
             <a:endParaRPr lang="en-US" sz="1200" dirty="0"/>
           </a:p>
@@ -12629,7 +12718,7 @@
                 <a:ea typeface="Arial" pitchFamily="34" charset="-122"/>
                 <a:cs typeface="Arial" pitchFamily="34" charset="-120"/>
               </a:rPr>
-              <a:t>No es un aviso: son dos</a:t>
+              <a:t>No es un aviso de 24 horas: son tres</a:t>
             </a:r>
             <a:endParaRPr lang="en-US" sz="2700" dirty="0"/>
           </a:p>
@@ -12650,7 +12739,7 @@
           </p:nvPr>
         </p:nvGraphicFramePr>
         <p:xfrm>
-          <a:off x="502920" y="1783080"/>
+          <a:off x="502920" y="1737360"/>
           <a:ext cx="8138160" cy="914400"/>
         </p:xfrm>
         <a:graphic>
@@ -12658,9 +12747,10 @@
             <a:tbl>
               <a:tblPr/>
               <a:tblGrid>
-                <a:gridCol w="1554480"/>
-                <a:gridCol w="3291840"/>
-                <a:gridCol w="3291840"/>
+                <a:gridCol w="1371600"/>
+                <a:gridCol w="1920240"/>
+                <a:gridCol w="3657600"/>
+                <a:gridCol w="1188720"/>
               </a:tblGrid>
               <a:tr h="0">
                 <a:tc>
@@ -12671,7 +12761,18 @@
                       <a:pPr indent="0" marL="0">
                         <a:buNone/>
                       </a:pPr>
-                      <a:endParaRPr lang="en-US" sz="1050" dirty="0">
+                      <a:r>
+                        <a:rPr lang="en-US" sz="950" b="1" dirty="0">
+                          <a:solidFill>
+                            <a:srgbClr val="1B1B1E"/>
+                          </a:solidFill>
+                          <a:latin typeface="Arial" pitchFamily="34" charset="0"/>
+                          <a:ea typeface="Arial" pitchFamily="34" charset="-122"/>
+                          <a:cs typeface="Arial" pitchFamily="34" charset="-120"/>
+                        </a:rPr>
+                        <a:t>El artículo</a:t>
+                      </a:r>
+                      <a:endParaRPr lang="en-US" sz="950" dirty="0">
                         <a:latin typeface="Arial" charset="0"/>
                         <a:ea typeface="Arial" charset="0"/>
                         <a:cs typeface="Arial" charset="0"/>
@@ -12729,7 +12830,7 @@
                         <a:buNone/>
                       </a:pPr>
                       <a:r>
-                        <a:rPr lang="en-US" sz="1050" b="1" dirty="0">
+                        <a:rPr lang="en-US" sz="950" b="1" dirty="0">
                           <a:solidFill>
                             <a:srgbClr val="1B1B1E"/>
                           </a:solidFill>
@@ -12737,9 +12838,9 @@
                           <a:ea typeface="Arial" pitchFamily="34" charset="-122"/>
                           <a:cs typeface="Arial" pitchFamily="34" charset="-120"/>
                         </a:rPr>
-                        <a:t>RCG 26 Bis · por sospecha</a:t>
+                        <a:t>Cómo se llama</a:t>
                       </a:r>
-                      <a:endParaRPr lang="en-US" sz="1050" dirty="0">
+                      <a:endParaRPr lang="en-US" sz="950" dirty="0">
                         <a:latin typeface="Arial" charset="0"/>
                         <a:ea typeface="Arial" charset="0"/>
                         <a:cs typeface="Arial" charset="0"/>
@@ -12797,7 +12898,7 @@
                         <a:buNone/>
                       </a:pPr>
                       <a:r>
-                        <a:rPr lang="en-US" sz="1050" b="1" dirty="0">
+                        <a:rPr lang="en-US" sz="950" b="1" dirty="0">
                           <a:solidFill>
                             <a:srgbClr val="1B1B1E"/>
                           </a:solidFill>
@@ -12805,9 +12906,77 @@
                           <a:ea typeface="Arial" pitchFamily="34" charset="-122"/>
                           <a:cs typeface="Arial" pitchFamily="34" charset="-120"/>
                         </a:rPr>
-                        <a:t>RCG 26 Bis 1 · por hechos o indicios</a:t>
+                        <a:t>De dónde nace</a:t>
                       </a:r>
-                      <a:endParaRPr lang="en-US" sz="1050" dirty="0">
+                      <a:endParaRPr lang="en-US" sz="950" dirty="0">
+                        <a:latin typeface="Arial" charset="0"/>
+                        <a:ea typeface="Arial" charset="0"/>
+                        <a:cs typeface="Arial" charset="0"/>
+                      </a:endParaRPr>
+                    </a:p>
+                  </a:txBody>
+                  <a:tcPr marL="63500" marR="63500" marT="63500" marB="63500" anchor="ctr">
+                    <a:lnL w="6350" cap="flat" cmpd="sng" algn="ctr">
+                      <a:solidFill>
+                        <a:srgbClr val="D9E2DB"/>
+                      </a:solidFill>
+                      <a:prstDash val="solid"/>
+                      <a:round/>
+                      <a:headEnd type="none" w="med" len="med"/>
+                      <a:tailEnd type="none" w="med" len="med"/>
+                    </a:lnL>
+                    <a:lnR w="6350" cap="flat" cmpd="sng" algn="ctr">
+                      <a:solidFill>
+                        <a:srgbClr val="D9E2DB"/>
+                      </a:solidFill>
+                      <a:prstDash val="solid"/>
+                      <a:round/>
+                      <a:headEnd type="none" w="med" len="med"/>
+                      <a:tailEnd type="none" w="med" len="med"/>
+                    </a:lnR>
+                    <a:lnT w="6350" cap="flat" cmpd="sng" algn="ctr">
+                      <a:solidFill>
+                        <a:srgbClr val="D9E2DB"/>
+                      </a:solidFill>
+                      <a:prstDash val="solid"/>
+                      <a:round/>
+                      <a:headEnd type="none" w="med" len="med"/>
+                      <a:tailEnd type="none" w="med" len="med"/>
+                    </a:lnT>
+                    <a:lnB w="6350" cap="flat" cmpd="sng" algn="ctr">
+                      <a:solidFill>
+                        <a:srgbClr val="D9E2DB"/>
+                      </a:solidFill>
+                      <a:prstDash val="solid"/>
+                      <a:round/>
+                      <a:headEnd type="none" w="med" len="med"/>
+                      <a:tailEnd type="none" w="med" len="med"/>
+                    </a:lnB>
+                    <a:solidFill>
+                      <a:srgbClr val="64C27B"/>
+                    </a:solidFill>
+                  </a:tcPr>
+                </a:tc>
+                <a:tc>
+                  <a:txBody>
+                    <a:bodyPr/>
+                    <a:lstStyle/>
+                    <a:p>
+                      <a:pPr indent="0" marL="0">
+                        <a:buNone/>
+                      </a:pPr>
+                      <a:r>
+                        <a:rPr lang="en-US" sz="950" b="1" dirty="0">
+                          <a:solidFill>
+                            <a:srgbClr val="1B1B1E"/>
+                          </a:solidFill>
+                          <a:latin typeface="Arial" pitchFamily="34" charset="0"/>
+                          <a:ea typeface="Arial" pitchFamily="34" charset="-122"/>
+                          <a:cs typeface="Arial" pitchFamily="34" charset="-120"/>
+                        </a:rPr>
+                        <a:t>El verbo del texto</a:t>
+                      </a:r>
+                      <a:endParaRPr lang="en-US" sz="950" dirty="0">
                         <a:latin typeface="Arial" charset="0"/>
                         <a:ea typeface="Arial" charset="0"/>
                         <a:cs typeface="Arial" charset="0"/>
@@ -12867,7 +13036,7 @@
                         <a:buNone/>
                       </a:pPr>
                       <a:r>
-                        <a:rPr lang="en-US" sz="1050" dirty="0">
+                        <a:rPr lang="en-US" sz="950" dirty="0">
                           <a:solidFill>
                             <a:srgbClr val="1B1B1E"/>
                           </a:solidFill>
@@ -12875,9 +13044,9 @@
                           <a:ea typeface="Arial" pitchFamily="34" charset="-122"/>
                           <a:cs typeface="Arial" pitchFamily="34" charset="-120"/>
                         </a:rPr>
-                        <a:t>De dónde sale</a:t>
+                        <a:t>RCG 26 Bis</a:t>
                       </a:r>
-                      <a:endParaRPr lang="en-US" sz="1050" dirty="0">
+                      <a:endParaRPr lang="en-US" sz="950" dirty="0">
                         <a:latin typeface="Arial" charset="0"/>
                         <a:ea typeface="Arial" charset="0"/>
                         <a:cs typeface="Arial" charset="0"/>
@@ -12935,7 +13104,7 @@
                         <a:buNone/>
                       </a:pPr>
                       <a:r>
-                        <a:rPr lang="en-US" sz="1050" dirty="0">
+                        <a:rPr lang="en-US" sz="950" dirty="0">
                           <a:solidFill>
                             <a:srgbClr val="1B1B1E"/>
                           </a:solidFill>
@@ -12943,9 +13112,9 @@
                           <a:ea typeface="Arial" pitchFamily="34" charset="-122"/>
                           <a:cs typeface="Arial" pitchFamily="34" charset="-120"/>
                         </a:rPr>
-                        <a:t>De lo que usted reconoce en la conducta del cliente</a:t>
+                        <a:t>Aviso por SOSPECHA</a:t>
                       </a:r>
-                      <a:endParaRPr lang="en-US" sz="1050" dirty="0">
+                      <a:endParaRPr lang="en-US" sz="950" dirty="0">
                         <a:latin typeface="Arial" charset="0"/>
                         <a:ea typeface="Arial" charset="0"/>
                         <a:cs typeface="Arial" charset="0"/>
@@ -13003,7 +13172,7 @@
                         <a:buNone/>
                       </a:pPr>
                       <a:r>
-                        <a:rPr lang="en-US" sz="1050" dirty="0">
+                        <a:rPr lang="en-US" sz="950" dirty="0">
                           <a:solidFill>
                             <a:srgbClr val="1B1B1E"/>
                           </a:solidFill>
@@ -13011,9 +13180,77 @@
                           <a:ea typeface="Arial" pitchFamily="34" charset="-122"/>
                           <a:cs typeface="Arial" pitchFamily="34" charset="-120"/>
                         </a:rPr>
-                        <a:t>De información de fuentes públicas o privadas</a:t>
+                        <a:t>De lo que usted reconoce en la actividad, conducta o comportamiento del cliente</a:t>
                       </a:r>
-                      <a:endParaRPr lang="en-US" sz="1050" dirty="0">
+                      <a:endParaRPr lang="en-US" sz="950" dirty="0">
+                        <a:latin typeface="Arial" charset="0"/>
+                        <a:ea typeface="Arial" charset="0"/>
+                        <a:cs typeface="Arial" charset="0"/>
+                      </a:endParaRPr>
+                    </a:p>
+                  </a:txBody>
+                  <a:tcPr marL="63500" marR="63500" marT="63500" marB="63500" anchor="ctr">
+                    <a:lnL w="6350" cap="flat" cmpd="sng" algn="ctr">
+                      <a:solidFill>
+                        <a:srgbClr val="D9E2DB"/>
+                      </a:solidFill>
+                      <a:prstDash val="solid"/>
+                      <a:round/>
+                      <a:headEnd type="none" w="med" len="med"/>
+                      <a:tailEnd type="none" w="med" len="med"/>
+                    </a:lnL>
+                    <a:lnR w="6350" cap="flat" cmpd="sng" algn="ctr">
+                      <a:solidFill>
+                        <a:srgbClr val="D9E2DB"/>
+                      </a:solidFill>
+                      <a:prstDash val="solid"/>
+                      <a:round/>
+                      <a:headEnd type="none" w="med" len="med"/>
+                      <a:tailEnd type="none" w="med" len="med"/>
+                    </a:lnR>
+                    <a:lnT w="6350" cap="flat" cmpd="sng" algn="ctr">
+                      <a:solidFill>
+                        <a:srgbClr val="D9E2DB"/>
+                      </a:solidFill>
+                      <a:prstDash val="solid"/>
+                      <a:round/>
+                      <a:headEnd type="none" w="med" len="med"/>
+                      <a:tailEnd type="none" w="med" len="med"/>
+                    </a:lnT>
+                    <a:lnB w="6350" cap="flat" cmpd="sng" algn="ctr">
+                      <a:solidFill>
+                        <a:srgbClr val="D9E2DB"/>
+                      </a:solidFill>
+                      <a:prstDash val="solid"/>
+                      <a:round/>
+                      <a:headEnd type="none" w="med" len="med"/>
+                      <a:tailEnd type="none" w="med" len="med"/>
+                    </a:lnB>
+                    <a:solidFill>
+                      <a:srgbClr val="FFFFFF"/>
+                    </a:solidFill>
+                  </a:tcPr>
+                </a:tc>
+                <a:tc>
+                  <a:txBody>
+                    <a:bodyPr/>
+                    <a:lstStyle/>
+                    <a:p>
+                      <a:pPr indent="0" marL="0">
+                        <a:buNone/>
+                      </a:pPr>
+                      <a:r>
+                        <a:rPr lang="en-US" sz="950" dirty="0">
+                          <a:solidFill>
+                            <a:srgbClr val="1B1B1E"/>
+                          </a:solidFill>
+                          <a:latin typeface="Arial" pitchFamily="34" charset="0"/>
+                          <a:ea typeface="Arial" pitchFamily="34" charset="-122"/>
+                          <a:cs typeface="Arial" pitchFamily="34" charset="-120"/>
+                        </a:rPr>
+                        <a:t>«reconozca»</a:t>
+                      </a:r>
+                      <a:endParaRPr lang="en-US" sz="950" dirty="0">
                         <a:latin typeface="Arial" charset="0"/>
                         <a:ea typeface="Arial" charset="0"/>
                         <a:cs typeface="Arial" charset="0"/>
@@ -13073,7 +13310,7 @@
                         <a:buNone/>
                       </a:pPr>
                       <a:r>
-                        <a:rPr lang="en-US" sz="1050" dirty="0">
+                        <a:rPr lang="en-US" sz="950" dirty="0">
                           <a:solidFill>
                             <a:srgbClr val="1B1B1E"/>
                           </a:solidFill>
@@ -13081,9 +13318,9 @@
                           <a:ea typeface="Arial" pitchFamily="34" charset="-122"/>
                           <a:cs typeface="Arial" pitchFamily="34" charset="-120"/>
                         </a:rPr>
-                        <a:t>El verbo del texto</a:t>
+                        <a:t>RCG 26 Bis 1</a:t>
                       </a:r>
-                      <a:endParaRPr lang="en-US" sz="1050" dirty="0">
+                      <a:endParaRPr lang="en-US" sz="950" dirty="0">
                         <a:latin typeface="Arial" charset="0"/>
                         <a:ea typeface="Arial" charset="0"/>
                         <a:cs typeface="Arial" charset="0"/>
@@ -13141,7 +13378,7 @@
                         <a:buNone/>
                       </a:pPr>
                       <a:r>
-                        <a:rPr lang="en-US" sz="1050" dirty="0">
+                        <a:rPr lang="en-US" sz="950" dirty="0">
                           <a:solidFill>
                             <a:srgbClr val="1B1B1E"/>
                           </a:solidFill>
@@ -13149,9 +13386,9 @@
                           <a:ea typeface="Arial" pitchFamily="34" charset="-122"/>
                           <a:cs typeface="Arial" pitchFamily="34" charset="-120"/>
                         </a:rPr>
-                        <a:t>«reconozca»</a:t>
+                        <a:t>Aviso por HECHOS O INDICIOS</a:t>
                       </a:r>
-                      <a:endParaRPr lang="en-US" sz="1050" dirty="0">
+                      <a:endParaRPr lang="en-US" sz="950" dirty="0">
                         <a:latin typeface="Arial" charset="0"/>
                         <a:ea typeface="Arial" charset="0"/>
                         <a:cs typeface="Arial" charset="0"/>
@@ -13209,7 +13446,75 @@
                         <a:buNone/>
                       </a:pPr>
                       <a:r>
-                        <a:rPr lang="en-US" sz="1050" dirty="0">
+                        <a:rPr lang="en-US" sz="950" dirty="0">
+                          <a:solidFill>
+                            <a:srgbClr val="1B1B1E"/>
+                          </a:solidFill>
+                          <a:latin typeface="Arial" pitchFamily="34" charset="0"/>
+                          <a:ea typeface="Arial" pitchFamily="34" charset="-122"/>
+                          <a:cs typeface="Arial" pitchFamily="34" charset="-120"/>
+                        </a:rPr>
+                        <a:t>De información que le llega de otras fuentes públicas o privadas</a:t>
+                      </a:r>
+                      <a:endParaRPr lang="en-US" sz="950" dirty="0">
+                        <a:latin typeface="Arial" charset="0"/>
+                        <a:ea typeface="Arial" charset="0"/>
+                        <a:cs typeface="Arial" charset="0"/>
+                      </a:endParaRPr>
+                    </a:p>
+                  </a:txBody>
+                  <a:tcPr marL="63500" marR="63500" marT="63500" marB="63500" anchor="ctr">
+                    <a:lnL w="6350" cap="flat" cmpd="sng" algn="ctr">
+                      <a:solidFill>
+                        <a:srgbClr val="D9E2DB"/>
+                      </a:solidFill>
+                      <a:prstDash val="solid"/>
+                      <a:round/>
+                      <a:headEnd type="none" w="med" len="med"/>
+                      <a:tailEnd type="none" w="med" len="med"/>
+                    </a:lnL>
+                    <a:lnR w="6350" cap="flat" cmpd="sng" algn="ctr">
+                      <a:solidFill>
+                        <a:srgbClr val="D9E2DB"/>
+                      </a:solidFill>
+                      <a:prstDash val="solid"/>
+                      <a:round/>
+                      <a:headEnd type="none" w="med" len="med"/>
+                      <a:tailEnd type="none" w="med" len="med"/>
+                    </a:lnR>
+                    <a:lnT w="6350" cap="flat" cmpd="sng" algn="ctr">
+                      <a:solidFill>
+                        <a:srgbClr val="D9E2DB"/>
+                      </a:solidFill>
+                      <a:prstDash val="solid"/>
+                      <a:round/>
+                      <a:headEnd type="none" w="med" len="med"/>
+                      <a:tailEnd type="none" w="med" len="med"/>
+                    </a:lnT>
+                    <a:lnB w="6350" cap="flat" cmpd="sng" algn="ctr">
+                      <a:solidFill>
+                        <a:srgbClr val="D9E2DB"/>
+                      </a:solidFill>
+                      <a:prstDash val="solid"/>
+                      <a:round/>
+                      <a:headEnd type="none" w="med" len="med"/>
+                      <a:tailEnd type="none" w="med" len="med"/>
+                    </a:lnB>
+                    <a:solidFill>
+                      <a:srgbClr val="EEF4EF"/>
+                    </a:solidFill>
+                  </a:tcPr>
+                </a:tc>
+                <a:tc>
+                  <a:txBody>
+                    <a:bodyPr/>
+                    <a:lstStyle/>
+                    <a:p>
+                      <a:pPr indent="0" marL="0">
+                        <a:buNone/>
+                      </a:pPr>
+                      <a:r>
+                        <a:rPr lang="en-US" sz="950" dirty="0">
                           <a:solidFill>
                             <a:srgbClr val="1B1B1E"/>
                           </a:solidFill>
@@ -13219,7 +13524,7 @@
                         </a:rPr>
                         <a:t>«conozca»</a:t>
                       </a:r>
-                      <a:endParaRPr lang="en-US" sz="1050" dirty="0">
+                      <a:endParaRPr lang="en-US" sz="950" dirty="0">
                         <a:latin typeface="Arial" charset="0"/>
                         <a:ea typeface="Arial" charset="0"/>
                         <a:cs typeface="Arial" charset="0"/>
@@ -13279,7 +13584,7 @@
                         <a:buNone/>
                       </a:pPr>
                       <a:r>
-                        <a:rPr lang="en-US" sz="1050" dirty="0">
+                        <a:rPr lang="en-US" sz="950" dirty="0">
                           <a:solidFill>
                             <a:srgbClr val="1B1B1E"/>
                           </a:solidFill>
@@ -13287,9 +13592,9 @@
                           <a:ea typeface="Arial" pitchFamily="34" charset="-122"/>
                           <a:cs typeface="Arial" pitchFamily="34" charset="-120"/>
                         </a:rPr>
-                        <a:t>Contra qué compara</a:t>
+                        <a:t>RCG 27, 2º párr.</a:t>
                       </a:r>
-                      <a:endParaRPr lang="en-US" sz="1050" dirty="0">
+                      <a:endParaRPr lang="en-US" sz="950" dirty="0">
                         <a:latin typeface="Arial" charset="0"/>
                         <a:ea typeface="Arial" charset="0"/>
                         <a:cs typeface="Arial" charset="0"/>
@@ -13347,7 +13652,7 @@
                         <a:buNone/>
                       </a:pPr>
                       <a:r>
-                        <a:rPr lang="en-US" sz="1050" dirty="0">
+                        <a:rPr lang="en-US" sz="950" dirty="0">
                           <a:solidFill>
                             <a:srgbClr val="1B1B1E"/>
                           </a:solidFill>
@@ -13355,9 +13660,9 @@
                           <a:ea typeface="Arial" pitchFamily="34" charset="-122"/>
                           <a:cs typeface="Arial" pitchFamily="34" charset="-120"/>
                         </a:rPr>
-                        <a:t>Lo que el cliente hace, contra lo común en su actividad</a:t>
+                        <a:t>Aviso por COINCIDENCIA CON LISTAS</a:t>
                       </a:r>
-                      <a:endParaRPr lang="en-US" sz="1050" dirty="0">
+                      <a:endParaRPr lang="en-US" sz="950" dirty="0">
                         <a:latin typeface="Arial" charset="0"/>
                         <a:ea typeface="Arial" charset="0"/>
                         <a:cs typeface="Arial" charset="0"/>
@@ -13415,7 +13720,7 @@
                         <a:buNone/>
                       </a:pPr>
                       <a:r>
-                        <a:rPr lang="en-US" sz="1050" dirty="0">
+                        <a:rPr lang="en-US" sz="950" dirty="0">
                           <a:solidFill>
                             <a:srgbClr val="1B1B1E"/>
                           </a:solidFill>
@@ -13423,9 +13728,77 @@
                           <a:ea typeface="Arial" pitchFamily="34" charset="-122"/>
                           <a:cs typeface="Arial" pitchFamily="34" charset="-120"/>
                         </a:rPr>
-                        <a:t>Un evento externo, contra su cartera</a:t>
+                        <a:t>De que la persona con quien realiza o intenta realizar el acto está en el listado del artículo 38</a:t>
                       </a:r>
-                      <a:endParaRPr lang="en-US" sz="1050" dirty="0">
+                      <a:endParaRPr lang="en-US" sz="950" dirty="0">
+                        <a:latin typeface="Arial" charset="0"/>
+                        <a:ea typeface="Arial" charset="0"/>
+                        <a:cs typeface="Arial" charset="0"/>
+                      </a:endParaRPr>
+                    </a:p>
+                  </a:txBody>
+                  <a:tcPr marL="63500" marR="63500" marT="63500" marB="63500" anchor="ctr">
+                    <a:lnL w="6350" cap="flat" cmpd="sng" algn="ctr">
+                      <a:solidFill>
+                        <a:srgbClr val="D9E2DB"/>
+                      </a:solidFill>
+                      <a:prstDash val="solid"/>
+                      <a:round/>
+                      <a:headEnd type="none" w="med" len="med"/>
+                      <a:tailEnd type="none" w="med" len="med"/>
+                    </a:lnL>
+                    <a:lnR w="6350" cap="flat" cmpd="sng" algn="ctr">
+                      <a:solidFill>
+                        <a:srgbClr val="D9E2DB"/>
+                      </a:solidFill>
+                      <a:prstDash val="solid"/>
+                      <a:round/>
+                      <a:headEnd type="none" w="med" len="med"/>
+                      <a:tailEnd type="none" w="med" len="med"/>
+                    </a:lnR>
+                    <a:lnT w="6350" cap="flat" cmpd="sng" algn="ctr">
+                      <a:solidFill>
+                        <a:srgbClr val="D9E2DB"/>
+                      </a:solidFill>
+                      <a:prstDash val="solid"/>
+                      <a:round/>
+                      <a:headEnd type="none" w="med" len="med"/>
+                      <a:tailEnd type="none" w="med" len="med"/>
+                    </a:lnT>
+                    <a:lnB w="6350" cap="flat" cmpd="sng" algn="ctr">
+                      <a:solidFill>
+                        <a:srgbClr val="D9E2DB"/>
+                      </a:solidFill>
+                      <a:prstDash val="solid"/>
+                      <a:round/>
+                      <a:headEnd type="none" w="med" len="med"/>
+                      <a:tailEnd type="none" w="med" len="med"/>
+                    </a:lnB>
+                    <a:solidFill>
+                      <a:srgbClr val="FFFFFF"/>
+                    </a:solidFill>
+                  </a:tcPr>
+                </a:tc>
+                <a:tc>
+                  <a:txBody>
+                    <a:bodyPr/>
+                    <a:lstStyle/>
+                    <a:p>
+                      <a:pPr indent="0" marL="0">
+                        <a:buNone/>
+                      </a:pPr>
+                      <a:r>
+                        <a:rPr lang="en-US" sz="950" dirty="0">
+                          <a:solidFill>
+                            <a:srgbClr val="1B1B1E"/>
+                          </a:solidFill>
+                          <a:latin typeface="Arial" pitchFamily="34" charset="0"/>
+                          <a:ea typeface="Arial" pitchFamily="34" charset="-122"/>
+                          <a:cs typeface="Arial" pitchFamily="34" charset="-120"/>
+                        </a:rPr>
+                        <a:t>«se trate de»</a:t>
+                      </a:r>
+                      <a:endParaRPr lang="en-US" sz="950" dirty="0">
                         <a:latin typeface="Arial" charset="0"/>
                         <a:ea typeface="Arial" charset="0"/>
                         <a:cs typeface="Arial" charset="0"/>
@@ -13485,7 +13858,7 @@
                         <a:buNone/>
                       </a:pPr>
                       <a:r>
-                        <a:rPr lang="en-US" sz="1050" dirty="0">
+                        <a:rPr lang="en-US" sz="950" dirty="0">
                           <a:solidFill>
                             <a:srgbClr val="1B1B1E"/>
                           </a:solidFill>
@@ -13493,9 +13866,9 @@
                           <a:ea typeface="Arial" pitchFamily="34" charset="-122"/>
                           <a:cs typeface="Arial" pitchFamily="34" charset="-120"/>
                         </a:rPr>
-                        <a:t>Ejemplo</a:t>
+                        <a:t>RCG 26 Bis 2</a:t>
                       </a:r>
-                      <a:endParaRPr lang="en-US" sz="1050" dirty="0">
+                      <a:endParaRPr lang="en-US" sz="950" dirty="0">
                         <a:latin typeface="Arial" charset="0"/>
                         <a:ea typeface="Arial" charset="0"/>
                         <a:cs typeface="Arial" charset="0"/>
@@ -13553,7 +13926,7 @@
                         <a:buNone/>
                       </a:pPr>
                       <a:r>
-                        <a:rPr lang="en-US" sz="1050" dirty="0">
+                        <a:rPr lang="en-US" sz="950" dirty="0">
                           <a:solidFill>
                             <a:srgbClr val="1B1B1E"/>
                           </a:solidFill>
@@ -13561,9 +13934,9 @@
                           <a:ea typeface="Arial" pitchFamily="34" charset="-122"/>
                           <a:cs typeface="Arial" pitchFamily="34" charset="-120"/>
                         </a:rPr>
-                        <a:t>El cliente insiste en fraccionar el pago</a:t>
+                        <a:t>No es un cuarto aviso</a:t>
                       </a:r>
-                      <a:endParaRPr lang="en-US" sz="1050" dirty="0">
+                      <a:endParaRPr lang="en-US" sz="950" dirty="0">
                         <a:latin typeface="Arial" charset="0"/>
                         <a:ea typeface="Arial" charset="0"/>
                         <a:cs typeface="Arial" charset="0"/>
@@ -13621,7 +13994,7 @@
                         <a:buNone/>
                       </a:pPr>
                       <a:r>
-                        <a:rPr lang="en-US" sz="1050" dirty="0">
+                        <a:rPr lang="en-US" sz="950" dirty="0">
                           <a:solidFill>
                             <a:srgbClr val="1B1B1E"/>
                           </a:solidFill>
@@ -13629,9 +14002,77 @@
                           <a:ea typeface="Arial" pitchFamily="34" charset="-122"/>
                           <a:cs typeface="Arial" pitchFamily="34" charset="-120"/>
                         </a:rPr>
-                        <a:t>Sale en la nota que su cliente fue vinculado a proceso</a:t>
+                        <a:t>Es la regla de alcance de los tres anteriores: se envían aunque no se alcance el umbral y aunque el acto no se haya celebrado</a:t>
                       </a:r>
-                      <a:endParaRPr lang="en-US" sz="1050" dirty="0">
+                      <a:endParaRPr lang="en-US" sz="950" dirty="0">
+                        <a:latin typeface="Arial" charset="0"/>
+                        <a:ea typeface="Arial" charset="0"/>
+                        <a:cs typeface="Arial" charset="0"/>
+                      </a:endParaRPr>
+                    </a:p>
+                  </a:txBody>
+                  <a:tcPr marL="63500" marR="63500" marT="63500" marB="63500" anchor="ctr">
+                    <a:lnL w="6350" cap="flat" cmpd="sng" algn="ctr">
+                      <a:solidFill>
+                        <a:srgbClr val="D9E2DB"/>
+                      </a:solidFill>
+                      <a:prstDash val="solid"/>
+                      <a:round/>
+                      <a:headEnd type="none" w="med" len="med"/>
+                      <a:tailEnd type="none" w="med" len="med"/>
+                    </a:lnL>
+                    <a:lnR w="6350" cap="flat" cmpd="sng" algn="ctr">
+                      <a:solidFill>
+                        <a:srgbClr val="D9E2DB"/>
+                      </a:solidFill>
+                      <a:prstDash val="solid"/>
+                      <a:round/>
+                      <a:headEnd type="none" w="med" len="med"/>
+                      <a:tailEnd type="none" w="med" len="med"/>
+                    </a:lnR>
+                    <a:lnT w="6350" cap="flat" cmpd="sng" algn="ctr">
+                      <a:solidFill>
+                        <a:srgbClr val="D9E2DB"/>
+                      </a:solidFill>
+                      <a:prstDash val="solid"/>
+                      <a:round/>
+                      <a:headEnd type="none" w="med" len="med"/>
+                      <a:tailEnd type="none" w="med" len="med"/>
+                    </a:lnT>
+                    <a:lnB w="6350" cap="flat" cmpd="sng" algn="ctr">
+                      <a:solidFill>
+                        <a:srgbClr val="D9E2DB"/>
+                      </a:solidFill>
+                      <a:prstDash val="solid"/>
+                      <a:round/>
+                      <a:headEnd type="none" w="med" len="med"/>
+                      <a:tailEnd type="none" w="med" len="med"/>
+                    </a:lnB>
+                    <a:solidFill>
+                      <a:srgbClr val="EEF4EF"/>
+                    </a:solidFill>
+                  </a:tcPr>
+                </a:tc>
+                <a:tc>
+                  <a:txBody>
+                    <a:bodyPr/>
+                    <a:lstStyle/>
+                    <a:p>
+                      <a:pPr indent="0" marL="0">
+                        <a:buNone/>
+                      </a:pPr>
+                      <a:r>
+                        <a:rPr lang="en-US" sz="950" dirty="0">
+                          <a:solidFill>
+                            <a:srgbClr val="1B1B1E"/>
+                          </a:solidFill>
+                          <a:latin typeface="Arial" pitchFamily="34" charset="0"/>
+                          <a:ea typeface="Arial" pitchFamily="34" charset="-122"/>
+                          <a:cs typeface="Arial" pitchFamily="34" charset="-120"/>
+                        </a:rPr>
+                        <a:t>—</a:t>
+                      </a:r>
+                      <a:endParaRPr lang="en-US" sz="950" dirty="0">
                         <a:latin typeface="Arial" charset="0"/>
                         <a:ea typeface="Arial" charset="0"/>
                         <a:cs typeface="Arial" charset="0"/>
@@ -13693,7 +14134,7 @@
         </p:nvSpPr>
         <p:spPr>
           <a:xfrm>
-            <a:off x="502920" y="3977640"/>
+            <a:off x="502920" y="4114800"/>
             <a:ext cx="8138160" cy="640080"/>
           </a:xfrm>
           <a:prstGeom prst="roundRect">
@@ -13715,7 +14156,7 @@
         </p:nvSpPr>
         <p:spPr>
           <a:xfrm>
-            <a:off x="731520" y="3995928"/>
+            <a:off x="731520" y="4133088"/>
             <a:ext cx="7680960" cy="603504"/>
           </a:xfrm>
           <a:prstGeom prst="rect">
@@ -13740,7 +14181,7 @@
                 <a:ea typeface="Arial" pitchFamily="34" charset="-122"/>
                 <a:cs typeface="Arial" pitchFamily="34" charset="-120"/>
               </a:rPr>
-              <a:t>Importa porque el reloj arranca en momentos distintos y porque lo que hay que documentar es distinto.</a:t>
+              <a:t>Los tres corren en 24 horas, pero el reloj arranca en momentos distintos y lo que hay que documentar es distinto en cada uno.</a:t>
             </a:r>
             <a:endParaRPr lang="en-US" sz="1200" dirty="0"/>
           </a:p>
@@ -16568,7 +17009,7 @@
                 <a:ea typeface="Arial" pitchFamily="34" charset="-122"/>
                 <a:cs typeface="Arial" pitchFamily="34" charset="-120"/>
               </a:rPr>
-              <a:t>Aunque no se haya celebrado</a:t>
+              <a:t>No se celebró: SE PRESENTA</a:t>
             </a:r>
             <a:endParaRPr lang="en-US" sz="1200" dirty="0"/>
           </a:p>
@@ -16607,7 +17048,7 @@
                 <a:ea typeface="Arial" pitchFamily="34" charset="-122"/>
                 <a:cs typeface="Arial" pitchFamily="34" charset="-120"/>
               </a:rPr>
-              <a:t>Se presenta si hay datos que permitan identificar a quien intentó llevar a cabo el acto u operación</a:t>
+              <a:t>La Ley dice «incluso si el acto no se celebró» y el Reglamento «se presentará aunque». Es imperativo, si hay datos de quien lo intentó</a:t>
             </a:r>
             <a:endParaRPr lang="en-US" sz="950" dirty="0"/>
           </a:p>
@@ -16646,7 +17087,7 @@
                 <a:ea typeface="Arial" pitchFamily="34" charset="-122"/>
                 <a:cs typeface="Arial" pitchFamily="34" charset="-120"/>
               </a:rPr>
-              <a:t>R 7 Bis · RCG 26 Bis 2</a:t>
+              <a:t>L 18 fr. VI 2º p. · R 7 Bis</a:t>
             </a:r>
             <a:endParaRPr lang="en-US" sz="850" dirty="0"/>
           </a:p>
@@ -16771,7 +17212,7 @@
                 <a:ea typeface="Arial" pitchFamily="34" charset="-122"/>
                 <a:cs typeface="Arial" pitchFamily="34" charset="-120"/>
               </a:rPr>
-              <a:t>Aunque no alcance el umbral</a:t>
+              <a:t>No llega al umbral: SE PUEDE</a:t>
             </a:r>
             <a:endParaRPr lang="en-US" sz="1200" dirty="0"/>
           </a:p>
@@ -16810,7 +17251,7 @@
                 <a:ea typeface="Arial" pitchFamily="34" charset="-122"/>
                 <a:cs typeface="Arial" pitchFamily="34" charset="-120"/>
               </a:rPr>
-              <a:t>Se presenta aunque el acto no cumpla con el monto o la condición de aviso del artículo 17</a:t>
+              <a:t>Aquí el texto dice «se podrán enviar». Es facultad, no deber: se valora, y la valoración se documenta</a:t>
             </a:r>
             <a:endParaRPr lang="en-US" sz="950" dirty="0"/>
           </a:p>
@@ -16974,7 +17415,7 @@
                 <a:ea typeface="Arial" pitchFamily="34" charset="-122"/>
                 <a:cs typeface="Arial" pitchFamily="34" charset="-120"/>
               </a:rPr>
-              <a:t>Aunque sólo lo hayan intentado</a:t>
+              <a:t>Y lo que NO está diferido</a:t>
             </a:r>
             <a:endParaRPr lang="en-US" sz="1200" dirty="0"/>
           </a:p>
@@ -17013,7 +17454,7 @@
                 <a:ea typeface="Arial" pitchFamily="34" charset="-122"/>
                 <a:cs typeface="Arial" pitchFamily="34" charset="-120"/>
               </a:rPr>
-              <a:t>También se avisa cuando la persona con quien se realiza o se intenta realizar el acto está en el listado del artículo 38</a:t>
+              <a:t>El mecanismo para identificar a las personas de las listas, que va en el Manual y dispara alerta. Exigible por su propia vía</a:t>
             </a:r>
             <a:endParaRPr lang="en-US" sz="950" dirty="0"/>
           </a:p>
@@ -17052,7 +17493,7 @@
                 <a:ea typeface="Arial" pitchFamily="34" charset="-122"/>
                 <a:cs typeface="Arial" pitchFamily="34" charset="-120"/>
               </a:rPr>
-              <a:t>RCG 27, segundo párrafo</a:t>
+              <a:t>RCG 37 Bis fr. IX · 41 fr. V</a:t>
             </a:r>
             <a:endParaRPr lang="en-US" sz="850" dirty="0"/>
           </a:p>
@@ -17113,7 +17554,7 @@
                 <a:ea typeface="Arial" pitchFamily="34" charset="-122"/>
                 <a:cs typeface="Arial" pitchFamily="34" charset="-120"/>
               </a:rPr>
-              <a:t>El que llegó, preguntó y se fue cuando le pidieron identificación no es un cliente perdido: es un intento.</a:t>
+              <a:t>El que llegó, preguntó y se fue cuando le pidieron identificación no es un cliente perdido: es un intento. · Y ojo con la diferencia entre «se presentará» y «se podrán enviar»: no es la misma obligación.</a:t>
             </a:r>
             <a:endParaRPr lang="en-US" sz="1200" dirty="0"/>
           </a:p>
@@ -17706,7 +18147,7 @@
                           <a:ea typeface="Arial" pitchFamily="34" charset="-122"/>
                           <a:cs typeface="Arial" pitchFamily="34" charset="-120"/>
                         </a:rPr>
-                        <a:t>El envío de los Avisos de los artículos 26 Bis, 26 Bis 1, 26 Bis 2 y 27, segundo párrafo, podrá hacerse seis meses después de que entre en vigor esa Resolución</a:t>
+                        <a:t>El envío de los tres Avisos de 24 horas —sospecha, hechos o indicios, y coincidencia con listas— podrá hacerse seis meses después de que entre en vigor esa Resolución</a:t>
                       </a:r>
                       <a:endParaRPr lang="en-US" sz="1100" dirty="0">
                         <a:latin typeface="Arial" charset="0"/>
@@ -17888,7 +18329,7 @@
                 <a:ea typeface="Arial" pitchFamily="34" charset="-122"/>
                 <a:cs typeface="Arial" pitchFamily="34" charset="-120"/>
               </a:rPr>
-              <a:t>Hoy no hay dónde presentarlo. Y cuando lo haya, todavía quedan seis meses.</a:t>
+              <a:t>Hoy no hay dónde presentarlos. Y cuando lo haya, todavía quedan seis meses.</a:t>
             </a:r>
             <a:endParaRPr lang="en-US" sz="1400" dirty="0"/>
           </a:p>
@@ -17917,7 +18358,7 @@
                 <a:ea typeface="Arial" pitchFamily="34" charset="-122"/>
                 <a:cs typeface="Arial" pitchFamily="34" charset="-120"/>
               </a:rPr>
-              <a:t>La obligación de detectar y documentar NO está diferida. Lo diferido es el envío.</a:t>
+              <a:t>Lo diferido es el envío. Detectar, documentar y tener el mecanismo de listas NO está diferido.</a:t>
             </a:r>
             <a:endParaRPr lang="en-US" sz="1400" dirty="0"/>
           </a:p>
@@ -22985,7 +23426,7 @@
                 <a:ea typeface="Arial" pitchFamily="34" charset="-122"/>
                 <a:cs typeface="Arial" pitchFamily="34" charset="-120"/>
               </a:rPr>
-              <a:t>Dos datos operativos y una corrección</a:t>
+              <a:t>Tres cosas que casi nadie tiene bien</a:t>
             </a:r>
             <a:endParaRPr lang="en-US" sz="2700" dirty="0"/>
           </a:p>
@@ -23643,7 +24084,7 @@
                           <a:ea typeface="Arial" pitchFamily="34" charset="-122"/>
                           <a:cs typeface="Arial" pitchFamily="34" charset="-120"/>
                         </a:rPr>
-                        <a:t>La corrección</a:t>
+                        <a:t>Dónde viven los formatos</a:t>
                       </a:r>
                       <a:endParaRPr lang="en-US" sz="1000" dirty="0">
                         <a:latin typeface="Arial" charset="0"/>
@@ -23711,7 +24152,7 @@
                           <a:ea typeface="Arial" pitchFamily="34" charset="-122"/>
                           <a:cs typeface="Arial" pitchFamily="34" charset="-120"/>
                         </a:rPr>
-                        <a:t>Los formatos de Aviso NO están en las Reglas. Los Anexos 1 a 10 de las Reglas son de identificación; los formatos viven en la Resolución publicada en el Diario Oficial</a:t>
+                        <a:t>Los formatos de Aviso NO están en las Reglas. Los Anexos 1 a 10 de las Reglas son de identificación; los formatos oficiales viven en la Resolución publicada en el Diario Oficial</a:t>
                       </a:r>
                       <a:endParaRPr lang="en-US" sz="1000" dirty="0">
                         <a:latin typeface="Arial" charset="0"/>
@@ -23779,7 +24220,7 @@
                           <a:ea typeface="Arial" pitchFamily="34" charset="-122"/>
                           <a:cs typeface="Arial" pitchFamily="34" charset="-120"/>
                         </a:rPr>
-                        <a:t>—</a:t>
+                        <a:t>L 24 · RCG 24</a:t>
                       </a:r>
                       <a:endParaRPr lang="en-US" sz="1000" dirty="0">
                         <a:latin typeface="Arial" charset="0"/>
@@ -25268,7 +25709,7 @@
                 <a:ea typeface="Arial" pitchFamily="34" charset="-122"/>
                 <a:cs typeface="Arial" pitchFamily="34" charset="-120"/>
               </a:rPr>
-              <a:t>La segunda no le toca por ser sujeto obligado: le toca por ser una sociedad mercantil. Aplica aunque su actividad vulnerable no exista. · UMA 2026 = $117.31</a:t>
+              <a:t>Y hay una TERCERA, en otro ordenamiento: el CFF 32-B Ter obliga a las personas morales a identificar a su beneficiario controlador ante el SAT, con umbral de MÁS DEL 15 %. La constancia rendida ante una autoridad no libera ante la otra. · UMA 2026 = $117.31</a:t>
             </a:r>
             <a:endParaRPr lang="en-US" sz="1200" dirty="0"/>
           </a:p>
@@ -27597,7 +28038,7 @@
                 <a:ea typeface="Arial" pitchFamily="34" charset="-122"/>
                 <a:cs typeface="Arial" pitchFamily="34" charset="-120"/>
               </a:rPr>
-              <a:t>Último párrafo: hay que documentar el procedimiento seguido, conservarlo, mantenerlo actualizado y resguardarlo diez años. No basta el nombre.</a:t>
+              <a:t>En la cadena NO se multiplican porcentajes: se mide quién decide en cada eslabón. Quien controla el 75 % de una sociedad que tiene el 52 % de su cliente, decide en su cliente. · Es criterio, no artículo.</a:t>
             </a:r>
             <a:endParaRPr lang="en-US" sz="1200" dirty="0"/>
           </a:p>
@@ -28285,7 +28726,7 @@
                 <a:ea typeface="Arial" pitchFamily="34" charset="-122"/>
                 <a:cs typeface="Arial" pitchFamily="34" charset="-120"/>
               </a:rPr>
-              <a:t>RCG 23 QUINQUIES 1</a:t>
+              <a:t>LA PREGUNTA QUE SIEMPRE SALE</a:t>
             </a:r>
             <a:endParaRPr lang="en-US" sz="1100" dirty="0"/>
           </a:p>
@@ -28324,7 +28765,7 @@
                 <a:ea typeface="Arial" pitchFamily="34" charset="-122"/>
                 <a:cs typeface="Arial" pitchFamily="34" charset="-120"/>
               </a:rPr>
-              <a:t>Fideicomisos y estructuras: la cascada</a:t>
+              <a:t>¿Y si el cliente no me da la información?</a:t>
             </a:r>
             <a:endParaRPr lang="en-US" sz="2700" dirty="0"/>
           </a:p>
@@ -28338,7 +28779,7 @@
         </p:nvSpPr>
         <p:spPr>
           <a:xfrm>
-            <a:off x="502920" y="1783080"/>
+            <a:off x="502920" y="1828800"/>
             <a:ext cx="2578608" cy="1335024"/>
           </a:xfrm>
           <a:prstGeom prst="roundRect">
@@ -28365,7 +28806,7 @@
         </p:nvSpPr>
         <p:spPr>
           <a:xfrm>
-            <a:off x="649224" y="1929384"/>
+            <a:off x="649224" y="1975104"/>
             <a:ext cx="274320" cy="274320"/>
           </a:xfrm>
           <a:prstGeom prst="ellipse">
@@ -28385,7 +28826,7 @@
         </p:nvSpPr>
         <p:spPr>
           <a:xfrm>
-            <a:off x="649224" y="1929384"/>
+            <a:off x="649224" y="1975104"/>
             <a:ext cx="274320" cy="274320"/>
           </a:xfrm>
           <a:prstGeom prst="rect">
@@ -28424,7 +28865,7 @@
         </p:nvSpPr>
         <p:spPr>
           <a:xfrm>
-            <a:off x="1005840" y="1911096"/>
+            <a:off x="1005840" y="1956816"/>
             <a:ext cx="1920240" cy="329184"/>
           </a:xfrm>
           <a:prstGeom prst="rect">
@@ -28449,7 +28890,7 @@
                 <a:ea typeface="Arial" pitchFamily="34" charset="-122"/>
                 <a:cs typeface="Arial" pitchFamily="34" charset="-120"/>
               </a:rPr>
-              <a:t>Quién puede serlo</a:t>
+              <a:t>Se niega</a:t>
             </a:r>
             <a:endParaRPr lang="en-US" sz="1200" dirty="0"/>
           </a:p>
@@ -28463,7 +28904,7 @@
         </p:nvSpPr>
         <p:spPr>
           <a:xfrm>
-            <a:off x="649224" y="2276856"/>
+            <a:off x="649224" y="2322576"/>
             <a:ext cx="2286000" cy="603504"/>
           </a:xfrm>
           <a:prstGeom prst="rect">
@@ -28488,7 +28929,7 @@
                 <a:ea typeface="Arial" pitchFamily="34" charset="-122"/>
                 <a:cs typeface="Arial" pitchFamily="34" charset="-120"/>
               </a:rPr>
-              <a:t>Cualquier persona física que en última instancia ejerza el control efectivo: fiduciario, fideicomitente, fideicomisario, protectora, comité técnico u órgano equivalente</a:t>
+              <a:t>La Ley no dice «documente el intento»: dice abstenerse de llevar a cabo el acto u operación, y lo dice SIN RESPONSABILIDAD ALGUNA para usted</a:t>
             </a:r>
             <a:endParaRPr lang="en-US" sz="950" dirty="0"/>
           </a:p>
@@ -28496,13 +28937,52 @@
       </p:sp>
       <p:sp>
         <p:nvSpPr>
-          <p:cNvPr id="14" name="Shape 12"/>
+          <p:cNvPr id="14" name="Text 12"/>
+          <p:cNvSpPr txBox="1"/>
+          <p:nvPr/>
+        </p:nvSpPr>
+        <p:spPr>
+          <a:xfrm>
+            <a:off x="649224" y="2935224"/>
+            <a:ext cx="2286000" cy="182880"/>
+          </a:xfrm>
+          <a:prstGeom prst="rect">
+            <a:avLst/>
+          </a:prstGeom>
+          <a:noFill/>
+          <a:ln/>
+        </p:spPr>
+        <p:txBody>
+          <a:bodyPr wrap="square" lIns="0" tIns="0" rIns="0" bIns="0" rtlCol="0" anchor="ctr"/>
+          <a:lstStyle/>
+          <a:p>
+            <a:pPr indent="0" marL="0">
+              <a:buNone/>
+            </a:pPr>
+            <a:r>
+              <a:rPr lang="en-US" sz="850" b="1" dirty="0">
+                <a:solidFill>
+                  <a:srgbClr val="2E7D4F"/>
+                </a:solidFill>
+                <a:latin typeface="Arial" pitchFamily="34" charset="0"/>
+                <a:ea typeface="Arial" pitchFamily="34" charset="-122"/>
+                <a:cs typeface="Arial" pitchFamily="34" charset="-120"/>
+              </a:rPr>
+              <a:t>L 21, segundo párrafo</a:t>
+            </a:r>
+            <a:endParaRPr lang="en-US" sz="850" dirty="0"/>
+          </a:p>
+        </p:txBody>
+      </p:sp>
+      <p:sp>
+        <p:nvSpPr>
+          <p:cNvPr id="15" name="Shape 13"/>
           <p:cNvSpPr/>
           <p:nvPr/>
         </p:nvSpPr>
         <p:spPr>
           <a:xfrm>
-            <a:off x="3282696" y="1783080"/>
+            <a:off x="3282696" y="1828800"/>
             <a:ext cx="2578608" cy="1335024"/>
           </a:xfrm>
           <a:prstGeom prst="roundRect">
@@ -28523,13 +29003,13 @@
       </p:sp>
       <p:sp>
         <p:nvSpPr>
-          <p:cNvPr id="15" name="Shape 13"/>
+          <p:cNvPr id="16" name="Shape 14"/>
           <p:cNvSpPr/>
           <p:nvPr/>
         </p:nvSpPr>
         <p:spPr>
           <a:xfrm>
-            <a:off x="3429000" y="1929384"/>
+            <a:off x="3429000" y="1975104"/>
             <a:ext cx="274320" cy="274320"/>
           </a:xfrm>
           <a:prstGeom prst="ellipse">
@@ -28543,13 +29023,13 @@
       </p:sp>
       <p:sp>
         <p:nvSpPr>
-          <p:cNvPr id="16" name="Text 14"/>
+          <p:cNvPr id="17" name="Text 15"/>
           <p:cNvSpPr txBox="1"/>
           <p:nvPr/>
         </p:nvSpPr>
         <p:spPr>
           <a:xfrm>
-            <a:off x="3429000" y="1929384"/>
+            <a:off x="3429000" y="1975104"/>
             <a:ext cx="274320" cy="274320"/>
           </a:xfrm>
           <a:prstGeom prst="rect">
@@ -28582,13 +29062,13 @@
       </p:sp>
       <p:sp>
         <p:nvSpPr>
-          <p:cNvPr id="17" name="Text 15"/>
+          <p:cNvPr id="18" name="Text 16"/>
           <p:cNvSpPr txBox="1"/>
           <p:nvPr/>
         </p:nvSpPr>
         <p:spPr>
           <a:xfrm>
-            <a:off x="3785616" y="1911096"/>
+            <a:off x="3785616" y="1956816"/>
             <a:ext cx="1920240" cy="329184"/>
           </a:xfrm>
           <a:prstGeom prst="rect">
@@ -28613,7 +29093,7 @@
                 <a:ea typeface="Arial" pitchFamily="34" charset="-122"/>
                 <a:cs typeface="Arial" pitchFamily="34" charset="-120"/>
               </a:rPr>
-              <a:t>La cascada</a:t>
+              <a:t>Coopera pero no alcanza</a:t>
             </a:r>
             <a:endParaRPr lang="en-US" sz="1200" dirty="0"/>
           </a:p>
@@ -28621,13 +29101,13 @@
       </p:sp>
       <p:sp>
         <p:nvSpPr>
-          <p:cNvPr id="18" name="Text 16"/>
+          <p:cNvPr id="19" name="Text 17"/>
           <p:cNvSpPr txBox="1"/>
           <p:nvPr/>
         </p:nvSpPr>
         <p:spPr>
           <a:xfrm>
-            <a:off x="3429000" y="2276856"/>
+            <a:off x="3429000" y="2322576"/>
             <a:ext cx="2286000" cy="603504"/>
           </a:xfrm>
           <a:prstGeom prst="rect">
@@ -28652,7 +29132,7 @@
                 <a:ea typeface="Arial" pitchFamily="34" charset="-122"/>
                 <a:cs typeface="Arial" pitchFamily="34" charset="-120"/>
               </a:rPr>
-              <a:t>Si el fideicomitente o el fideicomisario es persona moral, hay que ascender en la cadena hasta la persona física</a:t>
+              <a:t>No es negativa. Se sigue la prelación hasta el tercer nivel, que cierra siempre, y se documenta el recorrido</a:t>
             </a:r>
             <a:endParaRPr lang="en-US" sz="950" dirty="0"/>
           </a:p>
@@ -28660,13 +29140,52 @@
       </p:sp>
       <p:sp>
         <p:nvSpPr>
-          <p:cNvPr id="19" name="Shape 17"/>
+          <p:cNvPr id="20" name="Text 18"/>
+          <p:cNvSpPr txBox="1"/>
+          <p:nvPr/>
+        </p:nvSpPr>
+        <p:spPr>
+          <a:xfrm>
+            <a:off x="3429000" y="2935224"/>
+            <a:ext cx="2286000" cy="182880"/>
+          </a:xfrm>
+          <a:prstGeom prst="rect">
+            <a:avLst/>
+          </a:prstGeom>
+          <a:noFill/>
+          <a:ln/>
+        </p:spPr>
+        <p:txBody>
+          <a:bodyPr wrap="square" lIns="0" tIns="0" rIns="0" bIns="0" rtlCol="0" anchor="ctr"/>
+          <a:lstStyle/>
+          <a:p>
+            <a:pPr indent="0" marL="0">
+              <a:buNone/>
+            </a:pPr>
+            <a:r>
+              <a:rPr lang="en-US" sz="850" b="1" dirty="0">
+                <a:solidFill>
+                  <a:srgbClr val="2E7D4F"/>
+                </a:solidFill>
+                <a:latin typeface="Arial" pitchFamily="34" charset="0"/>
+                <a:ea typeface="Arial" pitchFamily="34" charset="-122"/>
+                <a:cs typeface="Arial" pitchFamily="34" charset="-120"/>
+              </a:rPr>
+              <a:t>RCG 23 Quinquies</a:t>
+            </a:r>
+            <a:endParaRPr lang="en-US" sz="850" dirty="0"/>
+          </a:p>
+        </p:txBody>
+      </p:sp>
+      <p:sp>
+        <p:nvSpPr>
+          <p:cNvPr id="21" name="Shape 19"/>
           <p:cNvSpPr/>
           <p:nvPr/>
         </p:nvSpPr>
         <p:spPr>
           <a:xfrm>
-            <a:off x="6062472" y="1783080"/>
+            <a:off x="6062472" y="1828800"/>
             <a:ext cx="2578608" cy="1335024"/>
           </a:xfrm>
           <a:prstGeom prst="roundRect">
@@ -28687,13 +29206,13 @@
       </p:sp>
       <p:sp>
         <p:nvSpPr>
-          <p:cNvPr id="20" name="Shape 18"/>
+          <p:cNvPr id="22" name="Shape 20"/>
           <p:cNvSpPr/>
           <p:nvPr/>
         </p:nvSpPr>
         <p:spPr>
           <a:xfrm>
-            <a:off x="6208776" y="1929384"/>
+            <a:off x="6208776" y="1975104"/>
             <a:ext cx="274320" cy="274320"/>
           </a:xfrm>
           <a:prstGeom prst="ellipse">
@@ -28707,13 +29226,13 @@
       </p:sp>
       <p:sp>
         <p:nvSpPr>
-          <p:cNvPr id="21" name="Text 19"/>
+          <p:cNvPr id="23" name="Text 21"/>
           <p:cNvSpPr txBox="1"/>
           <p:nvPr/>
         </p:nvSpPr>
         <p:spPr>
           <a:xfrm>
-            <a:off x="6208776" y="1929384"/>
+            <a:off x="6208776" y="1975104"/>
             <a:ext cx="274320" cy="274320"/>
           </a:xfrm>
           <a:prstGeom prst="rect">
@@ -28746,13 +29265,13 @@
       </p:sp>
       <p:sp>
         <p:nvSpPr>
-          <p:cNvPr id="22" name="Text 20"/>
+          <p:cNvPr id="24" name="Text 22"/>
           <p:cNvSpPr txBox="1"/>
           <p:nvPr/>
         </p:nvSpPr>
         <p:spPr>
           <a:xfrm>
-            <a:off x="6565392" y="1911096"/>
+            <a:off x="6565392" y="1956816"/>
             <a:ext cx="1920240" cy="329184"/>
           </a:xfrm>
           <a:prstGeom prst="rect">
@@ -28777,7 +29296,7 @@
                 <a:ea typeface="Arial" pitchFamily="34" charset="-122"/>
                 <a:cs typeface="Arial" pitchFamily="34" charset="-120"/>
               </a:rPr>
-              <a:t>El momento</a:t>
+              <a:t>La estructura es opaca por diseño</a:t>
             </a:r>
             <a:endParaRPr lang="en-US" sz="1200" dirty="0"/>
           </a:p>
@@ -28785,13 +29304,13 @@
       </p:sp>
       <p:sp>
         <p:nvSpPr>
-          <p:cNvPr id="23" name="Text 21"/>
+          <p:cNvPr id="25" name="Text 23"/>
           <p:cNvSpPr txBox="1"/>
           <p:nvPr/>
         </p:nvSpPr>
         <p:spPr>
           <a:xfrm>
-            <a:off x="6208776" y="2276856"/>
+            <a:off x="6208776" y="2322576"/>
             <a:ext cx="2286000" cy="603504"/>
           </a:xfrm>
           <a:prstGeom prst="rect">
@@ -28816,7 +29335,7 @@
                 <a:ea typeface="Arial" pitchFamily="34" charset="-122"/>
                 <a:cs typeface="Arial" pitchFamily="34" charset="-120"/>
               </a:rPr>
-              <a:t>Previo al acto u operación o, a más tardar, al establecer la Relación de negocios. No después</a:t>
+              <a:t>Tampoco es negativa: es un elemento de Riesgo que alimenta la clasificación del cliente y puede justificar no iniciar o terminar la relación</a:t>
             </a:r>
             <a:endParaRPr lang="en-US" sz="950" dirty="0"/>
           </a:p>
@@ -28824,13 +29343,52 @@
       </p:sp>
       <p:sp>
         <p:nvSpPr>
-          <p:cNvPr id="24" name="Shape 22"/>
+          <p:cNvPr id="26" name="Text 24"/>
+          <p:cNvSpPr txBox="1"/>
+          <p:nvPr/>
+        </p:nvSpPr>
+        <p:spPr>
+          <a:xfrm>
+            <a:off x="6208776" y="2935224"/>
+            <a:ext cx="2286000" cy="182880"/>
+          </a:xfrm>
+          <a:prstGeom prst="rect">
+            <a:avLst/>
+          </a:prstGeom>
+          <a:noFill/>
+          <a:ln/>
+        </p:spPr>
+        <p:txBody>
+          <a:bodyPr wrap="square" lIns="0" tIns="0" rIns="0" bIns="0" rtlCol="0" anchor="ctr"/>
+          <a:lstStyle/>
+          <a:p>
+            <a:pPr indent="0" marL="0">
+              <a:buNone/>
+            </a:pPr>
+            <a:r>
+              <a:rPr lang="en-US" sz="850" b="1" dirty="0">
+                <a:solidFill>
+                  <a:srgbClr val="2E7D4F"/>
+                </a:solidFill>
+                <a:latin typeface="Arial" pitchFamily="34" charset="0"/>
+                <a:ea typeface="Arial" pitchFamily="34" charset="-122"/>
+                <a:cs typeface="Arial" pitchFamily="34" charset="-120"/>
+              </a:rPr>
+              <a:t>RCG 23 Ter fr. I y V</a:t>
+            </a:r>
+            <a:endParaRPr lang="en-US" sz="850" dirty="0"/>
+          </a:p>
+        </p:txBody>
+      </p:sp>
+      <p:sp>
+        <p:nvSpPr>
+          <p:cNvPr id="27" name="Shape 25"/>
           <p:cNvSpPr/>
           <p:nvPr/>
         </p:nvSpPr>
         <p:spPr>
           <a:xfrm>
-            <a:off x="502920" y="3977640"/>
+            <a:off x="502920" y="4069080"/>
             <a:ext cx="8138160" cy="640080"/>
           </a:xfrm>
           <a:prstGeom prst="roundRect">
@@ -28846,13 +29404,13 @@
       </p:sp>
       <p:sp>
         <p:nvSpPr>
-          <p:cNvPr id="25" name="Text 23"/>
+          <p:cNvPr id="28" name="Text 26"/>
           <p:cNvSpPr txBox="1"/>
           <p:nvPr/>
         </p:nvSpPr>
         <p:spPr>
           <a:xfrm>
-            <a:off x="731520" y="3995928"/>
+            <a:off x="731520" y="4087368"/>
             <a:ext cx="7680960" cy="603504"/>
           </a:xfrm>
           <a:prstGeom prst="rect">
@@ -28877,7 +29435,7 @@
                 <a:ea typeface="Arial" pitchFamily="34" charset="-122"/>
                 <a:cs typeface="Arial" pitchFamily="34" charset="-120"/>
               </a:rPr>
-              <a:t>«Protectora» es la figura que casi nadie tiene en su formato. Revísenlo antes de marzo de 2027.</a:t>
+              <a:t>«Sin responsabilidad alguna» está en el texto. No es que pueda negarse: es que debe, y la Ley lo protege al hacerlo.</a:t>
             </a:r>
             <a:endParaRPr lang="en-US" sz="1200" dirty="0"/>
           </a:p>
@@ -29105,7 +29663,7 @@
                 <a:ea typeface="Arial" pitchFamily="34" charset="-122"/>
                 <a:cs typeface="Arial" pitchFamily="34" charset="-120"/>
               </a:rPr>
-              <a:t>RCG 23 QUINQUIES 2 · SÓLO HAY DOS</a:t>
+              <a:t>RCG 23 QUINQUIES 1</a:t>
             </a:r>
             <a:endParaRPr lang="en-US" sz="1100" dirty="0"/>
           </a:p>
@@ -29144,6 +29702,826 @@
                 <a:ea typeface="Arial" pitchFamily="34" charset="-122"/>
                 <a:cs typeface="Arial" pitchFamily="34" charset="-120"/>
               </a:rPr>
+              <a:t>Fideicomisos y estructuras: la cascada</a:t>
+            </a:r>
+            <a:endParaRPr lang="en-US" sz="2700" dirty="0"/>
+          </a:p>
+        </p:txBody>
+      </p:sp>
+      <p:sp>
+        <p:nvSpPr>
+          <p:cNvPr id="9" name="Shape 7"/>
+          <p:cNvSpPr/>
+          <p:nvPr/>
+        </p:nvSpPr>
+        <p:spPr>
+          <a:xfrm>
+            <a:off x="502920" y="1783080"/>
+            <a:ext cx="2578608" cy="1335024"/>
+          </a:xfrm>
+          <a:prstGeom prst="roundRect">
+            <a:avLst>
+              <a:gd name="adj" fmla="val 4110"/>
+            </a:avLst>
+          </a:prstGeom>
+          <a:solidFill>
+            <a:srgbClr val="FFFFFF"/>
+          </a:solidFill>
+          <a:ln w="9525">
+            <a:solidFill>
+              <a:srgbClr val="DCE6DE"/>
+            </a:solidFill>
+            <a:prstDash val="solid"/>
+          </a:ln>
+        </p:spPr>
+      </p:sp>
+      <p:sp>
+        <p:nvSpPr>
+          <p:cNvPr id="10" name="Shape 8"/>
+          <p:cNvSpPr/>
+          <p:nvPr/>
+        </p:nvSpPr>
+        <p:spPr>
+          <a:xfrm>
+            <a:off x="649224" y="1929384"/>
+            <a:ext cx="274320" cy="274320"/>
+          </a:xfrm>
+          <a:prstGeom prst="ellipse">
+            <a:avLst/>
+          </a:prstGeom>
+          <a:solidFill>
+            <a:srgbClr val="87D895"/>
+          </a:solidFill>
+          <a:ln/>
+        </p:spPr>
+      </p:sp>
+      <p:sp>
+        <p:nvSpPr>
+          <p:cNvPr id="11" name="Text 9"/>
+          <p:cNvSpPr txBox="1"/>
+          <p:nvPr/>
+        </p:nvSpPr>
+        <p:spPr>
+          <a:xfrm>
+            <a:off x="649224" y="1929384"/>
+            <a:ext cx="274320" cy="274320"/>
+          </a:xfrm>
+          <a:prstGeom prst="rect">
+            <a:avLst/>
+          </a:prstGeom>
+          <a:noFill/>
+          <a:ln/>
+        </p:spPr>
+        <p:txBody>
+          <a:bodyPr wrap="square" lIns="0" tIns="0" rIns="0" bIns="0" rtlCol="0" anchor="ctr"/>
+          <a:lstStyle/>
+          <a:p>
+            <a:pPr algn="ctr" indent="0" marL="0">
+              <a:buNone/>
+            </a:pPr>
+            <a:r>
+              <a:rPr lang="en-US" sz="1100" b="1" dirty="0">
+                <a:solidFill>
+                  <a:srgbClr val="1B1B1E"/>
+                </a:solidFill>
+                <a:latin typeface="Arial" pitchFamily="34" charset="0"/>
+                <a:ea typeface="Arial" pitchFamily="34" charset="-122"/>
+                <a:cs typeface="Arial" pitchFamily="34" charset="-120"/>
+              </a:rPr>
+              <a:t>1</a:t>
+            </a:r>
+            <a:endParaRPr lang="en-US" sz="1100" dirty="0"/>
+          </a:p>
+        </p:txBody>
+      </p:sp>
+      <p:sp>
+        <p:nvSpPr>
+          <p:cNvPr id="12" name="Text 10"/>
+          <p:cNvSpPr txBox="1"/>
+          <p:nvPr/>
+        </p:nvSpPr>
+        <p:spPr>
+          <a:xfrm>
+            <a:off x="1005840" y="1911096"/>
+            <a:ext cx="1920240" cy="329184"/>
+          </a:xfrm>
+          <a:prstGeom prst="rect">
+            <a:avLst/>
+          </a:prstGeom>
+          <a:noFill/>
+          <a:ln/>
+        </p:spPr>
+        <p:txBody>
+          <a:bodyPr wrap="square" lIns="0" tIns="0" rIns="0" bIns="0" rtlCol="0" anchor="t"/>
+          <a:lstStyle/>
+          <a:p>
+            <a:pPr indent="0" marL="0">
+              <a:buNone/>
+            </a:pPr>
+            <a:r>
+              <a:rPr lang="en-US" sz="1200" b="1" dirty="0">
+                <a:solidFill>
+                  <a:srgbClr val="1B1B1E"/>
+                </a:solidFill>
+                <a:latin typeface="Arial" pitchFamily="34" charset="0"/>
+                <a:ea typeface="Arial" pitchFamily="34" charset="-122"/>
+                <a:cs typeface="Arial" pitchFamily="34" charset="-120"/>
+              </a:rPr>
+              <a:t>Quién puede serlo</a:t>
+            </a:r>
+            <a:endParaRPr lang="en-US" sz="1200" dirty="0"/>
+          </a:p>
+        </p:txBody>
+      </p:sp>
+      <p:sp>
+        <p:nvSpPr>
+          <p:cNvPr id="13" name="Text 11"/>
+          <p:cNvSpPr txBox="1"/>
+          <p:nvPr/>
+        </p:nvSpPr>
+        <p:spPr>
+          <a:xfrm>
+            <a:off x="649224" y="2276856"/>
+            <a:ext cx="2286000" cy="603504"/>
+          </a:xfrm>
+          <a:prstGeom prst="rect">
+            <a:avLst/>
+          </a:prstGeom>
+          <a:noFill/>
+          <a:ln/>
+        </p:spPr>
+        <p:txBody>
+          <a:bodyPr wrap="square" lIns="0" tIns="0" rIns="0" bIns="0" rtlCol="0" anchor="t"/>
+          <a:lstStyle/>
+          <a:p>
+            <a:pPr indent="0" marL="0">
+              <a:buNone/>
+            </a:pPr>
+            <a:r>
+              <a:rPr lang="en-US" sz="950" dirty="0">
+                <a:solidFill>
+                  <a:srgbClr val="4D4D4D"/>
+                </a:solidFill>
+                <a:latin typeface="Arial" pitchFamily="34" charset="0"/>
+                <a:ea typeface="Arial" pitchFamily="34" charset="-122"/>
+                <a:cs typeface="Arial" pitchFamily="34" charset="-120"/>
+              </a:rPr>
+              <a:t>Cualquier persona física que en última instancia ejerza el control efectivo: fiduciario, fideicomitente, fideicomisario, protectora, comité técnico u órgano equivalente</a:t>
+            </a:r>
+            <a:endParaRPr lang="en-US" sz="950" dirty="0"/>
+          </a:p>
+        </p:txBody>
+      </p:sp>
+      <p:sp>
+        <p:nvSpPr>
+          <p:cNvPr id="14" name="Shape 12"/>
+          <p:cNvSpPr/>
+          <p:nvPr/>
+        </p:nvSpPr>
+        <p:spPr>
+          <a:xfrm>
+            <a:off x="3282696" y="1783080"/>
+            <a:ext cx="2578608" cy="1335024"/>
+          </a:xfrm>
+          <a:prstGeom prst="roundRect">
+            <a:avLst>
+              <a:gd name="adj" fmla="val 4110"/>
+            </a:avLst>
+          </a:prstGeom>
+          <a:solidFill>
+            <a:srgbClr val="FFFFFF"/>
+          </a:solidFill>
+          <a:ln w="9525">
+            <a:solidFill>
+              <a:srgbClr val="DCE6DE"/>
+            </a:solidFill>
+            <a:prstDash val="solid"/>
+          </a:ln>
+        </p:spPr>
+      </p:sp>
+      <p:sp>
+        <p:nvSpPr>
+          <p:cNvPr id="15" name="Shape 13"/>
+          <p:cNvSpPr/>
+          <p:nvPr/>
+        </p:nvSpPr>
+        <p:spPr>
+          <a:xfrm>
+            <a:off x="3429000" y="1929384"/>
+            <a:ext cx="274320" cy="274320"/>
+          </a:xfrm>
+          <a:prstGeom prst="ellipse">
+            <a:avLst/>
+          </a:prstGeom>
+          <a:solidFill>
+            <a:srgbClr val="87D895"/>
+          </a:solidFill>
+          <a:ln/>
+        </p:spPr>
+      </p:sp>
+      <p:sp>
+        <p:nvSpPr>
+          <p:cNvPr id="16" name="Text 14"/>
+          <p:cNvSpPr txBox="1"/>
+          <p:nvPr/>
+        </p:nvSpPr>
+        <p:spPr>
+          <a:xfrm>
+            <a:off x="3429000" y="1929384"/>
+            <a:ext cx="274320" cy="274320"/>
+          </a:xfrm>
+          <a:prstGeom prst="rect">
+            <a:avLst/>
+          </a:prstGeom>
+          <a:noFill/>
+          <a:ln/>
+        </p:spPr>
+        <p:txBody>
+          <a:bodyPr wrap="square" lIns="0" tIns="0" rIns="0" bIns="0" rtlCol="0" anchor="ctr"/>
+          <a:lstStyle/>
+          <a:p>
+            <a:pPr algn="ctr" indent="0" marL="0">
+              <a:buNone/>
+            </a:pPr>
+            <a:r>
+              <a:rPr lang="en-US" sz="1100" b="1" dirty="0">
+                <a:solidFill>
+                  <a:srgbClr val="1B1B1E"/>
+                </a:solidFill>
+                <a:latin typeface="Arial" pitchFamily="34" charset="0"/>
+                <a:ea typeface="Arial" pitchFamily="34" charset="-122"/>
+                <a:cs typeface="Arial" pitchFamily="34" charset="-120"/>
+              </a:rPr>
+              <a:t>2</a:t>
+            </a:r>
+            <a:endParaRPr lang="en-US" sz="1100" dirty="0"/>
+          </a:p>
+        </p:txBody>
+      </p:sp>
+      <p:sp>
+        <p:nvSpPr>
+          <p:cNvPr id="17" name="Text 15"/>
+          <p:cNvSpPr txBox="1"/>
+          <p:nvPr/>
+        </p:nvSpPr>
+        <p:spPr>
+          <a:xfrm>
+            <a:off x="3785616" y="1911096"/>
+            <a:ext cx="1920240" cy="329184"/>
+          </a:xfrm>
+          <a:prstGeom prst="rect">
+            <a:avLst/>
+          </a:prstGeom>
+          <a:noFill/>
+          <a:ln/>
+        </p:spPr>
+        <p:txBody>
+          <a:bodyPr wrap="square" lIns="0" tIns="0" rIns="0" bIns="0" rtlCol="0" anchor="t"/>
+          <a:lstStyle/>
+          <a:p>
+            <a:pPr indent="0" marL="0">
+              <a:buNone/>
+            </a:pPr>
+            <a:r>
+              <a:rPr lang="en-US" sz="1200" b="1" dirty="0">
+                <a:solidFill>
+                  <a:srgbClr val="1B1B1E"/>
+                </a:solidFill>
+                <a:latin typeface="Arial" pitchFamily="34" charset="0"/>
+                <a:ea typeface="Arial" pitchFamily="34" charset="-122"/>
+                <a:cs typeface="Arial" pitchFamily="34" charset="-120"/>
+              </a:rPr>
+              <a:t>La cascada</a:t>
+            </a:r>
+            <a:endParaRPr lang="en-US" sz="1200" dirty="0"/>
+          </a:p>
+        </p:txBody>
+      </p:sp>
+      <p:sp>
+        <p:nvSpPr>
+          <p:cNvPr id="18" name="Text 16"/>
+          <p:cNvSpPr txBox="1"/>
+          <p:nvPr/>
+        </p:nvSpPr>
+        <p:spPr>
+          <a:xfrm>
+            <a:off x="3429000" y="2276856"/>
+            <a:ext cx="2286000" cy="603504"/>
+          </a:xfrm>
+          <a:prstGeom prst="rect">
+            <a:avLst/>
+          </a:prstGeom>
+          <a:noFill/>
+          <a:ln/>
+        </p:spPr>
+        <p:txBody>
+          <a:bodyPr wrap="square" lIns="0" tIns="0" rIns="0" bIns="0" rtlCol="0" anchor="t"/>
+          <a:lstStyle/>
+          <a:p>
+            <a:pPr indent="0" marL="0">
+              <a:buNone/>
+            </a:pPr>
+            <a:r>
+              <a:rPr lang="en-US" sz="950" dirty="0">
+                <a:solidFill>
+                  <a:srgbClr val="4D4D4D"/>
+                </a:solidFill>
+                <a:latin typeface="Arial" pitchFamily="34" charset="0"/>
+                <a:ea typeface="Arial" pitchFamily="34" charset="-122"/>
+                <a:cs typeface="Arial" pitchFamily="34" charset="-120"/>
+              </a:rPr>
+              <a:t>Si el fideicomitente o el fideicomisario es persona moral, hay que ascender en la cadena hasta la persona física</a:t>
+            </a:r>
+            <a:endParaRPr lang="en-US" sz="950" dirty="0"/>
+          </a:p>
+        </p:txBody>
+      </p:sp>
+      <p:sp>
+        <p:nvSpPr>
+          <p:cNvPr id="19" name="Shape 17"/>
+          <p:cNvSpPr/>
+          <p:nvPr/>
+        </p:nvSpPr>
+        <p:spPr>
+          <a:xfrm>
+            <a:off x="6062472" y="1783080"/>
+            <a:ext cx="2578608" cy="1335024"/>
+          </a:xfrm>
+          <a:prstGeom prst="roundRect">
+            <a:avLst>
+              <a:gd name="adj" fmla="val 4110"/>
+            </a:avLst>
+          </a:prstGeom>
+          <a:solidFill>
+            <a:srgbClr val="FFFFFF"/>
+          </a:solidFill>
+          <a:ln w="9525">
+            <a:solidFill>
+              <a:srgbClr val="DCE6DE"/>
+            </a:solidFill>
+            <a:prstDash val="solid"/>
+          </a:ln>
+        </p:spPr>
+      </p:sp>
+      <p:sp>
+        <p:nvSpPr>
+          <p:cNvPr id="20" name="Shape 18"/>
+          <p:cNvSpPr/>
+          <p:nvPr/>
+        </p:nvSpPr>
+        <p:spPr>
+          <a:xfrm>
+            <a:off x="6208776" y="1929384"/>
+            <a:ext cx="274320" cy="274320"/>
+          </a:xfrm>
+          <a:prstGeom prst="ellipse">
+            <a:avLst/>
+          </a:prstGeom>
+          <a:solidFill>
+            <a:srgbClr val="87D895"/>
+          </a:solidFill>
+          <a:ln/>
+        </p:spPr>
+      </p:sp>
+      <p:sp>
+        <p:nvSpPr>
+          <p:cNvPr id="21" name="Text 19"/>
+          <p:cNvSpPr txBox="1"/>
+          <p:nvPr/>
+        </p:nvSpPr>
+        <p:spPr>
+          <a:xfrm>
+            <a:off x="6208776" y="1929384"/>
+            <a:ext cx="274320" cy="274320"/>
+          </a:xfrm>
+          <a:prstGeom prst="rect">
+            <a:avLst/>
+          </a:prstGeom>
+          <a:noFill/>
+          <a:ln/>
+        </p:spPr>
+        <p:txBody>
+          <a:bodyPr wrap="square" lIns="0" tIns="0" rIns="0" bIns="0" rtlCol="0" anchor="ctr"/>
+          <a:lstStyle/>
+          <a:p>
+            <a:pPr algn="ctr" indent="0" marL="0">
+              <a:buNone/>
+            </a:pPr>
+            <a:r>
+              <a:rPr lang="en-US" sz="1100" b="1" dirty="0">
+                <a:solidFill>
+                  <a:srgbClr val="1B1B1E"/>
+                </a:solidFill>
+                <a:latin typeface="Arial" pitchFamily="34" charset="0"/>
+                <a:ea typeface="Arial" pitchFamily="34" charset="-122"/>
+                <a:cs typeface="Arial" pitchFamily="34" charset="-120"/>
+              </a:rPr>
+              <a:t>3</a:t>
+            </a:r>
+            <a:endParaRPr lang="en-US" sz="1100" dirty="0"/>
+          </a:p>
+        </p:txBody>
+      </p:sp>
+      <p:sp>
+        <p:nvSpPr>
+          <p:cNvPr id="22" name="Text 20"/>
+          <p:cNvSpPr txBox="1"/>
+          <p:nvPr/>
+        </p:nvSpPr>
+        <p:spPr>
+          <a:xfrm>
+            <a:off x="6565392" y="1911096"/>
+            <a:ext cx="1920240" cy="329184"/>
+          </a:xfrm>
+          <a:prstGeom prst="rect">
+            <a:avLst/>
+          </a:prstGeom>
+          <a:noFill/>
+          <a:ln/>
+        </p:spPr>
+        <p:txBody>
+          <a:bodyPr wrap="square" lIns="0" tIns="0" rIns="0" bIns="0" rtlCol="0" anchor="t"/>
+          <a:lstStyle/>
+          <a:p>
+            <a:pPr indent="0" marL="0">
+              <a:buNone/>
+            </a:pPr>
+            <a:r>
+              <a:rPr lang="en-US" sz="1200" b="1" dirty="0">
+                <a:solidFill>
+                  <a:srgbClr val="1B1B1E"/>
+                </a:solidFill>
+                <a:latin typeface="Arial" pitchFamily="34" charset="0"/>
+                <a:ea typeface="Arial" pitchFamily="34" charset="-122"/>
+                <a:cs typeface="Arial" pitchFamily="34" charset="-120"/>
+              </a:rPr>
+              <a:t>El momento</a:t>
+            </a:r>
+            <a:endParaRPr lang="en-US" sz="1200" dirty="0"/>
+          </a:p>
+        </p:txBody>
+      </p:sp>
+      <p:sp>
+        <p:nvSpPr>
+          <p:cNvPr id="23" name="Text 21"/>
+          <p:cNvSpPr txBox="1"/>
+          <p:nvPr/>
+        </p:nvSpPr>
+        <p:spPr>
+          <a:xfrm>
+            <a:off x="6208776" y="2276856"/>
+            <a:ext cx="2286000" cy="603504"/>
+          </a:xfrm>
+          <a:prstGeom prst="rect">
+            <a:avLst/>
+          </a:prstGeom>
+          <a:noFill/>
+          <a:ln/>
+        </p:spPr>
+        <p:txBody>
+          <a:bodyPr wrap="square" lIns="0" tIns="0" rIns="0" bIns="0" rtlCol="0" anchor="t"/>
+          <a:lstStyle/>
+          <a:p>
+            <a:pPr indent="0" marL="0">
+              <a:buNone/>
+            </a:pPr>
+            <a:r>
+              <a:rPr lang="en-US" sz="950" dirty="0">
+                <a:solidFill>
+                  <a:srgbClr val="4D4D4D"/>
+                </a:solidFill>
+                <a:latin typeface="Arial" pitchFamily="34" charset="0"/>
+                <a:ea typeface="Arial" pitchFamily="34" charset="-122"/>
+                <a:cs typeface="Arial" pitchFamily="34" charset="-120"/>
+              </a:rPr>
+              <a:t>Previo al acto u operación o, a más tardar, al establecer la Relación de negocios. No después</a:t>
+            </a:r>
+            <a:endParaRPr lang="en-US" sz="950" dirty="0"/>
+          </a:p>
+        </p:txBody>
+      </p:sp>
+      <p:sp>
+        <p:nvSpPr>
+          <p:cNvPr id="24" name="Shape 22"/>
+          <p:cNvSpPr/>
+          <p:nvPr/>
+        </p:nvSpPr>
+        <p:spPr>
+          <a:xfrm>
+            <a:off x="502920" y="3977640"/>
+            <a:ext cx="8138160" cy="640080"/>
+          </a:xfrm>
+          <a:prstGeom prst="roundRect">
+            <a:avLst>
+              <a:gd name="adj" fmla="val 8571"/>
+            </a:avLst>
+          </a:prstGeom>
+          <a:solidFill>
+            <a:srgbClr val="87D895"/>
+          </a:solidFill>
+          <a:ln/>
+        </p:spPr>
+      </p:sp>
+      <p:sp>
+        <p:nvSpPr>
+          <p:cNvPr id="25" name="Text 23"/>
+          <p:cNvSpPr txBox="1"/>
+          <p:nvPr/>
+        </p:nvSpPr>
+        <p:spPr>
+          <a:xfrm>
+            <a:off x="731520" y="3995928"/>
+            <a:ext cx="7680960" cy="603504"/>
+          </a:xfrm>
+          <a:prstGeom prst="rect">
+            <a:avLst/>
+          </a:prstGeom>
+          <a:noFill/>
+          <a:ln/>
+        </p:spPr>
+        <p:txBody>
+          <a:bodyPr wrap="square" lIns="0" tIns="0" rIns="0" bIns="0" rtlCol="0" anchor="ctr"/>
+          <a:lstStyle/>
+          <a:p>
+            <a:pPr indent="0" marL="0">
+              <a:buNone/>
+            </a:pPr>
+            <a:r>
+              <a:rPr lang="en-US" sz="1200" b="1" dirty="0">
+                <a:solidFill>
+                  <a:srgbClr val="1B1B1E"/>
+                </a:solidFill>
+                <a:latin typeface="Arial" pitchFamily="34" charset="0"/>
+                <a:ea typeface="Arial" pitchFamily="34" charset="-122"/>
+                <a:cs typeface="Arial" pitchFamily="34" charset="-120"/>
+              </a:rPr>
+              <a:t>«Protectora» es la figura que casi nadie tiene en su formato. Revísenlo antes de marzo de 2027.</a:t>
+            </a:r>
+            <a:endParaRPr lang="en-US" sz="1200" dirty="0"/>
+          </a:p>
+        </p:txBody>
+      </p:sp>
+    </p:spTree>
+  </p:cSld>
+  <p:clrMapOvr>
+    <a:masterClrMapping/>
+  </p:clrMapOvr>
+</p:sld>
+</file>
+
+<file path=ppt/slides/slide35.xml><?xml version="1.0" encoding="utf-8"?>
+<p:sld xmlns:a="http://schemas.openxmlformats.org/drawingml/2006/main" xmlns:r="http://schemas.openxmlformats.org/officeDocument/2006/relationships" xmlns:p="http://schemas.openxmlformats.org/presentationml/2006/main">
+  <p:cSld name="Slide 35">
+    <p:bg>
+      <p:bgPr>
+        <a:solidFill>
+          <a:srgbClr val="F6F8F6"/>
+        </a:solidFill>
+      </p:bgPr>
+    </p:bg>
+    <p:spTree>
+      <p:nvGrpSpPr>
+        <p:cNvPr id="1" name=""/>
+        <p:cNvGrpSpPr/>
+        <p:nvPr/>
+      </p:nvGrpSpPr>
+      <p:grpSpPr>
+        <a:xfrm>
+          <a:off x="0" y="0"/>
+          <a:ext cx="0" cy="0"/>
+          <a:chOff x="0" y="0"/>
+          <a:chExt cx="0" cy="0"/>
+        </a:xfrm>
+      </p:grpSpPr>
+      <p:sp>
+        <p:nvSpPr>
+          <p:cNvPr id="2" name="Shape 0"/>
+          <p:cNvSpPr/>
+          <p:nvPr/>
+        </p:nvSpPr>
+        <p:spPr>
+          <a:xfrm>
+            <a:off x="0" y="4846320"/>
+            <a:ext cx="9144000" cy="18288"/>
+          </a:xfrm>
+          <a:prstGeom prst="rect">
+            <a:avLst/>
+          </a:prstGeom>
+          <a:solidFill>
+            <a:srgbClr val="DCE6DE"/>
+          </a:solidFill>
+          <a:ln/>
+        </p:spPr>
+      </p:sp>
+      <p:sp>
+        <p:nvSpPr>
+          <p:cNvPr id="3" name="Text 1"/>
+          <p:cNvSpPr txBox="1"/>
+          <p:nvPr/>
+        </p:nvSpPr>
+        <p:spPr>
+          <a:xfrm>
+            <a:off x="502920" y="4882896"/>
+            <a:ext cx="6949440" cy="219456"/>
+          </a:xfrm>
+          <a:prstGeom prst="rect">
+            <a:avLst/>
+          </a:prstGeom>
+          <a:noFill/>
+          <a:ln/>
+        </p:spPr>
+        <p:txBody>
+          <a:bodyPr wrap="square" lIns="0" tIns="0" rIns="0" bIns="0" rtlCol="0" anchor="ctr"/>
+          <a:lstStyle/>
+          <a:p>
+            <a:pPr indent="0" marL="0">
+              <a:buNone/>
+            </a:pPr>
+            <a:r>
+              <a:rPr lang="en-US" sz="800" dirty="0">
+                <a:solidFill>
+                  <a:srgbClr val="4D4D4D"/>
+                </a:solidFill>
+                <a:latin typeface="Arial" pitchFamily="34" charset="0"/>
+                <a:ea typeface="Arial" pitchFamily="34" charset="-122"/>
+                <a:cs typeface="Arial" pitchFamily="34" charset="-120"/>
+              </a:rPr>
+              <a:t>Taller Antilavado 360 · Sesión 4 · 8 de septiembre de 2026 · GMC360 / 360Educa</a:t>
+            </a:r>
+            <a:endParaRPr lang="en-US" sz="800" dirty="0"/>
+          </a:p>
+        </p:txBody>
+      </p:sp>
+      <p:sp>
+        <p:nvSpPr>
+          <p:cNvPr id="4" name="Text 2"/>
+          <p:cNvSpPr txBox="1"/>
+          <p:nvPr/>
+        </p:nvSpPr>
+        <p:spPr>
+          <a:xfrm>
+            <a:off x="8138160" y="4864608"/>
+            <a:ext cx="502920" cy="237744"/>
+          </a:xfrm>
+          <a:prstGeom prst="rect">
+            <a:avLst/>
+          </a:prstGeom>
+          <a:noFill/>
+          <a:ln/>
+        </p:spPr>
+        <p:txBody>
+          <a:bodyPr wrap="square" lIns="0" tIns="0" rIns="0" bIns="0" rtlCol="0" anchor="ctr"/>
+          <a:lstStyle/>
+          <a:p>
+            <a:pPr algn="r" indent="0" marL="0">
+              <a:buNone/>
+            </a:pPr>
+            <a:r>
+              <a:rPr lang="en-US" sz="900" b="1" dirty="0">
+                <a:solidFill>
+                  <a:srgbClr val="2E7D4F"/>
+                </a:solidFill>
+                <a:latin typeface="Arial" pitchFamily="34" charset="0"/>
+                <a:ea typeface="Arial" pitchFamily="34" charset="-122"/>
+                <a:cs typeface="Arial" pitchFamily="34" charset="-120"/>
+              </a:rPr>
+              <a:t>35</a:t>
+            </a:r>
+            <a:endParaRPr lang="en-US" sz="900" dirty="0"/>
+          </a:p>
+        </p:txBody>
+      </p:sp>
+      <p:sp>
+        <p:nvSpPr>
+          <p:cNvPr id="5" name="Shape 3"/>
+          <p:cNvSpPr/>
+          <p:nvPr/>
+        </p:nvSpPr>
+        <p:spPr>
+          <a:xfrm>
+            <a:off x="502920" y="384048"/>
+            <a:ext cx="384048" cy="384048"/>
+          </a:xfrm>
+          <a:prstGeom prst="ellipse">
+            <a:avLst/>
+          </a:prstGeom>
+          <a:solidFill>
+            <a:srgbClr val="64C27B"/>
+          </a:solidFill>
+          <a:ln/>
+        </p:spPr>
+      </p:sp>
+      <p:sp>
+        <p:nvSpPr>
+          <p:cNvPr id="6" name="Text 4"/>
+          <p:cNvSpPr txBox="1"/>
+          <p:nvPr/>
+        </p:nvSpPr>
+        <p:spPr>
+          <a:xfrm>
+            <a:off x="502920" y="384048"/>
+            <a:ext cx="384048" cy="384048"/>
+          </a:xfrm>
+          <a:prstGeom prst="rect">
+            <a:avLst/>
+          </a:prstGeom>
+          <a:noFill/>
+          <a:ln/>
+        </p:spPr>
+        <p:txBody>
+          <a:bodyPr wrap="square" lIns="0" tIns="0" rIns="0" bIns="0" rtlCol="0" anchor="ctr"/>
+          <a:lstStyle/>
+          <a:p>
+            <a:pPr algn="ctr" indent="0" marL="0">
+              <a:buNone/>
+            </a:pPr>
+            <a:r>
+              <a:rPr lang="en-US" sz="1300" b="1" dirty="0">
+                <a:solidFill>
+                  <a:srgbClr val="1B1B1E"/>
+                </a:solidFill>
+                <a:latin typeface="Arial" pitchFamily="34" charset="0"/>
+                <a:ea typeface="Arial" pitchFamily="34" charset="-122"/>
+                <a:cs typeface="Arial" pitchFamily="34" charset="-120"/>
+              </a:rPr>
+              <a:t>35</a:t>
+            </a:r>
+            <a:endParaRPr lang="en-US" sz="1300" dirty="0"/>
+          </a:p>
+        </p:txBody>
+      </p:sp>
+      <p:sp>
+        <p:nvSpPr>
+          <p:cNvPr id="7" name="Text 5"/>
+          <p:cNvSpPr txBox="1"/>
+          <p:nvPr/>
+        </p:nvSpPr>
+        <p:spPr>
+          <a:xfrm>
+            <a:off x="1024128" y="420624"/>
+            <a:ext cx="7589520" cy="292608"/>
+          </a:xfrm>
+          <a:prstGeom prst="rect">
+            <a:avLst/>
+          </a:prstGeom>
+          <a:noFill/>
+          <a:ln/>
+        </p:spPr>
+        <p:txBody>
+          <a:bodyPr wrap="square" lIns="0" tIns="0" rIns="0" bIns="0" rtlCol="0" anchor="ctr"/>
+          <a:lstStyle/>
+          <a:p>
+            <a:pPr indent="0" marL="0">
+              <a:buNone/>
+            </a:pPr>
+            <a:r>
+              <a:rPr lang="en-US" sz="1100" b="1" spc="120" kern="0" dirty="0">
+                <a:solidFill>
+                  <a:srgbClr val="2E7D4F"/>
+                </a:solidFill>
+                <a:latin typeface="Arial" pitchFamily="34" charset="0"/>
+                <a:ea typeface="Arial" pitchFamily="34" charset="-122"/>
+                <a:cs typeface="Arial" pitchFamily="34" charset="-120"/>
+              </a:rPr>
+              <a:t>RCG 23 QUINQUIES 2 · SÓLO HAY DOS</a:t>
+            </a:r>
+            <a:endParaRPr lang="en-US" sz="1100" dirty="0"/>
+          </a:p>
+        </p:txBody>
+      </p:sp>
+      <p:sp>
+        <p:nvSpPr>
+          <p:cNvPr id="8" name="Text 6"/>
+          <p:cNvSpPr txBox="1"/>
+          <p:nvPr/>
+        </p:nvSpPr>
+        <p:spPr>
+          <a:xfrm>
+            <a:off x="502920" y="960120"/>
+            <a:ext cx="8138160" cy="786384"/>
+          </a:xfrm>
+          <a:prstGeom prst="rect">
+            <a:avLst/>
+          </a:prstGeom>
+          <a:noFill/>
+          <a:ln/>
+        </p:spPr>
+        <p:txBody>
+          <a:bodyPr wrap="square" lIns="0" tIns="0" rIns="0" bIns="0" rtlCol="0" anchor="t"/>
+          <a:lstStyle/>
+          <a:p>
+            <a:pPr indent="0" marL="0">
+              <a:buNone/>
+            </a:pPr>
+            <a:r>
+              <a:rPr lang="en-US" sz="2700" b="1" dirty="0">
+                <a:solidFill>
+                  <a:srgbClr val="1B1B1E"/>
+                </a:solidFill>
+                <a:latin typeface="Arial" pitchFamily="34" charset="0"/>
+                <a:ea typeface="Arial" pitchFamily="34" charset="-122"/>
+                <a:cs typeface="Arial" pitchFamily="34" charset="-120"/>
+              </a:rPr>
               <a:t>Las dos excepciones, y hasta dónde llegan</a:t>
             </a:r>
             <a:endParaRPr lang="en-US" sz="2700" dirty="0"/>
@@ -29152,7 +30530,7 @@
       </p:sp>
       <p:graphicFrame>
         <p:nvGraphicFramePr>
-          <p:cNvPr id="35" name="Table 0"/>
+          <p:cNvPr id="36" name="Table 0"/>
           <p:cNvGraphicFramePr>
             <a:graphicFrameLocks noGrp="1"/>
           </p:cNvGraphicFramePr>
@@ -29857,9 +31235,9 @@
 </p:sld>
 </file>
 
-<file path=ppt/slides/slide35.xml><?xml version="1.0" encoding="utf-8"?>
+<file path=ppt/slides/slide36.xml><?xml version="1.0" encoding="utf-8"?>
 <p:sld xmlns:a="http://schemas.openxmlformats.org/drawingml/2006/main" xmlns:r="http://schemas.openxmlformats.org/officeDocument/2006/relationships" xmlns:p="http://schemas.openxmlformats.org/presentationml/2006/main">
-  <p:cSld name="Slide 35">
+  <p:cSld name="Slide 36">
     <p:bg>
       <p:bgPr>
         <a:solidFill>
@@ -29973,7 +31351,7 @@
                 <a:ea typeface="Arial" pitchFamily="34" charset="-122"/>
                 <a:cs typeface="Arial" pitchFamily="34" charset="-120"/>
               </a:rPr>
-              <a:t>35</a:t>
+              <a:t>36</a:t>
             </a:r>
             <a:endParaRPr lang="en-US" sz="900" dirty="0"/>
           </a:p>
@@ -30032,7 +31410,7 @@
                 <a:ea typeface="Arial" pitchFamily="34" charset="-122"/>
                 <a:cs typeface="Arial" pitchFamily="34" charset="-120"/>
               </a:rPr>
-              <a:t>35</a:t>
+              <a:t>36</a:t>
             </a:r>
             <a:endParaRPr lang="en-US" sz="1300" dirty="0"/>
           </a:p>
@@ -30118,7 +31496,7 @@
       </p:sp>
       <p:graphicFrame>
         <p:nvGraphicFramePr>
-          <p:cNvPr id="36" name="Table 0"/>
+          <p:cNvPr id="37" name="Table 0"/>
           <p:cNvGraphicFramePr>
             <a:graphicFrameLocks noGrp="1"/>
           </p:cNvGraphicFramePr>
@@ -31644,7 +33022,7 @@
                 <a:ea typeface="Arial" pitchFamily="34" charset="-122"/>
                 <a:cs typeface="Arial" pitchFamily="34" charset="-120"/>
               </a:rPr>
-              <a:t>Cuatro datos, en todos los casos, cuando el cliente es persona moral o fideicomiso: apellidos y nombre(s) · fecha de nacimiento · país de nacionalidad · CURP y RFC cuando cuente con ellas.</a:t>
+              <a:t>Cuatro datos, en todos los casos, en persona moral y fideicomiso: apellidos y nombre(s) · fecha de nacimiento · país de nacionalidad · CURP y RFC cuando cuente con ellas. El numeral ix dice «cuando cuente con ellas»: la ausencia se asienta, no impide.</a:t>
             </a:r>
             <a:endParaRPr lang="en-US" sz="1200" dirty="0"/>
           </a:p>
@@ -31658,9 +33036,9 @@
 </p:sld>
 </file>
 
-<file path=ppt/slides/slide36.xml><?xml version="1.0" encoding="utf-8"?>
+<file path=ppt/slides/slide37.xml><?xml version="1.0" encoding="utf-8"?>
 <p:sld xmlns:a="http://schemas.openxmlformats.org/drawingml/2006/main" xmlns:r="http://schemas.openxmlformats.org/officeDocument/2006/relationships" xmlns:p="http://schemas.openxmlformats.org/presentationml/2006/main">
-  <p:cSld name="Slide 36">
+  <p:cSld name="Slide 37">
     <p:bg>
       <p:bgPr>
         <a:solidFill>
@@ -31774,7 +33152,7 @@
                 <a:ea typeface="Arial" pitchFamily="34" charset="-122"/>
                 <a:cs typeface="Arial" pitchFamily="34" charset="-120"/>
               </a:rPr>
-              <a:t>36</a:t>
+              <a:t>37</a:t>
             </a:r>
             <a:endParaRPr lang="en-US" sz="900" dirty="0"/>
           </a:p>
@@ -32104,9 +33482,9 @@
 </p:sld>
 </file>
 
-<file path=ppt/slides/slide37.xml><?xml version="1.0" encoding="utf-8"?>
+<file path=ppt/slides/slide38.xml><?xml version="1.0" encoding="utf-8"?>
 <p:sld xmlns:a="http://schemas.openxmlformats.org/drawingml/2006/main" xmlns:r="http://schemas.openxmlformats.org/officeDocument/2006/relationships" xmlns:p="http://schemas.openxmlformats.org/presentationml/2006/main">
-  <p:cSld name="Slide 37">
+  <p:cSld name="Slide 38">
     <p:bg>
       <p:bgPr>
         <a:solidFill>
@@ -32220,7 +33598,7 @@
                 <a:ea typeface="Arial" pitchFamily="34" charset="-122"/>
                 <a:cs typeface="Arial" pitchFamily="34" charset="-120"/>
               </a:rPr>
-              <a:t>37</a:t>
+              <a:t>38</a:t>
             </a:r>
             <a:endParaRPr lang="en-US" sz="900" dirty="0"/>
           </a:p>
@@ -32279,7 +33657,7 @@
                 <a:ea typeface="Arial" pitchFamily="34" charset="-122"/>
                 <a:cs typeface="Arial" pitchFamily="34" charset="-120"/>
               </a:rPr>
-              <a:t>37</a:t>
+              <a:t>38</a:t>
             </a:r>
             <a:endParaRPr lang="en-US" sz="1300" dirty="0"/>
           </a:p>
@@ -32365,7 +33743,7 @@
       </p:sp>
       <p:graphicFrame>
         <p:nvGraphicFramePr>
-          <p:cNvPr id="38" name="Table 0"/>
+          <p:cNvPr id="39" name="Table 0"/>
           <p:cNvGraphicFramePr>
             <a:graphicFrameLocks noGrp="1"/>
           </p:cNvGraphicFramePr>
@@ -34930,943 +36308,6 @@
 </p:sld>
 </file>
 
-<file path=ppt/slides/slide38.xml><?xml version="1.0" encoding="utf-8"?>
-<p:sld xmlns:a="http://schemas.openxmlformats.org/drawingml/2006/main" xmlns:r="http://schemas.openxmlformats.org/officeDocument/2006/relationships" xmlns:p="http://schemas.openxmlformats.org/presentationml/2006/main">
-  <p:cSld name="Slide 38">
-    <p:bg>
-      <p:bgPr>
-        <a:solidFill>
-          <a:srgbClr val="F6F8F6"/>
-        </a:solidFill>
-      </p:bgPr>
-    </p:bg>
-    <p:spTree>
-      <p:nvGrpSpPr>
-        <p:cNvPr id="1" name=""/>
-        <p:cNvGrpSpPr/>
-        <p:nvPr/>
-      </p:nvGrpSpPr>
-      <p:grpSpPr>
-        <a:xfrm>
-          <a:off x="0" y="0"/>
-          <a:ext cx="0" cy="0"/>
-          <a:chOff x="0" y="0"/>
-          <a:chExt cx="0" cy="0"/>
-        </a:xfrm>
-      </p:grpSpPr>
-      <p:sp>
-        <p:nvSpPr>
-          <p:cNvPr id="2" name="Shape 0"/>
-          <p:cNvSpPr/>
-          <p:nvPr/>
-        </p:nvSpPr>
-        <p:spPr>
-          <a:xfrm>
-            <a:off x="0" y="4846320"/>
-            <a:ext cx="9144000" cy="18288"/>
-          </a:xfrm>
-          <a:prstGeom prst="rect">
-            <a:avLst/>
-          </a:prstGeom>
-          <a:solidFill>
-            <a:srgbClr val="DCE6DE"/>
-          </a:solidFill>
-          <a:ln/>
-        </p:spPr>
-      </p:sp>
-      <p:sp>
-        <p:nvSpPr>
-          <p:cNvPr id="3" name="Text 1"/>
-          <p:cNvSpPr txBox="1"/>
-          <p:nvPr/>
-        </p:nvSpPr>
-        <p:spPr>
-          <a:xfrm>
-            <a:off x="502920" y="4882896"/>
-            <a:ext cx="6949440" cy="219456"/>
-          </a:xfrm>
-          <a:prstGeom prst="rect">
-            <a:avLst/>
-          </a:prstGeom>
-          <a:noFill/>
-          <a:ln/>
-        </p:spPr>
-        <p:txBody>
-          <a:bodyPr wrap="square" lIns="0" tIns="0" rIns="0" bIns="0" rtlCol="0" anchor="ctr"/>
-          <a:lstStyle/>
-          <a:p>
-            <a:pPr indent="0" marL="0">
-              <a:buNone/>
-            </a:pPr>
-            <a:r>
-              <a:rPr lang="en-US" sz="800" dirty="0">
-                <a:solidFill>
-                  <a:srgbClr val="4D4D4D"/>
-                </a:solidFill>
-                <a:latin typeface="Arial" pitchFamily="34" charset="0"/>
-                <a:ea typeface="Arial" pitchFamily="34" charset="-122"/>
-                <a:cs typeface="Arial" pitchFamily="34" charset="-120"/>
-              </a:rPr>
-              <a:t>Taller Antilavado 360 · Sesión 4 · 8 de septiembre de 2026 · GMC360 / 360Educa</a:t>
-            </a:r>
-            <a:endParaRPr lang="en-US" sz="800" dirty="0"/>
-          </a:p>
-        </p:txBody>
-      </p:sp>
-      <p:sp>
-        <p:nvSpPr>
-          <p:cNvPr id="4" name="Text 2"/>
-          <p:cNvSpPr txBox="1"/>
-          <p:nvPr/>
-        </p:nvSpPr>
-        <p:spPr>
-          <a:xfrm>
-            <a:off x="8138160" y="4864608"/>
-            <a:ext cx="502920" cy="237744"/>
-          </a:xfrm>
-          <a:prstGeom prst="rect">
-            <a:avLst/>
-          </a:prstGeom>
-          <a:noFill/>
-          <a:ln/>
-        </p:spPr>
-        <p:txBody>
-          <a:bodyPr wrap="square" lIns="0" tIns="0" rIns="0" bIns="0" rtlCol="0" anchor="ctr"/>
-          <a:lstStyle/>
-          <a:p>
-            <a:pPr algn="r" indent="0" marL="0">
-              <a:buNone/>
-            </a:pPr>
-            <a:r>
-              <a:rPr lang="en-US" sz="900" b="1" dirty="0">
-                <a:solidFill>
-                  <a:srgbClr val="2E7D4F"/>
-                </a:solidFill>
-                <a:latin typeface="Arial" pitchFamily="34" charset="0"/>
-                <a:ea typeface="Arial" pitchFamily="34" charset="-122"/>
-                <a:cs typeface="Arial" pitchFamily="34" charset="-120"/>
-              </a:rPr>
-              <a:t>38</a:t>
-            </a:r>
-            <a:endParaRPr lang="en-US" sz="900" dirty="0"/>
-          </a:p>
-        </p:txBody>
-      </p:sp>
-      <p:sp>
-        <p:nvSpPr>
-          <p:cNvPr id="5" name="Shape 3"/>
-          <p:cNvSpPr/>
-          <p:nvPr/>
-        </p:nvSpPr>
-        <p:spPr>
-          <a:xfrm>
-            <a:off x="502920" y="384048"/>
-            <a:ext cx="384048" cy="384048"/>
-          </a:xfrm>
-          <a:prstGeom prst="ellipse">
-            <a:avLst/>
-          </a:prstGeom>
-          <a:solidFill>
-            <a:srgbClr val="64C27B"/>
-          </a:solidFill>
-          <a:ln/>
-        </p:spPr>
-      </p:sp>
-      <p:sp>
-        <p:nvSpPr>
-          <p:cNvPr id="6" name="Text 4"/>
-          <p:cNvSpPr txBox="1"/>
-          <p:nvPr/>
-        </p:nvSpPr>
-        <p:spPr>
-          <a:xfrm>
-            <a:off x="502920" y="384048"/>
-            <a:ext cx="384048" cy="384048"/>
-          </a:xfrm>
-          <a:prstGeom prst="rect">
-            <a:avLst/>
-          </a:prstGeom>
-          <a:noFill/>
-          <a:ln/>
-        </p:spPr>
-        <p:txBody>
-          <a:bodyPr wrap="square" lIns="0" tIns="0" rIns="0" bIns="0" rtlCol="0" anchor="ctr"/>
-          <a:lstStyle/>
-          <a:p>
-            <a:pPr algn="ctr" indent="0" marL="0">
-              <a:buNone/>
-            </a:pPr>
-            <a:r>
-              <a:rPr lang="en-US" sz="1300" b="1" dirty="0">
-                <a:solidFill>
-                  <a:srgbClr val="1B1B1E"/>
-                </a:solidFill>
-                <a:latin typeface="Arial" pitchFamily="34" charset="0"/>
-                <a:ea typeface="Arial" pitchFamily="34" charset="-122"/>
-                <a:cs typeface="Arial" pitchFamily="34" charset="-120"/>
-              </a:rPr>
-              <a:t>38</a:t>
-            </a:r>
-            <a:endParaRPr lang="en-US" sz="1300" dirty="0"/>
-          </a:p>
-        </p:txBody>
-      </p:sp>
-      <p:sp>
-        <p:nvSpPr>
-          <p:cNvPr id="7" name="Text 5"/>
-          <p:cNvSpPr txBox="1"/>
-          <p:nvPr/>
-        </p:nvSpPr>
-        <p:spPr>
-          <a:xfrm>
-            <a:off x="1024128" y="420624"/>
-            <a:ext cx="7589520" cy="292608"/>
-          </a:xfrm>
-          <a:prstGeom prst="rect">
-            <a:avLst/>
-          </a:prstGeom>
-          <a:noFill/>
-          <a:ln/>
-        </p:spPr>
-        <p:txBody>
-          <a:bodyPr wrap="square" lIns="0" tIns="0" rIns="0" bIns="0" rtlCol="0" anchor="ctr"/>
-          <a:lstStyle/>
-          <a:p>
-            <a:pPr indent="0" marL="0">
-              <a:buNone/>
-            </a:pPr>
-            <a:r>
-              <a:rPr lang="en-US" sz="1100" b="1" spc="120" kern="0" dirty="0">
-                <a:solidFill>
-                  <a:srgbClr val="2E7D4F"/>
-                </a:solidFill>
-                <a:latin typeface="Arial" pitchFamily="34" charset="0"/>
-                <a:ea typeface="Arial" pitchFamily="34" charset="-122"/>
-                <a:cs typeface="Arial" pitchFamily="34" charset="-120"/>
-              </a:rPr>
-              <a:t>LAS TRES TRAMPAS</a:t>
-            </a:r>
-            <a:endParaRPr lang="en-US" sz="1100" dirty="0"/>
-          </a:p>
-        </p:txBody>
-      </p:sp>
-      <p:sp>
-        <p:nvSpPr>
-          <p:cNvPr id="8" name="Text 6"/>
-          <p:cNvSpPr txBox="1"/>
-          <p:nvPr/>
-        </p:nvSpPr>
-        <p:spPr>
-          <a:xfrm>
-            <a:off x="502920" y="960120"/>
-            <a:ext cx="8138160" cy="786384"/>
-          </a:xfrm>
-          <a:prstGeom prst="rect">
-            <a:avLst/>
-          </a:prstGeom>
-          <a:noFill/>
-          <a:ln/>
-        </p:spPr>
-        <p:txBody>
-          <a:bodyPr wrap="square" lIns="0" tIns="0" rIns="0" bIns="0" rtlCol="0" anchor="t"/>
-          <a:lstStyle/>
-          <a:p>
-            <a:pPr indent="0" marL="0">
-              <a:buNone/>
-            </a:pPr>
-            <a:r>
-              <a:rPr lang="en-US" sz="2700" b="1" dirty="0">
-                <a:solidFill>
-                  <a:srgbClr val="1B1B1E"/>
-                </a:solidFill>
-                <a:latin typeface="Arial" pitchFamily="34" charset="0"/>
-                <a:ea typeface="Arial" pitchFamily="34" charset="-122"/>
-                <a:cs typeface="Arial" pitchFamily="34" charset="-120"/>
-              </a:rPr>
-              <a:t>Por dónde se cae</a:t>
-            </a:r>
-            <a:endParaRPr lang="en-US" sz="2700" dirty="0"/>
-          </a:p>
-        </p:txBody>
-      </p:sp>
-      <p:sp>
-        <p:nvSpPr>
-          <p:cNvPr id="9" name="Shape 7"/>
-          <p:cNvSpPr/>
-          <p:nvPr/>
-        </p:nvSpPr>
-        <p:spPr>
-          <a:xfrm>
-            <a:off x="502920" y="1828800"/>
-            <a:ext cx="2578608" cy="1335024"/>
-          </a:xfrm>
-          <a:prstGeom prst="roundRect">
-            <a:avLst>
-              <a:gd name="adj" fmla="val 4110"/>
-            </a:avLst>
-          </a:prstGeom>
-          <a:solidFill>
-            <a:srgbClr val="FFFFFF"/>
-          </a:solidFill>
-          <a:ln w="9525">
-            <a:solidFill>
-              <a:srgbClr val="DCE6DE"/>
-            </a:solidFill>
-            <a:prstDash val="solid"/>
-          </a:ln>
-        </p:spPr>
-      </p:sp>
-      <p:sp>
-        <p:nvSpPr>
-          <p:cNvPr id="10" name="Shape 8"/>
-          <p:cNvSpPr/>
-          <p:nvPr/>
-        </p:nvSpPr>
-        <p:spPr>
-          <a:xfrm>
-            <a:off x="649224" y="1975104"/>
-            <a:ext cx="274320" cy="274320"/>
-          </a:xfrm>
-          <a:prstGeom prst="ellipse">
-            <a:avLst/>
-          </a:prstGeom>
-          <a:solidFill>
-            <a:srgbClr val="87D895"/>
-          </a:solidFill>
-          <a:ln/>
-        </p:spPr>
-      </p:sp>
-      <p:sp>
-        <p:nvSpPr>
-          <p:cNvPr id="11" name="Text 9"/>
-          <p:cNvSpPr txBox="1"/>
-          <p:nvPr/>
-        </p:nvSpPr>
-        <p:spPr>
-          <a:xfrm>
-            <a:off x="649224" y="1975104"/>
-            <a:ext cx="274320" cy="274320"/>
-          </a:xfrm>
-          <a:prstGeom prst="rect">
-            <a:avLst/>
-          </a:prstGeom>
-          <a:noFill/>
-          <a:ln/>
-        </p:spPr>
-        <p:txBody>
-          <a:bodyPr wrap="square" lIns="0" tIns="0" rIns="0" bIns="0" rtlCol="0" anchor="ctr"/>
-          <a:lstStyle/>
-          <a:p>
-            <a:pPr algn="ctr" indent="0" marL="0">
-              <a:buNone/>
-            </a:pPr>
-            <a:r>
-              <a:rPr lang="en-US" sz="1100" b="1" dirty="0">
-                <a:solidFill>
-                  <a:srgbClr val="1B1B1E"/>
-                </a:solidFill>
-                <a:latin typeface="Arial" pitchFamily="34" charset="0"/>
-                <a:ea typeface="Arial" pitchFamily="34" charset="-122"/>
-                <a:cs typeface="Arial" pitchFamily="34" charset="-120"/>
-              </a:rPr>
-              <a:t>1</a:t>
-            </a:r>
-            <a:endParaRPr lang="en-US" sz="1100" dirty="0"/>
-          </a:p>
-        </p:txBody>
-      </p:sp>
-      <p:sp>
-        <p:nvSpPr>
-          <p:cNvPr id="12" name="Text 10"/>
-          <p:cNvSpPr txBox="1"/>
-          <p:nvPr/>
-        </p:nvSpPr>
-        <p:spPr>
-          <a:xfrm>
-            <a:off x="1005840" y="1956816"/>
-            <a:ext cx="1920240" cy="329184"/>
-          </a:xfrm>
-          <a:prstGeom prst="rect">
-            <a:avLst/>
-          </a:prstGeom>
-          <a:noFill/>
-          <a:ln/>
-        </p:spPr>
-        <p:txBody>
-          <a:bodyPr wrap="square" lIns="0" tIns="0" rIns="0" bIns="0" rtlCol="0" anchor="t"/>
-          <a:lstStyle/>
-          <a:p>
-            <a:pPr indent="0" marL="0">
-              <a:buNone/>
-            </a:pPr>
-            <a:r>
-              <a:rPr lang="en-US" sz="1200" b="1" dirty="0">
-                <a:solidFill>
-                  <a:srgbClr val="1B1B1E"/>
-                </a:solidFill>
-                <a:latin typeface="Arial" pitchFamily="34" charset="0"/>
-                <a:ea typeface="Arial" pitchFamily="34" charset="-122"/>
-                <a:cs typeface="Arial" pitchFamily="34" charset="-120"/>
-              </a:rPr>
-              <a:t>«Lo partimos en pagos»</a:t>
-            </a:r>
-            <a:endParaRPr lang="en-US" sz="1200" dirty="0"/>
-          </a:p>
-        </p:txBody>
-      </p:sp>
-      <p:sp>
-        <p:nvSpPr>
-          <p:cNvPr id="13" name="Text 11"/>
-          <p:cNvSpPr txBox="1"/>
-          <p:nvPr/>
-        </p:nvSpPr>
-        <p:spPr>
-          <a:xfrm>
-            <a:off x="649224" y="2322576"/>
-            <a:ext cx="2286000" cy="603504"/>
-          </a:xfrm>
-          <a:prstGeom prst="rect">
-            <a:avLst/>
-          </a:prstGeom>
-          <a:noFill/>
-          <a:ln/>
-        </p:spPr>
-        <p:txBody>
-          <a:bodyPr wrap="square" lIns="0" tIns="0" rIns="0" bIns="0" rtlCol="0" anchor="t"/>
-          <a:lstStyle/>
-          <a:p>
-            <a:pPr indent="0" marL="0">
-              <a:buNone/>
-            </a:pPr>
-            <a:r>
-              <a:rPr lang="en-US" sz="950" dirty="0">
-                <a:solidFill>
-                  <a:srgbClr val="4D4D4D"/>
-                </a:solidFill>
-                <a:latin typeface="Arial" pitchFamily="34" charset="0"/>
-                <a:ea typeface="Arial" pitchFamily="34" charset="-122"/>
-                <a:cs typeface="Arial" pitchFamily="34" charset="-120"/>
-              </a:rPr>
-              <a:t>La prohibición aplica al acto individual, ya sea en una o en varias exhibiciones</a:t>
-            </a:r>
-            <a:endParaRPr lang="en-US" sz="950" dirty="0"/>
-          </a:p>
-        </p:txBody>
-      </p:sp>
-      <p:sp>
-        <p:nvSpPr>
-          <p:cNvPr id="14" name="Text 12"/>
-          <p:cNvSpPr txBox="1"/>
-          <p:nvPr/>
-        </p:nvSpPr>
-        <p:spPr>
-          <a:xfrm>
-            <a:off x="649224" y="2935224"/>
-            <a:ext cx="2286000" cy="182880"/>
-          </a:xfrm>
-          <a:prstGeom prst="rect">
-            <a:avLst/>
-          </a:prstGeom>
-          <a:noFill/>
-          <a:ln/>
-        </p:spPr>
-        <p:txBody>
-          <a:bodyPr wrap="square" lIns="0" tIns="0" rIns="0" bIns="0" rtlCol="0" anchor="ctr"/>
-          <a:lstStyle/>
-          <a:p>
-            <a:pPr indent="0" marL="0">
-              <a:buNone/>
-            </a:pPr>
-            <a:r>
-              <a:rPr lang="en-US" sz="850" b="1" dirty="0">
-                <a:solidFill>
-                  <a:srgbClr val="2E7D4F"/>
-                </a:solidFill>
-                <a:latin typeface="Arial" pitchFamily="34" charset="0"/>
-                <a:ea typeface="Arial" pitchFamily="34" charset="-122"/>
-                <a:cs typeface="Arial" pitchFamily="34" charset="-120"/>
-              </a:rPr>
-              <a:t>R 42 fr. I</a:t>
-            </a:r>
-            <a:endParaRPr lang="en-US" sz="850" dirty="0"/>
-          </a:p>
-        </p:txBody>
-      </p:sp>
-      <p:sp>
-        <p:nvSpPr>
-          <p:cNvPr id="15" name="Shape 13"/>
-          <p:cNvSpPr/>
-          <p:nvPr/>
-        </p:nvSpPr>
-        <p:spPr>
-          <a:xfrm>
-            <a:off x="3282696" y="1828800"/>
-            <a:ext cx="2578608" cy="1335024"/>
-          </a:xfrm>
-          <a:prstGeom prst="roundRect">
-            <a:avLst>
-              <a:gd name="adj" fmla="val 4110"/>
-            </a:avLst>
-          </a:prstGeom>
-          <a:solidFill>
-            <a:srgbClr val="FFFFFF"/>
-          </a:solidFill>
-          <a:ln w="9525">
-            <a:solidFill>
-              <a:srgbClr val="DCE6DE"/>
-            </a:solidFill>
-            <a:prstDash val="solid"/>
-          </a:ln>
-        </p:spPr>
-      </p:sp>
-      <p:sp>
-        <p:nvSpPr>
-          <p:cNvPr id="16" name="Shape 14"/>
-          <p:cNvSpPr/>
-          <p:nvPr/>
-        </p:nvSpPr>
-        <p:spPr>
-          <a:xfrm>
-            <a:off x="3429000" y="1975104"/>
-            <a:ext cx="274320" cy="274320"/>
-          </a:xfrm>
-          <a:prstGeom prst="ellipse">
-            <a:avLst/>
-          </a:prstGeom>
-          <a:solidFill>
-            <a:srgbClr val="87D895"/>
-          </a:solidFill>
-          <a:ln/>
-        </p:spPr>
-      </p:sp>
-      <p:sp>
-        <p:nvSpPr>
-          <p:cNvPr id="17" name="Text 15"/>
-          <p:cNvSpPr txBox="1"/>
-          <p:nvPr/>
-        </p:nvSpPr>
-        <p:spPr>
-          <a:xfrm>
-            <a:off x="3429000" y="1975104"/>
-            <a:ext cx="274320" cy="274320"/>
-          </a:xfrm>
-          <a:prstGeom prst="rect">
-            <a:avLst/>
-          </a:prstGeom>
-          <a:noFill/>
-          <a:ln/>
-        </p:spPr>
-        <p:txBody>
-          <a:bodyPr wrap="square" lIns="0" tIns="0" rIns="0" bIns="0" rtlCol="0" anchor="ctr"/>
-          <a:lstStyle/>
-          <a:p>
-            <a:pPr algn="ctr" indent="0" marL="0">
-              <a:buNone/>
-            </a:pPr>
-            <a:r>
-              <a:rPr lang="en-US" sz="1100" b="1" dirty="0">
-                <a:solidFill>
-                  <a:srgbClr val="1B1B1E"/>
-                </a:solidFill>
-                <a:latin typeface="Arial" pitchFamily="34" charset="0"/>
-                <a:ea typeface="Arial" pitchFamily="34" charset="-122"/>
-                <a:cs typeface="Arial" pitchFamily="34" charset="-120"/>
-              </a:rPr>
-              <a:t>2</a:t>
-            </a:r>
-            <a:endParaRPr lang="en-US" sz="1100" dirty="0"/>
-          </a:p>
-        </p:txBody>
-      </p:sp>
-      <p:sp>
-        <p:nvSpPr>
-          <p:cNvPr id="18" name="Text 16"/>
-          <p:cNvSpPr txBox="1"/>
-          <p:nvPr/>
-        </p:nvSpPr>
-        <p:spPr>
-          <a:xfrm>
-            <a:off x="3785616" y="1956816"/>
-            <a:ext cx="1920240" cy="329184"/>
-          </a:xfrm>
-          <a:prstGeom prst="rect">
-            <a:avLst/>
-          </a:prstGeom>
-          <a:noFill/>
-          <a:ln/>
-        </p:spPr>
-        <p:txBody>
-          <a:bodyPr wrap="square" lIns="0" tIns="0" rIns="0" bIns="0" rtlCol="0" anchor="t"/>
-          <a:lstStyle/>
-          <a:p>
-            <a:pPr indent="0" marL="0">
-              <a:buNone/>
-            </a:pPr>
-            <a:r>
-              <a:rPr lang="en-US" sz="1200" b="1" dirty="0">
-                <a:solidFill>
-                  <a:srgbClr val="1B1B1E"/>
-                </a:solidFill>
-                <a:latin typeface="Arial" pitchFamily="34" charset="0"/>
-                <a:ea typeface="Arial" pitchFamily="34" charset="-122"/>
-                <a:cs typeface="Arial" pitchFamily="34" charset="-120"/>
-              </a:rPr>
-              <a:t>«Son tres contratos distintos»</a:t>
-            </a:r>
-            <a:endParaRPr lang="en-US" sz="1200" dirty="0"/>
-          </a:p>
-        </p:txBody>
-      </p:sp>
-      <p:sp>
-        <p:nvSpPr>
-          <p:cNvPr id="19" name="Text 17"/>
-          <p:cNvSpPr txBox="1"/>
-          <p:nvPr/>
-        </p:nvSpPr>
-        <p:spPr>
-          <a:xfrm>
-            <a:off x="3429000" y="2322576"/>
-            <a:ext cx="2286000" cy="603504"/>
-          </a:xfrm>
-          <a:prstGeom prst="rect">
-            <a:avLst/>
-          </a:prstGeom>
-          <a:noFill/>
-          <a:ln/>
-        </p:spPr>
-        <p:txBody>
-          <a:bodyPr wrap="square" lIns="0" tIns="0" rIns="0" bIns="0" rtlCol="0" anchor="t"/>
-          <a:lstStyle/>
-          <a:p>
-            <a:pPr indent="0" marL="0">
-              <a:buNone/>
-            </a:pPr>
-            <a:r>
-              <a:rPr lang="en-US" sz="950" dirty="0">
-                <a:solidFill>
-                  <a:srgbClr val="4D4D4D"/>
-                </a:solidFill>
-                <a:latin typeface="Arial" pitchFamily="34" charset="0"/>
-                <a:ea typeface="Arial" pitchFamily="34" charset="-122"/>
-                <a:cs typeface="Arial" pitchFamily="34" charset="-120"/>
-              </a:rPr>
-              <a:t>Aplica a un conjunto de actos cuando una sola persona aporta los recursos para pagarlos</a:t>
-            </a:r>
-            <a:endParaRPr lang="en-US" sz="950" dirty="0"/>
-          </a:p>
-        </p:txBody>
-      </p:sp>
-      <p:sp>
-        <p:nvSpPr>
-          <p:cNvPr id="20" name="Text 18"/>
-          <p:cNvSpPr txBox="1"/>
-          <p:nvPr/>
-        </p:nvSpPr>
-        <p:spPr>
-          <a:xfrm>
-            <a:off x="3429000" y="2935224"/>
-            <a:ext cx="2286000" cy="182880"/>
-          </a:xfrm>
-          <a:prstGeom prst="rect">
-            <a:avLst/>
-          </a:prstGeom>
-          <a:noFill/>
-          <a:ln/>
-        </p:spPr>
-        <p:txBody>
-          <a:bodyPr wrap="square" lIns="0" tIns="0" rIns="0" bIns="0" rtlCol="0" anchor="ctr"/>
-          <a:lstStyle/>
-          <a:p>
-            <a:pPr indent="0" marL="0">
-              <a:buNone/>
-            </a:pPr>
-            <a:r>
-              <a:rPr lang="en-US" sz="850" b="1" dirty="0">
-                <a:solidFill>
-                  <a:srgbClr val="2E7D4F"/>
-                </a:solidFill>
-                <a:latin typeface="Arial" pitchFamily="34" charset="0"/>
-                <a:ea typeface="Arial" pitchFamily="34" charset="-122"/>
-                <a:cs typeface="Arial" pitchFamily="34" charset="-120"/>
-              </a:rPr>
-              <a:t>R 42 fr. II</a:t>
-            </a:r>
-            <a:endParaRPr lang="en-US" sz="850" dirty="0"/>
-          </a:p>
-        </p:txBody>
-      </p:sp>
-      <p:sp>
-        <p:nvSpPr>
-          <p:cNvPr id="21" name="Shape 19"/>
-          <p:cNvSpPr/>
-          <p:nvPr/>
-        </p:nvSpPr>
-        <p:spPr>
-          <a:xfrm>
-            <a:off x="6062472" y="1828800"/>
-            <a:ext cx="2578608" cy="1335024"/>
-          </a:xfrm>
-          <a:prstGeom prst="roundRect">
-            <a:avLst>
-              <a:gd name="adj" fmla="val 4110"/>
-            </a:avLst>
-          </a:prstGeom>
-          <a:solidFill>
-            <a:srgbClr val="FFFFFF"/>
-          </a:solidFill>
-          <a:ln w="9525">
-            <a:solidFill>
-              <a:srgbClr val="DCE6DE"/>
-            </a:solidFill>
-            <a:prstDash val="solid"/>
-          </a:ln>
-        </p:spPr>
-      </p:sp>
-      <p:sp>
-        <p:nvSpPr>
-          <p:cNvPr id="22" name="Shape 20"/>
-          <p:cNvSpPr/>
-          <p:nvPr/>
-        </p:nvSpPr>
-        <p:spPr>
-          <a:xfrm>
-            <a:off x="6208776" y="1975104"/>
-            <a:ext cx="274320" cy="274320"/>
-          </a:xfrm>
-          <a:prstGeom prst="ellipse">
-            <a:avLst/>
-          </a:prstGeom>
-          <a:solidFill>
-            <a:srgbClr val="87D895"/>
-          </a:solidFill>
-          <a:ln/>
-        </p:spPr>
-      </p:sp>
-      <p:sp>
-        <p:nvSpPr>
-          <p:cNvPr id="23" name="Text 21"/>
-          <p:cNvSpPr txBox="1"/>
-          <p:nvPr/>
-        </p:nvSpPr>
-        <p:spPr>
-          <a:xfrm>
-            <a:off x="6208776" y="1975104"/>
-            <a:ext cx="274320" cy="274320"/>
-          </a:xfrm>
-          <a:prstGeom prst="rect">
-            <a:avLst/>
-          </a:prstGeom>
-          <a:noFill/>
-          <a:ln/>
-        </p:spPr>
-        <p:txBody>
-          <a:bodyPr wrap="square" lIns="0" tIns="0" rIns="0" bIns="0" rtlCol="0" anchor="ctr"/>
-          <a:lstStyle/>
-          <a:p>
-            <a:pPr algn="ctr" indent="0" marL="0">
-              <a:buNone/>
-            </a:pPr>
-            <a:r>
-              <a:rPr lang="en-US" sz="1100" b="1" dirty="0">
-                <a:solidFill>
-                  <a:srgbClr val="1B1B1E"/>
-                </a:solidFill>
-                <a:latin typeface="Arial" pitchFamily="34" charset="0"/>
-                <a:ea typeface="Arial" pitchFamily="34" charset="-122"/>
-                <a:cs typeface="Arial" pitchFamily="34" charset="-120"/>
-              </a:rPr>
-              <a:t>3</a:t>
-            </a:r>
-            <a:endParaRPr lang="en-US" sz="1100" dirty="0"/>
-          </a:p>
-        </p:txBody>
-      </p:sp>
-      <p:sp>
-        <p:nvSpPr>
-          <p:cNvPr id="24" name="Text 22"/>
-          <p:cNvSpPr txBox="1"/>
-          <p:nvPr/>
-        </p:nvSpPr>
-        <p:spPr>
-          <a:xfrm>
-            <a:off x="6565392" y="1956816"/>
-            <a:ext cx="1920240" cy="329184"/>
-          </a:xfrm>
-          <a:prstGeom prst="rect">
-            <a:avLst/>
-          </a:prstGeom>
-          <a:noFill/>
-          <a:ln/>
-        </p:spPr>
-        <p:txBody>
-          <a:bodyPr wrap="square" lIns="0" tIns="0" rIns="0" bIns="0" rtlCol="0" anchor="t"/>
-          <a:lstStyle/>
-          <a:p>
-            <a:pPr indent="0" marL="0">
-              <a:buNone/>
-            </a:pPr>
-            <a:r>
-              <a:rPr lang="en-US" sz="1200" b="1" dirty="0">
-                <a:solidFill>
-                  <a:srgbClr val="1B1B1E"/>
-                </a:solidFill>
-                <a:latin typeface="Arial" pitchFamily="34" charset="0"/>
-                <a:ea typeface="Arial" pitchFamily="34" charset="-122"/>
-                <a:cs typeface="Arial" pitchFamily="34" charset="-120"/>
-              </a:rPr>
-              <a:t>«Me pagó en efectivo y le devolví por transferencia»</a:t>
-            </a:r>
-            <a:endParaRPr lang="en-US" sz="1200" dirty="0"/>
-          </a:p>
-        </p:txBody>
-      </p:sp>
-      <p:sp>
-        <p:nvSpPr>
-          <p:cNvPr id="25" name="Text 23"/>
-          <p:cNvSpPr txBox="1"/>
-          <p:nvPr/>
-        </p:nvSpPr>
-        <p:spPr>
-          <a:xfrm>
-            <a:off x="6208776" y="2322576"/>
-            <a:ext cx="2286000" cy="603504"/>
-          </a:xfrm>
-          <a:prstGeom prst="rect">
-            <a:avLst/>
-          </a:prstGeom>
-          <a:noFill/>
-          <a:ln/>
-        </p:spPr>
-        <p:txBody>
-          <a:bodyPr wrap="square" lIns="0" tIns="0" rIns="0" bIns="0" rtlCol="0" anchor="t"/>
-          <a:lstStyle/>
-          <a:p>
-            <a:pPr indent="0" marL="0">
-              <a:buNone/>
-            </a:pPr>
-            <a:r>
-              <a:rPr lang="en-US" sz="950" dirty="0">
-                <a:solidFill>
-                  <a:srgbClr val="4D4D4D"/>
-                </a:solidFill>
-                <a:latin typeface="Arial" pitchFamily="34" charset="0"/>
-                <a:ea typeface="Arial" pitchFamily="34" charset="-122"/>
-                <a:cs typeface="Arial" pitchFamily="34" charset="-120"/>
-              </a:rPr>
-              <a:t>La devolución va en la misma forma de pago y en la misma moneda</a:t>
-            </a:r>
-            <a:endParaRPr lang="en-US" sz="950" dirty="0"/>
-          </a:p>
-        </p:txBody>
-      </p:sp>
-      <p:sp>
-        <p:nvSpPr>
-          <p:cNvPr id="26" name="Text 24"/>
-          <p:cNvSpPr txBox="1"/>
-          <p:nvPr/>
-        </p:nvSpPr>
-        <p:spPr>
-          <a:xfrm>
-            <a:off x="6208776" y="2935224"/>
-            <a:ext cx="2286000" cy="182880"/>
-          </a:xfrm>
-          <a:prstGeom prst="rect">
-            <a:avLst/>
-          </a:prstGeom>
-          <a:noFill/>
-          <a:ln/>
-        </p:spPr>
-        <p:txBody>
-          <a:bodyPr wrap="square" lIns="0" tIns="0" rIns="0" bIns="0" rtlCol="0" anchor="ctr"/>
-          <a:lstStyle/>
-          <a:p>
-            <a:pPr indent="0" marL="0">
-              <a:buNone/>
-            </a:pPr>
-            <a:r>
-              <a:rPr lang="en-US" sz="850" b="1" dirty="0">
-                <a:solidFill>
-                  <a:srgbClr val="2E7D4F"/>
-                </a:solidFill>
-                <a:latin typeface="Arial" pitchFamily="34" charset="0"/>
-                <a:ea typeface="Arial" pitchFamily="34" charset="-122"/>
-                <a:cs typeface="Arial" pitchFamily="34" charset="-120"/>
-              </a:rPr>
-              <a:t>R 43</a:t>
-            </a:r>
-            <a:endParaRPr lang="en-US" sz="850" dirty="0"/>
-          </a:p>
-        </p:txBody>
-      </p:sp>
-      <p:sp>
-        <p:nvSpPr>
-          <p:cNvPr id="27" name="Shape 25"/>
-          <p:cNvSpPr/>
-          <p:nvPr/>
-        </p:nvSpPr>
-        <p:spPr>
-          <a:xfrm>
-            <a:off x="502920" y="3977640"/>
-            <a:ext cx="8138160" cy="640080"/>
-          </a:xfrm>
-          <a:prstGeom prst="roundRect">
-            <a:avLst>
-              <a:gd name="adj" fmla="val 8571"/>
-            </a:avLst>
-          </a:prstGeom>
-          <a:solidFill>
-            <a:srgbClr val="87D895"/>
-          </a:solidFill>
-          <a:ln/>
-        </p:spPr>
-      </p:sp>
-      <p:sp>
-        <p:nvSpPr>
-          <p:cNvPr id="28" name="Text 26"/>
-          <p:cNvSpPr txBox="1"/>
-          <p:nvPr/>
-        </p:nvSpPr>
-        <p:spPr>
-          <a:xfrm>
-            <a:off x="731520" y="3995928"/>
-            <a:ext cx="7680960" cy="603504"/>
-          </a:xfrm>
-          <a:prstGeom prst="rect">
-            <a:avLst/>
-          </a:prstGeom>
-          <a:noFill/>
-          <a:ln/>
-        </p:spPr>
-        <p:txBody>
-          <a:bodyPr wrap="square" lIns="0" tIns="0" rIns="0" bIns="0" rtlCol="0" anchor="ctr"/>
-          <a:lstStyle/>
-          <a:p>
-            <a:pPr indent="0" marL="0">
-              <a:buNone/>
-            </a:pPr>
-            <a:r>
-              <a:rPr lang="en-US" sz="1200" b="1" dirty="0">
-                <a:solidFill>
-                  <a:srgbClr val="1B1B1E"/>
-                </a:solidFill>
-                <a:latin typeface="Arial" pitchFamily="34" charset="0"/>
-                <a:ea typeface="Arial" pitchFamily="34" charset="-122"/>
-                <a:cs typeface="Arial" pitchFamily="34" charset="-120"/>
-              </a:rPr>
-              <a:t>Fedatarios: en operaciones de 8,025 UMA o más hay que identificar monto, fecha, forma y moneda de pago. Abajo de eso, y si ya se pagó antes de la firma, basta la declaración bajo protesta. · L 33 y R 45</a:t>
-            </a:r>
-            <a:endParaRPr lang="en-US" sz="1200" dirty="0"/>
-          </a:p>
-        </p:txBody>
-      </p:sp>
-    </p:spTree>
-  </p:cSld>
-  <p:clrMapOvr>
-    <a:masterClrMapping/>
-  </p:clrMapOvr>
-</p:sld>
-</file>
-
 <file path=ppt/slides/slide39.xml><?xml version="1.0" encoding="utf-8"?>
 <p:sld xmlns:a="http://schemas.openxmlformats.org/drawingml/2006/main" xmlns:r="http://schemas.openxmlformats.org/officeDocument/2006/relationships" xmlns:p="http://schemas.openxmlformats.org/presentationml/2006/main">
   <p:cSld name="Slide 39">
@@ -36081,7 +36522,7 @@
                 <a:ea typeface="Arial" pitchFamily="34" charset="-122"/>
                 <a:cs typeface="Arial" pitchFamily="34" charset="-120"/>
               </a:rPr>
-              <a:t>R 6 · LAS TRES BASES</a:t>
+              <a:t>LAS TRES TRAMPAS</a:t>
             </a:r>
             <a:endParaRPr lang="en-US" sz="1100" dirty="0"/>
           </a:p>
@@ -36120,870 +36561,624 @@
                 <a:ea typeface="Arial" pitchFamily="34" charset="-122"/>
                 <a:cs typeface="Arial" pitchFamily="34" charset="-120"/>
               </a:rPr>
-              <a:t>El mismo acto se mide de tres maneras</a:t>
+              <a:t>Por dónde se cae</a:t>
             </a:r>
             <a:endParaRPr lang="en-US" sz="2700" dirty="0"/>
           </a:p>
         </p:txBody>
       </p:sp>
-      <p:graphicFrame>
-        <p:nvGraphicFramePr>
-          <p:cNvPr id="40" name="Table 0"/>
-          <p:cNvGraphicFramePr>
-            <a:graphicFrameLocks noGrp="1"/>
-          </p:cNvGraphicFramePr>
-          <p:nvPr>
-            <p:extLst>
-              <p:ext uri="{D42A27DB-BD31-4B8C-83A1-F6EECF244321}">
-                <p14:modId xmlns:p14="http://schemas.microsoft.com/office/powerpoint/2010/main" val="1579011935"/>
-              </p:ext>
-            </p:extLst>
-          </p:nvPr>
-        </p:nvGraphicFramePr>
-        <p:xfrm>
-          <a:off x="502920" y="1783080"/>
-          <a:ext cx="8138160" cy="914400"/>
-        </p:xfrm>
-        <a:graphic>
-          <a:graphicData uri="http://schemas.openxmlformats.org/drawingml/2006/table">
-            <a:tbl>
-              <a:tblPr/>
-              <a:tblGrid>
-                <a:gridCol w="3657600"/>
-                <a:gridCol w="2743200"/>
-                <a:gridCol w="1737360"/>
-              </a:tblGrid>
-              <a:tr h="0">
-                <a:tc>
-                  <a:txBody>
-                    <a:bodyPr/>
-                    <a:lstStyle/>
-                    <a:p>
-                      <a:pPr indent="0" marL="0">
-                        <a:buNone/>
-                      </a:pPr>
-                      <a:r>
-                        <a:rPr lang="en-US" sz="1150" b="1" dirty="0">
-                          <a:solidFill>
-                            <a:srgbClr val="1B1B1E"/>
-                          </a:solidFill>
-                          <a:latin typeface="Arial" pitchFamily="34" charset="0"/>
-                          <a:ea typeface="Arial" pitchFamily="34" charset="-122"/>
-                          <a:cs typeface="Arial" pitchFamily="34" charset="-120"/>
-                        </a:rPr>
-                        <a:t>Para qué</a:t>
-                      </a:r>
-                      <a:endParaRPr lang="en-US" sz="1150" dirty="0">
-                        <a:latin typeface="Arial" charset="0"/>
-                        <a:ea typeface="Arial" charset="0"/>
-                        <a:cs typeface="Arial" charset="0"/>
-                      </a:endParaRPr>
-                    </a:p>
-                  </a:txBody>
-                  <a:tcPr marL="63500" marR="63500" marT="63500" marB="63500" anchor="ctr">
-                    <a:lnL w="6350" cap="flat" cmpd="sng" algn="ctr">
-                      <a:solidFill>
-                        <a:srgbClr val="D9E2DB"/>
-                      </a:solidFill>
-                      <a:prstDash val="solid"/>
-                      <a:round/>
-                      <a:headEnd type="none" w="med" len="med"/>
-                      <a:tailEnd type="none" w="med" len="med"/>
-                    </a:lnL>
-                    <a:lnR w="6350" cap="flat" cmpd="sng" algn="ctr">
-                      <a:solidFill>
-                        <a:srgbClr val="D9E2DB"/>
-                      </a:solidFill>
-                      <a:prstDash val="solid"/>
-                      <a:round/>
-                      <a:headEnd type="none" w="med" len="med"/>
-                      <a:tailEnd type="none" w="med" len="med"/>
-                    </a:lnR>
-                    <a:lnT w="6350" cap="flat" cmpd="sng" algn="ctr">
-                      <a:solidFill>
-                        <a:srgbClr val="D9E2DB"/>
-                      </a:solidFill>
-                      <a:prstDash val="solid"/>
-                      <a:round/>
-                      <a:headEnd type="none" w="med" len="med"/>
-                      <a:tailEnd type="none" w="med" len="med"/>
-                    </a:lnT>
-                    <a:lnB w="6350" cap="flat" cmpd="sng" algn="ctr">
-                      <a:solidFill>
-                        <a:srgbClr val="D9E2DB"/>
-                      </a:solidFill>
-                      <a:prstDash val="solid"/>
-                      <a:round/>
-                      <a:headEnd type="none" w="med" len="med"/>
-                      <a:tailEnd type="none" w="med" len="med"/>
-                    </a:lnB>
-                    <a:solidFill>
-                      <a:srgbClr val="64C27B"/>
-                    </a:solidFill>
-                  </a:tcPr>
-                </a:tc>
-                <a:tc>
-                  <a:txBody>
-                    <a:bodyPr/>
-                    <a:lstStyle/>
-                    <a:p>
-                      <a:pPr indent="0" marL="0">
-                        <a:buNone/>
-                      </a:pPr>
-                      <a:r>
-                        <a:rPr lang="en-US" sz="1150" b="1" dirty="0">
-                          <a:solidFill>
-                            <a:srgbClr val="1B1B1E"/>
-                          </a:solidFill>
-                          <a:latin typeface="Arial" pitchFamily="34" charset="0"/>
-                          <a:ea typeface="Arial" pitchFamily="34" charset="-122"/>
-                          <a:cs typeface="Arial" pitchFamily="34" charset="-120"/>
-                        </a:rPr>
-                        <a:t>¿Lleva contribuciones?</a:t>
-                      </a:r>
-                      <a:endParaRPr lang="en-US" sz="1150" dirty="0">
-                        <a:latin typeface="Arial" charset="0"/>
-                        <a:ea typeface="Arial" charset="0"/>
-                        <a:cs typeface="Arial" charset="0"/>
-                      </a:endParaRPr>
-                    </a:p>
-                  </a:txBody>
-                  <a:tcPr marL="63500" marR="63500" marT="63500" marB="63500" anchor="ctr">
-                    <a:lnL w="6350" cap="flat" cmpd="sng" algn="ctr">
-                      <a:solidFill>
-                        <a:srgbClr val="D9E2DB"/>
-                      </a:solidFill>
-                      <a:prstDash val="solid"/>
-                      <a:round/>
-                      <a:headEnd type="none" w="med" len="med"/>
-                      <a:tailEnd type="none" w="med" len="med"/>
-                    </a:lnL>
-                    <a:lnR w="6350" cap="flat" cmpd="sng" algn="ctr">
-                      <a:solidFill>
-                        <a:srgbClr val="D9E2DB"/>
-                      </a:solidFill>
-                      <a:prstDash val="solid"/>
-                      <a:round/>
-                      <a:headEnd type="none" w="med" len="med"/>
-                      <a:tailEnd type="none" w="med" len="med"/>
-                    </a:lnR>
-                    <a:lnT w="6350" cap="flat" cmpd="sng" algn="ctr">
-                      <a:solidFill>
-                        <a:srgbClr val="D9E2DB"/>
-                      </a:solidFill>
-                      <a:prstDash val="solid"/>
-                      <a:round/>
-                      <a:headEnd type="none" w="med" len="med"/>
-                      <a:tailEnd type="none" w="med" len="med"/>
-                    </a:lnT>
-                    <a:lnB w="6350" cap="flat" cmpd="sng" algn="ctr">
-                      <a:solidFill>
-                        <a:srgbClr val="D9E2DB"/>
-                      </a:solidFill>
-                      <a:prstDash val="solid"/>
-                      <a:round/>
-                      <a:headEnd type="none" w="med" len="med"/>
-                      <a:tailEnd type="none" w="med" len="med"/>
-                    </a:lnB>
-                    <a:solidFill>
-                      <a:srgbClr val="64C27B"/>
-                    </a:solidFill>
-                  </a:tcPr>
-                </a:tc>
-                <a:tc>
-                  <a:txBody>
-                    <a:bodyPr/>
-                    <a:lstStyle/>
-                    <a:p>
-                      <a:pPr indent="0" marL="0">
-                        <a:buNone/>
-                      </a:pPr>
-                      <a:r>
-                        <a:rPr lang="en-US" sz="1150" b="1" dirty="0">
-                          <a:solidFill>
-                            <a:srgbClr val="1B1B1E"/>
-                          </a:solidFill>
-                          <a:latin typeface="Arial" pitchFamily="34" charset="0"/>
-                          <a:ea typeface="Arial" pitchFamily="34" charset="-122"/>
-                          <a:cs typeface="Arial" pitchFamily="34" charset="-120"/>
-                        </a:rPr>
-                        <a:t>Fundamento</a:t>
-                      </a:r>
-                      <a:endParaRPr lang="en-US" sz="1150" dirty="0">
-                        <a:latin typeface="Arial" charset="0"/>
-                        <a:ea typeface="Arial" charset="0"/>
-                        <a:cs typeface="Arial" charset="0"/>
-                      </a:endParaRPr>
-                    </a:p>
-                  </a:txBody>
-                  <a:tcPr marL="63500" marR="63500" marT="63500" marB="63500" anchor="ctr">
-                    <a:lnL w="6350" cap="flat" cmpd="sng" algn="ctr">
-                      <a:solidFill>
-                        <a:srgbClr val="D9E2DB"/>
-                      </a:solidFill>
-                      <a:prstDash val="solid"/>
-                      <a:round/>
-                      <a:headEnd type="none" w="med" len="med"/>
-                      <a:tailEnd type="none" w="med" len="med"/>
-                    </a:lnL>
-                    <a:lnR w="6350" cap="flat" cmpd="sng" algn="ctr">
-                      <a:solidFill>
-                        <a:srgbClr val="D9E2DB"/>
-                      </a:solidFill>
-                      <a:prstDash val="solid"/>
-                      <a:round/>
-                      <a:headEnd type="none" w="med" len="med"/>
-                      <a:tailEnd type="none" w="med" len="med"/>
-                    </a:lnR>
-                    <a:lnT w="6350" cap="flat" cmpd="sng" algn="ctr">
-                      <a:solidFill>
-                        <a:srgbClr val="D9E2DB"/>
-                      </a:solidFill>
-                      <a:prstDash val="solid"/>
-                      <a:round/>
-                      <a:headEnd type="none" w="med" len="med"/>
-                      <a:tailEnd type="none" w="med" len="med"/>
-                    </a:lnT>
-                    <a:lnB w="6350" cap="flat" cmpd="sng" algn="ctr">
-                      <a:solidFill>
-                        <a:srgbClr val="D9E2DB"/>
-                      </a:solidFill>
-                      <a:prstDash val="solid"/>
-                      <a:round/>
-                      <a:headEnd type="none" w="med" len="med"/>
-                      <a:tailEnd type="none" w="med" len="med"/>
-                    </a:lnB>
-                    <a:solidFill>
-                      <a:srgbClr val="64C27B"/>
-                    </a:solidFill>
-                  </a:tcPr>
-                </a:tc>
-              </a:tr>
-              <a:tr h="0">
-                <a:tc>
-                  <a:txBody>
-                    <a:bodyPr/>
-                    <a:lstStyle/>
-                    <a:p>
-                      <a:pPr indent="0" marL="0">
-                        <a:buNone/>
-                      </a:pPr>
-                      <a:r>
-                        <a:rPr lang="en-US" sz="1150" dirty="0">
-                          <a:solidFill>
-                            <a:srgbClr val="1B1B1E"/>
-                          </a:solidFill>
-                          <a:latin typeface="Arial" pitchFamily="34" charset="0"/>
-                          <a:ea typeface="Arial" pitchFamily="34" charset="-122"/>
-                          <a:cs typeface="Arial" pitchFamily="34" charset="-120"/>
-                        </a:rPr>
-                        <a:t>Saber si IDENTIFICA o si AVISA (artículo 17)</a:t>
-                      </a:r>
-                      <a:endParaRPr lang="en-US" sz="1150" dirty="0">
-                        <a:latin typeface="Arial" charset="0"/>
-                        <a:ea typeface="Arial" charset="0"/>
-                        <a:cs typeface="Arial" charset="0"/>
-                      </a:endParaRPr>
-                    </a:p>
-                  </a:txBody>
-                  <a:tcPr marL="63500" marR="63500" marT="63500" marB="63500" anchor="ctr">
-                    <a:lnL w="6350" cap="flat" cmpd="sng" algn="ctr">
-                      <a:solidFill>
-                        <a:srgbClr val="D9E2DB"/>
-                      </a:solidFill>
-                      <a:prstDash val="solid"/>
-                      <a:round/>
-                      <a:headEnd type="none" w="med" len="med"/>
-                      <a:tailEnd type="none" w="med" len="med"/>
-                    </a:lnL>
-                    <a:lnR w="6350" cap="flat" cmpd="sng" algn="ctr">
-                      <a:solidFill>
-                        <a:srgbClr val="D9E2DB"/>
-                      </a:solidFill>
-                      <a:prstDash val="solid"/>
-                      <a:round/>
-                      <a:headEnd type="none" w="med" len="med"/>
-                      <a:tailEnd type="none" w="med" len="med"/>
-                    </a:lnR>
-                    <a:lnT w="6350" cap="flat" cmpd="sng" algn="ctr">
-                      <a:solidFill>
-                        <a:srgbClr val="D9E2DB"/>
-                      </a:solidFill>
-                      <a:prstDash val="solid"/>
-                      <a:round/>
-                      <a:headEnd type="none" w="med" len="med"/>
-                      <a:tailEnd type="none" w="med" len="med"/>
-                    </a:lnT>
-                    <a:lnB w="6350" cap="flat" cmpd="sng" algn="ctr">
-                      <a:solidFill>
-                        <a:srgbClr val="D9E2DB"/>
-                      </a:solidFill>
-                      <a:prstDash val="solid"/>
-                      <a:round/>
-                      <a:headEnd type="none" w="med" len="med"/>
-                      <a:tailEnd type="none" w="med" len="med"/>
-                    </a:lnB>
-                    <a:solidFill>
-                      <a:srgbClr val="FFFFFF"/>
-                    </a:solidFill>
-                  </a:tcPr>
-                </a:tc>
-                <a:tc>
-                  <a:txBody>
-                    <a:bodyPr/>
-                    <a:lstStyle/>
-                    <a:p>
-                      <a:pPr indent="0" marL="0">
-                        <a:buNone/>
-                      </a:pPr>
-                      <a:r>
-                        <a:rPr lang="en-US" sz="1150" dirty="0">
-                          <a:solidFill>
-                            <a:srgbClr val="1B1B1E"/>
-                          </a:solidFill>
-                          <a:latin typeface="Arial" pitchFamily="34" charset="0"/>
-                          <a:ea typeface="Arial" pitchFamily="34" charset="-122"/>
-                          <a:cs typeface="Arial" pitchFamily="34" charset="-120"/>
-                        </a:rPr>
-                        <a:t>NO. Sin contribuciones ni accesorios</a:t>
-                      </a:r>
-                      <a:endParaRPr lang="en-US" sz="1150" dirty="0">
-                        <a:latin typeface="Arial" charset="0"/>
-                        <a:ea typeface="Arial" charset="0"/>
-                        <a:cs typeface="Arial" charset="0"/>
-                      </a:endParaRPr>
-                    </a:p>
-                  </a:txBody>
-                  <a:tcPr marL="63500" marR="63500" marT="63500" marB="63500" anchor="ctr">
-                    <a:lnL w="6350" cap="flat" cmpd="sng" algn="ctr">
-                      <a:solidFill>
-                        <a:srgbClr val="D9E2DB"/>
-                      </a:solidFill>
-                      <a:prstDash val="solid"/>
-                      <a:round/>
-                      <a:headEnd type="none" w="med" len="med"/>
-                      <a:tailEnd type="none" w="med" len="med"/>
-                    </a:lnL>
-                    <a:lnR w="6350" cap="flat" cmpd="sng" algn="ctr">
-                      <a:solidFill>
-                        <a:srgbClr val="D9E2DB"/>
-                      </a:solidFill>
-                      <a:prstDash val="solid"/>
-                      <a:round/>
-                      <a:headEnd type="none" w="med" len="med"/>
-                      <a:tailEnd type="none" w="med" len="med"/>
-                    </a:lnR>
-                    <a:lnT w="6350" cap="flat" cmpd="sng" algn="ctr">
-                      <a:solidFill>
-                        <a:srgbClr val="D9E2DB"/>
-                      </a:solidFill>
-                      <a:prstDash val="solid"/>
-                      <a:round/>
-                      <a:headEnd type="none" w="med" len="med"/>
-                      <a:tailEnd type="none" w="med" len="med"/>
-                    </a:lnT>
-                    <a:lnB w="6350" cap="flat" cmpd="sng" algn="ctr">
-                      <a:solidFill>
-                        <a:srgbClr val="D9E2DB"/>
-                      </a:solidFill>
-                      <a:prstDash val="solid"/>
-                      <a:round/>
-                      <a:headEnd type="none" w="med" len="med"/>
-                      <a:tailEnd type="none" w="med" len="med"/>
-                    </a:lnB>
-                    <a:solidFill>
-                      <a:srgbClr val="FFFFFF"/>
-                    </a:solidFill>
-                  </a:tcPr>
-                </a:tc>
-                <a:tc>
-                  <a:txBody>
-                    <a:bodyPr/>
-                    <a:lstStyle/>
-                    <a:p>
-                      <a:pPr indent="0" marL="0">
-                        <a:buNone/>
-                      </a:pPr>
-                      <a:r>
-                        <a:rPr lang="en-US" sz="1150" dirty="0">
-                          <a:solidFill>
-                            <a:srgbClr val="1B1B1E"/>
-                          </a:solidFill>
-                          <a:latin typeface="Arial" pitchFamily="34" charset="0"/>
-                          <a:ea typeface="Arial" pitchFamily="34" charset="-122"/>
-                          <a:cs typeface="Arial" pitchFamily="34" charset="-120"/>
-                        </a:rPr>
-                        <a:t>R 6, primer párrafo</a:t>
-                      </a:r>
-                      <a:endParaRPr lang="en-US" sz="1150" dirty="0">
-                        <a:latin typeface="Arial" charset="0"/>
-                        <a:ea typeface="Arial" charset="0"/>
-                        <a:cs typeface="Arial" charset="0"/>
-                      </a:endParaRPr>
-                    </a:p>
-                  </a:txBody>
-                  <a:tcPr marL="63500" marR="63500" marT="63500" marB="63500" anchor="ctr">
-                    <a:lnL w="6350" cap="flat" cmpd="sng" algn="ctr">
-                      <a:solidFill>
-                        <a:srgbClr val="D9E2DB"/>
-                      </a:solidFill>
-                      <a:prstDash val="solid"/>
-                      <a:round/>
-                      <a:headEnd type="none" w="med" len="med"/>
-                      <a:tailEnd type="none" w="med" len="med"/>
-                    </a:lnL>
-                    <a:lnR w="6350" cap="flat" cmpd="sng" algn="ctr">
-                      <a:solidFill>
-                        <a:srgbClr val="D9E2DB"/>
-                      </a:solidFill>
-                      <a:prstDash val="solid"/>
-                      <a:round/>
-                      <a:headEnd type="none" w="med" len="med"/>
-                      <a:tailEnd type="none" w="med" len="med"/>
-                    </a:lnR>
-                    <a:lnT w="6350" cap="flat" cmpd="sng" algn="ctr">
-                      <a:solidFill>
-                        <a:srgbClr val="D9E2DB"/>
-                      </a:solidFill>
-                      <a:prstDash val="solid"/>
-                      <a:round/>
-                      <a:headEnd type="none" w="med" len="med"/>
-                      <a:tailEnd type="none" w="med" len="med"/>
-                    </a:lnT>
-                    <a:lnB w="6350" cap="flat" cmpd="sng" algn="ctr">
-                      <a:solidFill>
-                        <a:srgbClr val="D9E2DB"/>
-                      </a:solidFill>
-                      <a:prstDash val="solid"/>
-                      <a:round/>
-                      <a:headEnd type="none" w="med" len="med"/>
-                      <a:tailEnd type="none" w="med" len="med"/>
-                    </a:lnB>
-                    <a:solidFill>
-                      <a:srgbClr val="FFFFFF"/>
-                    </a:solidFill>
-                  </a:tcPr>
-                </a:tc>
-              </a:tr>
-              <a:tr h="0">
-                <a:tc>
-                  <a:txBody>
-                    <a:bodyPr/>
-                    <a:lstStyle/>
-                    <a:p>
-                      <a:pPr indent="0" marL="0">
-                        <a:buNone/>
-                      </a:pPr>
-                      <a:r>
-                        <a:rPr lang="en-US" sz="1150" dirty="0">
-                          <a:solidFill>
-                            <a:srgbClr val="1B1B1E"/>
-                          </a:solidFill>
-                          <a:latin typeface="Arial" pitchFamily="34" charset="0"/>
-                          <a:ea typeface="Arial" pitchFamily="34" charset="-122"/>
-                          <a:cs typeface="Arial" pitchFamily="34" charset="-120"/>
-                        </a:rPr>
-                        <a:t>LLENAR el Aviso</a:t>
-                      </a:r>
-                      <a:endParaRPr lang="en-US" sz="1150" dirty="0">
-                        <a:latin typeface="Arial" charset="0"/>
-                        <a:ea typeface="Arial" charset="0"/>
-                        <a:cs typeface="Arial" charset="0"/>
-                      </a:endParaRPr>
-                    </a:p>
-                  </a:txBody>
-                  <a:tcPr marL="63500" marR="63500" marT="63500" marB="63500" anchor="ctr">
-                    <a:lnL w="6350" cap="flat" cmpd="sng" algn="ctr">
-                      <a:solidFill>
-                        <a:srgbClr val="D9E2DB"/>
-                      </a:solidFill>
-                      <a:prstDash val="solid"/>
-                      <a:round/>
-                      <a:headEnd type="none" w="med" len="med"/>
-                      <a:tailEnd type="none" w="med" len="med"/>
-                    </a:lnL>
-                    <a:lnR w="6350" cap="flat" cmpd="sng" algn="ctr">
-                      <a:solidFill>
-                        <a:srgbClr val="D9E2DB"/>
-                      </a:solidFill>
-                      <a:prstDash val="solid"/>
-                      <a:round/>
-                      <a:headEnd type="none" w="med" len="med"/>
-                      <a:tailEnd type="none" w="med" len="med"/>
-                    </a:lnR>
-                    <a:lnT w="6350" cap="flat" cmpd="sng" algn="ctr">
-                      <a:solidFill>
-                        <a:srgbClr val="D9E2DB"/>
-                      </a:solidFill>
-                      <a:prstDash val="solid"/>
-                      <a:round/>
-                      <a:headEnd type="none" w="med" len="med"/>
-                      <a:tailEnd type="none" w="med" len="med"/>
-                    </a:lnT>
-                    <a:lnB w="6350" cap="flat" cmpd="sng" algn="ctr">
-                      <a:solidFill>
-                        <a:srgbClr val="D9E2DB"/>
-                      </a:solidFill>
-                      <a:prstDash val="solid"/>
-                      <a:round/>
-                      <a:headEnd type="none" w="med" len="med"/>
-                      <a:tailEnd type="none" w="med" len="med"/>
-                    </a:lnB>
-                    <a:solidFill>
-                      <a:srgbClr val="EEF4EF"/>
-                    </a:solidFill>
-                  </a:tcPr>
-                </a:tc>
-                <a:tc>
-                  <a:txBody>
-                    <a:bodyPr/>
-                    <a:lstStyle/>
-                    <a:p>
-                      <a:pPr indent="0" marL="0">
-                        <a:buNone/>
-                      </a:pPr>
-                      <a:r>
-                        <a:rPr lang="en-US" sz="1150" dirty="0">
-                          <a:solidFill>
-                            <a:srgbClr val="1B1B1E"/>
-                          </a:solidFill>
-                          <a:latin typeface="Arial" pitchFamily="34" charset="0"/>
-                          <a:ea typeface="Arial" pitchFamily="34" charset="-122"/>
-                          <a:cs typeface="Arial" pitchFamily="34" charset="-120"/>
-                        </a:rPr>
-                        <a:t>SÍ. Se reporta el total de los pagos recibidos, sin desglosar</a:t>
-                      </a:r>
-                      <a:endParaRPr lang="en-US" sz="1150" dirty="0">
-                        <a:latin typeface="Arial" charset="0"/>
-                        <a:ea typeface="Arial" charset="0"/>
-                        <a:cs typeface="Arial" charset="0"/>
-                      </a:endParaRPr>
-                    </a:p>
-                  </a:txBody>
-                  <a:tcPr marL="63500" marR="63500" marT="63500" marB="63500" anchor="ctr">
-                    <a:lnL w="6350" cap="flat" cmpd="sng" algn="ctr">
-                      <a:solidFill>
-                        <a:srgbClr val="D9E2DB"/>
-                      </a:solidFill>
-                      <a:prstDash val="solid"/>
-                      <a:round/>
-                      <a:headEnd type="none" w="med" len="med"/>
-                      <a:tailEnd type="none" w="med" len="med"/>
-                    </a:lnL>
-                    <a:lnR w="6350" cap="flat" cmpd="sng" algn="ctr">
-                      <a:solidFill>
-                        <a:srgbClr val="D9E2DB"/>
-                      </a:solidFill>
-                      <a:prstDash val="solid"/>
-                      <a:round/>
-                      <a:headEnd type="none" w="med" len="med"/>
-                      <a:tailEnd type="none" w="med" len="med"/>
-                    </a:lnR>
-                    <a:lnT w="6350" cap="flat" cmpd="sng" algn="ctr">
-                      <a:solidFill>
-                        <a:srgbClr val="D9E2DB"/>
-                      </a:solidFill>
-                      <a:prstDash val="solid"/>
-                      <a:round/>
-                      <a:headEnd type="none" w="med" len="med"/>
-                      <a:tailEnd type="none" w="med" len="med"/>
-                    </a:lnT>
-                    <a:lnB w="6350" cap="flat" cmpd="sng" algn="ctr">
-                      <a:solidFill>
-                        <a:srgbClr val="D9E2DB"/>
-                      </a:solidFill>
-                      <a:prstDash val="solid"/>
-                      <a:round/>
-                      <a:headEnd type="none" w="med" len="med"/>
-                      <a:tailEnd type="none" w="med" len="med"/>
-                    </a:lnB>
-                    <a:solidFill>
-                      <a:srgbClr val="EEF4EF"/>
-                    </a:solidFill>
-                  </a:tcPr>
-                </a:tc>
-                <a:tc>
-                  <a:txBody>
-                    <a:bodyPr/>
-                    <a:lstStyle/>
-                    <a:p>
-                      <a:pPr indent="0" marL="0">
-                        <a:buNone/>
-                      </a:pPr>
-                      <a:r>
-                        <a:rPr lang="en-US" sz="1150" dirty="0">
-                          <a:solidFill>
-                            <a:srgbClr val="1B1B1E"/>
-                          </a:solidFill>
-                          <a:latin typeface="Arial" pitchFamily="34" charset="0"/>
-                          <a:ea typeface="Arial" pitchFamily="34" charset="-122"/>
-                          <a:cs typeface="Arial" pitchFamily="34" charset="-120"/>
-                        </a:rPr>
-                        <a:t>R 6, primer párrafo, segunda parte</a:t>
-                      </a:r>
-                      <a:endParaRPr lang="en-US" sz="1150" dirty="0">
-                        <a:latin typeface="Arial" charset="0"/>
-                        <a:ea typeface="Arial" charset="0"/>
-                        <a:cs typeface="Arial" charset="0"/>
-                      </a:endParaRPr>
-                    </a:p>
-                  </a:txBody>
-                  <a:tcPr marL="63500" marR="63500" marT="63500" marB="63500" anchor="ctr">
-                    <a:lnL w="6350" cap="flat" cmpd="sng" algn="ctr">
-                      <a:solidFill>
-                        <a:srgbClr val="D9E2DB"/>
-                      </a:solidFill>
-                      <a:prstDash val="solid"/>
-                      <a:round/>
-                      <a:headEnd type="none" w="med" len="med"/>
-                      <a:tailEnd type="none" w="med" len="med"/>
-                    </a:lnL>
-                    <a:lnR w="6350" cap="flat" cmpd="sng" algn="ctr">
-                      <a:solidFill>
-                        <a:srgbClr val="D9E2DB"/>
-                      </a:solidFill>
-                      <a:prstDash val="solid"/>
-                      <a:round/>
-                      <a:headEnd type="none" w="med" len="med"/>
-                      <a:tailEnd type="none" w="med" len="med"/>
-                    </a:lnR>
-                    <a:lnT w="6350" cap="flat" cmpd="sng" algn="ctr">
-                      <a:solidFill>
-                        <a:srgbClr val="D9E2DB"/>
-                      </a:solidFill>
-                      <a:prstDash val="solid"/>
-                      <a:round/>
-                      <a:headEnd type="none" w="med" len="med"/>
-                      <a:tailEnd type="none" w="med" len="med"/>
-                    </a:lnT>
-                    <a:lnB w="6350" cap="flat" cmpd="sng" algn="ctr">
-                      <a:solidFill>
-                        <a:srgbClr val="D9E2DB"/>
-                      </a:solidFill>
-                      <a:prstDash val="solid"/>
-                      <a:round/>
-                      <a:headEnd type="none" w="med" len="med"/>
-                      <a:tailEnd type="none" w="med" len="med"/>
-                    </a:lnB>
-                    <a:solidFill>
-                      <a:srgbClr val="EEF4EF"/>
-                    </a:solidFill>
-                  </a:tcPr>
-                </a:tc>
-              </a:tr>
-              <a:tr h="0">
-                <a:tc>
-                  <a:txBody>
-                    <a:bodyPr/>
-                    <a:lstStyle/>
-                    <a:p>
-                      <a:pPr indent="0" marL="0">
-                        <a:buNone/>
-                      </a:pPr>
-                      <a:r>
-                        <a:rPr lang="en-US" sz="1150" dirty="0">
-                          <a:solidFill>
-                            <a:srgbClr val="1B1B1E"/>
-                          </a:solidFill>
-                          <a:latin typeface="Arial" pitchFamily="34" charset="0"/>
-                          <a:ea typeface="Arial" pitchFamily="34" charset="-122"/>
-                          <a:cs typeface="Arial" pitchFamily="34" charset="-120"/>
-                        </a:rPr>
-                        <a:t>Saber si está PROHIBIDO EL EFECTIVO (artículo 32)</a:t>
-                      </a:r>
-                      <a:endParaRPr lang="en-US" sz="1150" dirty="0">
-                        <a:latin typeface="Arial" charset="0"/>
-                        <a:ea typeface="Arial" charset="0"/>
-                        <a:cs typeface="Arial" charset="0"/>
-                      </a:endParaRPr>
-                    </a:p>
-                  </a:txBody>
-                  <a:tcPr marL="63500" marR="63500" marT="63500" marB="63500" anchor="ctr">
-                    <a:lnL w="6350" cap="flat" cmpd="sng" algn="ctr">
-                      <a:solidFill>
-                        <a:srgbClr val="D9E2DB"/>
-                      </a:solidFill>
-                      <a:prstDash val="solid"/>
-                      <a:round/>
-                      <a:headEnd type="none" w="med" len="med"/>
-                      <a:tailEnd type="none" w="med" len="med"/>
-                    </a:lnL>
-                    <a:lnR w="6350" cap="flat" cmpd="sng" algn="ctr">
-                      <a:solidFill>
-                        <a:srgbClr val="D9E2DB"/>
-                      </a:solidFill>
-                      <a:prstDash val="solid"/>
-                      <a:round/>
-                      <a:headEnd type="none" w="med" len="med"/>
-                      <a:tailEnd type="none" w="med" len="med"/>
-                    </a:lnR>
-                    <a:lnT w="6350" cap="flat" cmpd="sng" algn="ctr">
-                      <a:solidFill>
-                        <a:srgbClr val="D9E2DB"/>
-                      </a:solidFill>
-                      <a:prstDash val="solid"/>
-                      <a:round/>
-                      <a:headEnd type="none" w="med" len="med"/>
-                      <a:tailEnd type="none" w="med" len="med"/>
-                    </a:lnT>
-                    <a:lnB w="6350" cap="flat" cmpd="sng" algn="ctr">
-                      <a:solidFill>
-                        <a:srgbClr val="D9E2DB"/>
-                      </a:solidFill>
-                      <a:prstDash val="solid"/>
-                      <a:round/>
-                      <a:headEnd type="none" w="med" len="med"/>
-                      <a:tailEnd type="none" w="med" len="med"/>
-                    </a:lnB>
-                    <a:solidFill>
-                      <a:srgbClr val="FFFFFF"/>
-                    </a:solidFill>
-                  </a:tcPr>
-                </a:tc>
-                <a:tc>
-                  <a:txBody>
-                    <a:bodyPr/>
-                    <a:lstStyle/>
-                    <a:p>
-                      <a:pPr indent="0" marL="0">
-                        <a:buNone/>
-                      </a:pPr>
-                      <a:r>
-                        <a:rPr lang="en-US" sz="1150" dirty="0">
-                          <a:solidFill>
-                            <a:srgbClr val="1B1B1E"/>
-                          </a:solidFill>
-                          <a:latin typeface="Arial" pitchFamily="34" charset="0"/>
-                          <a:ea typeface="Arial" pitchFamily="34" charset="-122"/>
-                          <a:cs typeface="Arial" pitchFamily="34" charset="-120"/>
-                        </a:rPr>
-                        <a:t>SÍ. Con contribuciones y accesorios</a:t>
-                      </a:r>
-                      <a:endParaRPr lang="en-US" sz="1150" dirty="0">
-                        <a:latin typeface="Arial" charset="0"/>
-                        <a:ea typeface="Arial" charset="0"/>
-                        <a:cs typeface="Arial" charset="0"/>
-                      </a:endParaRPr>
-                    </a:p>
-                  </a:txBody>
-                  <a:tcPr marL="63500" marR="63500" marT="63500" marB="63500" anchor="ctr">
-                    <a:lnL w="6350" cap="flat" cmpd="sng" algn="ctr">
-                      <a:solidFill>
-                        <a:srgbClr val="D9E2DB"/>
-                      </a:solidFill>
-                      <a:prstDash val="solid"/>
-                      <a:round/>
-                      <a:headEnd type="none" w="med" len="med"/>
-                      <a:tailEnd type="none" w="med" len="med"/>
-                    </a:lnL>
-                    <a:lnR w="6350" cap="flat" cmpd="sng" algn="ctr">
-                      <a:solidFill>
-                        <a:srgbClr val="D9E2DB"/>
-                      </a:solidFill>
-                      <a:prstDash val="solid"/>
-                      <a:round/>
-                      <a:headEnd type="none" w="med" len="med"/>
-                      <a:tailEnd type="none" w="med" len="med"/>
-                    </a:lnR>
-                    <a:lnT w="6350" cap="flat" cmpd="sng" algn="ctr">
-                      <a:solidFill>
-                        <a:srgbClr val="D9E2DB"/>
-                      </a:solidFill>
-                      <a:prstDash val="solid"/>
-                      <a:round/>
-                      <a:headEnd type="none" w="med" len="med"/>
-                      <a:tailEnd type="none" w="med" len="med"/>
-                    </a:lnT>
-                    <a:lnB w="6350" cap="flat" cmpd="sng" algn="ctr">
-                      <a:solidFill>
-                        <a:srgbClr val="D9E2DB"/>
-                      </a:solidFill>
-                      <a:prstDash val="solid"/>
-                      <a:round/>
-                      <a:headEnd type="none" w="med" len="med"/>
-                      <a:tailEnd type="none" w="med" len="med"/>
-                    </a:lnB>
-                    <a:solidFill>
-                      <a:srgbClr val="FFFFFF"/>
-                    </a:solidFill>
-                  </a:tcPr>
-                </a:tc>
-                <a:tc>
-                  <a:txBody>
-                    <a:bodyPr/>
-                    <a:lstStyle/>
-                    <a:p>
-                      <a:pPr indent="0" marL="0">
-                        <a:buNone/>
-                      </a:pPr>
-                      <a:r>
-                        <a:rPr lang="en-US" sz="1150" dirty="0">
-                          <a:solidFill>
-                            <a:srgbClr val="1B1B1E"/>
-                          </a:solidFill>
-                          <a:latin typeface="Arial" pitchFamily="34" charset="0"/>
-                          <a:ea typeface="Arial" pitchFamily="34" charset="-122"/>
-                          <a:cs typeface="Arial" pitchFamily="34" charset="-120"/>
-                        </a:rPr>
-                        <a:t>R 6, tercer párrafo</a:t>
-                      </a:r>
-                      <a:endParaRPr lang="en-US" sz="1150" dirty="0">
-                        <a:latin typeface="Arial" charset="0"/>
-                        <a:ea typeface="Arial" charset="0"/>
-                        <a:cs typeface="Arial" charset="0"/>
-                      </a:endParaRPr>
-                    </a:p>
-                  </a:txBody>
-                  <a:tcPr marL="63500" marR="63500" marT="63500" marB="63500" anchor="ctr">
-                    <a:lnL w="6350" cap="flat" cmpd="sng" algn="ctr">
-                      <a:solidFill>
-                        <a:srgbClr val="D9E2DB"/>
-                      </a:solidFill>
-                      <a:prstDash val="solid"/>
-                      <a:round/>
-                      <a:headEnd type="none" w="med" len="med"/>
-                      <a:tailEnd type="none" w="med" len="med"/>
-                    </a:lnL>
-                    <a:lnR w="6350" cap="flat" cmpd="sng" algn="ctr">
-                      <a:solidFill>
-                        <a:srgbClr val="D9E2DB"/>
-                      </a:solidFill>
-                      <a:prstDash val="solid"/>
-                      <a:round/>
-                      <a:headEnd type="none" w="med" len="med"/>
-                      <a:tailEnd type="none" w="med" len="med"/>
-                    </a:lnR>
-                    <a:lnT w="6350" cap="flat" cmpd="sng" algn="ctr">
-                      <a:solidFill>
-                        <a:srgbClr val="D9E2DB"/>
-                      </a:solidFill>
-                      <a:prstDash val="solid"/>
-                      <a:round/>
-                      <a:headEnd type="none" w="med" len="med"/>
-                      <a:tailEnd type="none" w="med" len="med"/>
-                    </a:lnT>
-                    <a:lnB w="6350" cap="flat" cmpd="sng" algn="ctr">
-                      <a:solidFill>
-                        <a:srgbClr val="D9E2DB"/>
-                      </a:solidFill>
-                      <a:prstDash val="solid"/>
-                      <a:round/>
-                      <a:headEnd type="none" w="med" len="med"/>
-                      <a:tailEnd type="none" w="med" len="med"/>
-                    </a:lnB>
-                    <a:solidFill>
-                      <a:srgbClr val="FFFFFF"/>
-                    </a:solidFill>
-                  </a:tcPr>
-                </a:tc>
-              </a:tr>
-            </a:tbl>
-          </a:graphicData>
-        </a:graphic>
-      </p:graphicFrame>
-      <p:sp>
-        <p:nvSpPr>
-          <p:cNvPr id="10" name="Shape 7"/>
+      <p:sp>
+        <p:nvSpPr>
+          <p:cNvPr id="9" name="Shape 7"/>
+          <p:cNvSpPr/>
+          <p:nvPr/>
+        </p:nvSpPr>
+        <p:spPr>
+          <a:xfrm>
+            <a:off x="502920" y="1828800"/>
+            <a:ext cx="2578608" cy="1335024"/>
+          </a:xfrm>
+          <a:prstGeom prst="roundRect">
+            <a:avLst>
+              <a:gd name="adj" fmla="val 4110"/>
+            </a:avLst>
+          </a:prstGeom>
+          <a:solidFill>
+            <a:srgbClr val="FFFFFF"/>
+          </a:solidFill>
+          <a:ln w="9525">
+            <a:solidFill>
+              <a:srgbClr val="DCE6DE"/>
+            </a:solidFill>
+            <a:prstDash val="solid"/>
+          </a:ln>
+        </p:spPr>
+      </p:sp>
+      <p:sp>
+        <p:nvSpPr>
+          <p:cNvPr id="10" name="Shape 8"/>
+          <p:cNvSpPr/>
+          <p:nvPr/>
+        </p:nvSpPr>
+        <p:spPr>
+          <a:xfrm>
+            <a:off x="649224" y="1975104"/>
+            <a:ext cx="274320" cy="274320"/>
+          </a:xfrm>
+          <a:prstGeom prst="ellipse">
+            <a:avLst/>
+          </a:prstGeom>
+          <a:solidFill>
+            <a:srgbClr val="87D895"/>
+          </a:solidFill>
+          <a:ln/>
+        </p:spPr>
+      </p:sp>
+      <p:sp>
+        <p:nvSpPr>
+          <p:cNvPr id="11" name="Text 9"/>
+          <p:cNvSpPr txBox="1"/>
+          <p:nvPr/>
+        </p:nvSpPr>
+        <p:spPr>
+          <a:xfrm>
+            <a:off x="649224" y="1975104"/>
+            <a:ext cx="274320" cy="274320"/>
+          </a:xfrm>
+          <a:prstGeom prst="rect">
+            <a:avLst/>
+          </a:prstGeom>
+          <a:noFill/>
+          <a:ln/>
+        </p:spPr>
+        <p:txBody>
+          <a:bodyPr wrap="square" lIns="0" tIns="0" rIns="0" bIns="0" rtlCol="0" anchor="ctr"/>
+          <a:lstStyle/>
+          <a:p>
+            <a:pPr algn="ctr" indent="0" marL="0">
+              <a:buNone/>
+            </a:pPr>
+            <a:r>
+              <a:rPr lang="en-US" sz="1100" b="1" dirty="0">
+                <a:solidFill>
+                  <a:srgbClr val="1B1B1E"/>
+                </a:solidFill>
+                <a:latin typeface="Arial" pitchFamily="34" charset="0"/>
+                <a:ea typeface="Arial" pitchFamily="34" charset="-122"/>
+                <a:cs typeface="Arial" pitchFamily="34" charset="-120"/>
+              </a:rPr>
+              <a:t>1</a:t>
+            </a:r>
+            <a:endParaRPr lang="en-US" sz="1100" dirty="0"/>
+          </a:p>
+        </p:txBody>
+      </p:sp>
+      <p:sp>
+        <p:nvSpPr>
+          <p:cNvPr id="12" name="Text 10"/>
+          <p:cNvSpPr txBox="1"/>
+          <p:nvPr/>
+        </p:nvSpPr>
+        <p:spPr>
+          <a:xfrm>
+            <a:off x="1005840" y="1956816"/>
+            <a:ext cx="1920240" cy="329184"/>
+          </a:xfrm>
+          <a:prstGeom prst="rect">
+            <a:avLst/>
+          </a:prstGeom>
+          <a:noFill/>
+          <a:ln/>
+        </p:spPr>
+        <p:txBody>
+          <a:bodyPr wrap="square" lIns="0" tIns="0" rIns="0" bIns="0" rtlCol="0" anchor="t"/>
+          <a:lstStyle/>
+          <a:p>
+            <a:pPr indent="0" marL="0">
+              <a:buNone/>
+            </a:pPr>
+            <a:r>
+              <a:rPr lang="en-US" sz="1200" b="1" dirty="0">
+                <a:solidFill>
+                  <a:srgbClr val="1B1B1E"/>
+                </a:solidFill>
+                <a:latin typeface="Arial" pitchFamily="34" charset="0"/>
+                <a:ea typeface="Arial" pitchFamily="34" charset="-122"/>
+                <a:cs typeface="Arial" pitchFamily="34" charset="-120"/>
+              </a:rPr>
+              <a:t>«Lo partimos en pagos»</a:t>
+            </a:r>
+            <a:endParaRPr lang="en-US" sz="1200" dirty="0"/>
+          </a:p>
+        </p:txBody>
+      </p:sp>
+      <p:sp>
+        <p:nvSpPr>
+          <p:cNvPr id="13" name="Text 11"/>
+          <p:cNvSpPr txBox="1"/>
+          <p:nvPr/>
+        </p:nvSpPr>
+        <p:spPr>
+          <a:xfrm>
+            <a:off x="649224" y="2322576"/>
+            <a:ext cx="2286000" cy="603504"/>
+          </a:xfrm>
+          <a:prstGeom prst="rect">
+            <a:avLst/>
+          </a:prstGeom>
+          <a:noFill/>
+          <a:ln/>
+        </p:spPr>
+        <p:txBody>
+          <a:bodyPr wrap="square" lIns="0" tIns="0" rIns="0" bIns="0" rtlCol="0" anchor="t"/>
+          <a:lstStyle/>
+          <a:p>
+            <a:pPr indent="0" marL="0">
+              <a:buNone/>
+            </a:pPr>
+            <a:r>
+              <a:rPr lang="en-US" sz="950" dirty="0">
+                <a:solidFill>
+                  <a:srgbClr val="4D4D4D"/>
+                </a:solidFill>
+                <a:latin typeface="Arial" pitchFamily="34" charset="0"/>
+                <a:ea typeface="Arial" pitchFamily="34" charset="-122"/>
+                <a:cs typeface="Arial" pitchFamily="34" charset="-120"/>
+              </a:rPr>
+              <a:t>La prohibición aplica al acto individual, ya sea en una o en varias exhibiciones</a:t>
+            </a:r>
+            <a:endParaRPr lang="en-US" sz="950" dirty="0"/>
+          </a:p>
+        </p:txBody>
+      </p:sp>
+      <p:sp>
+        <p:nvSpPr>
+          <p:cNvPr id="14" name="Text 12"/>
+          <p:cNvSpPr txBox="1"/>
+          <p:nvPr/>
+        </p:nvSpPr>
+        <p:spPr>
+          <a:xfrm>
+            <a:off x="649224" y="2935224"/>
+            <a:ext cx="2286000" cy="182880"/>
+          </a:xfrm>
+          <a:prstGeom prst="rect">
+            <a:avLst/>
+          </a:prstGeom>
+          <a:noFill/>
+          <a:ln/>
+        </p:spPr>
+        <p:txBody>
+          <a:bodyPr wrap="square" lIns="0" tIns="0" rIns="0" bIns="0" rtlCol="0" anchor="ctr"/>
+          <a:lstStyle/>
+          <a:p>
+            <a:pPr indent="0" marL="0">
+              <a:buNone/>
+            </a:pPr>
+            <a:r>
+              <a:rPr lang="en-US" sz="850" b="1" dirty="0">
+                <a:solidFill>
+                  <a:srgbClr val="2E7D4F"/>
+                </a:solidFill>
+                <a:latin typeface="Arial" pitchFamily="34" charset="0"/>
+                <a:ea typeface="Arial" pitchFamily="34" charset="-122"/>
+                <a:cs typeface="Arial" pitchFamily="34" charset="-120"/>
+              </a:rPr>
+              <a:t>R 42 fr. I</a:t>
+            </a:r>
+            <a:endParaRPr lang="en-US" sz="850" dirty="0"/>
+          </a:p>
+        </p:txBody>
+      </p:sp>
+      <p:sp>
+        <p:nvSpPr>
+          <p:cNvPr id="15" name="Shape 13"/>
+          <p:cNvSpPr/>
+          <p:nvPr/>
+        </p:nvSpPr>
+        <p:spPr>
+          <a:xfrm>
+            <a:off x="3282696" y="1828800"/>
+            <a:ext cx="2578608" cy="1335024"/>
+          </a:xfrm>
+          <a:prstGeom prst="roundRect">
+            <a:avLst>
+              <a:gd name="adj" fmla="val 4110"/>
+            </a:avLst>
+          </a:prstGeom>
+          <a:solidFill>
+            <a:srgbClr val="FFFFFF"/>
+          </a:solidFill>
+          <a:ln w="9525">
+            <a:solidFill>
+              <a:srgbClr val="DCE6DE"/>
+            </a:solidFill>
+            <a:prstDash val="solid"/>
+          </a:ln>
+        </p:spPr>
+      </p:sp>
+      <p:sp>
+        <p:nvSpPr>
+          <p:cNvPr id="16" name="Shape 14"/>
+          <p:cNvSpPr/>
+          <p:nvPr/>
+        </p:nvSpPr>
+        <p:spPr>
+          <a:xfrm>
+            <a:off x="3429000" y="1975104"/>
+            <a:ext cx="274320" cy="274320"/>
+          </a:xfrm>
+          <a:prstGeom prst="ellipse">
+            <a:avLst/>
+          </a:prstGeom>
+          <a:solidFill>
+            <a:srgbClr val="87D895"/>
+          </a:solidFill>
+          <a:ln/>
+        </p:spPr>
+      </p:sp>
+      <p:sp>
+        <p:nvSpPr>
+          <p:cNvPr id="17" name="Text 15"/>
+          <p:cNvSpPr txBox="1"/>
+          <p:nvPr/>
+        </p:nvSpPr>
+        <p:spPr>
+          <a:xfrm>
+            <a:off x="3429000" y="1975104"/>
+            <a:ext cx="274320" cy="274320"/>
+          </a:xfrm>
+          <a:prstGeom prst="rect">
+            <a:avLst/>
+          </a:prstGeom>
+          <a:noFill/>
+          <a:ln/>
+        </p:spPr>
+        <p:txBody>
+          <a:bodyPr wrap="square" lIns="0" tIns="0" rIns="0" bIns="0" rtlCol="0" anchor="ctr"/>
+          <a:lstStyle/>
+          <a:p>
+            <a:pPr algn="ctr" indent="0" marL="0">
+              <a:buNone/>
+            </a:pPr>
+            <a:r>
+              <a:rPr lang="en-US" sz="1100" b="1" dirty="0">
+                <a:solidFill>
+                  <a:srgbClr val="1B1B1E"/>
+                </a:solidFill>
+                <a:latin typeface="Arial" pitchFamily="34" charset="0"/>
+                <a:ea typeface="Arial" pitchFamily="34" charset="-122"/>
+                <a:cs typeface="Arial" pitchFamily="34" charset="-120"/>
+              </a:rPr>
+              <a:t>2</a:t>
+            </a:r>
+            <a:endParaRPr lang="en-US" sz="1100" dirty="0"/>
+          </a:p>
+        </p:txBody>
+      </p:sp>
+      <p:sp>
+        <p:nvSpPr>
+          <p:cNvPr id="18" name="Text 16"/>
+          <p:cNvSpPr txBox="1"/>
+          <p:nvPr/>
+        </p:nvSpPr>
+        <p:spPr>
+          <a:xfrm>
+            <a:off x="3785616" y="1956816"/>
+            <a:ext cx="1920240" cy="329184"/>
+          </a:xfrm>
+          <a:prstGeom prst="rect">
+            <a:avLst/>
+          </a:prstGeom>
+          <a:noFill/>
+          <a:ln/>
+        </p:spPr>
+        <p:txBody>
+          <a:bodyPr wrap="square" lIns="0" tIns="0" rIns="0" bIns="0" rtlCol="0" anchor="t"/>
+          <a:lstStyle/>
+          <a:p>
+            <a:pPr indent="0" marL="0">
+              <a:buNone/>
+            </a:pPr>
+            <a:r>
+              <a:rPr lang="en-US" sz="1200" b="1" dirty="0">
+                <a:solidFill>
+                  <a:srgbClr val="1B1B1E"/>
+                </a:solidFill>
+                <a:latin typeface="Arial" pitchFamily="34" charset="0"/>
+                <a:ea typeface="Arial" pitchFamily="34" charset="-122"/>
+                <a:cs typeface="Arial" pitchFamily="34" charset="-120"/>
+              </a:rPr>
+              <a:t>«Son tres contratos distintos»</a:t>
+            </a:r>
+            <a:endParaRPr lang="en-US" sz="1200" dirty="0"/>
+          </a:p>
+        </p:txBody>
+      </p:sp>
+      <p:sp>
+        <p:nvSpPr>
+          <p:cNvPr id="19" name="Text 17"/>
+          <p:cNvSpPr txBox="1"/>
+          <p:nvPr/>
+        </p:nvSpPr>
+        <p:spPr>
+          <a:xfrm>
+            <a:off x="3429000" y="2322576"/>
+            <a:ext cx="2286000" cy="603504"/>
+          </a:xfrm>
+          <a:prstGeom prst="rect">
+            <a:avLst/>
+          </a:prstGeom>
+          <a:noFill/>
+          <a:ln/>
+        </p:spPr>
+        <p:txBody>
+          <a:bodyPr wrap="square" lIns="0" tIns="0" rIns="0" bIns="0" rtlCol="0" anchor="t"/>
+          <a:lstStyle/>
+          <a:p>
+            <a:pPr indent="0" marL="0">
+              <a:buNone/>
+            </a:pPr>
+            <a:r>
+              <a:rPr lang="en-US" sz="950" dirty="0">
+                <a:solidFill>
+                  <a:srgbClr val="4D4D4D"/>
+                </a:solidFill>
+                <a:latin typeface="Arial" pitchFamily="34" charset="0"/>
+                <a:ea typeface="Arial" pitchFamily="34" charset="-122"/>
+                <a:cs typeface="Arial" pitchFamily="34" charset="-120"/>
+              </a:rPr>
+              <a:t>Aplica a un conjunto de actos cuando una sola persona aporta los recursos para pagarlos</a:t>
+            </a:r>
+            <a:endParaRPr lang="en-US" sz="950" dirty="0"/>
+          </a:p>
+        </p:txBody>
+      </p:sp>
+      <p:sp>
+        <p:nvSpPr>
+          <p:cNvPr id="20" name="Text 18"/>
+          <p:cNvSpPr txBox="1"/>
+          <p:nvPr/>
+        </p:nvSpPr>
+        <p:spPr>
+          <a:xfrm>
+            <a:off x="3429000" y="2935224"/>
+            <a:ext cx="2286000" cy="182880"/>
+          </a:xfrm>
+          <a:prstGeom prst="rect">
+            <a:avLst/>
+          </a:prstGeom>
+          <a:noFill/>
+          <a:ln/>
+        </p:spPr>
+        <p:txBody>
+          <a:bodyPr wrap="square" lIns="0" tIns="0" rIns="0" bIns="0" rtlCol="0" anchor="ctr"/>
+          <a:lstStyle/>
+          <a:p>
+            <a:pPr indent="0" marL="0">
+              <a:buNone/>
+            </a:pPr>
+            <a:r>
+              <a:rPr lang="en-US" sz="850" b="1" dirty="0">
+                <a:solidFill>
+                  <a:srgbClr val="2E7D4F"/>
+                </a:solidFill>
+                <a:latin typeface="Arial" pitchFamily="34" charset="0"/>
+                <a:ea typeface="Arial" pitchFamily="34" charset="-122"/>
+                <a:cs typeface="Arial" pitchFamily="34" charset="-120"/>
+              </a:rPr>
+              <a:t>R 42 fr. II</a:t>
+            </a:r>
+            <a:endParaRPr lang="en-US" sz="850" dirty="0"/>
+          </a:p>
+        </p:txBody>
+      </p:sp>
+      <p:sp>
+        <p:nvSpPr>
+          <p:cNvPr id="21" name="Shape 19"/>
+          <p:cNvSpPr/>
+          <p:nvPr/>
+        </p:nvSpPr>
+        <p:spPr>
+          <a:xfrm>
+            <a:off x="6062472" y="1828800"/>
+            <a:ext cx="2578608" cy="1335024"/>
+          </a:xfrm>
+          <a:prstGeom prst="roundRect">
+            <a:avLst>
+              <a:gd name="adj" fmla="val 4110"/>
+            </a:avLst>
+          </a:prstGeom>
+          <a:solidFill>
+            <a:srgbClr val="FFFFFF"/>
+          </a:solidFill>
+          <a:ln w="9525">
+            <a:solidFill>
+              <a:srgbClr val="DCE6DE"/>
+            </a:solidFill>
+            <a:prstDash val="solid"/>
+          </a:ln>
+        </p:spPr>
+      </p:sp>
+      <p:sp>
+        <p:nvSpPr>
+          <p:cNvPr id="22" name="Shape 20"/>
+          <p:cNvSpPr/>
+          <p:nvPr/>
+        </p:nvSpPr>
+        <p:spPr>
+          <a:xfrm>
+            <a:off x="6208776" y="1975104"/>
+            <a:ext cx="274320" cy="274320"/>
+          </a:xfrm>
+          <a:prstGeom prst="ellipse">
+            <a:avLst/>
+          </a:prstGeom>
+          <a:solidFill>
+            <a:srgbClr val="87D895"/>
+          </a:solidFill>
+          <a:ln/>
+        </p:spPr>
+      </p:sp>
+      <p:sp>
+        <p:nvSpPr>
+          <p:cNvPr id="23" name="Text 21"/>
+          <p:cNvSpPr txBox="1"/>
+          <p:nvPr/>
+        </p:nvSpPr>
+        <p:spPr>
+          <a:xfrm>
+            <a:off x="6208776" y="1975104"/>
+            <a:ext cx="274320" cy="274320"/>
+          </a:xfrm>
+          <a:prstGeom prst="rect">
+            <a:avLst/>
+          </a:prstGeom>
+          <a:noFill/>
+          <a:ln/>
+        </p:spPr>
+        <p:txBody>
+          <a:bodyPr wrap="square" lIns="0" tIns="0" rIns="0" bIns="0" rtlCol="0" anchor="ctr"/>
+          <a:lstStyle/>
+          <a:p>
+            <a:pPr algn="ctr" indent="0" marL="0">
+              <a:buNone/>
+            </a:pPr>
+            <a:r>
+              <a:rPr lang="en-US" sz="1100" b="1" dirty="0">
+                <a:solidFill>
+                  <a:srgbClr val="1B1B1E"/>
+                </a:solidFill>
+                <a:latin typeface="Arial" pitchFamily="34" charset="0"/>
+                <a:ea typeface="Arial" pitchFamily="34" charset="-122"/>
+                <a:cs typeface="Arial" pitchFamily="34" charset="-120"/>
+              </a:rPr>
+              <a:t>3</a:t>
+            </a:r>
+            <a:endParaRPr lang="en-US" sz="1100" dirty="0"/>
+          </a:p>
+        </p:txBody>
+      </p:sp>
+      <p:sp>
+        <p:nvSpPr>
+          <p:cNvPr id="24" name="Text 22"/>
+          <p:cNvSpPr txBox="1"/>
+          <p:nvPr/>
+        </p:nvSpPr>
+        <p:spPr>
+          <a:xfrm>
+            <a:off x="6565392" y="1956816"/>
+            <a:ext cx="1920240" cy="329184"/>
+          </a:xfrm>
+          <a:prstGeom prst="rect">
+            <a:avLst/>
+          </a:prstGeom>
+          <a:noFill/>
+          <a:ln/>
+        </p:spPr>
+        <p:txBody>
+          <a:bodyPr wrap="square" lIns="0" tIns="0" rIns="0" bIns="0" rtlCol="0" anchor="t"/>
+          <a:lstStyle/>
+          <a:p>
+            <a:pPr indent="0" marL="0">
+              <a:buNone/>
+            </a:pPr>
+            <a:r>
+              <a:rPr lang="en-US" sz="1200" b="1" dirty="0">
+                <a:solidFill>
+                  <a:srgbClr val="1B1B1E"/>
+                </a:solidFill>
+                <a:latin typeface="Arial" pitchFamily="34" charset="0"/>
+                <a:ea typeface="Arial" pitchFamily="34" charset="-122"/>
+                <a:cs typeface="Arial" pitchFamily="34" charset="-120"/>
+              </a:rPr>
+              <a:t>«Me pagó en efectivo y le devolví por transferencia»</a:t>
+            </a:r>
+            <a:endParaRPr lang="en-US" sz="1200" dirty="0"/>
+          </a:p>
+        </p:txBody>
+      </p:sp>
+      <p:sp>
+        <p:nvSpPr>
+          <p:cNvPr id="25" name="Text 23"/>
+          <p:cNvSpPr txBox="1"/>
+          <p:nvPr/>
+        </p:nvSpPr>
+        <p:spPr>
+          <a:xfrm>
+            <a:off x="6208776" y="2322576"/>
+            <a:ext cx="2286000" cy="603504"/>
+          </a:xfrm>
+          <a:prstGeom prst="rect">
+            <a:avLst/>
+          </a:prstGeom>
+          <a:noFill/>
+          <a:ln/>
+        </p:spPr>
+        <p:txBody>
+          <a:bodyPr wrap="square" lIns="0" tIns="0" rIns="0" bIns="0" rtlCol="0" anchor="t"/>
+          <a:lstStyle/>
+          <a:p>
+            <a:pPr indent="0" marL="0">
+              <a:buNone/>
+            </a:pPr>
+            <a:r>
+              <a:rPr lang="en-US" sz="950" dirty="0">
+                <a:solidFill>
+                  <a:srgbClr val="4D4D4D"/>
+                </a:solidFill>
+                <a:latin typeface="Arial" pitchFamily="34" charset="0"/>
+                <a:ea typeface="Arial" pitchFamily="34" charset="-122"/>
+                <a:cs typeface="Arial" pitchFamily="34" charset="-120"/>
+              </a:rPr>
+              <a:t>La devolución va en la misma forma de pago y en la misma moneda</a:t>
+            </a:r>
+            <a:endParaRPr lang="en-US" sz="950" dirty="0"/>
+          </a:p>
+        </p:txBody>
+      </p:sp>
+      <p:sp>
+        <p:nvSpPr>
+          <p:cNvPr id="26" name="Text 24"/>
+          <p:cNvSpPr txBox="1"/>
+          <p:nvPr/>
+        </p:nvSpPr>
+        <p:spPr>
+          <a:xfrm>
+            <a:off x="6208776" y="2935224"/>
+            <a:ext cx="2286000" cy="182880"/>
+          </a:xfrm>
+          <a:prstGeom prst="rect">
+            <a:avLst/>
+          </a:prstGeom>
+          <a:noFill/>
+          <a:ln/>
+        </p:spPr>
+        <p:txBody>
+          <a:bodyPr wrap="square" lIns="0" tIns="0" rIns="0" bIns="0" rtlCol="0" anchor="ctr"/>
+          <a:lstStyle/>
+          <a:p>
+            <a:pPr indent="0" marL="0">
+              <a:buNone/>
+            </a:pPr>
+            <a:r>
+              <a:rPr lang="en-US" sz="850" b="1" dirty="0">
+                <a:solidFill>
+                  <a:srgbClr val="2E7D4F"/>
+                </a:solidFill>
+                <a:latin typeface="Arial" pitchFamily="34" charset="0"/>
+                <a:ea typeface="Arial" pitchFamily="34" charset="-122"/>
+                <a:cs typeface="Arial" pitchFamily="34" charset="-120"/>
+              </a:rPr>
+              <a:t>R 43</a:t>
+            </a:r>
+            <a:endParaRPr lang="en-US" sz="850" dirty="0"/>
+          </a:p>
+        </p:txBody>
+      </p:sp>
+      <p:sp>
+        <p:nvSpPr>
+          <p:cNvPr id="27" name="Shape 25"/>
           <p:cNvSpPr/>
           <p:nvPr/>
         </p:nvSpPr>
@@ -37005,7 +37200,7 @@
       </p:sp>
       <p:sp>
         <p:nvSpPr>
-          <p:cNvPr id="11" name="Text 8"/>
+          <p:cNvPr id="28" name="Text 26"/>
           <p:cNvSpPr txBox="1"/>
           <p:nvPr/>
         </p:nvSpPr>
@@ -37036,7 +37231,7 @@
                 <a:ea typeface="Arial" pitchFamily="34" charset="-122"/>
                 <a:cs typeface="Arial" pitchFamily="34" charset="-120"/>
               </a:rPr>
-              <a:t>Y para comercio exterior hay una cuarta: el valor en aduana de las mercancías. · R 6, segundo párrafo</a:t>
+              <a:t>Fedatarios: en operaciones de 8,025 UMA o más hay que identificar monto, fecha, forma y moneda de pago. Abajo de eso, y si ya se pagó antes de la firma, basta la declaración bajo protesta. · L 33 y R 45</a:t>
             </a:r>
             <a:endParaRPr lang="en-US" sz="1200" dirty="0"/>
           </a:p>
@@ -37834,7 +38029,7 @@
                           <a:ea typeface="Arial" pitchFamily="34" charset="-122"/>
                           <a:cs typeface="Arial" pitchFamily="34" charset="-120"/>
                         </a:rPr>
-                        <a:t>Manual con metodología · grado de riesgo · perfil transaccional · orden de prelación del Beneficiario Controlador</a:t>
+                        <a:t>Manual con metodología · grado de riesgo · perfil transaccional · SISTEMA DE ALERTAS · orden de prelación del Beneficiario Controlador</a:t>
                       </a:r>
                       <a:endParaRPr lang="en-US" sz="1150" dirty="0">
                         <a:latin typeface="Arial" charset="0"/>
@@ -38425,7 +38620,7 @@
                 <a:ea typeface="Arial" pitchFamily="34" charset="-122"/>
                 <a:cs typeface="Arial" pitchFamily="34" charset="-120"/>
               </a:rPr>
-              <a:t>El mecanismo sólo tiene que contener lo que pase a partir del 1 de junio de 2027. No hay que cargarle el histórico.</a:t>
+              <a:t>Ojo al trimestre de en medio: el sistema de alertas es exigible desde el 1 de marzo y los mecanismos automatizados hasta el 1 de junio. De marzo a mayo el sistema tiene que poder operarse por otros medios.</a:t>
             </a:r>
             <a:endParaRPr lang="en-US" sz="1200" dirty="0"/>
           </a:p>
@@ -38653,7 +38848,7 @@
                 <a:ea typeface="Arial" pitchFamily="34" charset="-122"/>
                 <a:cs typeface="Arial" pitchFamily="34" charset="-120"/>
               </a:rPr>
-              <a:t>EL CASO QUE SE VAN A LLEVAR</a:t>
+              <a:t>R 6 · LAS TRES BASES</a:t>
             </a:r>
             <a:endParaRPr lang="en-US" sz="1100" dirty="0"/>
           </a:p>
@@ -38692,299 +38887,876 @@
                 <a:ea typeface="Arial" pitchFamily="34" charset="-122"/>
                 <a:cs typeface="Arial" pitchFamily="34" charset="-120"/>
               </a:rPr>
-              <a:t>Un coche de $340,000 más IVA</a:t>
+              <a:t>El mismo acto se mide de tres maneras</a:t>
             </a:r>
             <a:endParaRPr lang="en-US" sz="2700" dirty="0"/>
           </a:p>
         </p:txBody>
       </p:sp>
-      <p:sp>
-        <p:nvSpPr>
-          <p:cNvPr id="9" name="Shape 7"/>
+      <p:graphicFrame>
+        <p:nvGraphicFramePr>
+          <p:cNvPr id="41" name="Table 0"/>
+          <p:cNvGraphicFramePr>
+            <a:graphicFrameLocks noGrp="1"/>
+          </p:cNvGraphicFramePr>
+          <p:nvPr>
+            <p:extLst>
+              <p:ext uri="{D42A27DB-BD31-4B8C-83A1-F6EECF244321}">
+                <p14:modId xmlns:p14="http://schemas.microsoft.com/office/powerpoint/2010/main" val="1579011935"/>
+              </p:ext>
+            </p:extLst>
+          </p:nvPr>
+        </p:nvGraphicFramePr>
+        <p:xfrm>
+          <a:off x="502920" y="1783080"/>
+          <a:ext cx="8138160" cy="914400"/>
+        </p:xfrm>
+        <a:graphic>
+          <a:graphicData uri="http://schemas.openxmlformats.org/drawingml/2006/table">
+            <a:tbl>
+              <a:tblPr/>
+              <a:tblGrid>
+                <a:gridCol w="3657600"/>
+                <a:gridCol w="2743200"/>
+                <a:gridCol w="1737360"/>
+              </a:tblGrid>
+              <a:tr h="0">
+                <a:tc>
+                  <a:txBody>
+                    <a:bodyPr/>
+                    <a:lstStyle/>
+                    <a:p>
+                      <a:pPr indent="0" marL="0">
+                        <a:buNone/>
+                      </a:pPr>
+                      <a:r>
+                        <a:rPr lang="en-US" sz="1150" b="1" dirty="0">
+                          <a:solidFill>
+                            <a:srgbClr val="1B1B1E"/>
+                          </a:solidFill>
+                          <a:latin typeface="Arial" pitchFamily="34" charset="0"/>
+                          <a:ea typeface="Arial" pitchFamily="34" charset="-122"/>
+                          <a:cs typeface="Arial" pitchFamily="34" charset="-120"/>
+                        </a:rPr>
+                        <a:t>Para qué</a:t>
+                      </a:r>
+                      <a:endParaRPr lang="en-US" sz="1150" dirty="0">
+                        <a:latin typeface="Arial" charset="0"/>
+                        <a:ea typeface="Arial" charset="0"/>
+                        <a:cs typeface="Arial" charset="0"/>
+                      </a:endParaRPr>
+                    </a:p>
+                  </a:txBody>
+                  <a:tcPr marL="63500" marR="63500" marT="63500" marB="63500" anchor="ctr">
+                    <a:lnL w="6350" cap="flat" cmpd="sng" algn="ctr">
+                      <a:solidFill>
+                        <a:srgbClr val="D9E2DB"/>
+                      </a:solidFill>
+                      <a:prstDash val="solid"/>
+                      <a:round/>
+                      <a:headEnd type="none" w="med" len="med"/>
+                      <a:tailEnd type="none" w="med" len="med"/>
+                    </a:lnL>
+                    <a:lnR w="6350" cap="flat" cmpd="sng" algn="ctr">
+                      <a:solidFill>
+                        <a:srgbClr val="D9E2DB"/>
+                      </a:solidFill>
+                      <a:prstDash val="solid"/>
+                      <a:round/>
+                      <a:headEnd type="none" w="med" len="med"/>
+                      <a:tailEnd type="none" w="med" len="med"/>
+                    </a:lnR>
+                    <a:lnT w="6350" cap="flat" cmpd="sng" algn="ctr">
+                      <a:solidFill>
+                        <a:srgbClr val="D9E2DB"/>
+                      </a:solidFill>
+                      <a:prstDash val="solid"/>
+                      <a:round/>
+                      <a:headEnd type="none" w="med" len="med"/>
+                      <a:tailEnd type="none" w="med" len="med"/>
+                    </a:lnT>
+                    <a:lnB w="6350" cap="flat" cmpd="sng" algn="ctr">
+                      <a:solidFill>
+                        <a:srgbClr val="D9E2DB"/>
+                      </a:solidFill>
+                      <a:prstDash val="solid"/>
+                      <a:round/>
+                      <a:headEnd type="none" w="med" len="med"/>
+                      <a:tailEnd type="none" w="med" len="med"/>
+                    </a:lnB>
+                    <a:solidFill>
+                      <a:srgbClr val="64C27B"/>
+                    </a:solidFill>
+                  </a:tcPr>
+                </a:tc>
+                <a:tc>
+                  <a:txBody>
+                    <a:bodyPr/>
+                    <a:lstStyle/>
+                    <a:p>
+                      <a:pPr indent="0" marL="0">
+                        <a:buNone/>
+                      </a:pPr>
+                      <a:r>
+                        <a:rPr lang="en-US" sz="1150" b="1" dirty="0">
+                          <a:solidFill>
+                            <a:srgbClr val="1B1B1E"/>
+                          </a:solidFill>
+                          <a:latin typeface="Arial" pitchFamily="34" charset="0"/>
+                          <a:ea typeface="Arial" pitchFamily="34" charset="-122"/>
+                          <a:cs typeface="Arial" pitchFamily="34" charset="-120"/>
+                        </a:rPr>
+                        <a:t>¿Lleva contribuciones?</a:t>
+                      </a:r>
+                      <a:endParaRPr lang="en-US" sz="1150" dirty="0">
+                        <a:latin typeface="Arial" charset="0"/>
+                        <a:ea typeface="Arial" charset="0"/>
+                        <a:cs typeface="Arial" charset="0"/>
+                      </a:endParaRPr>
+                    </a:p>
+                  </a:txBody>
+                  <a:tcPr marL="63500" marR="63500" marT="63500" marB="63500" anchor="ctr">
+                    <a:lnL w="6350" cap="flat" cmpd="sng" algn="ctr">
+                      <a:solidFill>
+                        <a:srgbClr val="D9E2DB"/>
+                      </a:solidFill>
+                      <a:prstDash val="solid"/>
+                      <a:round/>
+                      <a:headEnd type="none" w="med" len="med"/>
+                      <a:tailEnd type="none" w="med" len="med"/>
+                    </a:lnL>
+                    <a:lnR w="6350" cap="flat" cmpd="sng" algn="ctr">
+                      <a:solidFill>
+                        <a:srgbClr val="D9E2DB"/>
+                      </a:solidFill>
+                      <a:prstDash val="solid"/>
+                      <a:round/>
+                      <a:headEnd type="none" w="med" len="med"/>
+                      <a:tailEnd type="none" w="med" len="med"/>
+                    </a:lnR>
+                    <a:lnT w="6350" cap="flat" cmpd="sng" algn="ctr">
+                      <a:solidFill>
+                        <a:srgbClr val="D9E2DB"/>
+                      </a:solidFill>
+                      <a:prstDash val="solid"/>
+                      <a:round/>
+                      <a:headEnd type="none" w="med" len="med"/>
+                      <a:tailEnd type="none" w="med" len="med"/>
+                    </a:lnT>
+                    <a:lnB w="6350" cap="flat" cmpd="sng" algn="ctr">
+                      <a:solidFill>
+                        <a:srgbClr val="D9E2DB"/>
+                      </a:solidFill>
+                      <a:prstDash val="solid"/>
+                      <a:round/>
+                      <a:headEnd type="none" w="med" len="med"/>
+                      <a:tailEnd type="none" w="med" len="med"/>
+                    </a:lnB>
+                    <a:solidFill>
+                      <a:srgbClr val="64C27B"/>
+                    </a:solidFill>
+                  </a:tcPr>
+                </a:tc>
+                <a:tc>
+                  <a:txBody>
+                    <a:bodyPr/>
+                    <a:lstStyle/>
+                    <a:p>
+                      <a:pPr indent="0" marL="0">
+                        <a:buNone/>
+                      </a:pPr>
+                      <a:r>
+                        <a:rPr lang="en-US" sz="1150" b="1" dirty="0">
+                          <a:solidFill>
+                            <a:srgbClr val="1B1B1E"/>
+                          </a:solidFill>
+                          <a:latin typeface="Arial" pitchFamily="34" charset="0"/>
+                          <a:ea typeface="Arial" pitchFamily="34" charset="-122"/>
+                          <a:cs typeface="Arial" pitchFamily="34" charset="-120"/>
+                        </a:rPr>
+                        <a:t>Fundamento</a:t>
+                      </a:r>
+                      <a:endParaRPr lang="en-US" sz="1150" dirty="0">
+                        <a:latin typeface="Arial" charset="0"/>
+                        <a:ea typeface="Arial" charset="0"/>
+                        <a:cs typeface="Arial" charset="0"/>
+                      </a:endParaRPr>
+                    </a:p>
+                  </a:txBody>
+                  <a:tcPr marL="63500" marR="63500" marT="63500" marB="63500" anchor="ctr">
+                    <a:lnL w="6350" cap="flat" cmpd="sng" algn="ctr">
+                      <a:solidFill>
+                        <a:srgbClr val="D9E2DB"/>
+                      </a:solidFill>
+                      <a:prstDash val="solid"/>
+                      <a:round/>
+                      <a:headEnd type="none" w="med" len="med"/>
+                      <a:tailEnd type="none" w="med" len="med"/>
+                    </a:lnL>
+                    <a:lnR w="6350" cap="flat" cmpd="sng" algn="ctr">
+                      <a:solidFill>
+                        <a:srgbClr val="D9E2DB"/>
+                      </a:solidFill>
+                      <a:prstDash val="solid"/>
+                      <a:round/>
+                      <a:headEnd type="none" w="med" len="med"/>
+                      <a:tailEnd type="none" w="med" len="med"/>
+                    </a:lnR>
+                    <a:lnT w="6350" cap="flat" cmpd="sng" algn="ctr">
+                      <a:solidFill>
+                        <a:srgbClr val="D9E2DB"/>
+                      </a:solidFill>
+                      <a:prstDash val="solid"/>
+                      <a:round/>
+                      <a:headEnd type="none" w="med" len="med"/>
+                      <a:tailEnd type="none" w="med" len="med"/>
+                    </a:lnT>
+                    <a:lnB w="6350" cap="flat" cmpd="sng" algn="ctr">
+                      <a:solidFill>
+                        <a:srgbClr val="D9E2DB"/>
+                      </a:solidFill>
+                      <a:prstDash val="solid"/>
+                      <a:round/>
+                      <a:headEnd type="none" w="med" len="med"/>
+                      <a:tailEnd type="none" w="med" len="med"/>
+                    </a:lnB>
+                    <a:solidFill>
+                      <a:srgbClr val="64C27B"/>
+                    </a:solidFill>
+                  </a:tcPr>
+                </a:tc>
+              </a:tr>
+              <a:tr h="0">
+                <a:tc>
+                  <a:txBody>
+                    <a:bodyPr/>
+                    <a:lstStyle/>
+                    <a:p>
+                      <a:pPr indent="0" marL="0">
+                        <a:buNone/>
+                      </a:pPr>
+                      <a:r>
+                        <a:rPr lang="en-US" sz="1150" dirty="0">
+                          <a:solidFill>
+                            <a:srgbClr val="1B1B1E"/>
+                          </a:solidFill>
+                          <a:latin typeface="Arial" pitchFamily="34" charset="0"/>
+                          <a:ea typeface="Arial" pitchFamily="34" charset="-122"/>
+                          <a:cs typeface="Arial" pitchFamily="34" charset="-120"/>
+                        </a:rPr>
+                        <a:t>Saber si IDENTIFICA o si AVISA (artículo 17)</a:t>
+                      </a:r>
+                      <a:endParaRPr lang="en-US" sz="1150" dirty="0">
+                        <a:latin typeface="Arial" charset="0"/>
+                        <a:ea typeface="Arial" charset="0"/>
+                        <a:cs typeface="Arial" charset="0"/>
+                      </a:endParaRPr>
+                    </a:p>
+                  </a:txBody>
+                  <a:tcPr marL="63500" marR="63500" marT="63500" marB="63500" anchor="ctr">
+                    <a:lnL w="6350" cap="flat" cmpd="sng" algn="ctr">
+                      <a:solidFill>
+                        <a:srgbClr val="D9E2DB"/>
+                      </a:solidFill>
+                      <a:prstDash val="solid"/>
+                      <a:round/>
+                      <a:headEnd type="none" w="med" len="med"/>
+                      <a:tailEnd type="none" w="med" len="med"/>
+                    </a:lnL>
+                    <a:lnR w="6350" cap="flat" cmpd="sng" algn="ctr">
+                      <a:solidFill>
+                        <a:srgbClr val="D9E2DB"/>
+                      </a:solidFill>
+                      <a:prstDash val="solid"/>
+                      <a:round/>
+                      <a:headEnd type="none" w="med" len="med"/>
+                      <a:tailEnd type="none" w="med" len="med"/>
+                    </a:lnR>
+                    <a:lnT w="6350" cap="flat" cmpd="sng" algn="ctr">
+                      <a:solidFill>
+                        <a:srgbClr val="D9E2DB"/>
+                      </a:solidFill>
+                      <a:prstDash val="solid"/>
+                      <a:round/>
+                      <a:headEnd type="none" w="med" len="med"/>
+                      <a:tailEnd type="none" w="med" len="med"/>
+                    </a:lnT>
+                    <a:lnB w="6350" cap="flat" cmpd="sng" algn="ctr">
+                      <a:solidFill>
+                        <a:srgbClr val="D9E2DB"/>
+                      </a:solidFill>
+                      <a:prstDash val="solid"/>
+                      <a:round/>
+                      <a:headEnd type="none" w="med" len="med"/>
+                      <a:tailEnd type="none" w="med" len="med"/>
+                    </a:lnB>
+                    <a:solidFill>
+                      <a:srgbClr val="FFFFFF"/>
+                    </a:solidFill>
+                  </a:tcPr>
+                </a:tc>
+                <a:tc>
+                  <a:txBody>
+                    <a:bodyPr/>
+                    <a:lstStyle/>
+                    <a:p>
+                      <a:pPr indent="0" marL="0">
+                        <a:buNone/>
+                      </a:pPr>
+                      <a:r>
+                        <a:rPr lang="en-US" sz="1150" dirty="0">
+                          <a:solidFill>
+                            <a:srgbClr val="1B1B1E"/>
+                          </a:solidFill>
+                          <a:latin typeface="Arial" pitchFamily="34" charset="0"/>
+                          <a:ea typeface="Arial" pitchFamily="34" charset="-122"/>
+                          <a:cs typeface="Arial" pitchFamily="34" charset="-120"/>
+                        </a:rPr>
+                        <a:t>NO. Sin contribuciones ni accesorios</a:t>
+                      </a:r>
+                      <a:endParaRPr lang="en-US" sz="1150" dirty="0">
+                        <a:latin typeface="Arial" charset="0"/>
+                        <a:ea typeface="Arial" charset="0"/>
+                        <a:cs typeface="Arial" charset="0"/>
+                      </a:endParaRPr>
+                    </a:p>
+                  </a:txBody>
+                  <a:tcPr marL="63500" marR="63500" marT="63500" marB="63500" anchor="ctr">
+                    <a:lnL w="6350" cap="flat" cmpd="sng" algn="ctr">
+                      <a:solidFill>
+                        <a:srgbClr val="D9E2DB"/>
+                      </a:solidFill>
+                      <a:prstDash val="solid"/>
+                      <a:round/>
+                      <a:headEnd type="none" w="med" len="med"/>
+                      <a:tailEnd type="none" w="med" len="med"/>
+                    </a:lnL>
+                    <a:lnR w="6350" cap="flat" cmpd="sng" algn="ctr">
+                      <a:solidFill>
+                        <a:srgbClr val="D9E2DB"/>
+                      </a:solidFill>
+                      <a:prstDash val="solid"/>
+                      <a:round/>
+                      <a:headEnd type="none" w="med" len="med"/>
+                      <a:tailEnd type="none" w="med" len="med"/>
+                    </a:lnR>
+                    <a:lnT w="6350" cap="flat" cmpd="sng" algn="ctr">
+                      <a:solidFill>
+                        <a:srgbClr val="D9E2DB"/>
+                      </a:solidFill>
+                      <a:prstDash val="solid"/>
+                      <a:round/>
+                      <a:headEnd type="none" w="med" len="med"/>
+                      <a:tailEnd type="none" w="med" len="med"/>
+                    </a:lnT>
+                    <a:lnB w="6350" cap="flat" cmpd="sng" algn="ctr">
+                      <a:solidFill>
+                        <a:srgbClr val="D9E2DB"/>
+                      </a:solidFill>
+                      <a:prstDash val="solid"/>
+                      <a:round/>
+                      <a:headEnd type="none" w="med" len="med"/>
+                      <a:tailEnd type="none" w="med" len="med"/>
+                    </a:lnB>
+                    <a:solidFill>
+                      <a:srgbClr val="FFFFFF"/>
+                    </a:solidFill>
+                  </a:tcPr>
+                </a:tc>
+                <a:tc>
+                  <a:txBody>
+                    <a:bodyPr/>
+                    <a:lstStyle/>
+                    <a:p>
+                      <a:pPr indent="0" marL="0">
+                        <a:buNone/>
+                      </a:pPr>
+                      <a:r>
+                        <a:rPr lang="en-US" sz="1150" dirty="0">
+                          <a:solidFill>
+                            <a:srgbClr val="1B1B1E"/>
+                          </a:solidFill>
+                          <a:latin typeface="Arial" pitchFamily="34" charset="0"/>
+                          <a:ea typeface="Arial" pitchFamily="34" charset="-122"/>
+                          <a:cs typeface="Arial" pitchFamily="34" charset="-120"/>
+                        </a:rPr>
+                        <a:t>R 6, primer párrafo</a:t>
+                      </a:r>
+                      <a:endParaRPr lang="en-US" sz="1150" dirty="0">
+                        <a:latin typeface="Arial" charset="0"/>
+                        <a:ea typeface="Arial" charset="0"/>
+                        <a:cs typeface="Arial" charset="0"/>
+                      </a:endParaRPr>
+                    </a:p>
+                  </a:txBody>
+                  <a:tcPr marL="63500" marR="63500" marT="63500" marB="63500" anchor="ctr">
+                    <a:lnL w="6350" cap="flat" cmpd="sng" algn="ctr">
+                      <a:solidFill>
+                        <a:srgbClr val="D9E2DB"/>
+                      </a:solidFill>
+                      <a:prstDash val="solid"/>
+                      <a:round/>
+                      <a:headEnd type="none" w="med" len="med"/>
+                      <a:tailEnd type="none" w="med" len="med"/>
+                    </a:lnL>
+                    <a:lnR w="6350" cap="flat" cmpd="sng" algn="ctr">
+                      <a:solidFill>
+                        <a:srgbClr val="D9E2DB"/>
+                      </a:solidFill>
+                      <a:prstDash val="solid"/>
+                      <a:round/>
+                      <a:headEnd type="none" w="med" len="med"/>
+                      <a:tailEnd type="none" w="med" len="med"/>
+                    </a:lnR>
+                    <a:lnT w="6350" cap="flat" cmpd="sng" algn="ctr">
+                      <a:solidFill>
+                        <a:srgbClr val="D9E2DB"/>
+                      </a:solidFill>
+                      <a:prstDash val="solid"/>
+                      <a:round/>
+                      <a:headEnd type="none" w="med" len="med"/>
+                      <a:tailEnd type="none" w="med" len="med"/>
+                    </a:lnT>
+                    <a:lnB w="6350" cap="flat" cmpd="sng" algn="ctr">
+                      <a:solidFill>
+                        <a:srgbClr val="D9E2DB"/>
+                      </a:solidFill>
+                      <a:prstDash val="solid"/>
+                      <a:round/>
+                      <a:headEnd type="none" w="med" len="med"/>
+                      <a:tailEnd type="none" w="med" len="med"/>
+                    </a:lnB>
+                    <a:solidFill>
+                      <a:srgbClr val="FFFFFF"/>
+                    </a:solidFill>
+                  </a:tcPr>
+                </a:tc>
+              </a:tr>
+              <a:tr h="0">
+                <a:tc>
+                  <a:txBody>
+                    <a:bodyPr/>
+                    <a:lstStyle/>
+                    <a:p>
+                      <a:pPr indent="0" marL="0">
+                        <a:buNone/>
+                      </a:pPr>
+                      <a:r>
+                        <a:rPr lang="en-US" sz="1150" dirty="0">
+                          <a:solidFill>
+                            <a:srgbClr val="1B1B1E"/>
+                          </a:solidFill>
+                          <a:latin typeface="Arial" pitchFamily="34" charset="0"/>
+                          <a:ea typeface="Arial" pitchFamily="34" charset="-122"/>
+                          <a:cs typeface="Arial" pitchFamily="34" charset="-120"/>
+                        </a:rPr>
+                        <a:t>LLENAR el Aviso</a:t>
+                      </a:r>
+                      <a:endParaRPr lang="en-US" sz="1150" dirty="0">
+                        <a:latin typeface="Arial" charset="0"/>
+                        <a:ea typeface="Arial" charset="0"/>
+                        <a:cs typeface="Arial" charset="0"/>
+                      </a:endParaRPr>
+                    </a:p>
+                  </a:txBody>
+                  <a:tcPr marL="63500" marR="63500" marT="63500" marB="63500" anchor="ctr">
+                    <a:lnL w="6350" cap="flat" cmpd="sng" algn="ctr">
+                      <a:solidFill>
+                        <a:srgbClr val="D9E2DB"/>
+                      </a:solidFill>
+                      <a:prstDash val="solid"/>
+                      <a:round/>
+                      <a:headEnd type="none" w="med" len="med"/>
+                      <a:tailEnd type="none" w="med" len="med"/>
+                    </a:lnL>
+                    <a:lnR w="6350" cap="flat" cmpd="sng" algn="ctr">
+                      <a:solidFill>
+                        <a:srgbClr val="D9E2DB"/>
+                      </a:solidFill>
+                      <a:prstDash val="solid"/>
+                      <a:round/>
+                      <a:headEnd type="none" w="med" len="med"/>
+                      <a:tailEnd type="none" w="med" len="med"/>
+                    </a:lnR>
+                    <a:lnT w="6350" cap="flat" cmpd="sng" algn="ctr">
+                      <a:solidFill>
+                        <a:srgbClr val="D9E2DB"/>
+                      </a:solidFill>
+                      <a:prstDash val="solid"/>
+                      <a:round/>
+                      <a:headEnd type="none" w="med" len="med"/>
+                      <a:tailEnd type="none" w="med" len="med"/>
+                    </a:lnT>
+                    <a:lnB w="6350" cap="flat" cmpd="sng" algn="ctr">
+                      <a:solidFill>
+                        <a:srgbClr val="D9E2DB"/>
+                      </a:solidFill>
+                      <a:prstDash val="solid"/>
+                      <a:round/>
+                      <a:headEnd type="none" w="med" len="med"/>
+                      <a:tailEnd type="none" w="med" len="med"/>
+                    </a:lnB>
+                    <a:solidFill>
+                      <a:srgbClr val="EEF4EF"/>
+                    </a:solidFill>
+                  </a:tcPr>
+                </a:tc>
+                <a:tc>
+                  <a:txBody>
+                    <a:bodyPr/>
+                    <a:lstStyle/>
+                    <a:p>
+                      <a:pPr indent="0" marL="0">
+                        <a:buNone/>
+                      </a:pPr>
+                      <a:r>
+                        <a:rPr lang="en-US" sz="1150" dirty="0">
+                          <a:solidFill>
+                            <a:srgbClr val="1B1B1E"/>
+                          </a:solidFill>
+                          <a:latin typeface="Arial" pitchFamily="34" charset="0"/>
+                          <a:ea typeface="Arial" pitchFamily="34" charset="-122"/>
+                          <a:cs typeface="Arial" pitchFamily="34" charset="-120"/>
+                        </a:rPr>
+                        <a:t>SÍ. Se reporta el total de los pagos recibidos, sin desglosar</a:t>
+                      </a:r>
+                      <a:endParaRPr lang="en-US" sz="1150" dirty="0">
+                        <a:latin typeface="Arial" charset="0"/>
+                        <a:ea typeface="Arial" charset="0"/>
+                        <a:cs typeface="Arial" charset="0"/>
+                      </a:endParaRPr>
+                    </a:p>
+                  </a:txBody>
+                  <a:tcPr marL="63500" marR="63500" marT="63500" marB="63500" anchor="ctr">
+                    <a:lnL w="6350" cap="flat" cmpd="sng" algn="ctr">
+                      <a:solidFill>
+                        <a:srgbClr val="D9E2DB"/>
+                      </a:solidFill>
+                      <a:prstDash val="solid"/>
+                      <a:round/>
+                      <a:headEnd type="none" w="med" len="med"/>
+                      <a:tailEnd type="none" w="med" len="med"/>
+                    </a:lnL>
+                    <a:lnR w="6350" cap="flat" cmpd="sng" algn="ctr">
+                      <a:solidFill>
+                        <a:srgbClr val="D9E2DB"/>
+                      </a:solidFill>
+                      <a:prstDash val="solid"/>
+                      <a:round/>
+                      <a:headEnd type="none" w="med" len="med"/>
+                      <a:tailEnd type="none" w="med" len="med"/>
+                    </a:lnR>
+                    <a:lnT w="6350" cap="flat" cmpd="sng" algn="ctr">
+                      <a:solidFill>
+                        <a:srgbClr val="D9E2DB"/>
+                      </a:solidFill>
+                      <a:prstDash val="solid"/>
+                      <a:round/>
+                      <a:headEnd type="none" w="med" len="med"/>
+                      <a:tailEnd type="none" w="med" len="med"/>
+                    </a:lnT>
+                    <a:lnB w="6350" cap="flat" cmpd="sng" algn="ctr">
+                      <a:solidFill>
+                        <a:srgbClr val="D9E2DB"/>
+                      </a:solidFill>
+                      <a:prstDash val="solid"/>
+                      <a:round/>
+                      <a:headEnd type="none" w="med" len="med"/>
+                      <a:tailEnd type="none" w="med" len="med"/>
+                    </a:lnB>
+                    <a:solidFill>
+                      <a:srgbClr val="EEF4EF"/>
+                    </a:solidFill>
+                  </a:tcPr>
+                </a:tc>
+                <a:tc>
+                  <a:txBody>
+                    <a:bodyPr/>
+                    <a:lstStyle/>
+                    <a:p>
+                      <a:pPr indent="0" marL="0">
+                        <a:buNone/>
+                      </a:pPr>
+                      <a:r>
+                        <a:rPr lang="en-US" sz="1150" dirty="0">
+                          <a:solidFill>
+                            <a:srgbClr val="1B1B1E"/>
+                          </a:solidFill>
+                          <a:latin typeface="Arial" pitchFamily="34" charset="0"/>
+                          <a:ea typeface="Arial" pitchFamily="34" charset="-122"/>
+                          <a:cs typeface="Arial" pitchFamily="34" charset="-120"/>
+                        </a:rPr>
+                        <a:t>R 6, primer párrafo, segunda parte</a:t>
+                      </a:r>
+                      <a:endParaRPr lang="en-US" sz="1150" dirty="0">
+                        <a:latin typeface="Arial" charset="0"/>
+                        <a:ea typeface="Arial" charset="0"/>
+                        <a:cs typeface="Arial" charset="0"/>
+                      </a:endParaRPr>
+                    </a:p>
+                  </a:txBody>
+                  <a:tcPr marL="63500" marR="63500" marT="63500" marB="63500" anchor="ctr">
+                    <a:lnL w="6350" cap="flat" cmpd="sng" algn="ctr">
+                      <a:solidFill>
+                        <a:srgbClr val="D9E2DB"/>
+                      </a:solidFill>
+                      <a:prstDash val="solid"/>
+                      <a:round/>
+                      <a:headEnd type="none" w="med" len="med"/>
+                      <a:tailEnd type="none" w="med" len="med"/>
+                    </a:lnL>
+                    <a:lnR w="6350" cap="flat" cmpd="sng" algn="ctr">
+                      <a:solidFill>
+                        <a:srgbClr val="D9E2DB"/>
+                      </a:solidFill>
+                      <a:prstDash val="solid"/>
+                      <a:round/>
+                      <a:headEnd type="none" w="med" len="med"/>
+                      <a:tailEnd type="none" w="med" len="med"/>
+                    </a:lnR>
+                    <a:lnT w="6350" cap="flat" cmpd="sng" algn="ctr">
+                      <a:solidFill>
+                        <a:srgbClr val="D9E2DB"/>
+                      </a:solidFill>
+                      <a:prstDash val="solid"/>
+                      <a:round/>
+                      <a:headEnd type="none" w="med" len="med"/>
+                      <a:tailEnd type="none" w="med" len="med"/>
+                    </a:lnT>
+                    <a:lnB w="6350" cap="flat" cmpd="sng" algn="ctr">
+                      <a:solidFill>
+                        <a:srgbClr val="D9E2DB"/>
+                      </a:solidFill>
+                      <a:prstDash val="solid"/>
+                      <a:round/>
+                      <a:headEnd type="none" w="med" len="med"/>
+                      <a:tailEnd type="none" w="med" len="med"/>
+                    </a:lnB>
+                    <a:solidFill>
+                      <a:srgbClr val="EEF4EF"/>
+                    </a:solidFill>
+                  </a:tcPr>
+                </a:tc>
+              </a:tr>
+              <a:tr h="0">
+                <a:tc>
+                  <a:txBody>
+                    <a:bodyPr/>
+                    <a:lstStyle/>
+                    <a:p>
+                      <a:pPr indent="0" marL="0">
+                        <a:buNone/>
+                      </a:pPr>
+                      <a:r>
+                        <a:rPr lang="en-US" sz="1150" dirty="0">
+                          <a:solidFill>
+                            <a:srgbClr val="1B1B1E"/>
+                          </a:solidFill>
+                          <a:latin typeface="Arial" pitchFamily="34" charset="0"/>
+                          <a:ea typeface="Arial" pitchFamily="34" charset="-122"/>
+                          <a:cs typeface="Arial" pitchFamily="34" charset="-120"/>
+                        </a:rPr>
+                        <a:t>Saber si está PROHIBIDO EL EFECTIVO (artículo 32)</a:t>
+                      </a:r>
+                      <a:endParaRPr lang="en-US" sz="1150" dirty="0">
+                        <a:latin typeface="Arial" charset="0"/>
+                        <a:ea typeface="Arial" charset="0"/>
+                        <a:cs typeface="Arial" charset="0"/>
+                      </a:endParaRPr>
+                    </a:p>
+                  </a:txBody>
+                  <a:tcPr marL="63500" marR="63500" marT="63500" marB="63500" anchor="ctr">
+                    <a:lnL w="6350" cap="flat" cmpd="sng" algn="ctr">
+                      <a:solidFill>
+                        <a:srgbClr val="D9E2DB"/>
+                      </a:solidFill>
+                      <a:prstDash val="solid"/>
+                      <a:round/>
+                      <a:headEnd type="none" w="med" len="med"/>
+                      <a:tailEnd type="none" w="med" len="med"/>
+                    </a:lnL>
+                    <a:lnR w="6350" cap="flat" cmpd="sng" algn="ctr">
+                      <a:solidFill>
+                        <a:srgbClr val="D9E2DB"/>
+                      </a:solidFill>
+                      <a:prstDash val="solid"/>
+                      <a:round/>
+                      <a:headEnd type="none" w="med" len="med"/>
+                      <a:tailEnd type="none" w="med" len="med"/>
+                    </a:lnR>
+                    <a:lnT w="6350" cap="flat" cmpd="sng" algn="ctr">
+                      <a:solidFill>
+                        <a:srgbClr val="D9E2DB"/>
+                      </a:solidFill>
+                      <a:prstDash val="solid"/>
+                      <a:round/>
+                      <a:headEnd type="none" w="med" len="med"/>
+                      <a:tailEnd type="none" w="med" len="med"/>
+                    </a:lnT>
+                    <a:lnB w="6350" cap="flat" cmpd="sng" algn="ctr">
+                      <a:solidFill>
+                        <a:srgbClr val="D9E2DB"/>
+                      </a:solidFill>
+                      <a:prstDash val="solid"/>
+                      <a:round/>
+                      <a:headEnd type="none" w="med" len="med"/>
+                      <a:tailEnd type="none" w="med" len="med"/>
+                    </a:lnB>
+                    <a:solidFill>
+                      <a:srgbClr val="FFFFFF"/>
+                    </a:solidFill>
+                  </a:tcPr>
+                </a:tc>
+                <a:tc>
+                  <a:txBody>
+                    <a:bodyPr/>
+                    <a:lstStyle/>
+                    <a:p>
+                      <a:pPr indent="0" marL="0">
+                        <a:buNone/>
+                      </a:pPr>
+                      <a:r>
+                        <a:rPr lang="en-US" sz="1150" dirty="0">
+                          <a:solidFill>
+                            <a:srgbClr val="1B1B1E"/>
+                          </a:solidFill>
+                          <a:latin typeface="Arial" pitchFamily="34" charset="0"/>
+                          <a:ea typeface="Arial" pitchFamily="34" charset="-122"/>
+                          <a:cs typeface="Arial" pitchFamily="34" charset="-120"/>
+                        </a:rPr>
+                        <a:t>SÍ. Con contribuciones y accesorios</a:t>
+                      </a:r>
+                      <a:endParaRPr lang="en-US" sz="1150" dirty="0">
+                        <a:latin typeface="Arial" charset="0"/>
+                        <a:ea typeface="Arial" charset="0"/>
+                        <a:cs typeface="Arial" charset="0"/>
+                      </a:endParaRPr>
+                    </a:p>
+                  </a:txBody>
+                  <a:tcPr marL="63500" marR="63500" marT="63500" marB="63500" anchor="ctr">
+                    <a:lnL w="6350" cap="flat" cmpd="sng" algn="ctr">
+                      <a:solidFill>
+                        <a:srgbClr val="D9E2DB"/>
+                      </a:solidFill>
+                      <a:prstDash val="solid"/>
+                      <a:round/>
+                      <a:headEnd type="none" w="med" len="med"/>
+                      <a:tailEnd type="none" w="med" len="med"/>
+                    </a:lnL>
+                    <a:lnR w="6350" cap="flat" cmpd="sng" algn="ctr">
+                      <a:solidFill>
+                        <a:srgbClr val="D9E2DB"/>
+                      </a:solidFill>
+                      <a:prstDash val="solid"/>
+                      <a:round/>
+                      <a:headEnd type="none" w="med" len="med"/>
+                      <a:tailEnd type="none" w="med" len="med"/>
+                    </a:lnR>
+                    <a:lnT w="6350" cap="flat" cmpd="sng" algn="ctr">
+                      <a:solidFill>
+                        <a:srgbClr val="D9E2DB"/>
+                      </a:solidFill>
+                      <a:prstDash val="solid"/>
+                      <a:round/>
+                      <a:headEnd type="none" w="med" len="med"/>
+                      <a:tailEnd type="none" w="med" len="med"/>
+                    </a:lnT>
+                    <a:lnB w="6350" cap="flat" cmpd="sng" algn="ctr">
+                      <a:solidFill>
+                        <a:srgbClr val="D9E2DB"/>
+                      </a:solidFill>
+                      <a:prstDash val="solid"/>
+                      <a:round/>
+                      <a:headEnd type="none" w="med" len="med"/>
+                      <a:tailEnd type="none" w="med" len="med"/>
+                    </a:lnB>
+                    <a:solidFill>
+                      <a:srgbClr val="FFFFFF"/>
+                    </a:solidFill>
+                  </a:tcPr>
+                </a:tc>
+                <a:tc>
+                  <a:txBody>
+                    <a:bodyPr/>
+                    <a:lstStyle/>
+                    <a:p>
+                      <a:pPr indent="0" marL="0">
+                        <a:buNone/>
+                      </a:pPr>
+                      <a:r>
+                        <a:rPr lang="en-US" sz="1150" dirty="0">
+                          <a:solidFill>
+                            <a:srgbClr val="1B1B1E"/>
+                          </a:solidFill>
+                          <a:latin typeface="Arial" pitchFamily="34" charset="0"/>
+                          <a:ea typeface="Arial" pitchFamily="34" charset="-122"/>
+                          <a:cs typeface="Arial" pitchFamily="34" charset="-120"/>
+                        </a:rPr>
+                        <a:t>R 6, tercer párrafo</a:t>
+                      </a:r>
+                      <a:endParaRPr lang="en-US" sz="1150" dirty="0">
+                        <a:latin typeface="Arial" charset="0"/>
+                        <a:ea typeface="Arial" charset="0"/>
+                        <a:cs typeface="Arial" charset="0"/>
+                      </a:endParaRPr>
+                    </a:p>
+                  </a:txBody>
+                  <a:tcPr marL="63500" marR="63500" marT="63500" marB="63500" anchor="ctr">
+                    <a:lnL w="6350" cap="flat" cmpd="sng" algn="ctr">
+                      <a:solidFill>
+                        <a:srgbClr val="D9E2DB"/>
+                      </a:solidFill>
+                      <a:prstDash val="solid"/>
+                      <a:round/>
+                      <a:headEnd type="none" w="med" len="med"/>
+                      <a:tailEnd type="none" w="med" len="med"/>
+                    </a:lnL>
+                    <a:lnR w="6350" cap="flat" cmpd="sng" algn="ctr">
+                      <a:solidFill>
+                        <a:srgbClr val="D9E2DB"/>
+                      </a:solidFill>
+                      <a:prstDash val="solid"/>
+                      <a:round/>
+                      <a:headEnd type="none" w="med" len="med"/>
+                      <a:tailEnd type="none" w="med" len="med"/>
+                    </a:lnR>
+                    <a:lnT w="6350" cap="flat" cmpd="sng" algn="ctr">
+                      <a:solidFill>
+                        <a:srgbClr val="D9E2DB"/>
+                      </a:solidFill>
+                      <a:prstDash val="solid"/>
+                      <a:round/>
+                      <a:headEnd type="none" w="med" len="med"/>
+                      <a:tailEnd type="none" w="med" len="med"/>
+                    </a:lnT>
+                    <a:lnB w="6350" cap="flat" cmpd="sng" algn="ctr">
+                      <a:solidFill>
+                        <a:srgbClr val="D9E2DB"/>
+                      </a:solidFill>
+                      <a:prstDash val="solid"/>
+                      <a:round/>
+                      <a:headEnd type="none" w="med" len="med"/>
+                      <a:tailEnd type="none" w="med" len="med"/>
+                    </a:lnB>
+                    <a:solidFill>
+                      <a:srgbClr val="FFFFFF"/>
+                    </a:solidFill>
+                  </a:tcPr>
+                </a:tc>
+              </a:tr>
+            </a:tbl>
+          </a:graphicData>
+        </a:graphic>
+      </p:graphicFrame>
+      <p:sp>
+        <p:nvSpPr>
+          <p:cNvPr id="10" name="Shape 7"/>
           <p:cNvSpPr/>
           <p:nvPr/>
         </p:nvSpPr>
         <p:spPr>
           <a:xfrm>
-            <a:off x="502920" y="1920240"/>
-            <a:ext cx="3931920" cy="1463040"/>
-          </a:xfrm>
-          <a:prstGeom prst="roundRect">
-            <a:avLst>
-              <a:gd name="adj" fmla="val 5000"/>
-            </a:avLst>
-          </a:prstGeom>
-          <a:solidFill>
-            <a:srgbClr val="FFFFFF"/>
-          </a:solidFill>
-          <a:ln w="9525">
-            <a:solidFill>
-              <a:srgbClr val="DCE6DE"/>
-            </a:solidFill>
-            <a:prstDash val="solid"/>
-          </a:ln>
-        </p:spPr>
-      </p:sp>
-      <p:sp>
-        <p:nvSpPr>
-          <p:cNvPr id="10" name="Text 8"/>
-          <p:cNvSpPr txBox="1"/>
-          <p:nvPr/>
-        </p:nvSpPr>
-        <p:spPr>
-          <a:xfrm>
-            <a:off x="685800" y="2066544"/>
-            <a:ext cx="3566160" cy="658368"/>
-          </a:xfrm>
-          <a:prstGeom prst="rect">
-            <a:avLst/>
-          </a:prstGeom>
-          <a:noFill/>
-          <a:ln/>
-        </p:spPr>
-        <p:txBody>
-          <a:bodyPr wrap="square" lIns="0" tIns="0" rIns="0" bIns="0" rtlCol="0" anchor="ctr"/>
-          <a:lstStyle/>
-          <a:p>
-            <a:pPr indent="0" marL="0">
-              <a:buNone/>
-            </a:pPr>
-            <a:r>
-              <a:rPr lang="en-US" sz="3000" b="1" dirty="0">
-                <a:solidFill>
-                  <a:srgbClr val="2E7D4F"/>
-                </a:solidFill>
-                <a:latin typeface="Arial" pitchFamily="34" charset="0"/>
-                <a:ea typeface="Arial" pitchFamily="34" charset="-122"/>
-                <a:cs typeface="Arial" pitchFamily="34" charset="-120"/>
-              </a:rPr>
-              <a:t>$340,000</a:t>
-            </a:r>
-            <a:endParaRPr lang="en-US" sz="3000" dirty="0"/>
-          </a:p>
-        </p:txBody>
-      </p:sp>
-      <p:sp>
-        <p:nvSpPr>
-          <p:cNvPr id="11" name="Text 9"/>
-          <p:cNvSpPr txBox="1"/>
-          <p:nvPr/>
-        </p:nvSpPr>
-        <p:spPr>
-          <a:xfrm>
-            <a:off x="685800" y="2761488"/>
-            <a:ext cx="3566160" cy="512064"/>
-          </a:xfrm>
-          <a:prstGeom prst="rect">
-            <a:avLst/>
-          </a:prstGeom>
-          <a:noFill/>
-          <a:ln/>
-        </p:spPr>
-        <p:txBody>
-          <a:bodyPr wrap="square" lIns="0" tIns="0" rIns="0" bIns="0" rtlCol="0" anchor="t"/>
-          <a:lstStyle/>
-          <a:p>
-            <a:pPr indent="0" marL="0">
-              <a:buNone/>
-            </a:pPr>
-            <a:r>
-              <a:rPr lang="en-US" sz="1100" dirty="0">
-                <a:solidFill>
-                  <a:srgbClr val="4D4D4D"/>
-                </a:solidFill>
-                <a:latin typeface="Arial" pitchFamily="34" charset="0"/>
-                <a:ea typeface="Arial" pitchFamily="34" charset="-122"/>
-                <a:cs typeface="Arial" pitchFamily="34" charset="-120"/>
-              </a:rPr>
-              <a:t>BASE 1 · para identificar y avisar (sin IVA)</a:t>
-            </a:r>
-            <a:endParaRPr lang="en-US" sz="1100" dirty="0"/>
-          </a:p>
-          <a:p>
-            <a:pPr indent="0" marL="0">
-              <a:buNone/>
-            </a:pPr>
-            <a:r>
-              <a:rPr lang="en-US" sz="1100" dirty="0">
-                <a:solidFill>
-                  <a:srgbClr val="4D4D4D"/>
-                </a:solidFill>
-                <a:latin typeface="Arial" pitchFamily="34" charset="0"/>
-                <a:ea typeface="Arial" pitchFamily="34" charset="-122"/>
-                <a:cs typeface="Arial" pitchFamily="34" charset="-120"/>
-              </a:rPr>
-              <a:t>Umbral de identificación de la fracción VIII: $376,565.10</a:t>
-            </a:r>
-            <a:endParaRPr lang="en-US" sz="1100" dirty="0"/>
-          </a:p>
-          <a:p>
-            <a:pPr indent="0" marL="0">
-              <a:buNone/>
-            </a:pPr>
-            <a:r>
-              <a:rPr lang="en-US" sz="1100" dirty="0">
-                <a:solidFill>
-                  <a:srgbClr val="4D4D4D"/>
-                </a:solidFill>
-                <a:latin typeface="Arial" pitchFamily="34" charset="0"/>
-                <a:ea typeface="Arial" pitchFamily="34" charset="-122"/>
-                <a:cs typeface="Arial" pitchFamily="34" charset="-120"/>
-              </a:rPr>
-              <a:t>ESTÁ POR DEBAJO. No nace la obligación por esa vía</a:t>
-            </a:r>
-            <a:endParaRPr lang="en-US" sz="1100" dirty="0"/>
-          </a:p>
-        </p:txBody>
-      </p:sp>
-      <p:sp>
-        <p:nvSpPr>
-          <p:cNvPr id="12" name="Shape 10"/>
-          <p:cNvSpPr/>
-          <p:nvPr/>
-        </p:nvSpPr>
-        <p:spPr>
-          <a:xfrm>
-            <a:off x="4709160" y="1920240"/>
-            <a:ext cx="3931920" cy="1463040"/>
-          </a:xfrm>
-          <a:prstGeom prst="roundRect">
-            <a:avLst>
-              <a:gd name="adj" fmla="val 5000"/>
-            </a:avLst>
-          </a:prstGeom>
-          <a:solidFill>
-            <a:srgbClr val="FFFFFF"/>
-          </a:solidFill>
-          <a:ln w="9525">
-            <a:solidFill>
-              <a:srgbClr val="DCE6DE"/>
-            </a:solidFill>
-            <a:prstDash val="solid"/>
-          </a:ln>
-        </p:spPr>
-      </p:sp>
-      <p:sp>
-        <p:nvSpPr>
-          <p:cNvPr id="13" name="Text 11"/>
-          <p:cNvSpPr txBox="1"/>
-          <p:nvPr/>
-        </p:nvSpPr>
-        <p:spPr>
-          <a:xfrm>
-            <a:off x="4892040" y="2066544"/>
-            <a:ext cx="3566160" cy="658368"/>
-          </a:xfrm>
-          <a:prstGeom prst="rect">
-            <a:avLst/>
-          </a:prstGeom>
-          <a:noFill/>
-          <a:ln/>
-        </p:spPr>
-        <p:txBody>
-          <a:bodyPr wrap="square" lIns="0" tIns="0" rIns="0" bIns="0" rtlCol="0" anchor="ctr"/>
-          <a:lstStyle/>
-          <a:p>
-            <a:pPr indent="0" marL="0">
-              <a:buNone/>
-            </a:pPr>
-            <a:r>
-              <a:rPr lang="en-US" sz="3000" b="1" dirty="0">
-                <a:solidFill>
-                  <a:srgbClr val="B3261E"/>
-                </a:solidFill>
-                <a:latin typeface="Arial" pitchFamily="34" charset="0"/>
-                <a:ea typeface="Arial" pitchFamily="34" charset="-122"/>
-                <a:cs typeface="Arial" pitchFamily="34" charset="-120"/>
-              </a:rPr>
-              <a:t>$394,400</a:t>
-            </a:r>
-            <a:endParaRPr lang="en-US" sz="3000" dirty="0"/>
-          </a:p>
-        </p:txBody>
-      </p:sp>
-      <p:sp>
-        <p:nvSpPr>
-          <p:cNvPr id="14" name="Text 12"/>
-          <p:cNvSpPr txBox="1"/>
-          <p:nvPr/>
-        </p:nvSpPr>
-        <p:spPr>
-          <a:xfrm>
-            <a:off x="4892040" y="2761488"/>
-            <a:ext cx="3566160" cy="512064"/>
-          </a:xfrm>
-          <a:prstGeom prst="rect">
-            <a:avLst/>
-          </a:prstGeom>
-          <a:noFill/>
-          <a:ln/>
-        </p:spPr>
-        <p:txBody>
-          <a:bodyPr wrap="square" lIns="0" tIns="0" rIns="0" bIns="0" rtlCol="0" anchor="t"/>
-          <a:lstStyle/>
-          <a:p>
-            <a:pPr indent="0" marL="0">
-              <a:buNone/>
-            </a:pPr>
-            <a:r>
-              <a:rPr lang="en-US" sz="1100" dirty="0">
-                <a:solidFill>
-                  <a:srgbClr val="4D4D4D"/>
-                </a:solidFill>
-                <a:latin typeface="Arial" pitchFamily="34" charset="0"/>
-                <a:ea typeface="Arial" pitchFamily="34" charset="-122"/>
-                <a:cs typeface="Arial" pitchFamily="34" charset="-120"/>
-              </a:rPr>
-              <a:t>BASE 3 · para el tope de efectivo (con IVA)</a:t>
-            </a:r>
-            <a:endParaRPr lang="en-US" sz="1100" dirty="0"/>
-          </a:p>
-          <a:p>
-            <a:pPr indent="0" marL="0">
-              <a:buNone/>
-            </a:pPr>
-            <a:r>
-              <a:rPr lang="en-US" sz="1100" dirty="0">
-                <a:solidFill>
-                  <a:srgbClr val="4D4D4D"/>
-                </a:solidFill>
-                <a:latin typeface="Arial" pitchFamily="34" charset="0"/>
-                <a:ea typeface="Arial" pitchFamily="34" charset="-122"/>
-                <a:cs typeface="Arial" pitchFamily="34" charset="-120"/>
-              </a:rPr>
-              <a:t>Tope del artículo 32, fracción II: $376,565.10</a:t>
-            </a:r>
-            <a:endParaRPr lang="en-US" sz="1100" dirty="0"/>
-          </a:p>
-          <a:p>
-            <a:pPr indent="0" marL="0">
-              <a:buNone/>
-            </a:pPr>
-            <a:r>
-              <a:rPr lang="en-US" sz="1100" dirty="0">
-                <a:solidFill>
-                  <a:srgbClr val="4D4D4D"/>
-                </a:solidFill>
-                <a:latin typeface="Arial" pitchFamily="34" charset="0"/>
-                <a:ea typeface="Arial" pitchFamily="34" charset="-122"/>
-                <a:cs typeface="Arial" pitchFamily="34" charset="-120"/>
-              </a:rPr>
-              <a:t>ESTÁ POR ENCIMA. Pagarlo en efectivo está prohibido</a:t>
-            </a:r>
-            <a:endParaRPr lang="en-US" sz="1100" dirty="0"/>
-          </a:p>
-        </p:txBody>
-      </p:sp>
-      <p:sp>
-        <p:nvSpPr>
-          <p:cNvPr id="15" name="Shape 13"/>
-          <p:cNvSpPr/>
-          <p:nvPr/>
-        </p:nvSpPr>
-        <p:spPr>
-          <a:xfrm>
-            <a:off x="502920" y="3703320"/>
+            <a:off x="502920" y="3977640"/>
             <a:ext cx="8138160" cy="640080"/>
           </a:xfrm>
           <a:prstGeom prst="roundRect">
@@ -39000,13 +39772,13 @@
       </p:sp>
       <p:sp>
         <p:nvSpPr>
-          <p:cNvPr id="16" name="Text 14"/>
+          <p:cNvPr id="11" name="Text 8"/>
           <p:cNvSpPr txBox="1"/>
           <p:nvPr/>
         </p:nvSpPr>
         <p:spPr>
           <a:xfrm>
-            <a:off x="731520" y="3721608"/>
+            <a:off x="731520" y="3995928"/>
             <a:ext cx="7680960" cy="603504"/>
           </a:xfrm>
           <a:prstGeom prst="rect">
@@ -39031,7 +39803,7 @@
                 <a:ea typeface="Arial" pitchFamily="34" charset="-122"/>
                 <a:cs typeface="Arial" pitchFamily="34" charset="-120"/>
               </a:rPr>
-              <a:t>El mismo coche, el mismo día, el mismo cliente. Y la diferencia entre las dos respuestas es un impuesto.</a:t>
+              <a:t>Y para comercio exterior hay una cuarta: el valor en aduana de las mercancías. · R 6, segundo párrafo</a:t>
             </a:r>
             <a:endParaRPr lang="en-US" sz="1200" dirty="0"/>
           </a:p>
@@ -39259,7 +40031,7 @@
                 <a:ea typeface="Arial" pitchFamily="34" charset="-122"/>
                 <a:cs typeface="Arial" pitchFamily="34" charset="-120"/>
               </a:rPr>
-              <a:t>CIERRE</a:t>
+              <a:t>EL CASO QUE SE VAN A LLEVAR</a:t>
             </a:r>
             <a:endParaRPr lang="en-US" sz="1100" dirty="0"/>
           </a:p>
@@ -39298,7 +40070,7 @@
                 <a:ea typeface="Arial" pitchFamily="34" charset="-122"/>
                 <a:cs typeface="Arial" pitchFamily="34" charset="-120"/>
               </a:rPr>
-              <a:t>La tarea, cuatro cosas</a:t>
+              <a:t>Un coche de $340,000 más IVA</a:t>
             </a:r>
             <a:endParaRPr lang="en-US" sz="2700" dirty="0"/>
           </a:p>
@@ -39312,12 +40084,12 @@
         </p:nvSpPr>
         <p:spPr>
           <a:xfrm>
-            <a:off x="502920" y="1828800"/>
-            <a:ext cx="3968496" cy="1335024"/>
+            <a:off x="502920" y="1920240"/>
+            <a:ext cx="3931920" cy="1463040"/>
           </a:xfrm>
           <a:prstGeom prst="roundRect">
             <a:avLst>
-              <a:gd name="adj" fmla="val 4110"/>
+              <a:gd name="adj" fmla="val 5000"/>
             </a:avLst>
           </a:prstGeom>
           <a:solidFill>
@@ -39333,23 +40105,42 @@
       </p:sp>
       <p:sp>
         <p:nvSpPr>
-          <p:cNvPr id="10" name="Shape 8"/>
-          <p:cNvSpPr/>
-          <p:nvPr/>
-        </p:nvSpPr>
-        <p:spPr>
-          <a:xfrm>
-            <a:off x="649224" y="1975104"/>
-            <a:ext cx="274320" cy="274320"/>
-          </a:xfrm>
-          <a:prstGeom prst="ellipse">
-            <a:avLst/>
-          </a:prstGeom>
-          <a:solidFill>
-            <a:srgbClr val="87D895"/>
-          </a:solidFill>
-          <a:ln/>
-        </p:spPr>
+          <p:cNvPr id="10" name="Text 8"/>
+          <p:cNvSpPr txBox="1"/>
+          <p:nvPr/>
+        </p:nvSpPr>
+        <p:spPr>
+          <a:xfrm>
+            <a:off x="685800" y="2066544"/>
+            <a:ext cx="3566160" cy="658368"/>
+          </a:xfrm>
+          <a:prstGeom prst="rect">
+            <a:avLst/>
+          </a:prstGeom>
+          <a:noFill/>
+          <a:ln/>
+        </p:spPr>
+        <p:txBody>
+          <a:bodyPr wrap="square" lIns="0" tIns="0" rIns="0" bIns="0" rtlCol="0" anchor="ctr"/>
+          <a:lstStyle/>
+          <a:p>
+            <a:pPr indent="0" marL="0">
+              <a:buNone/>
+            </a:pPr>
+            <a:r>
+              <a:rPr lang="en-US" sz="3000" b="1" dirty="0">
+                <a:solidFill>
+                  <a:srgbClr val="2E7D4F"/>
+                </a:solidFill>
+                <a:latin typeface="Arial" pitchFamily="34" charset="0"/>
+                <a:ea typeface="Arial" pitchFamily="34" charset="-122"/>
+                <a:cs typeface="Arial" pitchFamily="34" charset="-120"/>
+              </a:rPr>
+              <a:t>$340,000</a:t>
+            </a:r>
+            <a:endParaRPr lang="en-US" sz="3000" dirty="0"/>
+          </a:p>
+        </p:txBody>
       </p:sp>
       <p:sp>
         <p:nvSpPr>
@@ -39359,47 +40150,8 @@
         </p:nvSpPr>
         <p:spPr>
           <a:xfrm>
-            <a:off x="649224" y="1975104"/>
-            <a:ext cx="274320" cy="274320"/>
-          </a:xfrm>
-          <a:prstGeom prst="rect">
-            <a:avLst/>
-          </a:prstGeom>
-          <a:noFill/>
-          <a:ln/>
-        </p:spPr>
-        <p:txBody>
-          <a:bodyPr wrap="square" lIns="0" tIns="0" rIns="0" bIns="0" rtlCol="0" anchor="ctr"/>
-          <a:lstStyle/>
-          <a:p>
-            <a:pPr algn="ctr" indent="0" marL="0">
-              <a:buNone/>
-            </a:pPr>
-            <a:r>
-              <a:rPr lang="en-US" sz="1100" b="1" dirty="0">
-                <a:solidFill>
-                  <a:srgbClr val="1B1B1E"/>
-                </a:solidFill>
-                <a:latin typeface="Arial" pitchFamily="34" charset="0"/>
-                <a:ea typeface="Arial" pitchFamily="34" charset="-122"/>
-                <a:cs typeface="Arial" pitchFamily="34" charset="-120"/>
-              </a:rPr>
-              <a:t>1</a:t>
-            </a:r>
-            <a:endParaRPr lang="en-US" sz="1100" dirty="0"/>
-          </a:p>
-        </p:txBody>
-      </p:sp>
-      <p:sp>
-        <p:nvSpPr>
-          <p:cNvPr id="12" name="Text 10"/>
-          <p:cNvSpPr txBox="1"/>
-          <p:nvPr/>
-        </p:nvSpPr>
-        <p:spPr>
-          <a:xfrm>
-            <a:off x="1005840" y="1956816"/>
-            <a:ext cx="3310128" cy="329184"/>
+            <a:off x="685800" y="2761488"/>
+            <a:ext cx="3566160" cy="512064"/>
           </a:xfrm>
           <a:prstGeom prst="rect">
             <a:avLst/>
@@ -39415,46 +40167,24 @@
               <a:buNone/>
             </a:pPr>
             <a:r>
-              <a:rPr lang="en-US" sz="1200" b="1" dirty="0">
-                <a:solidFill>
-                  <a:srgbClr val="1B1B1E"/>
-                </a:solidFill>
-                <a:latin typeface="Arial" pitchFamily="34" charset="0"/>
-                <a:ea typeface="Arial" pitchFamily="34" charset="-122"/>
-                <a:cs typeface="Arial" pitchFamily="34" charset="-120"/>
-              </a:rPr>
-              <a:t>1 · El renglón del perfil</a:t>
-            </a:r>
-            <a:endParaRPr lang="en-US" sz="1200" dirty="0"/>
-          </a:p>
-        </p:txBody>
-      </p:sp>
-      <p:sp>
-        <p:nvSpPr>
-          <p:cNvPr id="13" name="Text 11"/>
-          <p:cNvSpPr txBox="1"/>
-          <p:nvPr/>
-        </p:nvSpPr>
-        <p:spPr>
-          <a:xfrm>
-            <a:off x="649224" y="2322576"/>
-            <a:ext cx="3675888" cy="603504"/>
-          </a:xfrm>
-          <a:prstGeom prst="rect">
-            <a:avLst/>
-          </a:prstGeom>
-          <a:noFill/>
-          <a:ln/>
-        </p:spPr>
-        <p:txBody>
-          <a:bodyPr wrap="square" lIns="0" tIns="0" rIns="0" bIns="0" rtlCol="0" anchor="t"/>
-          <a:lstStyle/>
+              <a:rPr lang="en-US" sz="1100" dirty="0">
+                <a:solidFill>
+                  <a:srgbClr val="4D4D4D"/>
+                </a:solidFill>
+                <a:latin typeface="Arial" pitchFamily="34" charset="0"/>
+                <a:ea typeface="Arial" pitchFamily="34" charset="-122"/>
+                <a:cs typeface="Arial" pitchFamily="34" charset="-120"/>
+              </a:rPr>
+              <a:t>BASE 1 · para identificar y avisar (sin IVA)</a:t>
+            </a:r>
+            <a:endParaRPr lang="en-US" sz="1100" dirty="0"/>
+          </a:p>
           <a:p>
             <a:pPr indent="0" marL="0">
               <a:buNone/>
             </a:pPr>
             <a:r>
-              <a:rPr lang="en-US" sz="950" dirty="0">
+              <a:rPr lang="en-US" sz="1100" dirty="0">
                 <a:solidFill>
                   <a:srgbClr val="4D4D4D"/>
                 </a:solidFill>
@@ -39462,26 +40192,43 @@
                 <a:ea typeface="Arial" pitchFamily="34" charset="-122"/>
                 <a:cs typeface="Arial" pitchFamily="34" charset="-120"/>
               </a:rPr>
-              <a:t>Meter el monto máximo mensual estimado al cuestionario de alta. Es de esta semana, no de 2027</a:t>
-            </a:r>
-            <a:endParaRPr lang="en-US" sz="950" dirty="0"/>
-          </a:p>
-        </p:txBody>
-      </p:sp>
-      <p:sp>
-        <p:nvSpPr>
-          <p:cNvPr id="14" name="Shape 12"/>
+              <a:t>Umbral de identificación de la fracción VIII: $376,565.10</a:t>
+            </a:r>
+            <a:endParaRPr lang="en-US" sz="1100" dirty="0"/>
+          </a:p>
+          <a:p>
+            <a:pPr indent="0" marL="0">
+              <a:buNone/>
+            </a:pPr>
+            <a:r>
+              <a:rPr lang="en-US" sz="1100" dirty="0">
+                <a:solidFill>
+                  <a:srgbClr val="4D4D4D"/>
+                </a:solidFill>
+                <a:latin typeface="Arial" pitchFamily="34" charset="0"/>
+                <a:ea typeface="Arial" pitchFamily="34" charset="-122"/>
+                <a:cs typeface="Arial" pitchFamily="34" charset="-120"/>
+              </a:rPr>
+              <a:t>ESTÁ POR DEBAJO. No nace la obligación por esa vía</a:t>
+            </a:r>
+            <a:endParaRPr lang="en-US" sz="1100" dirty="0"/>
+          </a:p>
+        </p:txBody>
+      </p:sp>
+      <p:sp>
+        <p:nvSpPr>
+          <p:cNvPr id="12" name="Shape 10"/>
           <p:cNvSpPr/>
           <p:nvPr/>
         </p:nvSpPr>
         <p:spPr>
           <a:xfrm>
-            <a:off x="4672584" y="1828800"/>
-            <a:ext cx="3968496" cy="1335024"/>
+            <a:off x="4709160" y="1920240"/>
+            <a:ext cx="3931920" cy="1463040"/>
           </a:xfrm>
           <a:prstGeom prst="roundRect">
             <a:avLst>
-              <a:gd name="adj" fmla="val 4110"/>
+              <a:gd name="adj" fmla="val 5000"/>
             </a:avLst>
           </a:prstGeom>
           <a:solidFill>
@@ -39497,478 +40244,125 @@
       </p:sp>
       <p:sp>
         <p:nvSpPr>
+          <p:cNvPr id="13" name="Text 11"/>
+          <p:cNvSpPr txBox="1"/>
+          <p:nvPr/>
+        </p:nvSpPr>
+        <p:spPr>
+          <a:xfrm>
+            <a:off x="4892040" y="2066544"/>
+            <a:ext cx="3566160" cy="658368"/>
+          </a:xfrm>
+          <a:prstGeom prst="rect">
+            <a:avLst/>
+          </a:prstGeom>
+          <a:noFill/>
+          <a:ln/>
+        </p:spPr>
+        <p:txBody>
+          <a:bodyPr wrap="square" lIns="0" tIns="0" rIns="0" bIns="0" rtlCol="0" anchor="ctr"/>
+          <a:lstStyle/>
+          <a:p>
+            <a:pPr indent="0" marL="0">
+              <a:buNone/>
+            </a:pPr>
+            <a:r>
+              <a:rPr lang="en-US" sz="3000" b="1" dirty="0">
+                <a:solidFill>
+                  <a:srgbClr val="B3261E"/>
+                </a:solidFill>
+                <a:latin typeface="Arial" pitchFamily="34" charset="0"/>
+                <a:ea typeface="Arial" pitchFamily="34" charset="-122"/>
+                <a:cs typeface="Arial" pitchFamily="34" charset="-120"/>
+              </a:rPr>
+              <a:t>$394,400</a:t>
+            </a:r>
+            <a:endParaRPr lang="en-US" sz="3000" dirty="0"/>
+          </a:p>
+        </p:txBody>
+      </p:sp>
+      <p:sp>
+        <p:nvSpPr>
+          <p:cNvPr id="14" name="Text 12"/>
+          <p:cNvSpPr txBox="1"/>
+          <p:nvPr/>
+        </p:nvSpPr>
+        <p:spPr>
+          <a:xfrm>
+            <a:off x="4892040" y="2761488"/>
+            <a:ext cx="3566160" cy="512064"/>
+          </a:xfrm>
+          <a:prstGeom prst="rect">
+            <a:avLst/>
+          </a:prstGeom>
+          <a:noFill/>
+          <a:ln/>
+        </p:spPr>
+        <p:txBody>
+          <a:bodyPr wrap="square" lIns="0" tIns="0" rIns="0" bIns="0" rtlCol="0" anchor="t"/>
+          <a:lstStyle/>
+          <a:p>
+            <a:pPr indent="0" marL="0">
+              <a:buNone/>
+            </a:pPr>
+            <a:r>
+              <a:rPr lang="en-US" sz="1100" dirty="0">
+                <a:solidFill>
+                  <a:srgbClr val="4D4D4D"/>
+                </a:solidFill>
+                <a:latin typeface="Arial" pitchFamily="34" charset="0"/>
+                <a:ea typeface="Arial" pitchFamily="34" charset="-122"/>
+                <a:cs typeface="Arial" pitchFamily="34" charset="-120"/>
+              </a:rPr>
+              <a:t>BASE 3 · para el tope de efectivo (con IVA)</a:t>
+            </a:r>
+            <a:endParaRPr lang="en-US" sz="1100" dirty="0"/>
+          </a:p>
+          <a:p>
+            <a:pPr indent="0" marL="0">
+              <a:buNone/>
+            </a:pPr>
+            <a:r>
+              <a:rPr lang="en-US" sz="1100" dirty="0">
+                <a:solidFill>
+                  <a:srgbClr val="4D4D4D"/>
+                </a:solidFill>
+                <a:latin typeface="Arial" pitchFamily="34" charset="0"/>
+                <a:ea typeface="Arial" pitchFamily="34" charset="-122"/>
+                <a:cs typeface="Arial" pitchFamily="34" charset="-120"/>
+              </a:rPr>
+              <a:t>Tope del artículo 32, fracción II: $376,565.10</a:t>
+            </a:r>
+            <a:endParaRPr lang="en-US" sz="1100" dirty="0"/>
+          </a:p>
+          <a:p>
+            <a:pPr indent="0" marL="0">
+              <a:buNone/>
+            </a:pPr>
+            <a:r>
+              <a:rPr lang="en-US" sz="1100" dirty="0">
+                <a:solidFill>
+                  <a:srgbClr val="4D4D4D"/>
+                </a:solidFill>
+                <a:latin typeface="Arial" pitchFamily="34" charset="0"/>
+                <a:ea typeface="Arial" pitchFamily="34" charset="-122"/>
+                <a:cs typeface="Arial" pitchFamily="34" charset="-120"/>
+              </a:rPr>
+              <a:t>ESTÁ POR ENCIMA. Pagarlo en efectivo está prohibido</a:t>
+            </a:r>
+            <a:endParaRPr lang="en-US" sz="1100" dirty="0"/>
+          </a:p>
+        </p:txBody>
+      </p:sp>
+      <p:sp>
+        <p:nvSpPr>
           <p:cNvPr id="15" name="Shape 13"/>
           <p:cNvSpPr/>
           <p:nvPr/>
         </p:nvSpPr>
         <p:spPr>
           <a:xfrm>
-            <a:off x="4818888" y="1975104"/>
-            <a:ext cx="274320" cy="274320"/>
-          </a:xfrm>
-          <a:prstGeom prst="ellipse">
-            <a:avLst/>
-          </a:prstGeom>
-          <a:solidFill>
-            <a:srgbClr val="87D895"/>
-          </a:solidFill>
-          <a:ln/>
-        </p:spPr>
-      </p:sp>
-      <p:sp>
-        <p:nvSpPr>
-          <p:cNvPr id="16" name="Text 14"/>
-          <p:cNvSpPr txBox="1"/>
-          <p:nvPr/>
-        </p:nvSpPr>
-        <p:spPr>
-          <a:xfrm>
-            <a:off x="4818888" y="1975104"/>
-            <a:ext cx="274320" cy="274320"/>
-          </a:xfrm>
-          <a:prstGeom prst="rect">
-            <a:avLst/>
-          </a:prstGeom>
-          <a:noFill/>
-          <a:ln/>
-        </p:spPr>
-        <p:txBody>
-          <a:bodyPr wrap="square" lIns="0" tIns="0" rIns="0" bIns="0" rtlCol="0" anchor="ctr"/>
-          <a:lstStyle/>
-          <a:p>
-            <a:pPr algn="ctr" indent="0" marL="0">
-              <a:buNone/>
-            </a:pPr>
-            <a:r>
-              <a:rPr lang="en-US" sz="1100" b="1" dirty="0">
-                <a:solidFill>
-                  <a:srgbClr val="1B1B1E"/>
-                </a:solidFill>
-                <a:latin typeface="Arial" pitchFamily="34" charset="0"/>
-                <a:ea typeface="Arial" pitchFamily="34" charset="-122"/>
-                <a:cs typeface="Arial" pitchFamily="34" charset="-120"/>
-              </a:rPr>
-              <a:t>2</a:t>
-            </a:r>
-            <a:endParaRPr lang="en-US" sz="1100" dirty="0"/>
-          </a:p>
-        </p:txBody>
-      </p:sp>
-      <p:sp>
-        <p:nvSpPr>
-          <p:cNvPr id="17" name="Text 15"/>
-          <p:cNvSpPr txBox="1"/>
-          <p:nvPr/>
-        </p:nvSpPr>
-        <p:spPr>
-          <a:xfrm>
-            <a:off x="5175504" y="1956816"/>
-            <a:ext cx="3310128" cy="329184"/>
-          </a:xfrm>
-          <a:prstGeom prst="rect">
-            <a:avLst/>
-          </a:prstGeom>
-          <a:noFill/>
-          <a:ln/>
-        </p:spPr>
-        <p:txBody>
-          <a:bodyPr wrap="square" lIns="0" tIns="0" rIns="0" bIns="0" rtlCol="0" anchor="t"/>
-          <a:lstStyle/>
-          <a:p>
-            <a:pPr indent="0" marL="0">
-              <a:buNone/>
-            </a:pPr>
-            <a:r>
-              <a:rPr lang="en-US" sz="1200" b="1" dirty="0">
-                <a:solidFill>
-                  <a:srgbClr val="1B1B1E"/>
-                </a:solidFill>
-                <a:latin typeface="Arial" pitchFamily="34" charset="0"/>
-                <a:ea typeface="Arial" pitchFamily="34" charset="-122"/>
-                <a:cs typeface="Arial" pitchFamily="34" charset="-120"/>
-              </a:rPr>
-              <a:t>2 · Terminar el checklist</a:t>
-            </a:r>
-            <a:endParaRPr lang="en-US" sz="1200" dirty="0"/>
-          </a:p>
-        </p:txBody>
-      </p:sp>
-      <p:sp>
-        <p:nvSpPr>
-          <p:cNvPr id="18" name="Text 16"/>
-          <p:cNvSpPr txBox="1"/>
-          <p:nvPr/>
-        </p:nvSpPr>
-        <p:spPr>
-          <a:xfrm>
-            <a:off x="4818888" y="2322576"/>
-            <a:ext cx="3675888" cy="603504"/>
-          </a:xfrm>
-          <a:prstGeom prst="rect">
-            <a:avLst/>
-          </a:prstGeom>
-          <a:noFill/>
-          <a:ln/>
-        </p:spPr>
-        <p:txBody>
-          <a:bodyPr wrap="square" lIns="0" tIns="0" rIns="0" bIns="0" rtlCol="0" anchor="t"/>
-          <a:lstStyle/>
-          <a:p>
-            <a:pPr indent="0" marL="0">
-              <a:buNone/>
-            </a:pPr>
-            <a:r>
-              <a:rPr lang="en-US" sz="950" dirty="0">
-                <a:solidFill>
-                  <a:srgbClr val="4D4D4D"/>
-                </a:solidFill>
-                <a:latin typeface="Arial" pitchFamily="34" charset="0"/>
-                <a:ea typeface="Arial" pitchFamily="34" charset="-122"/>
-                <a:cs typeface="Arial" pitchFamily="34" charset="-120"/>
-              </a:rPr>
-              <a:t>De la estructura que trajo, documentando el nivel en que cerró</a:t>
-            </a:r>
-            <a:endParaRPr lang="en-US" sz="950" dirty="0"/>
-          </a:p>
-        </p:txBody>
-      </p:sp>
-      <p:sp>
-        <p:nvSpPr>
-          <p:cNvPr id="19" name="Shape 17"/>
-          <p:cNvSpPr/>
-          <p:nvPr/>
-        </p:nvSpPr>
-        <p:spPr>
-          <a:xfrm>
-            <a:off x="502920" y="3310128"/>
-            <a:ext cx="3968496" cy="1335024"/>
-          </a:xfrm>
-          <a:prstGeom prst="roundRect">
-            <a:avLst>
-              <a:gd name="adj" fmla="val 4110"/>
-            </a:avLst>
-          </a:prstGeom>
-          <a:solidFill>
-            <a:srgbClr val="FFFFFF"/>
-          </a:solidFill>
-          <a:ln w="9525">
-            <a:solidFill>
-              <a:srgbClr val="DCE6DE"/>
-            </a:solidFill>
-            <a:prstDash val="solid"/>
-          </a:ln>
-        </p:spPr>
-      </p:sp>
-      <p:sp>
-        <p:nvSpPr>
-          <p:cNvPr id="20" name="Shape 18"/>
-          <p:cNvSpPr/>
-          <p:nvPr/>
-        </p:nvSpPr>
-        <p:spPr>
-          <a:xfrm>
-            <a:off x="649224" y="3456432"/>
-            <a:ext cx="274320" cy="274320"/>
-          </a:xfrm>
-          <a:prstGeom prst="ellipse">
-            <a:avLst/>
-          </a:prstGeom>
-          <a:solidFill>
-            <a:srgbClr val="87D895"/>
-          </a:solidFill>
-          <a:ln/>
-        </p:spPr>
-      </p:sp>
-      <p:sp>
-        <p:nvSpPr>
-          <p:cNvPr id="21" name="Text 19"/>
-          <p:cNvSpPr txBox="1"/>
-          <p:nvPr/>
-        </p:nvSpPr>
-        <p:spPr>
-          <a:xfrm>
-            <a:off x="649224" y="3456432"/>
-            <a:ext cx="274320" cy="274320"/>
-          </a:xfrm>
-          <a:prstGeom prst="rect">
-            <a:avLst/>
-          </a:prstGeom>
-          <a:noFill/>
-          <a:ln/>
-        </p:spPr>
-        <p:txBody>
-          <a:bodyPr wrap="square" lIns="0" tIns="0" rIns="0" bIns="0" rtlCol="0" anchor="ctr"/>
-          <a:lstStyle/>
-          <a:p>
-            <a:pPr algn="ctr" indent="0" marL="0">
-              <a:buNone/>
-            </a:pPr>
-            <a:r>
-              <a:rPr lang="en-US" sz="1100" b="1" dirty="0">
-                <a:solidFill>
-                  <a:srgbClr val="1B1B1E"/>
-                </a:solidFill>
-                <a:latin typeface="Arial" pitchFamily="34" charset="0"/>
-                <a:ea typeface="Arial" pitchFamily="34" charset="-122"/>
-                <a:cs typeface="Arial" pitchFamily="34" charset="-120"/>
-              </a:rPr>
-              <a:t>3</a:t>
-            </a:r>
-            <a:endParaRPr lang="en-US" sz="1100" dirty="0"/>
-          </a:p>
-        </p:txBody>
-      </p:sp>
-      <p:sp>
-        <p:nvSpPr>
-          <p:cNvPr id="22" name="Text 20"/>
-          <p:cNvSpPr txBox="1"/>
-          <p:nvPr/>
-        </p:nvSpPr>
-        <p:spPr>
-          <a:xfrm>
-            <a:off x="1005840" y="3438144"/>
-            <a:ext cx="3310128" cy="329184"/>
-          </a:xfrm>
-          <a:prstGeom prst="rect">
-            <a:avLst/>
-          </a:prstGeom>
-          <a:noFill/>
-          <a:ln/>
-        </p:spPr>
-        <p:txBody>
-          <a:bodyPr wrap="square" lIns="0" tIns="0" rIns="0" bIns="0" rtlCol="0" anchor="t"/>
-          <a:lstStyle/>
-          <a:p>
-            <a:pPr indent="0" marL="0">
-              <a:buNone/>
-            </a:pPr>
-            <a:r>
-              <a:rPr lang="en-US" sz="1200" b="1" dirty="0">
-                <a:solidFill>
-                  <a:srgbClr val="1B1B1E"/>
-                </a:solidFill>
-                <a:latin typeface="Arial" pitchFamily="34" charset="0"/>
-                <a:ea typeface="Arial" pitchFamily="34" charset="-122"/>
-                <a:cs typeface="Arial" pitchFamily="34" charset="-120"/>
-              </a:rPr>
-              <a:t>3 · La cuarta alerta</a:t>
-            </a:r>
-            <a:endParaRPr lang="en-US" sz="1200" dirty="0"/>
-          </a:p>
-        </p:txBody>
-      </p:sp>
-      <p:sp>
-        <p:nvSpPr>
-          <p:cNvPr id="23" name="Text 21"/>
-          <p:cNvSpPr txBox="1"/>
-          <p:nvPr/>
-        </p:nvSpPr>
-        <p:spPr>
-          <a:xfrm>
-            <a:off x="649224" y="3803904"/>
-            <a:ext cx="3675888" cy="603504"/>
-          </a:xfrm>
-          <a:prstGeom prst="rect">
-            <a:avLst/>
-          </a:prstGeom>
-          <a:noFill/>
-          <a:ln/>
-        </p:spPr>
-        <p:txBody>
-          <a:bodyPr wrap="square" lIns="0" tIns="0" rIns="0" bIns="0" rtlCol="0" anchor="t"/>
-          <a:lstStyle/>
-          <a:p>
-            <a:pPr indent="0" marL="0">
-              <a:buNone/>
-            </a:pPr>
-            <a:r>
-              <a:rPr lang="en-US" sz="950" dirty="0">
-                <a:solidFill>
-                  <a:srgbClr val="4D4D4D"/>
-                </a:solidFill>
-                <a:latin typeface="Arial" pitchFamily="34" charset="0"/>
-                <a:ea typeface="Arial" pitchFamily="34" charset="-122"/>
-                <a:cs typeface="Arial" pitchFamily="34" charset="-120"/>
-              </a:rPr>
-              <a:t>Configurar la de países y jurisdicciones, que es la que nadie tiene</a:t>
-            </a:r>
-            <a:endParaRPr lang="en-US" sz="950" dirty="0"/>
-          </a:p>
-        </p:txBody>
-      </p:sp>
-      <p:sp>
-        <p:nvSpPr>
-          <p:cNvPr id="24" name="Shape 22"/>
-          <p:cNvSpPr/>
-          <p:nvPr/>
-        </p:nvSpPr>
-        <p:spPr>
-          <a:xfrm>
-            <a:off x="4672584" y="3310128"/>
-            <a:ext cx="3968496" cy="1335024"/>
-          </a:xfrm>
-          <a:prstGeom prst="roundRect">
-            <a:avLst>
-              <a:gd name="adj" fmla="val 4110"/>
-            </a:avLst>
-          </a:prstGeom>
-          <a:solidFill>
-            <a:srgbClr val="FFFFFF"/>
-          </a:solidFill>
-          <a:ln w="9525">
-            <a:solidFill>
-              <a:srgbClr val="DCE6DE"/>
-            </a:solidFill>
-            <a:prstDash val="solid"/>
-          </a:ln>
-        </p:spPr>
-      </p:sp>
-      <p:sp>
-        <p:nvSpPr>
-          <p:cNvPr id="25" name="Shape 23"/>
-          <p:cNvSpPr/>
-          <p:nvPr/>
-        </p:nvSpPr>
-        <p:spPr>
-          <a:xfrm>
-            <a:off x="4818888" y="3456432"/>
-            <a:ext cx="274320" cy="274320"/>
-          </a:xfrm>
-          <a:prstGeom prst="ellipse">
-            <a:avLst/>
-          </a:prstGeom>
-          <a:solidFill>
-            <a:srgbClr val="87D895"/>
-          </a:solidFill>
-          <a:ln/>
-        </p:spPr>
-      </p:sp>
-      <p:sp>
-        <p:nvSpPr>
-          <p:cNvPr id="26" name="Text 24"/>
-          <p:cNvSpPr txBox="1"/>
-          <p:nvPr/>
-        </p:nvSpPr>
-        <p:spPr>
-          <a:xfrm>
-            <a:off x="4818888" y="3456432"/>
-            <a:ext cx="274320" cy="274320"/>
-          </a:xfrm>
-          <a:prstGeom prst="rect">
-            <a:avLst/>
-          </a:prstGeom>
-          <a:noFill/>
-          <a:ln/>
-        </p:spPr>
-        <p:txBody>
-          <a:bodyPr wrap="square" lIns="0" tIns="0" rIns="0" bIns="0" rtlCol="0" anchor="ctr"/>
-          <a:lstStyle/>
-          <a:p>
-            <a:pPr algn="ctr" indent="0" marL="0">
-              <a:buNone/>
-            </a:pPr>
-            <a:r>
-              <a:rPr lang="en-US" sz="1100" b="1" dirty="0">
-                <a:solidFill>
-                  <a:srgbClr val="1B1B1E"/>
-                </a:solidFill>
-                <a:latin typeface="Arial" pitchFamily="34" charset="0"/>
-                <a:ea typeface="Arial" pitchFamily="34" charset="-122"/>
-                <a:cs typeface="Arial" pitchFamily="34" charset="-120"/>
-              </a:rPr>
-              <a:t>4</a:t>
-            </a:r>
-            <a:endParaRPr lang="en-US" sz="1100" dirty="0"/>
-          </a:p>
-        </p:txBody>
-      </p:sp>
-      <p:sp>
-        <p:nvSpPr>
-          <p:cNvPr id="27" name="Text 25"/>
-          <p:cNvSpPr txBox="1"/>
-          <p:nvPr/>
-        </p:nvSpPr>
-        <p:spPr>
-          <a:xfrm>
-            <a:off x="5175504" y="3438144"/>
-            <a:ext cx="3310128" cy="329184"/>
-          </a:xfrm>
-          <a:prstGeom prst="rect">
-            <a:avLst/>
-          </a:prstGeom>
-          <a:noFill/>
-          <a:ln/>
-        </p:spPr>
-        <p:txBody>
-          <a:bodyPr wrap="square" lIns="0" tIns="0" rIns="0" bIns="0" rtlCol="0" anchor="t"/>
-          <a:lstStyle/>
-          <a:p>
-            <a:pPr indent="0" marL="0">
-              <a:buNone/>
-            </a:pPr>
-            <a:r>
-              <a:rPr lang="en-US" sz="1200" b="1" dirty="0">
-                <a:solidFill>
-                  <a:srgbClr val="1B1B1E"/>
-                </a:solidFill>
-                <a:latin typeface="Arial" pitchFamily="34" charset="0"/>
-                <a:ea typeface="Arial" pitchFamily="34" charset="-122"/>
-                <a:cs typeface="Arial" pitchFamily="34" charset="-120"/>
-              </a:rPr>
-              <a:t>4 · La prueba del IVA</a:t>
-            </a:r>
-            <a:endParaRPr lang="en-US" sz="1200" dirty="0"/>
-          </a:p>
-        </p:txBody>
-      </p:sp>
-      <p:sp>
-        <p:nvSpPr>
-          <p:cNvPr id="28" name="Text 26"/>
-          <p:cNvSpPr txBox="1"/>
-          <p:nvPr/>
-        </p:nvSpPr>
-        <p:spPr>
-          <a:xfrm>
-            <a:off x="4818888" y="3803904"/>
-            <a:ext cx="3675888" cy="603504"/>
-          </a:xfrm>
-          <a:prstGeom prst="rect">
-            <a:avLst/>
-          </a:prstGeom>
-          <a:noFill/>
-          <a:ln/>
-        </p:spPr>
-        <p:txBody>
-          <a:bodyPr wrap="square" lIns="0" tIns="0" rIns="0" bIns="0" rtlCol="0" anchor="t"/>
-          <a:lstStyle/>
-          <a:p>
-            <a:pPr indent="0" marL="0">
-              <a:buNone/>
-            </a:pPr>
-            <a:r>
-              <a:rPr lang="en-US" sz="950" dirty="0">
-                <a:solidFill>
-                  <a:srgbClr val="4D4D4D"/>
-                </a:solidFill>
-                <a:latin typeface="Arial" pitchFamily="34" charset="0"/>
-                <a:ea typeface="Arial" pitchFamily="34" charset="-122"/>
-                <a:cs typeface="Arial" pitchFamily="34" charset="-120"/>
-              </a:rPr>
-              <a:t>Sobre su última operación grande: ¿queda del mismo lado en las tres bases?</a:t>
-            </a:r>
-            <a:endParaRPr lang="en-US" sz="950" dirty="0"/>
-          </a:p>
-        </p:txBody>
-      </p:sp>
-      <p:sp>
-        <p:nvSpPr>
-          <p:cNvPr id="29" name="Shape 27"/>
-          <p:cNvSpPr/>
-          <p:nvPr/>
-        </p:nvSpPr>
-        <p:spPr>
-          <a:xfrm>
-            <a:off x="502920" y="3977640"/>
+            <a:off x="502920" y="3703320"/>
             <a:ext cx="8138160" cy="640080"/>
           </a:xfrm>
           <a:prstGeom prst="roundRect">
@@ -39984,13 +40378,13 @@
       </p:sp>
       <p:sp>
         <p:nvSpPr>
-          <p:cNvPr id="30" name="Text 28"/>
+          <p:cNvPr id="16" name="Text 14"/>
           <p:cNvSpPr txBox="1"/>
           <p:nvPr/>
         </p:nvSpPr>
         <p:spPr>
           <a:xfrm>
-            <a:off x="731520" y="3995928"/>
+            <a:off x="731520" y="3721608"/>
             <a:ext cx="7680960" cy="603504"/>
           </a:xfrm>
           <a:prstGeom prst="rect">
@@ -40015,7 +40409,7 @@
                 <a:ea typeface="Arial" pitchFamily="34" charset="-122"/>
                 <a:cs typeface="Arial" pitchFamily="34" charset="-120"/>
               </a:rPr>
-              <a:t>La próxima sesión es el LUNES 14 de septiembre. Vamos fracción por fracción: traigan la duda de su sector.</a:t>
+              <a:t>El mismo coche, el mismo día, el mismo cliente. Y la diferencia entre las dos respuestas es un impuesto.</a:t>
             </a:r>
             <a:endParaRPr lang="en-US" sz="1200" dirty="0"/>
           </a:p>
@@ -40032,6 +40426,990 @@
 <file path=ppt/slides/slide42.xml><?xml version="1.0" encoding="utf-8"?>
 <p:sld xmlns:a="http://schemas.openxmlformats.org/drawingml/2006/main" xmlns:r="http://schemas.openxmlformats.org/officeDocument/2006/relationships" xmlns:p="http://schemas.openxmlformats.org/presentationml/2006/main">
   <p:cSld name="Slide 42">
+    <p:bg>
+      <p:bgPr>
+        <a:solidFill>
+          <a:srgbClr val="F6F8F6"/>
+        </a:solidFill>
+      </p:bgPr>
+    </p:bg>
+    <p:spTree>
+      <p:nvGrpSpPr>
+        <p:cNvPr id="1" name=""/>
+        <p:cNvGrpSpPr/>
+        <p:nvPr/>
+      </p:nvGrpSpPr>
+      <p:grpSpPr>
+        <a:xfrm>
+          <a:off x="0" y="0"/>
+          <a:ext cx="0" cy="0"/>
+          <a:chOff x="0" y="0"/>
+          <a:chExt cx="0" cy="0"/>
+        </a:xfrm>
+      </p:grpSpPr>
+      <p:sp>
+        <p:nvSpPr>
+          <p:cNvPr id="2" name="Shape 0"/>
+          <p:cNvSpPr/>
+          <p:nvPr/>
+        </p:nvSpPr>
+        <p:spPr>
+          <a:xfrm>
+            <a:off x="0" y="4846320"/>
+            <a:ext cx="9144000" cy="18288"/>
+          </a:xfrm>
+          <a:prstGeom prst="rect">
+            <a:avLst/>
+          </a:prstGeom>
+          <a:solidFill>
+            <a:srgbClr val="DCE6DE"/>
+          </a:solidFill>
+          <a:ln/>
+        </p:spPr>
+      </p:sp>
+      <p:sp>
+        <p:nvSpPr>
+          <p:cNvPr id="3" name="Text 1"/>
+          <p:cNvSpPr txBox="1"/>
+          <p:nvPr/>
+        </p:nvSpPr>
+        <p:spPr>
+          <a:xfrm>
+            <a:off x="502920" y="4882896"/>
+            <a:ext cx="6949440" cy="219456"/>
+          </a:xfrm>
+          <a:prstGeom prst="rect">
+            <a:avLst/>
+          </a:prstGeom>
+          <a:noFill/>
+          <a:ln/>
+        </p:spPr>
+        <p:txBody>
+          <a:bodyPr wrap="square" lIns="0" tIns="0" rIns="0" bIns="0" rtlCol="0" anchor="ctr"/>
+          <a:lstStyle/>
+          <a:p>
+            <a:pPr indent="0" marL="0">
+              <a:buNone/>
+            </a:pPr>
+            <a:r>
+              <a:rPr lang="en-US" sz="800" dirty="0">
+                <a:solidFill>
+                  <a:srgbClr val="4D4D4D"/>
+                </a:solidFill>
+                <a:latin typeface="Arial" pitchFamily="34" charset="0"/>
+                <a:ea typeface="Arial" pitchFamily="34" charset="-122"/>
+                <a:cs typeface="Arial" pitchFamily="34" charset="-120"/>
+              </a:rPr>
+              <a:t>Taller Antilavado 360 · Sesión 4 · 8 de septiembre de 2026 · GMC360 / 360Educa</a:t>
+            </a:r>
+            <a:endParaRPr lang="en-US" sz="800" dirty="0"/>
+          </a:p>
+        </p:txBody>
+      </p:sp>
+      <p:sp>
+        <p:nvSpPr>
+          <p:cNvPr id="4" name="Text 2"/>
+          <p:cNvSpPr txBox="1"/>
+          <p:nvPr/>
+        </p:nvSpPr>
+        <p:spPr>
+          <a:xfrm>
+            <a:off x="8138160" y="4864608"/>
+            <a:ext cx="502920" cy="237744"/>
+          </a:xfrm>
+          <a:prstGeom prst="rect">
+            <a:avLst/>
+          </a:prstGeom>
+          <a:noFill/>
+          <a:ln/>
+        </p:spPr>
+        <p:txBody>
+          <a:bodyPr wrap="square" lIns="0" tIns="0" rIns="0" bIns="0" rtlCol="0" anchor="ctr"/>
+          <a:lstStyle/>
+          <a:p>
+            <a:pPr algn="r" indent="0" marL="0">
+              <a:buNone/>
+            </a:pPr>
+            <a:r>
+              <a:rPr lang="en-US" sz="900" b="1" dirty="0">
+                <a:solidFill>
+                  <a:srgbClr val="2E7D4F"/>
+                </a:solidFill>
+                <a:latin typeface="Arial" pitchFamily="34" charset="0"/>
+                <a:ea typeface="Arial" pitchFamily="34" charset="-122"/>
+                <a:cs typeface="Arial" pitchFamily="34" charset="-120"/>
+              </a:rPr>
+              <a:t>42</a:t>
+            </a:r>
+            <a:endParaRPr lang="en-US" sz="900" dirty="0"/>
+          </a:p>
+        </p:txBody>
+      </p:sp>
+      <p:sp>
+        <p:nvSpPr>
+          <p:cNvPr id="5" name="Shape 3"/>
+          <p:cNvSpPr/>
+          <p:nvPr/>
+        </p:nvSpPr>
+        <p:spPr>
+          <a:xfrm>
+            <a:off x="502920" y="384048"/>
+            <a:ext cx="384048" cy="384048"/>
+          </a:xfrm>
+          <a:prstGeom prst="ellipse">
+            <a:avLst/>
+          </a:prstGeom>
+          <a:solidFill>
+            <a:srgbClr val="64C27B"/>
+          </a:solidFill>
+          <a:ln/>
+        </p:spPr>
+      </p:sp>
+      <p:sp>
+        <p:nvSpPr>
+          <p:cNvPr id="6" name="Text 4"/>
+          <p:cNvSpPr txBox="1"/>
+          <p:nvPr/>
+        </p:nvSpPr>
+        <p:spPr>
+          <a:xfrm>
+            <a:off x="502920" y="384048"/>
+            <a:ext cx="384048" cy="384048"/>
+          </a:xfrm>
+          <a:prstGeom prst="rect">
+            <a:avLst/>
+          </a:prstGeom>
+          <a:noFill/>
+          <a:ln/>
+        </p:spPr>
+        <p:txBody>
+          <a:bodyPr wrap="square" lIns="0" tIns="0" rIns="0" bIns="0" rtlCol="0" anchor="ctr"/>
+          <a:lstStyle/>
+          <a:p>
+            <a:pPr algn="ctr" indent="0" marL="0">
+              <a:buNone/>
+            </a:pPr>
+            <a:r>
+              <a:rPr lang="en-US" sz="1300" b="1" dirty="0">
+                <a:solidFill>
+                  <a:srgbClr val="1B1B1E"/>
+                </a:solidFill>
+                <a:latin typeface="Arial" pitchFamily="34" charset="0"/>
+                <a:ea typeface="Arial" pitchFamily="34" charset="-122"/>
+                <a:cs typeface="Arial" pitchFamily="34" charset="-120"/>
+              </a:rPr>
+              <a:t>42</a:t>
+            </a:r>
+            <a:endParaRPr lang="en-US" sz="1300" dirty="0"/>
+          </a:p>
+        </p:txBody>
+      </p:sp>
+      <p:sp>
+        <p:nvSpPr>
+          <p:cNvPr id="7" name="Text 5"/>
+          <p:cNvSpPr txBox="1"/>
+          <p:nvPr/>
+        </p:nvSpPr>
+        <p:spPr>
+          <a:xfrm>
+            <a:off x="1024128" y="420624"/>
+            <a:ext cx="7589520" cy="292608"/>
+          </a:xfrm>
+          <a:prstGeom prst="rect">
+            <a:avLst/>
+          </a:prstGeom>
+          <a:noFill/>
+          <a:ln/>
+        </p:spPr>
+        <p:txBody>
+          <a:bodyPr wrap="square" lIns="0" tIns="0" rIns="0" bIns="0" rtlCol="0" anchor="ctr"/>
+          <a:lstStyle/>
+          <a:p>
+            <a:pPr indent="0" marL="0">
+              <a:buNone/>
+            </a:pPr>
+            <a:r>
+              <a:rPr lang="en-US" sz="1100" b="1" spc="120" kern="0" dirty="0">
+                <a:solidFill>
+                  <a:srgbClr val="2E7D4F"/>
+                </a:solidFill>
+                <a:latin typeface="Arial" pitchFamily="34" charset="0"/>
+                <a:ea typeface="Arial" pitchFamily="34" charset="-122"/>
+                <a:cs typeface="Arial" pitchFamily="34" charset="-120"/>
+              </a:rPr>
+              <a:t>CIERRE</a:t>
+            </a:r>
+            <a:endParaRPr lang="en-US" sz="1100" dirty="0"/>
+          </a:p>
+        </p:txBody>
+      </p:sp>
+      <p:sp>
+        <p:nvSpPr>
+          <p:cNvPr id="8" name="Text 6"/>
+          <p:cNvSpPr txBox="1"/>
+          <p:nvPr/>
+        </p:nvSpPr>
+        <p:spPr>
+          <a:xfrm>
+            <a:off x="502920" y="960120"/>
+            <a:ext cx="8138160" cy="786384"/>
+          </a:xfrm>
+          <a:prstGeom prst="rect">
+            <a:avLst/>
+          </a:prstGeom>
+          <a:noFill/>
+          <a:ln/>
+        </p:spPr>
+        <p:txBody>
+          <a:bodyPr wrap="square" lIns="0" tIns="0" rIns="0" bIns="0" rtlCol="0" anchor="t"/>
+          <a:lstStyle/>
+          <a:p>
+            <a:pPr indent="0" marL="0">
+              <a:buNone/>
+            </a:pPr>
+            <a:r>
+              <a:rPr lang="en-US" sz="2700" b="1" dirty="0">
+                <a:solidFill>
+                  <a:srgbClr val="1B1B1E"/>
+                </a:solidFill>
+                <a:latin typeface="Arial" pitchFamily="34" charset="0"/>
+                <a:ea typeface="Arial" pitchFamily="34" charset="-122"/>
+                <a:cs typeface="Arial" pitchFamily="34" charset="-120"/>
+              </a:rPr>
+              <a:t>La tarea, cuatro cosas</a:t>
+            </a:r>
+            <a:endParaRPr lang="en-US" sz="2700" dirty="0"/>
+          </a:p>
+        </p:txBody>
+      </p:sp>
+      <p:sp>
+        <p:nvSpPr>
+          <p:cNvPr id="9" name="Shape 7"/>
+          <p:cNvSpPr/>
+          <p:nvPr/>
+        </p:nvSpPr>
+        <p:spPr>
+          <a:xfrm>
+            <a:off x="502920" y="1828800"/>
+            <a:ext cx="3968496" cy="1335024"/>
+          </a:xfrm>
+          <a:prstGeom prst="roundRect">
+            <a:avLst>
+              <a:gd name="adj" fmla="val 4110"/>
+            </a:avLst>
+          </a:prstGeom>
+          <a:solidFill>
+            <a:srgbClr val="FFFFFF"/>
+          </a:solidFill>
+          <a:ln w="9525">
+            <a:solidFill>
+              <a:srgbClr val="DCE6DE"/>
+            </a:solidFill>
+            <a:prstDash val="solid"/>
+          </a:ln>
+        </p:spPr>
+      </p:sp>
+      <p:sp>
+        <p:nvSpPr>
+          <p:cNvPr id="10" name="Shape 8"/>
+          <p:cNvSpPr/>
+          <p:nvPr/>
+        </p:nvSpPr>
+        <p:spPr>
+          <a:xfrm>
+            <a:off x="649224" y="1975104"/>
+            <a:ext cx="274320" cy="274320"/>
+          </a:xfrm>
+          <a:prstGeom prst="ellipse">
+            <a:avLst/>
+          </a:prstGeom>
+          <a:solidFill>
+            <a:srgbClr val="87D895"/>
+          </a:solidFill>
+          <a:ln/>
+        </p:spPr>
+      </p:sp>
+      <p:sp>
+        <p:nvSpPr>
+          <p:cNvPr id="11" name="Text 9"/>
+          <p:cNvSpPr txBox="1"/>
+          <p:nvPr/>
+        </p:nvSpPr>
+        <p:spPr>
+          <a:xfrm>
+            <a:off x="649224" y="1975104"/>
+            <a:ext cx="274320" cy="274320"/>
+          </a:xfrm>
+          <a:prstGeom prst="rect">
+            <a:avLst/>
+          </a:prstGeom>
+          <a:noFill/>
+          <a:ln/>
+        </p:spPr>
+        <p:txBody>
+          <a:bodyPr wrap="square" lIns="0" tIns="0" rIns="0" bIns="0" rtlCol="0" anchor="ctr"/>
+          <a:lstStyle/>
+          <a:p>
+            <a:pPr algn="ctr" indent="0" marL="0">
+              <a:buNone/>
+            </a:pPr>
+            <a:r>
+              <a:rPr lang="en-US" sz="1100" b="1" dirty="0">
+                <a:solidFill>
+                  <a:srgbClr val="1B1B1E"/>
+                </a:solidFill>
+                <a:latin typeface="Arial" pitchFamily="34" charset="0"/>
+                <a:ea typeface="Arial" pitchFamily="34" charset="-122"/>
+                <a:cs typeface="Arial" pitchFamily="34" charset="-120"/>
+              </a:rPr>
+              <a:t>1</a:t>
+            </a:r>
+            <a:endParaRPr lang="en-US" sz="1100" dirty="0"/>
+          </a:p>
+        </p:txBody>
+      </p:sp>
+      <p:sp>
+        <p:nvSpPr>
+          <p:cNvPr id="12" name="Text 10"/>
+          <p:cNvSpPr txBox="1"/>
+          <p:nvPr/>
+        </p:nvSpPr>
+        <p:spPr>
+          <a:xfrm>
+            <a:off x="1005840" y="1956816"/>
+            <a:ext cx="3310128" cy="329184"/>
+          </a:xfrm>
+          <a:prstGeom prst="rect">
+            <a:avLst/>
+          </a:prstGeom>
+          <a:noFill/>
+          <a:ln/>
+        </p:spPr>
+        <p:txBody>
+          <a:bodyPr wrap="square" lIns="0" tIns="0" rIns="0" bIns="0" rtlCol="0" anchor="t"/>
+          <a:lstStyle/>
+          <a:p>
+            <a:pPr indent="0" marL="0">
+              <a:buNone/>
+            </a:pPr>
+            <a:r>
+              <a:rPr lang="en-US" sz="1200" b="1" dirty="0">
+                <a:solidFill>
+                  <a:srgbClr val="1B1B1E"/>
+                </a:solidFill>
+                <a:latin typeface="Arial" pitchFamily="34" charset="0"/>
+                <a:ea typeface="Arial" pitchFamily="34" charset="-122"/>
+                <a:cs typeface="Arial" pitchFamily="34" charset="-120"/>
+              </a:rPr>
+              <a:t>1 · El renglón del perfil</a:t>
+            </a:r>
+            <a:endParaRPr lang="en-US" sz="1200" dirty="0"/>
+          </a:p>
+        </p:txBody>
+      </p:sp>
+      <p:sp>
+        <p:nvSpPr>
+          <p:cNvPr id="13" name="Text 11"/>
+          <p:cNvSpPr txBox="1"/>
+          <p:nvPr/>
+        </p:nvSpPr>
+        <p:spPr>
+          <a:xfrm>
+            <a:off x="649224" y="2322576"/>
+            <a:ext cx="3675888" cy="603504"/>
+          </a:xfrm>
+          <a:prstGeom prst="rect">
+            <a:avLst/>
+          </a:prstGeom>
+          <a:noFill/>
+          <a:ln/>
+        </p:spPr>
+        <p:txBody>
+          <a:bodyPr wrap="square" lIns="0" tIns="0" rIns="0" bIns="0" rtlCol="0" anchor="t"/>
+          <a:lstStyle/>
+          <a:p>
+            <a:pPr indent="0" marL="0">
+              <a:buNone/>
+            </a:pPr>
+            <a:r>
+              <a:rPr lang="en-US" sz="950" dirty="0">
+                <a:solidFill>
+                  <a:srgbClr val="4D4D4D"/>
+                </a:solidFill>
+                <a:latin typeface="Arial" pitchFamily="34" charset="0"/>
+                <a:ea typeface="Arial" pitchFamily="34" charset="-122"/>
+                <a:cs typeface="Arial" pitchFamily="34" charset="-120"/>
+              </a:rPr>
+              <a:t>Meter el monto máximo mensual estimado al cuestionario de alta. Es de esta semana, no de 2027</a:t>
+            </a:r>
+            <a:endParaRPr lang="en-US" sz="950" dirty="0"/>
+          </a:p>
+        </p:txBody>
+      </p:sp>
+      <p:sp>
+        <p:nvSpPr>
+          <p:cNvPr id="14" name="Shape 12"/>
+          <p:cNvSpPr/>
+          <p:nvPr/>
+        </p:nvSpPr>
+        <p:spPr>
+          <a:xfrm>
+            <a:off x="4672584" y="1828800"/>
+            <a:ext cx="3968496" cy="1335024"/>
+          </a:xfrm>
+          <a:prstGeom prst="roundRect">
+            <a:avLst>
+              <a:gd name="adj" fmla="val 4110"/>
+            </a:avLst>
+          </a:prstGeom>
+          <a:solidFill>
+            <a:srgbClr val="FFFFFF"/>
+          </a:solidFill>
+          <a:ln w="9525">
+            <a:solidFill>
+              <a:srgbClr val="DCE6DE"/>
+            </a:solidFill>
+            <a:prstDash val="solid"/>
+          </a:ln>
+        </p:spPr>
+      </p:sp>
+      <p:sp>
+        <p:nvSpPr>
+          <p:cNvPr id="15" name="Shape 13"/>
+          <p:cNvSpPr/>
+          <p:nvPr/>
+        </p:nvSpPr>
+        <p:spPr>
+          <a:xfrm>
+            <a:off x="4818888" y="1975104"/>
+            <a:ext cx="274320" cy="274320"/>
+          </a:xfrm>
+          <a:prstGeom prst="ellipse">
+            <a:avLst/>
+          </a:prstGeom>
+          <a:solidFill>
+            <a:srgbClr val="87D895"/>
+          </a:solidFill>
+          <a:ln/>
+        </p:spPr>
+      </p:sp>
+      <p:sp>
+        <p:nvSpPr>
+          <p:cNvPr id="16" name="Text 14"/>
+          <p:cNvSpPr txBox="1"/>
+          <p:nvPr/>
+        </p:nvSpPr>
+        <p:spPr>
+          <a:xfrm>
+            <a:off x="4818888" y="1975104"/>
+            <a:ext cx="274320" cy="274320"/>
+          </a:xfrm>
+          <a:prstGeom prst="rect">
+            <a:avLst/>
+          </a:prstGeom>
+          <a:noFill/>
+          <a:ln/>
+        </p:spPr>
+        <p:txBody>
+          <a:bodyPr wrap="square" lIns="0" tIns="0" rIns="0" bIns="0" rtlCol="0" anchor="ctr"/>
+          <a:lstStyle/>
+          <a:p>
+            <a:pPr algn="ctr" indent="0" marL="0">
+              <a:buNone/>
+            </a:pPr>
+            <a:r>
+              <a:rPr lang="en-US" sz="1100" b="1" dirty="0">
+                <a:solidFill>
+                  <a:srgbClr val="1B1B1E"/>
+                </a:solidFill>
+                <a:latin typeface="Arial" pitchFamily="34" charset="0"/>
+                <a:ea typeface="Arial" pitchFamily="34" charset="-122"/>
+                <a:cs typeface="Arial" pitchFamily="34" charset="-120"/>
+              </a:rPr>
+              <a:t>2</a:t>
+            </a:r>
+            <a:endParaRPr lang="en-US" sz="1100" dirty="0"/>
+          </a:p>
+        </p:txBody>
+      </p:sp>
+      <p:sp>
+        <p:nvSpPr>
+          <p:cNvPr id="17" name="Text 15"/>
+          <p:cNvSpPr txBox="1"/>
+          <p:nvPr/>
+        </p:nvSpPr>
+        <p:spPr>
+          <a:xfrm>
+            <a:off x="5175504" y="1956816"/>
+            <a:ext cx="3310128" cy="329184"/>
+          </a:xfrm>
+          <a:prstGeom prst="rect">
+            <a:avLst/>
+          </a:prstGeom>
+          <a:noFill/>
+          <a:ln/>
+        </p:spPr>
+        <p:txBody>
+          <a:bodyPr wrap="square" lIns="0" tIns="0" rIns="0" bIns="0" rtlCol="0" anchor="t"/>
+          <a:lstStyle/>
+          <a:p>
+            <a:pPr indent="0" marL="0">
+              <a:buNone/>
+            </a:pPr>
+            <a:r>
+              <a:rPr lang="en-US" sz="1200" b="1" dirty="0">
+                <a:solidFill>
+                  <a:srgbClr val="1B1B1E"/>
+                </a:solidFill>
+                <a:latin typeface="Arial" pitchFamily="34" charset="0"/>
+                <a:ea typeface="Arial" pitchFamily="34" charset="-122"/>
+                <a:cs typeface="Arial" pitchFamily="34" charset="-120"/>
+              </a:rPr>
+              <a:t>2 · Terminar el checklist</a:t>
+            </a:r>
+            <a:endParaRPr lang="en-US" sz="1200" dirty="0"/>
+          </a:p>
+        </p:txBody>
+      </p:sp>
+      <p:sp>
+        <p:nvSpPr>
+          <p:cNvPr id="18" name="Text 16"/>
+          <p:cNvSpPr txBox="1"/>
+          <p:nvPr/>
+        </p:nvSpPr>
+        <p:spPr>
+          <a:xfrm>
+            <a:off x="4818888" y="2322576"/>
+            <a:ext cx="3675888" cy="603504"/>
+          </a:xfrm>
+          <a:prstGeom prst="rect">
+            <a:avLst/>
+          </a:prstGeom>
+          <a:noFill/>
+          <a:ln/>
+        </p:spPr>
+        <p:txBody>
+          <a:bodyPr wrap="square" lIns="0" tIns="0" rIns="0" bIns="0" rtlCol="0" anchor="t"/>
+          <a:lstStyle/>
+          <a:p>
+            <a:pPr indent="0" marL="0">
+              <a:buNone/>
+            </a:pPr>
+            <a:r>
+              <a:rPr lang="en-US" sz="950" dirty="0">
+                <a:solidFill>
+                  <a:srgbClr val="4D4D4D"/>
+                </a:solidFill>
+                <a:latin typeface="Arial" pitchFamily="34" charset="0"/>
+                <a:ea typeface="Arial" pitchFamily="34" charset="-122"/>
+                <a:cs typeface="Arial" pitchFamily="34" charset="-120"/>
+              </a:rPr>
+              <a:t>De la estructura que trajo, documentando el nivel en que cerró</a:t>
+            </a:r>
+            <a:endParaRPr lang="en-US" sz="950" dirty="0"/>
+          </a:p>
+        </p:txBody>
+      </p:sp>
+      <p:sp>
+        <p:nvSpPr>
+          <p:cNvPr id="19" name="Shape 17"/>
+          <p:cNvSpPr/>
+          <p:nvPr/>
+        </p:nvSpPr>
+        <p:spPr>
+          <a:xfrm>
+            <a:off x="502920" y="3310128"/>
+            <a:ext cx="3968496" cy="1335024"/>
+          </a:xfrm>
+          <a:prstGeom prst="roundRect">
+            <a:avLst>
+              <a:gd name="adj" fmla="val 4110"/>
+            </a:avLst>
+          </a:prstGeom>
+          <a:solidFill>
+            <a:srgbClr val="FFFFFF"/>
+          </a:solidFill>
+          <a:ln w="9525">
+            <a:solidFill>
+              <a:srgbClr val="DCE6DE"/>
+            </a:solidFill>
+            <a:prstDash val="solid"/>
+          </a:ln>
+        </p:spPr>
+      </p:sp>
+      <p:sp>
+        <p:nvSpPr>
+          <p:cNvPr id="20" name="Shape 18"/>
+          <p:cNvSpPr/>
+          <p:nvPr/>
+        </p:nvSpPr>
+        <p:spPr>
+          <a:xfrm>
+            <a:off x="649224" y="3456432"/>
+            <a:ext cx="274320" cy="274320"/>
+          </a:xfrm>
+          <a:prstGeom prst="ellipse">
+            <a:avLst/>
+          </a:prstGeom>
+          <a:solidFill>
+            <a:srgbClr val="87D895"/>
+          </a:solidFill>
+          <a:ln/>
+        </p:spPr>
+      </p:sp>
+      <p:sp>
+        <p:nvSpPr>
+          <p:cNvPr id="21" name="Text 19"/>
+          <p:cNvSpPr txBox="1"/>
+          <p:nvPr/>
+        </p:nvSpPr>
+        <p:spPr>
+          <a:xfrm>
+            <a:off x="649224" y="3456432"/>
+            <a:ext cx="274320" cy="274320"/>
+          </a:xfrm>
+          <a:prstGeom prst="rect">
+            <a:avLst/>
+          </a:prstGeom>
+          <a:noFill/>
+          <a:ln/>
+        </p:spPr>
+        <p:txBody>
+          <a:bodyPr wrap="square" lIns="0" tIns="0" rIns="0" bIns="0" rtlCol="0" anchor="ctr"/>
+          <a:lstStyle/>
+          <a:p>
+            <a:pPr algn="ctr" indent="0" marL="0">
+              <a:buNone/>
+            </a:pPr>
+            <a:r>
+              <a:rPr lang="en-US" sz="1100" b="1" dirty="0">
+                <a:solidFill>
+                  <a:srgbClr val="1B1B1E"/>
+                </a:solidFill>
+                <a:latin typeface="Arial" pitchFamily="34" charset="0"/>
+                <a:ea typeface="Arial" pitchFamily="34" charset="-122"/>
+                <a:cs typeface="Arial" pitchFamily="34" charset="-120"/>
+              </a:rPr>
+              <a:t>3</a:t>
+            </a:r>
+            <a:endParaRPr lang="en-US" sz="1100" dirty="0"/>
+          </a:p>
+        </p:txBody>
+      </p:sp>
+      <p:sp>
+        <p:nvSpPr>
+          <p:cNvPr id="22" name="Text 20"/>
+          <p:cNvSpPr txBox="1"/>
+          <p:nvPr/>
+        </p:nvSpPr>
+        <p:spPr>
+          <a:xfrm>
+            <a:off x="1005840" y="3438144"/>
+            <a:ext cx="3310128" cy="329184"/>
+          </a:xfrm>
+          <a:prstGeom prst="rect">
+            <a:avLst/>
+          </a:prstGeom>
+          <a:noFill/>
+          <a:ln/>
+        </p:spPr>
+        <p:txBody>
+          <a:bodyPr wrap="square" lIns="0" tIns="0" rIns="0" bIns="0" rtlCol="0" anchor="t"/>
+          <a:lstStyle/>
+          <a:p>
+            <a:pPr indent="0" marL="0">
+              <a:buNone/>
+            </a:pPr>
+            <a:r>
+              <a:rPr lang="en-US" sz="1200" b="1" dirty="0">
+                <a:solidFill>
+                  <a:srgbClr val="1B1B1E"/>
+                </a:solidFill>
+                <a:latin typeface="Arial" pitchFamily="34" charset="0"/>
+                <a:ea typeface="Arial" pitchFamily="34" charset="-122"/>
+                <a:cs typeface="Arial" pitchFamily="34" charset="-120"/>
+              </a:rPr>
+              <a:t>3 · La cuarta alerta</a:t>
+            </a:r>
+            <a:endParaRPr lang="en-US" sz="1200" dirty="0"/>
+          </a:p>
+        </p:txBody>
+      </p:sp>
+      <p:sp>
+        <p:nvSpPr>
+          <p:cNvPr id="23" name="Text 21"/>
+          <p:cNvSpPr txBox="1"/>
+          <p:nvPr/>
+        </p:nvSpPr>
+        <p:spPr>
+          <a:xfrm>
+            <a:off x="649224" y="3803904"/>
+            <a:ext cx="3675888" cy="603504"/>
+          </a:xfrm>
+          <a:prstGeom prst="rect">
+            <a:avLst/>
+          </a:prstGeom>
+          <a:noFill/>
+          <a:ln/>
+        </p:spPr>
+        <p:txBody>
+          <a:bodyPr wrap="square" lIns="0" tIns="0" rIns="0" bIns="0" rtlCol="0" anchor="t"/>
+          <a:lstStyle/>
+          <a:p>
+            <a:pPr indent="0" marL="0">
+              <a:buNone/>
+            </a:pPr>
+            <a:r>
+              <a:rPr lang="en-US" sz="950" dirty="0">
+                <a:solidFill>
+                  <a:srgbClr val="4D4D4D"/>
+                </a:solidFill>
+                <a:latin typeface="Arial" pitchFamily="34" charset="0"/>
+                <a:ea typeface="Arial" pitchFamily="34" charset="-122"/>
+                <a:cs typeface="Arial" pitchFamily="34" charset="-120"/>
+              </a:rPr>
+              <a:t>Configurar la de países y jurisdicciones, que es la que nadie tiene</a:t>
+            </a:r>
+            <a:endParaRPr lang="en-US" sz="950" dirty="0"/>
+          </a:p>
+        </p:txBody>
+      </p:sp>
+      <p:sp>
+        <p:nvSpPr>
+          <p:cNvPr id="24" name="Shape 22"/>
+          <p:cNvSpPr/>
+          <p:nvPr/>
+        </p:nvSpPr>
+        <p:spPr>
+          <a:xfrm>
+            <a:off x="4672584" y="3310128"/>
+            <a:ext cx="3968496" cy="1335024"/>
+          </a:xfrm>
+          <a:prstGeom prst="roundRect">
+            <a:avLst>
+              <a:gd name="adj" fmla="val 4110"/>
+            </a:avLst>
+          </a:prstGeom>
+          <a:solidFill>
+            <a:srgbClr val="FFFFFF"/>
+          </a:solidFill>
+          <a:ln w="9525">
+            <a:solidFill>
+              <a:srgbClr val="DCE6DE"/>
+            </a:solidFill>
+            <a:prstDash val="solid"/>
+          </a:ln>
+        </p:spPr>
+      </p:sp>
+      <p:sp>
+        <p:nvSpPr>
+          <p:cNvPr id="25" name="Shape 23"/>
+          <p:cNvSpPr/>
+          <p:nvPr/>
+        </p:nvSpPr>
+        <p:spPr>
+          <a:xfrm>
+            <a:off x="4818888" y="3456432"/>
+            <a:ext cx="274320" cy="274320"/>
+          </a:xfrm>
+          <a:prstGeom prst="ellipse">
+            <a:avLst/>
+          </a:prstGeom>
+          <a:solidFill>
+            <a:srgbClr val="87D895"/>
+          </a:solidFill>
+          <a:ln/>
+        </p:spPr>
+      </p:sp>
+      <p:sp>
+        <p:nvSpPr>
+          <p:cNvPr id="26" name="Text 24"/>
+          <p:cNvSpPr txBox="1"/>
+          <p:nvPr/>
+        </p:nvSpPr>
+        <p:spPr>
+          <a:xfrm>
+            <a:off x="4818888" y="3456432"/>
+            <a:ext cx="274320" cy="274320"/>
+          </a:xfrm>
+          <a:prstGeom prst="rect">
+            <a:avLst/>
+          </a:prstGeom>
+          <a:noFill/>
+          <a:ln/>
+        </p:spPr>
+        <p:txBody>
+          <a:bodyPr wrap="square" lIns="0" tIns="0" rIns="0" bIns="0" rtlCol="0" anchor="ctr"/>
+          <a:lstStyle/>
+          <a:p>
+            <a:pPr algn="ctr" indent="0" marL="0">
+              <a:buNone/>
+            </a:pPr>
+            <a:r>
+              <a:rPr lang="en-US" sz="1100" b="1" dirty="0">
+                <a:solidFill>
+                  <a:srgbClr val="1B1B1E"/>
+                </a:solidFill>
+                <a:latin typeface="Arial" pitchFamily="34" charset="0"/>
+                <a:ea typeface="Arial" pitchFamily="34" charset="-122"/>
+                <a:cs typeface="Arial" pitchFamily="34" charset="-120"/>
+              </a:rPr>
+              <a:t>4</a:t>
+            </a:r>
+            <a:endParaRPr lang="en-US" sz="1100" dirty="0"/>
+          </a:p>
+        </p:txBody>
+      </p:sp>
+      <p:sp>
+        <p:nvSpPr>
+          <p:cNvPr id="27" name="Text 25"/>
+          <p:cNvSpPr txBox="1"/>
+          <p:nvPr/>
+        </p:nvSpPr>
+        <p:spPr>
+          <a:xfrm>
+            <a:off x="5175504" y="3438144"/>
+            <a:ext cx="3310128" cy="329184"/>
+          </a:xfrm>
+          <a:prstGeom prst="rect">
+            <a:avLst/>
+          </a:prstGeom>
+          <a:noFill/>
+          <a:ln/>
+        </p:spPr>
+        <p:txBody>
+          <a:bodyPr wrap="square" lIns="0" tIns="0" rIns="0" bIns="0" rtlCol="0" anchor="t"/>
+          <a:lstStyle/>
+          <a:p>
+            <a:pPr indent="0" marL="0">
+              <a:buNone/>
+            </a:pPr>
+            <a:r>
+              <a:rPr lang="en-US" sz="1200" b="1" dirty="0">
+                <a:solidFill>
+                  <a:srgbClr val="1B1B1E"/>
+                </a:solidFill>
+                <a:latin typeface="Arial" pitchFamily="34" charset="0"/>
+                <a:ea typeface="Arial" pitchFamily="34" charset="-122"/>
+                <a:cs typeface="Arial" pitchFamily="34" charset="-120"/>
+              </a:rPr>
+              <a:t>4 · La prueba del IVA</a:t>
+            </a:r>
+            <a:endParaRPr lang="en-US" sz="1200" dirty="0"/>
+          </a:p>
+        </p:txBody>
+      </p:sp>
+      <p:sp>
+        <p:nvSpPr>
+          <p:cNvPr id="28" name="Text 26"/>
+          <p:cNvSpPr txBox="1"/>
+          <p:nvPr/>
+        </p:nvSpPr>
+        <p:spPr>
+          <a:xfrm>
+            <a:off x="4818888" y="3803904"/>
+            <a:ext cx="3675888" cy="603504"/>
+          </a:xfrm>
+          <a:prstGeom prst="rect">
+            <a:avLst/>
+          </a:prstGeom>
+          <a:noFill/>
+          <a:ln/>
+        </p:spPr>
+        <p:txBody>
+          <a:bodyPr wrap="square" lIns="0" tIns="0" rIns="0" bIns="0" rtlCol="0" anchor="t"/>
+          <a:lstStyle/>
+          <a:p>
+            <a:pPr indent="0" marL="0">
+              <a:buNone/>
+            </a:pPr>
+            <a:r>
+              <a:rPr lang="en-US" sz="950" dirty="0">
+                <a:solidFill>
+                  <a:srgbClr val="4D4D4D"/>
+                </a:solidFill>
+                <a:latin typeface="Arial" pitchFamily="34" charset="0"/>
+                <a:ea typeface="Arial" pitchFamily="34" charset="-122"/>
+                <a:cs typeface="Arial" pitchFamily="34" charset="-120"/>
+              </a:rPr>
+              <a:t>Sobre su última operación grande: ¿queda del mismo lado en las tres bases?</a:t>
+            </a:r>
+            <a:endParaRPr lang="en-US" sz="950" dirty="0"/>
+          </a:p>
+        </p:txBody>
+      </p:sp>
+      <p:sp>
+        <p:nvSpPr>
+          <p:cNvPr id="29" name="Shape 27"/>
+          <p:cNvSpPr/>
+          <p:nvPr/>
+        </p:nvSpPr>
+        <p:spPr>
+          <a:xfrm>
+            <a:off x="502920" y="3977640"/>
+            <a:ext cx="8138160" cy="640080"/>
+          </a:xfrm>
+          <a:prstGeom prst="roundRect">
+            <a:avLst>
+              <a:gd name="adj" fmla="val 8571"/>
+            </a:avLst>
+          </a:prstGeom>
+          <a:solidFill>
+            <a:srgbClr val="87D895"/>
+          </a:solidFill>
+          <a:ln/>
+        </p:spPr>
+      </p:sp>
+      <p:sp>
+        <p:nvSpPr>
+          <p:cNvPr id="30" name="Text 28"/>
+          <p:cNvSpPr txBox="1"/>
+          <p:nvPr/>
+        </p:nvSpPr>
+        <p:spPr>
+          <a:xfrm>
+            <a:off x="731520" y="3995928"/>
+            <a:ext cx="7680960" cy="603504"/>
+          </a:xfrm>
+          <a:prstGeom prst="rect">
+            <a:avLst/>
+          </a:prstGeom>
+          <a:noFill/>
+          <a:ln/>
+        </p:spPr>
+        <p:txBody>
+          <a:bodyPr wrap="square" lIns="0" tIns="0" rIns="0" bIns="0" rtlCol="0" anchor="ctr"/>
+          <a:lstStyle/>
+          <a:p>
+            <a:pPr indent="0" marL="0">
+              <a:buNone/>
+            </a:pPr>
+            <a:r>
+              <a:rPr lang="en-US" sz="1200" b="1" dirty="0">
+                <a:solidFill>
+                  <a:srgbClr val="1B1B1E"/>
+                </a:solidFill>
+                <a:latin typeface="Arial" pitchFamily="34" charset="0"/>
+                <a:ea typeface="Arial" pitchFamily="34" charset="-122"/>
+                <a:cs typeface="Arial" pitchFamily="34" charset="-120"/>
+              </a:rPr>
+              <a:t>La próxima sesión es el LUNES 14 de septiembre. Vamos fracción por fracción: traigan la duda de su sector.</a:t>
+            </a:r>
+            <a:endParaRPr lang="en-US" sz="1200" dirty="0"/>
+          </a:p>
+        </p:txBody>
+      </p:sp>
+    </p:spTree>
+  </p:cSld>
+  <p:clrMapOvr>
+    <a:masterClrMapping/>
+  </p:clrMapOvr>
+</p:sld>
+</file>
+
+<file path=ppt/slides/slide43.xml><?xml version="1.0" encoding="utf-8"?>
+<p:sld xmlns:a="http://schemas.openxmlformats.org/drawingml/2006/main" xmlns:r="http://schemas.openxmlformats.org/officeDocument/2006/relationships" xmlns:p="http://schemas.openxmlformats.org/presentationml/2006/main">
+  <p:cSld name="Slide 43">
     <p:bg>
       <p:bgPr>
         <a:solidFill>
@@ -43397,7 +44775,7 @@
         </p:nvSpPr>
         <p:spPr>
           <a:xfrm>
-            <a:off x="502920" y="4023360"/>
+            <a:off x="502920" y="3977640"/>
             <a:ext cx="8138160" cy="640080"/>
           </a:xfrm>
           <a:prstGeom prst="roundRect">
@@ -43419,7 +44797,7 @@
         </p:nvSpPr>
         <p:spPr>
           <a:xfrm>
-            <a:off x="731520" y="4041648"/>
+            <a:off x="731520" y="3995928"/>
             <a:ext cx="7680960" cy="603504"/>
           </a:xfrm>
           <a:prstGeom prst="rect">
@@ -43444,7 +44822,7 @@
                 <a:ea typeface="Arial" pitchFamily="34" charset="-122"/>
                 <a:cs typeface="Arial" pitchFamily="34" charset="-120"/>
               </a:rPr>
-              <a:t>Si no lo preguntó en el alta, no lo tiene. Ese renglón entra al cuestionario esta semana, no en marzo de 2027.</a:t>
+              <a:t>Y el mismo párrafo dice para qué: ese perfil inicial «deberá estar incluido en el sistema de alertas», para detectar la inconsistencia entre lo que el cliente dijo que iba a operar y lo que operó.</a:t>
             </a:r>
             <a:endParaRPr lang="en-US" sz="1200" dirty="0"/>
           </a:p>

--- a/s04/descargables/S04_ALU_01_Presentacion.pptx
+++ b/s04/descargables/S04_ALU_01_Presentacion.pptx
@@ -48,9 +48,10 @@
     <p:sldId id="296" r:id="rId42"/>
     <p:sldId id="297" r:id="rId43"/>
     <p:sldId id="298" r:id="rId44"/>
+    <p:sldId id="299" r:id="rId45"/>
   </p:sldIdLst>
   <p:notesMasterIdLst>
-    <p:notesMasterId r:id="rId45"/>
+    <p:notesMasterId r:id="rId46"/>
   </p:notesMasterIdLst>
   <p:sldSz cx="9144000" cy="5143500"/>
   <p:notesSz cx="5143500" cy="9144000"/>
@@ -3824,6 +3825,94 @@
             <a:fld id="{F7021451-1387-4CA6-816F-3879F97B5CBC}" type="slidenum">
               <a:rPr lang="en-US"/>
               <a:t>43</a:t>
+            </a:fld>
+            <a:endParaRPr lang="en-US"/>
+          </a:p>
+        </p:txBody>
+      </p:sp>
+    </p:spTree>
+    <p:extLst>
+      <p:ext uri="{BB962C8B-B14F-4D97-AF65-F5344CB8AC3E}">
+        <p14:creationId xmlns:p14="http://schemas.microsoft.com/office/powerpoint/2010/main" val="1024086991"/>
+      </p:ext>
+    </p:extLst>
+  </p:cSld>
+  <p:clrMapOvr>
+    <a:masterClrMapping/>
+  </p:clrMapOvr>
+</p:notes>
+</file>
+
+<file path=ppt/notesSlides/notesSlide44.xml><?xml version="1.0" encoding="utf-8"?>
+<p:notes xmlns:a="http://schemas.openxmlformats.org/drawingml/2006/main" xmlns:r="http://schemas.openxmlformats.org/officeDocument/2006/relationships" xmlns:p="http://schemas.openxmlformats.org/presentationml/2006/main">
+  <p:cSld>
+    <p:spTree>
+      <p:nvGrpSpPr>
+        <p:cNvPr id="1" name=""/>
+        <p:cNvGrpSpPr/>
+        <p:nvPr/>
+      </p:nvGrpSpPr>
+      <p:grpSpPr>
+        <a:xfrm>
+          <a:off x="0" y="0"/>
+          <a:ext cx="0" cy="0"/>
+          <a:chOff x="0" y="0"/>
+          <a:chExt cx="0" cy="0"/>
+        </a:xfrm>
+      </p:grpSpPr>
+      <p:sp>
+        <p:nvSpPr>
+          <p:cNvPr id="2" name="Slide Image Placeholder 1"/>
+          <p:cNvSpPr>
+            <a:spLocks noGrp="1" noRot="1" noChangeAspect="1"/>
+          </p:cNvSpPr>
+          <p:nvPr>
+            <p:ph type="sldImg"/>
+          </p:nvPr>
+        </p:nvSpPr>
+        <p:spPr/>
+      </p:sp>
+      <p:sp>
+        <p:nvSpPr>
+          <p:cNvPr id="3" name="Notes Placeholder 2"/>
+          <p:cNvSpPr>
+            <a:spLocks noGrp="1"/>
+          </p:cNvSpPr>
+          <p:nvPr>
+            <p:ph type="body" idx="1"/>
+          </p:nvPr>
+        </p:nvSpPr>
+        <p:spPr/>
+        <p:txBody>
+          <a:bodyPr/>
+          <a:lstStyle/>
+          <a:p>
+            <a:r>
+              <a:rPr lang="en-US" dirty="0"/>
+              <a:t/>
+            </a:r>
+            <a:endParaRPr lang="en-US" dirty="0"/>
+          </a:p>
+        </p:txBody>
+      </p:sp>
+      <p:sp>
+        <p:nvSpPr>
+          <p:cNvPr id="4" name="Slide Number Placeholder 3"/>
+          <p:cNvSpPr>
+            <a:spLocks noGrp="1"/>
+          </p:cNvSpPr>
+          <p:nvPr>
+            <p:ph type="sldNum" sz="quarter" idx="10"/>
+          </p:nvPr>
+        </p:nvSpPr>
+        <p:spPr/>
+        <p:txBody>
+          <a:bodyPr/>
+          <a:lstStyle/>
+          <a:p>
+            <a:fld id="{F7021451-1387-4CA6-816F-3879F97B5CBC}" type="slidenum">
+              <a:rPr lang="en-US"/>
+              <a:t>44</a:t>
             </a:fld>
             <a:endParaRPr lang="en-US"/>
           </a:p>
@@ -30483,7 +30572,7 @@
                 <a:ea typeface="Arial" pitchFamily="34" charset="-122"/>
                 <a:cs typeface="Arial" pitchFamily="34" charset="-120"/>
               </a:rPr>
-              <a:t>RCG 23 QUINQUIES 2 · SÓLO HAY DOS</a:t>
+              <a:t>LGTOC · SUPLETORIA DESDE EL 16 DE JULIO DE 2025</a:t>
             </a:r>
             <a:endParaRPr lang="en-US" sz="1100" dirty="0"/>
           </a:p>
@@ -30522,6 +30611,943 @@
                 <a:ea typeface="Arial" pitchFamily="34" charset="-122"/>
                 <a:cs typeface="Arial" pitchFamily="34" charset="-120"/>
               </a:rPr>
+              <a:t>Fideicomiso: dónde se lee el control</a:t>
+            </a:r>
+            <a:endParaRPr lang="en-US" sz="2700" dirty="0"/>
+          </a:p>
+        </p:txBody>
+      </p:sp>
+      <p:sp>
+        <p:nvSpPr>
+          <p:cNvPr id="9" name="Shape 7"/>
+          <p:cNvSpPr/>
+          <p:nvPr/>
+        </p:nvSpPr>
+        <p:spPr>
+          <a:xfrm>
+            <a:off x="502920" y="1783080"/>
+            <a:ext cx="2578608" cy="1335024"/>
+          </a:xfrm>
+          <a:prstGeom prst="roundRect">
+            <a:avLst>
+              <a:gd name="adj" fmla="val 4110"/>
+            </a:avLst>
+          </a:prstGeom>
+          <a:solidFill>
+            <a:srgbClr val="FFFFFF"/>
+          </a:solidFill>
+          <a:ln w="9525">
+            <a:solidFill>
+              <a:srgbClr val="DCE6DE"/>
+            </a:solidFill>
+            <a:prstDash val="solid"/>
+          </a:ln>
+        </p:spPr>
+      </p:sp>
+      <p:sp>
+        <p:nvSpPr>
+          <p:cNvPr id="10" name="Shape 8"/>
+          <p:cNvSpPr/>
+          <p:nvPr/>
+        </p:nvSpPr>
+        <p:spPr>
+          <a:xfrm>
+            <a:off x="649224" y="1929384"/>
+            <a:ext cx="274320" cy="274320"/>
+          </a:xfrm>
+          <a:prstGeom prst="ellipse">
+            <a:avLst/>
+          </a:prstGeom>
+          <a:solidFill>
+            <a:srgbClr val="87D895"/>
+          </a:solidFill>
+          <a:ln/>
+        </p:spPr>
+      </p:sp>
+      <p:sp>
+        <p:nvSpPr>
+          <p:cNvPr id="11" name="Text 9"/>
+          <p:cNvSpPr txBox="1"/>
+          <p:nvPr/>
+        </p:nvSpPr>
+        <p:spPr>
+          <a:xfrm>
+            <a:off x="649224" y="1929384"/>
+            <a:ext cx="274320" cy="274320"/>
+          </a:xfrm>
+          <a:prstGeom prst="rect">
+            <a:avLst/>
+          </a:prstGeom>
+          <a:noFill/>
+          <a:ln/>
+        </p:spPr>
+        <p:txBody>
+          <a:bodyPr wrap="square" lIns="0" tIns="0" rIns="0" bIns="0" rtlCol="0" anchor="ctr"/>
+          <a:lstStyle/>
+          <a:p>
+            <a:pPr algn="ctr" indent="0" marL="0">
+              <a:buNone/>
+            </a:pPr>
+            <a:r>
+              <a:rPr lang="en-US" sz="1100" b="1" dirty="0">
+                <a:solidFill>
+                  <a:srgbClr val="1B1B1E"/>
+                </a:solidFill>
+                <a:latin typeface="Arial" pitchFamily="34" charset="0"/>
+                <a:ea typeface="Arial" pitchFamily="34" charset="-122"/>
+                <a:cs typeface="Arial" pitchFamily="34" charset="-120"/>
+              </a:rPr>
+              <a:t>1</a:t>
+            </a:r>
+            <a:endParaRPr lang="en-US" sz="1100" dirty="0"/>
+          </a:p>
+        </p:txBody>
+      </p:sp>
+      <p:sp>
+        <p:nvSpPr>
+          <p:cNvPr id="12" name="Text 10"/>
+          <p:cNvSpPr txBox="1"/>
+          <p:nvPr/>
+        </p:nvSpPr>
+        <p:spPr>
+          <a:xfrm>
+            <a:off x="1005840" y="1911096"/>
+            <a:ext cx="1920240" cy="329184"/>
+          </a:xfrm>
+          <a:prstGeom prst="rect">
+            <a:avLst/>
+          </a:prstGeom>
+          <a:noFill/>
+          <a:ln/>
+        </p:spPr>
+        <p:txBody>
+          <a:bodyPr wrap="square" lIns="0" tIns="0" rIns="0" bIns="0" rtlCol="0" anchor="t"/>
+          <a:lstStyle/>
+          <a:p>
+            <a:pPr indent="0" marL="0">
+              <a:buNone/>
+            </a:pPr>
+            <a:r>
+              <a:rPr lang="en-US" sz="1200" b="1" dirty="0">
+                <a:solidFill>
+                  <a:srgbClr val="1B1B1E"/>
+                </a:solidFill>
+                <a:latin typeface="Arial" pitchFamily="34" charset="0"/>
+                <a:ea typeface="Arial" pitchFamily="34" charset="-122"/>
+                <a:cs typeface="Arial" pitchFamily="34" charset="-120"/>
+              </a:rPr>
+              <a:t>Se reservó derechos</a:t>
+            </a:r>
+            <a:endParaRPr lang="en-US" sz="1200" dirty="0"/>
+          </a:p>
+        </p:txBody>
+      </p:sp>
+      <p:sp>
+        <p:nvSpPr>
+          <p:cNvPr id="13" name="Text 11"/>
+          <p:cNvSpPr txBox="1"/>
+          <p:nvPr/>
+        </p:nvSpPr>
+        <p:spPr>
+          <a:xfrm>
+            <a:off x="649224" y="2276856"/>
+            <a:ext cx="2286000" cy="603504"/>
+          </a:xfrm>
+          <a:prstGeom prst="rect">
+            <a:avLst/>
+          </a:prstGeom>
+          <a:noFill/>
+          <a:ln/>
+        </p:spPr>
+        <p:txBody>
+          <a:bodyPr wrap="square" lIns="0" tIns="0" rIns="0" bIns="0" rtlCol="0" anchor="t"/>
+          <a:lstStyle/>
+          <a:p>
+            <a:pPr indent="0" marL="0">
+              <a:buNone/>
+            </a:pPr>
+            <a:r>
+              <a:rPr lang="en-US" sz="950" dirty="0">
+                <a:solidFill>
+                  <a:srgbClr val="4D4D4D"/>
+                </a:solidFill>
+                <a:latin typeface="Arial" pitchFamily="34" charset="0"/>
+                <a:ea typeface="Arial" pitchFamily="34" charset="-122"/>
+                <a:cs typeface="Arial" pitchFamily="34" charset="-120"/>
+              </a:rPr>
+              <a:t>El fideicomitente puede reservarse expresamente derechos y acciones sobre los bienes afectos. Está escrito en el acto constitutivo: se lee, no se pregunta</a:t>
+            </a:r>
+            <a:endParaRPr lang="en-US" sz="950" dirty="0"/>
+          </a:p>
+        </p:txBody>
+      </p:sp>
+      <p:sp>
+        <p:nvSpPr>
+          <p:cNvPr id="14" name="Text 12"/>
+          <p:cNvSpPr txBox="1"/>
+          <p:nvPr/>
+        </p:nvSpPr>
+        <p:spPr>
+          <a:xfrm>
+            <a:off x="649224" y="2889504"/>
+            <a:ext cx="2286000" cy="182880"/>
+          </a:xfrm>
+          <a:prstGeom prst="rect">
+            <a:avLst/>
+          </a:prstGeom>
+          <a:noFill/>
+          <a:ln/>
+        </p:spPr>
+        <p:txBody>
+          <a:bodyPr wrap="square" lIns="0" tIns="0" rIns="0" bIns="0" rtlCol="0" anchor="ctr"/>
+          <a:lstStyle/>
+          <a:p>
+            <a:pPr indent="0" marL="0">
+              <a:buNone/>
+            </a:pPr>
+            <a:r>
+              <a:rPr lang="en-US" sz="850" b="1" dirty="0">
+                <a:solidFill>
+                  <a:srgbClr val="2E7D4F"/>
+                </a:solidFill>
+                <a:latin typeface="Arial" pitchFamily="34" charset="0"/>
+                <a:ea typeface="Arial" pitchFamily="34" charset="-122"/>
+                <a:cs typeface="Arial" pitchFamily="34" charset="-120"/>
+              </a:rPr>
+              <a:t>LGTOC 386, segundo párrafo</a:t>
+            </a:r>
+            <a:endParaRPr lang="en-US" sz="850" dirty="0"/>
+          </a:p>
+        </p:txBody>
+      </p:sp>
+      <p:sp>
+        <p:nvSpPr>
+          <p:cNvPr id="15" name="Shape 13"/>
+          <p:cNvSpPr/>
+          <p:nvPr/>
+        </p:nvSpPr>
+        <p:spPr>
+          <a:xfrm>
+            <a:off x="3282696" y="1783080"/>
+            <a:ext cx="2578608" cy="1335024"/>
+          </a:xfrm>
+          <a:prstGeom prst="roundRect">
+            <a:avLst>
+              <a:gd name="adj" fmla="val 4110"/>
+            </a:avLst>
+          </a:prstGeom>
+          <a:solidFill>
+            <a:srgbClr val="FFFFFF"/>
+          </a:solidFill>
+          <a:ln w="9525">
+            <a:solidFill>
+              <a:srgbClr val="DCE6DE"/>
+            </a:solidFill>
+            <a:prstDash val="solid"/>
+          </a:ln>
+        </p:spPr>
+      </p:sp>
+      <p:sp>
+        <p:nvSpPr>
+          <p:cNvPr id="16" name="Shape 14"/>
+          <p:cNvSpPr/>
+          <p:nvPr/>
+        </p:nvSpPr>
+        <p:spPr>
+          <a:xfrm>
+            <a:off x="3429000" y="1929384"/>
+            <a:ext cx="274320" cy="274320"/>
+          </a:xfrm>
+          <a:prstGeom prst="ellipse">
+            <a:avLst/>
+          </a:prstGeom>
+          <a:solidFill>
+            <a:srgbClr val="87D895"/>
+          </a:solidFill>
+          <a:ln/>
+        </p:spPr>
+      </p:sp>
+      <p:sp>
+        <p:nvSpPr>
+          <p:cNvPr id="17" name="Text 15"/>
+          <p:cNvSpPr txBox="1"/>
+          <p:nvPr/>
+        </p:nvSpPr>
+        <p:spPr>
+          <a:xfrm>
+            <a:off x="3429000" y="1929384"/>
+            <a:ext cx="274320" cy="274320"/>
+          </a:xfrm>
+          <a:prstGeom prst="rect">
+            <a:avLst/>
+          </a:prstGeom>
+          <a:noFill/>
+          <a:ln/>
+        </p:spPr>
+        <p:txBody>
+          <a:bodyPr wrap="square" lIns="0" tIns="0" rIns="0" bIns="0" rtlCol="0" anchor="ctr"/>
+          <a:lstStyle/>
+          <a:p>
+            <a:pPr algn="ctr" indent="0" marL="0">
+              <a:buNone/>
+            </a:pPr>
+            <a:r>
+              <a:rPr lang="en-US" sz="1100" b="1" dirty="0">
+                <a:solidFill>
+                  <a:srgbClr val="1B1B1E"/>
+                </a:solidFill>
+                <a:latin typeface="Arial" pitchFamily="34" charset="0"/>
+                <a:ea typeface="Arial" pitchFamily="34" charset="-122"/>
+                <a:cs typeface="Arial" pitchFamily="34" charset="-120"/>
+              </a:rPr>
+              <a:t>2</a:t>
+            </a:r>
+            <a:endParaRPr lang="en-US" sz="1100" dirty="0"/>
+          </a:p>
+        </p:txBody>
+      </p:sp>
+      <p:sp>
+        <p:nvSpPr>
+          <p:cNvPr id="18" name="Text 16"/>
+          <p:cNvSpPr txBox="1"/>
+          <p:nvPr/>
+        </p:nvSpPr>
+        <p:spPr>
+          <a:xfrm>
+            <a:off x="3785616" y="1911096"/>
+            <a:ext cx="1920240" cy="329184"/>
+          </a:xfrm>
+          <a:prstGeom prst="rect">
+            <a:avLst/>
+          </a:prstGeom>
+          <a:noFill/>
+          <a:ln/>
+        </p:spPr>
+        <p:txBody>
+          <a:bodyPr wrap="square" lIns="0" tIns="0" rIns="0" bIns="0" rtlCol="0" anchor="t"/>
+          <a:lstStyle/>
+          <a:p>
+            <a:pPr indent="0" marL="0">
+              <a:buNone/>
+            </a:pPr>
+            <a:r>
+              <a:rPr lang="en-US" sz="1200" b="1" dirty="0">
+                <a:solidFill>
+                  <a:srgbClr val="1B1B1E"/>
+                </a:solidFill>
+                <a:latin typeface="Arial" pitchFamily="34" charset="0"/>
+                <a:ea typeface="Arial" pitchFamily="34" charset="-122"/>
+                <a:cs typeface="Arial" pitchFamily="34" charset="-120"/>
+              </a:rPr>
+              <a:t>Se reservó la revocación</a:t>
+            </a:r>
+            <a:endParaRPr lang="en-US" sz="1200" dirty="0"/>
+          </a:p>
+        </p:txBody>
+      </p:sp>
+      <p:sp>
+        <p:nvSpPr>
+          <p:cNvPr id="19" name="Text 17"/>
+          <p:cNvSpPr txBox="1"/>
+          <p:nvPr/>
+        </p:nvSpPr>
+        <p:spPr>
+          <a:xfrm>
+            <a:off x="3429000" y="2276856"/>
+            <a:ext cx="2286000" cy="603504"/>
+          </a:xfrm>
+          <a:prstGeom prst="rect">
+            <a:avLst/>
+          </a:prstGeom>
+          <a:noFill/>
+          <a:ln/>
+        </p:spPr>
+        <p:txBody>
+          <a:bodyPr wrap="square" lIns="0" tIns="0" rIns="0" bIns="0" rtlCol="0" anchor="t"/>
+          <a:lstStyle/>
+          <a:p>
+            <a:pPr indent="0" marL="0">
+              <a:buNone/>
+            </a:pPr>
+            <a:r>
+              <a:rPr lang="en-US" sz="950" dirty="0">
+                <a:solidFill>
+                  <a:srgbClr val="4D4D4D"/>
+                </a:solidFill>
+                <a:latin typeface="Arial" pitchFamily="34" charset="0"/>
+                <a:ea typeface="Arial" pitchFamily="34" charset="-122"/>
+                <a:cs typeface="Arial" pitchFamily="34" charset="-120"/>
+              </a:rPr>
+              <a:t>Sólo puede revocar quien se reservó ese derecho al constituir el fideicomiso. Quien puede extinguirlo, manda</a:t>
+            </a:r>
+            <a:endParaRPr lang="en-US" sz="950" dirty="0"/>
+          </a:p>
+        </p:txBody>
+      </p:sp>
+      <p:sp>
+        <p:nvSpPr>
+          <p:cNvPr id="20" name="Text 18"/>
+          <p:cNvSpPr txBox="1"/>
+          <p:nvPr/>
+        </p:nvSpPr>
+        <p:spPr>
+          <a:xfrm>
+            <a:off x="3429000" y="2889504"/>
+            <a:ext cx="2286000" cy="182880"/>
+          </a:xfrm>
+          <a:prstGeom prst="rect">
+            <a:avLst/>
+          </a:prstGeom>
+          <a:noFill/>
+          <a:ln/>
+        </p:spPr>
+        <p:txBody>
+          <a:bodyPr wrap="square" lIns="0" tIns="0" rIns="0" bIns="0" rtlCol="0" anchor="ctr"/>
+          <a:lstStyle/>
+          <a:p>
+            <a:pPr indent="0" marL="0">
+              <a:buNone/>
+            </a:pPr>
+            <a:r>
+              <a:rPr lang="en-US" sz="850" b="1" dirty="0">
+                <a:solidFill>
+                  <a:srgbClr val="2E7D4F"/>
+                </a:solidFill>
+                <a:latin typeface="Arial" pitchFamily="34" charset="0"/>
+                <a:ea typeface="Arial" pitchFamily="34" charset="-122"/>
+                <a:cs typeface="Arial" pitchFamily="34" charset="-120"/>
+              </a:rPr>
+              <a:t>LGTOC 392 fr. VI</a:t>
+            </a:r>
+            <a:endParaRPr lang="en-US" sz="850" dirty="0"/>
+          </a:p>
+        </p:txBody>
+      </p:sp>
+      <p:sp>
+        <p:nvSpPr>
+          <p:cNvPr id="21" name="Shape 19"/>
+          <p:cNvSpPr/>
+          <p:nvPr/>
+        </p:nvSpPr>
+        <p:spPr>
+          <a:xfrm>
+            <a:off x="6062472" y="1783080"/>
+            <a:ext cx="2578608" cy="1335024"/>
+          </a:xfrm>
+          <a:prstGeom prst="roundRect">
+            <a:avLst>
+              <a:gd name="adj" fmla="val 4110"/>
+            </a:avLst>
+          </a:prstGeom>
+          <a:solidFill>
+            <a:srgbClr val="FFFFFF"/>
+          </a:solidFill>
+          <a:ln w="9525">
+            <a:solidFill>
+              <a:srgbClr val="DCE6DE"/>
+            </a:solidFill>
+            <a:prstDash val="solid"/>
+          </a:ln>
+        </p:spPr>
+      </p:sp>
+      <p:sp>
+        <p:nvSpPr>
+          <p:cNvPr id="22" name="Shape 20"/>
+          <p:cNvSpPr/>
+          <p:nvPr/>
+        </p:nvSpPr>
+        <p:spPr>
+          <a:xfrm>
+            <a:off x="6208776" y="1929384"/>
+            <a:ext cx="274320" cy="274320"/>
+          </a:xfrm>
+          <a:prstGeom prst="ellipse">
+            <a:avLst/>
+          </a:prstGeom>
+          <a:solidFill>
+            <a:srgbClr val="87D895"/>
+          </a:solidFill>
+          <a:ln/>
+        </p:spPr>
+      </p:sp>
+      <p:sp>
+        <p:nvSpPr>
+          <p:cNvPr id="23" name="Text 21"/>
+          <p:cNvSpPr txBox="1"/>
+          <p:nvPr/>
+        </p:nvSpPr>
+        <p:spPr>
+          <a:xfrm>
+            <a:off x="6208776" y="1929384"/>
+            <a:ext cx="274320" cy="274320"/>
+          </a:xfrm>
+          <a:prstGeom prst="rect">
+            <a:avLst/>
+          </a:prstGeom>
+          <a:noFill/>
+          <a:ln/>
+        </p:spPr>
+        <p:txBody>
+          <a:bodyPr wrap="square" lIns="0" tIns="0" rIns="0" bIns="0" rtlCol="0" anchor="ctr"/>
+          <a:lstStyle/>
+          <a:p>
+            <a:pPr algn="ctr" indent="0" marL="0">
+              <a:buNone/>
+            </a:pPr>
+            <a:r>
+              <a:rPr lang="en-US" sz="1100" b="1" dirty="0">
+                <a:solidFill>
+                  <a:srgbClr val="1B1B1E"/>
+                </a:solidFill>
+                <a:latin typeface="Arial" pitchFamily="34" charset="0"/>
+                <a:ea typeface="Arial" pitchFamily="34" charset="-122"/>
+                <a:cs typeface="Arial" pitchFamily="34" charset="-120"/>
+              </a:rPr>
+              <a:t>3</a:t>
+            </a:r>
+            <a:endParaRPr lang="en-US" sz="1100" dirty="0"/>
+          </a:p>
+        </p:txBody>
+      </p:sp>
+      <p:sp>
+        <p:nvSpPr>
+          <p:cNvPr id="24" name="Text 22"/>
+          <p:cNvSpPr txBox="1"/>
+          <p:nvPr/>
+        </p:nvSpPr>
+        <p:spPr>
+          <a:xfrm>
+            <a:off x="6565392" y="1911096"/>
+            <a:ext cx="1920240" cy="329184"/>
+          </a:xfrm>
+          <a:prstGeom prst="rect">
+            <a:avLst/>
+          </a:prstGeom>
+          <a:noFill/>
+          <a:ln/>
+        </p:spPr>
+        <p:txBody>
+          <a:bodyPr wrap="square" lIns="0" tIns="0" rIns="0" bIns="0" rtlCol="0" anchor="t"/>
+          <a:lstStyle/>
+          <a:p>
+            <a:pPr indent="0" marL="0">
+              <a:buNone/>
+            </a:pPr>
+            <a:r>
+              <a:rPr lang="en-US" sz="1200" b="1" dirty="0">
+                <a:solidFill>
+                  <a:srgbClr val="1B1B1E"/>
+                </a:solidFill>
+                <a:latin typeface="Arial" pitchFamily="34" charset="0"/>
+                <a:ea typeface="Arial" pitchFamily="34" charset="-122"/>
+                <a:cs typeface="Arial" pitchFamily="34" charset="-120"/>
+              </a:rPr>
+              <a:t>No hay fideicomisario</a:t>
+            </a:r>
+            <a:endParaRPr lang="en-US" sz="1200" dirty="0"/>
+          </a:p>
+        </p:txBody>
+      </p:sp>
+      <p:sp>
+        <p:nvSpPr>
+          <p:cNvPr id="25" name="Text 23"/>
+          <p:cNvSpPr txBox="1"/>
+          <p:nvPr/>
+        </p:nvSpPr>
+        <p:spPr>
+          <a:xfrm>
+            <a:off x="6208776" y="2276856"/>
+            <a:ext cx="2286000" cy="603504"/>
+          </a:xfrm>
+          <a:prstGeom prst="rect">
+            <a:avLst/>
+          </a:prstGeom>
+          <a:noFill/>
+          <a:ln/>
+        </p:spPr>
+        <p:txBody>
+          <a:bodyPr wrap="square" lIns="0" tIns="0" rIns="0" bIns="0" rtlCol="0" anchor="t"/>
+          <a:lstStyle/>
+          <a:p>
+            <a:pPr indent="0" marL="0">
+              <a:buNone/>
+            </a:pPr>
+            <a:r>
+              <a:rPr lang="en-US" sz="950" dirty="0">
+                <a:solidFill>
+                  <a:srgbClr val="4D4D4D"/>
+                </a:solidFill>
+                <a:latin typeface="Arial" pitchFamily="34" charset="0"/>
+                <a:ea typeface="Arial" pitchFamily="34" charset="-122"/>
+                <a:cs typeface="Arial" pitchFamily="34" charset="-120"/>
+              </a:rPr>
+              <a:t>El fideicomiso es válido aunque se constituya sin señalarlo. La identificación no se detiene: el control se busca en las demás figuras</a:t>
+            </a:r>
+            <a:endParaRPr lang="en-US" sz="950" dirty="0"/>
+          </a:p>
+        </p:txBody>
+      </p:sp>
+      <p:sp>
+        <p:nvSpPr>
+          <p:cNvPr id="26" name="Text 24"/>
+          <p:cNvSpPr txBox="1"/>
+          <p:nvPr/>
+        </p:nvSpPr>
+        <p:spPr>
+          <a:xfrm>
+            <a:off x="6208776" y="2889504"/>
+            <a:ext cx="2286000" cy="182880"/>
+          </a:xfrm>
+          <a:prstGeom prst="rect">
+            <a:avLst/>
+          </a:prstGeom>
+          <a:noFill/>
+          <a:ln/>
+        </p:spPr>
+        <p:txBody>
+          <a:bodyPr wrap="square" lIns="0" tIns="0" rIns="0" bIns="0" rtlCol="0" anchor="ctr"/>
+          <a:lstStyle/>
+          <a:p>
+            <a:pPr indent="0" marL="0">
+              <a:buNone/>
+            </a:pPr>
+            <a:r>
+              <a:rPr lang="en-US" sz="850" b="1" dirty="0">
+                <a:solidFill>
+                  <a:srgbClr val="2E7D4F"/>
+                </a:solidFill>
+                <a:latin typeface="Arial" pitchFamily="34" charset="0"/>
+                <a:ea typeface="Arial" pitchFamily="34" charset="-122"/>
+                <a:cs typeface="Arial" pitchFamily="34" charset="-120"/>
+              </a:rPr>
+              <a:t>LGTOC 382, tercer párrafo</a:t>
+            </a:r>
+            <a:endParaRPr lang="en-US" sz="850" dirty="0"/>
+          </a:p>
+        </p:txBody>
+      </p:sp>
+      <p:sp>
+        <p:nvSpPr>
+          <p:cNvPr id="27" name="Shape 25"/>
+          <p:cNvSpPr/>
+          <p:nvPr/>
+        </p:nvSpPr>
+        <p:spPr>
+          <a:xfrm>
+            <a:off x="502920" y="4069080"/>
+            <a:ext cx="8138160" cy="640080"/>
+          </a:xfrm>
+          <a:prstGeom prst="roundRect">
+            <a:avLst>
+              <a:gd name="adj" fmla="val 8571"/>
+            </a:avLst>
+          </a:prstGeom>
+          <a:solidFill>
+            <a:srgbClr val="87D895"/>
+          </a:solidFill>
+          <a:ln/>
+        </p:spPr>
+      </p:sp>
+      <p:sp>
+        <p:nvSpPr>
+          <p:cNvPr id="28" name="Text 26"/>
+          <p:cNvSpPr txBox="1"/>
+          <p:nvPr/>
+        </p:nvSpPr>
+        <p:spPr>
+          <a:xfrm>
+            <a:off x="731520" y="4087368"/>
+            <a:ext cx="7680960" cy="603504"/>
+          </a:xfrm>
+          <a:prstGeom prst="rect">
+            <a:avLst/>
+          </a:prstGeom>
+          <a:noFill/>
+          <a:ln/>
+        </p:spPr>
+        <p:txBody>
+          <a:bodyPr wrap="square" lIns="0" tIns="0" rIns="0" bIns="0" rtlCol="0" anchor="ctr"/>
+          <a:lstStyle/>
+          <a:p>
+            <a:pPr indent="0" marL="0">
+              <a:buNone/>
+            </a:pPr>
+            <a:r>
+              <a:rPr lang="en-US" sz="1200" b="1" dirty="0">
+                <a:solidFill>
+                  <a:srgbClr val="1B1B1E"/>
+                </a:solidFill>
+                <a:latin typeface="Arial" pitchFamily="34" charset="0"/>
+                <a:ea typeface="Arial" pitchFamily="34" charset="-122"/>
+                <a:cs typeface="Arial" pitchFamily="34" charset="-120"/>
+              </a:rPr>
+              <a:t>Los fideicomisos secretos están prohibidos desde 1932 (LGTOC 394 fr. I). Al cliente que se niega a decir quién interviene no le contestas con el Acuerdo: le contestas con la ley de la materia.</a:t>
+            </a:r>
+            <a:endParaRPr lang="en-US" sz="1200" dirty="0"/>
+          </a:p>
+        </p:txBody>
+      </p:sp>
+    </p:spTree>
+  </p:cSld>
+  <p:clrMapOvr>
+    <a:masterClrMapping/>
+  </p:clrMapOvr>
+</p:sld>
+</file>
+
+<file path=ppt/slides/slide36.xml><?xml version="1.0" encoding="utf-8"?>
+<p:sld xmlns:a="http://schemas.openxmlformats.org/drawingml/2006/main" xmlns:r="http://schemas.openxmlformats.org/officeDocument/2006/relationships" xmlns:p="http://schemas.openxmlformats.org/presentationml/2006/main">
+  <p:cSld name="Slide 36">
+    <p:bg>
+      <p:bgPr>
+        <a:solidFill>
+          <a:srgbClr val="F6F8F6"/>
+        </a:solidFill>
+      </p:bgPr>
+    </p:bg>
+    <p:spTree>
+      <p:nvGrpSpPr>
+        <p:cNvPr id="1" name=""/>
+        <p:cNvGrpSpPr/>
+        <p:nvPr/>
+      </p:nvGrpSpPr>
+      <p:grpSpPr>
+        <a:xfrm>
+          <a:off x="0" y="0"/>
+          <a:ext cx="0" cy="0"/>
+          <a:chOff x="0" y="0"/>
+          <a:chExt cx="0" cy="0"/>
+        </a:xfrm>
+      </p:grpSpPr>
+      <p:sp>
+        <p:nvSpPr>
+          <p:cNvPr id="2" name="Shape 0"/>
+          <p:cNvSpPr/>
+          <p:nvPr/>
+        </p:nvSpPr>
+        <p:spPr>
+          <a:xfrm>
+            <a:off x="0" y="4846320"/>
+            <a:ext cx="9144000" cy="18288"/>
+          </a:xfrm>
+          <a:prstGeom prst="rect">
+            <a:avLst/>
+          </a:prstGeom>
+          <a:solidFill>
+            <a:srgbClr val="DCE6DE"/>
+          </a:solidFill>
+          <a:ln/>
+        </p:spPr>
+      </p:sp>
+      <p:sp>
+        <p:nvSpPr>
+          <p:cNvPr id="3" name="Text 1"/>
+          <p:cNvSpPr txBox="1"/>
+          <p:nvPr/>
+        </p:nvSpPr>
+        <p:spPr>
+          <a:xfrm>
+            <a:off x="502920" y="4882896"/>
+            <a:ext cx="6949440" cy="219456"/>
+          </a:xfrm>
+          <a:prstGeom prst="rect">
+            <a:avLst/>
+          </a:prstGeom>
+          <a:noFill/>
+          <a:ln/>
+        </p:spPr>
+        <p:txBody>
+          <a:bodyPr wrap="square" lIns="0" tIns="0" rIns="0" bIns="0" rtlCol="0" anchor="ctr"/>
+          <a:lstStyle/>
+          <a:p>
+            <a:pPr indent="0" marL="0">
+              <a:buNone/>
+            </a:pPr>
+            <a:r>
+              <a:rPr lang="en-US" sz="800" dirty="0">
+                <a:solidFill>
+                  <a:srgbClr val="4D4D4D"/>
+                </a:solidFill>
+                <a:latin typeface="Arial" pitchFamily="34" charset="0"/>
+                <a:ea typeface="Arial" pitchFamily="34" charset="-122"/>
+                <a:cs typeface="Arial" pitchFamily="34" charset="-120"/>
+              </a:rPr>
+              <a:t>Taller Antilavado 360 · Sesión 4 · 8 de septiembre de 2026 · GMC360 / 360Educa</a:t>
+            </a:r>
+            <a:endParaRPr lang="en-US" sz="800" dirty="0"/>
+          </a:p>
+        </p:txBody>
+      </p:sp>
+      <p:sp>
+        <p:nvSpPr>
+          <p:cNvPr id="4" name="Text 2"/>
+          <p:cNvSpPr txBox="1"/>
+          <p:nvPr/>
+        </p:nvSpPr>
+        <p:spPr>
+          <a:xfrm>
+            <a:off x="8138160" y="4864608"/>
+            <a:ext cx="502920" cy="237744"/>
+          </a:xfrm>
+          <a:prstGeom prst="rect">
+            <a:avLst/>
+          </a:prstGeom>
+          <a:noFill/>
+          <a:ln/>
+        </p:spPr>
+        <p:txBody>
+          <a:bodyPr wrap="square" lIns="0" tIns="0" rIns="0" bIns="0" rtlCol="0" anchor="ctr"/>
+          <a:lstStyle/>
+          <a:p>
+            <a:pPr algn="r" indent="0" marL="0">
+              <a:buNone/>
+            </a:pPr>
+            <a:r>
+              <a:rPr lang="en-US" sz="900" b="1" dirty="0">
+                <a:solidFill>
+                  <a:srgbClr val="2E7D4F"/>
+                </a:solidFill>
+                <a:latin typeface="Arial" pitchFamily="34" charset="0"/>
+                <a:ea typeface="Arial" pitchFamily="34" charset="-122"/>
+                <a:cs typeface="Arial" pitchFamily="34" charset="-120"/>
+              </a:rPr>
+              <a:t>36</a:t>
+            </a:r>
+            <a:endParaRPr lang="en-US" sz="900" dirty="0"/>
+          </a:p>
+        </p:txBody>
+      </p:sp>
+      <p:sp>
+        <p:nvSpPr>
+          <p:cNvPr id="5" name="Shape 3"/>
+          <p:cNvSpPr/>
+          <p:nvPr/>
+        </p:nvSpPr>
+        <p:spPr>
+          <a:xfrm>
+            <a:off x="502920" y="384048"/>
+            <a:ext cx="384048" cy="384048"/>
+          </a:xfrm>
+          <a:prstGeom prst="ellipse">
+            <a:avLst/>
+          </a:prstGeom>
+          <a:solidFill>
+            <a:srgbClr val="64C27B"/>
+          </a:solidFill>
+          <a:ln/>
+        </p:spPr>
+      </p:sp>
+      <p:sp>
+        <p:nvSpPr>
+          <p:cNvPr id="6" name="Text 4"/>
+          <p:cNvSpPr txBox="1"/>
+          <p:nvPr/>
+        </p:nvSpPr>
+        <p:spPr>
+          <a:xfrm>
+            <a:off x="502920" y="384048"/>
+            <a:ext cx="384048" cy="384048"/>
+          </a:xfrm>
+          <a:prstGeom prst="rect">
+            <a:avLst/>
+          </a:prstGeom>
+          <a:noFill/>
+          <a:ln/>
+        </p:spPr>
+        <p:txBody>
+          <a:bodyPr wrap="square" lIns="0" tIns="0" rIns="0" bIns="0" rtlCol="0" anchor="ctr"/>
+          <a:lstStyle/>
+          <a:p>
+            <a:pPr algn="ctr" indent="0" marL="0">
+              <a:buNone/>
+            </a:pPr>
+            <a:r>
+              <a:rPr lang="en-US" sz="1300" b="1" dirty="0">
+                <a:solidFill>
+                  <a:srgbClr val="1B1B1E"/>
+                </a:solidFill>
+                <a:latin typeface="Arial" pitchFamily="34" charset="0"/>
+                <a:ea typeface="Arial" pitchFamily="34" charset="-122"/>
+                <a:cs typeface="Arial" pitchFamily="34" charset="-120"/>
+              </a:rPr>
+              <a:t>36</a:t>
+            </a:r>
+            <a:endParaRPr lang="en-US" sz="1300" dirty="0"/>
+          </a:p>
+        </p:txBody>
+      </p:sp>
+      <p:sp>
+        <p:nvSpPr>
+          <p:cNvPr id="7" name="Text 5"/>
+          <p:cNvSpPr txBox="1"/>
+          <p:nvPr/>
+        </p:nvSpPr>
+        <p:spPr>
+          <a:xfrm>
+            <a:off x="1024128" y="420624"/>
+            <a:ext cx="7589520" cy="292608"/>
+          </a:xfrm>
+          <a:prstGeom prst="rect">
+            <a:avLst/>
+          </a:prstGeom>
+          <a:noFill/>
+          <a:ln/>
+        </p:spPr>
+        <p:txBody>
+          <a:bodyPr wrap="square" lIns="0" tIns="0" rIns="0" bIns="0" rtlCol="0" anchor="ctr"/>
+          <a:lstStyle/>
+          <a:p>
+            <a:pPr indent="0" marL="0">
+              <a:buNone/>
+            </a:pPr>
+            <a:r>
+              <a:rPr lang="en-US" sz="1100" b="1" spc="120" kern="0" dirty="0">
+                <a:solidFill>
+                  <a:srgbClr val="2E7D4F"/>
+                </a:solidFill>
+                <a:latin typeface="Arial" pitchFamily="34" charset="0"/>
+                <a:ea typeface="Arial" pitchFamily="34" charset="-122"/>
+                <a:cs typeface="Arial" pitchFamily="34" charset="-120"/>
+              </a:rPr>
+              <a:t>RCG 23 QUINQUIES 2 · SÓLO HAY DOS</a:t>
+            </a:r>
+            <a:endParaRPr lang="en-US" sz="1100" dirty="0"/>
+          </a:p>
+        </p:txBody>
+      </p:sp>
+      <p:sp>
+        <p:nvSpPr>
+          <p:cNvPr id="8" name="Text 6"/>
+          <p:cNvSpPr txBox="1"/>
+          <p:nvPr/>
+        </p:nvSpPr>
+        <p:spPr>
+          <a:xfrm>
+            <a:off x="502920" y="960120"/>
+            <a:ext cx="8138160" cy="786384"/>
+          </a:xfrm>
+          <a:prstGeom prst="rect">
+            <a:avLst/>
+          </a:prstGeom>
+          <a:noFill/>
+          <a:ln/>
+        </p:spPr>
+        <p:txBody>
+          <a:bodyPr wrap="square" lIns="0" tIns="0" rIns="0" bIns="0" rtlCol="0" anchor="t"/>
+          <a:lstStyle/>
+          <a:p>
+            <a:pPr indent="0" marL="0">
+              <a:buNone/>
+            </a:pPr>
+            <a:r>
+              <a:rPr lang="en-US" sz="2700" b="1" dirty="0">
+                <a:solidFill>
+                  <a:srgbClr val="1B1B1E"/>
+                </a:solidFill>
+                <a:latin typeface="Arial" pitchFamily="34" charset="0"/>
+                <a:ea typeface="Arial" pitchFamily="34" charset="-122"/>
+                <a:cs typeface="Arial" pitchFamily="34" charset="-120"/>
+              </a:rPr>
               <a:t>Las dos excepciones, y hasta dónde llegan</a:t>
             </a:r>
             <a:endParaRPr lang="en-US" sz="2700" dirty="0"/>
@@ -30530,7 +31556,7 @@
       </p:sp>
       <p:graphicFrame>
         <p:nvGraphicFramePr>
-          <p:cNvPr id="36" name="Table 0"/>
+          <p:cNvPr id="37" name="Table 0"/>
           <p:cNvGraphicFramePr>
             <a:graphicFrameLocks noGrp="1"/>
           </p:cNvGraphicFramePr>
@@ -31235,9 +32261,9 @@
 </p:sld>
 </file>
 
-<file path=ppt/slides/slide36.xml><?xml version="1.0" encoding="utf-8"?>
+<file path=ppt/slides/slide37.xml><?xml version="1.0" encoding="utf-8"?>
 <p:sld xmlns:a="http://schemas.openxmlformats.org/drawingml/2006/main" xmlns:r="http://schemas.openxmlformats.org/officeDocument/2006/relationships" xmlns:p="http://schemas.openxmlformats.org/presentationml/2006/main">
-  <p:cSld name="Slide 36">
+  <p:cSld name="Slide 37">
     <p:bg>
       <p:bgPr>
         <a:solidFill>
@@ -31351,7 +32377,7 @@
                 <a:ea typeface="Arial" pitchFamily="34" charset="-122"/>
                 <a:cs typeface="Arial" pitchFamily="34" charset="-120"/>
               </a:rPr>
-              <a:t>36</a:t>
+              <a:t>37</a:t>
             </a:r>
             <a:endParaRPr lang="en-US" sz="900" dirty="0"/>
           </a:p>
@@ -31410,7 +32436,7 @@
                 <a:ea typeface="Arial" pitchFamily="34" charset="-122"/>
                 <a:cs typeface="Arial" pitchFamily="34" charset="-120"/>
               </a:rPr>
-              <a:t>36</a:t>
+              <a:t>37</a:t>
             </a:r>
             <a:endParaRPr lang="en-US" sz="1300" dirty="0"/>
           </a:p>
@@ -31496,7 +32522,7 @@
       </p:sp>
       <p:graphicFrame>
         <p:nvGraphicFramePr>
-          <p:cNvPr id="37" name="Table 0"/>
+          <p:cNvPr id="38" name="Table 0"/>
           <p:cNvGraphicFramePr>
             <a:graphicFrameLocks noGrp="1"/>
           </p:cNvGraphicFramePr>
@@ -33036,9 +34062,9 @@
 </p:sld>
 </file>
 
-<file path=ppt/slides/slide37.xml><?xml version="1.0" encoding="utf-8"?>
+<file path=ppt/slides/slide38.xml><?xml version="1.0" encoding="utf-8"?>
 <p:sld xmlns:a="http://schemas.openxmlformats.org/drawingml/2006/main" xmlns:r="http://schemas.openxmlformats.org/officeDocument/2006/relationships" xmlns:p="http://schemas.openxmlformats.org/presentationml/2006/main">
-  <p:cSld name="Slide 37">
+  <p:cSld name="Slide 38">
     <p:bg>
       <p:bgPr>
         <a:solidFill>
@@ -33152,7 +34178,7 @@
                 <a:ea typeface="Arial" pitchFamily="34" charset="-122"/>
                 <a:cs typeface="Arial" pitchFamily="34" charset="-120"/>
               </a:rPr>
-              <a:t>37</a:t>
+              <a:t>38</a:t>
             </a:r>
             <a:endParaRPr lang="en-US" sz="900" dirty="0"/>
           </a:p>
@@ -33482,9 +34508,9 @@
 </p:sld>
 </file>
 
-<file path=ppt/slides/slide38.xml><?xml version="1.0" encoding="utf-8"?>
+<file path=ppt/slides/slide39.xml><?xml version="1.0" encoding="utf-8"?>
 <p:sld xmlns:a="http://schemas.openxmlformats.org/drawingml/2006/main" xmlns:r="http://schemas.openxmlformats.org/officeDocument/2006/relationships" xmlns:p="http://schemas.openxmlformats.org/presentationml/2006/main">
-  <p:cSld name="Slide 38">
+  <p:cSld name="Slide 39">
     <p:bg>
       <p:bgPr>
         <a:solidFill>
@@ -33598,7 +34624,7 @@
                 <a:ea typeface="Arial" pitchFamily="34" charset="-122"/>
                 <a:cs typeface="Arial" pitchFamily="34" charset="-120"/>
               </a:rPr>
-              <a:t>38</a:t>
+              <a:t>39</a:t>
             </a:r>
             <a:endParaRPr lang="en-US" sz="900" dirty="0"/>
           </a:p>
@@ -33657,7 +34683,7 @@
                 <a:ea typeface="Arial" pitchFamily="34" charset="-122"/>
                 <a:cs typeface="Arial" pitchFamily="34" charset="-120"/>
               </a:rPr>
-              <a:t>38</a:t>
+              <a:t>39</a:t>
             </a:r>
             <a:endParaRPr lang="en-US" sz="1300" dirty="0"/>
           </a:p>
@@ -33743,7 +34769,7 @@
       </p:sp>
       <p:graphicFrame>
         <p:nvGraphicFramePr>
-          <p:cNvPr id="39" name="Table 0"/>
+          <p:cNvPr id="40" name="Table 0"/>
           <p:cNvGraphicFramePr>
             <a:graphicFrameLocks noGrp="1"/>
           </p:cNvGraphicFramePr>
@@ -36295,943 +37321,6 @@
                 <a:cs typeface="Arial" pitchFamily="34" charset="-120"/>
               </a:rPr>
               <a:t>Prohíbe pagar y también ACEPTAR el pago. Sanción del L 53 fr. VII con L 54 fr. III: 10,000 a 65,000 UMA, o del 10 al 100 % del valor del acto, la que resulte mayor.</a:t>
-            </a:r>
-            <a:endParaRPr lang="en-US" sz="1200" dirty="0"/>
-          </a:p>
-        </p:txBody>
-      </p:sp>
-    </p:spTree>
-  </p:cSld>
-  <p:clrMapOvr>
-    <a:masterClrMapping/>
-  </p:clrMapOvr>
-</p:sld>
-</file>
-
-<file path=ppt/slides/slide39.xml><?xml version="1.0" encoding="utf-8"?>
-<p:sld xmlns:a="http://schemas.openxmlformats.org/drawingml/2006/main" xmlns:r="http://schemas.openxmlformats.org/officeDocument/2006/relationships" xmlns:p="http://schemas.openxmlformats.org/presentationml/2006/main">
-  <p:cSld name="Slide 39">
-    <p:bg>
-      <p:bgPr>
-        <a:solidFill>
-          <a:srgbClr val="F6F8F6"/>
-        </a:solidFill>
-      </p:bgPr>
-    </p:bg>
-    <p:spTree>
-      <p:nvGrpSpPr>
-        <p:cNvPr id="1" name=""/>
-        <p:cNvGrpSpPr/>
-        <p:nvPr/>
-      </p:nvGrpSpPr>
-      <p:grpSpPr>
-        <a:xfrm>
-          <a:off x="0" y="0"/>
-          <a:ext cx="0" cy="0"/>
-          <a:chOff x="0" y="0"/>
-          <a:chExt cx="0" cy="0"/>
-        </a:xfrm>
-      </p:grpSpPr>
-      <p:sp>
-        <p:nvSpPr>
-          <p:cNvPr id="2" name="Shape 0"/>
-          <p:cNvSpPr/>
-          <p:nvPr/>
-        </p:nvSpPr>
-        <p:spPr>
-          <a:xfrm>
-            <a:off x="0" y="4846320"/>
-            <a:ext cx="9144000" cy="18288"/>
-          </a:xfrm>
-          <a:prstGeom prst="rect">
-            <a:avLst/>
-          </a:prstGeom>
-          <a:solidFill>
-            <a:srgbClr val="DCE6DE"/>
-          </a:solidFill>
-          <a:ln/>
-        </p:spPr>
-      </p:sp>
-      <p:sp>
-        <p:nvSpPr>
-          <p:cNvPr id="3" name="Text 1"/>
-          <p:cNvSpPr txBox="1"/>
-          <p:nvPr/>
-        </p:nvSpPr>
-        <p:spPr>
-          <a:xfrm>
-            <a:off x="502920" y="4882896"/>
-            <a:ext cx="6949440" cy="219456"/>
-          </a:xfrm>
-          <a:prstGeom prst="rect">
-            <a:avLst/>
-          </a:prstGeom>
-          <a:noFill/>
-          <a:ln/>
-        </p:spPr>
-        <p:txBody>
-          <a:bodyPr wrap="square" lIns="0" tIns="0" rIns="0" bIns="0" rtlCol="0" anchor="ctr"/>
-          <a:lstStyle/>
-          <a:p>
-            <a:pPr indent="0" marL="0">
-              <a:buNone/>
-            </a:pPr>
-            <a:r>
-              <a:rPr lang="en-US" sz="800" dirty="0">
-                <a:solidFill>
-                  <a:srgbClr val="4D4D4D"/>
-                </a:solidFill>
-                <a:latin typeface="Arial" pitchFamily="34" charset="0"/>
-                <a:ea typeface="Arial" pitchFamily="34" charset="-122"/>
-                <a:cs typeface="Arial" pitchFamily="34" charset="-120"/>
-              </a:rPr>
-              <a:t>Taller Antilavado 360 · Sesión 4 · 8 de septiembre de 2026 · GMC360 / 360Educa</a:t>
-            </a:r>
-            <a:endParaRPr lang="en-US" sz="800" dirty="0"/>
-          </a:p>
-        </p:txBody>
-      </p:sp>
-      <p:sp>
-        <p:nvSpPr>
-          <p:cNvPr id="4" name="Text 2"/>
-          <p:cNvSpPr txBox="1"/>
-          <p:nvPr/>
-        </p:nvSpPr>
-        <p:spPr>
-          <a:xfrm>
-            <a:off x="8138160" y="4864608"/>
-            <a:ext cx="502920" cy="237744"/>
-          </a:xfrm>
-          <a:prstGeom prst="rect">
-            <a:avLst/>
-          </a:prstGeom>
-          <a:noFill/>
-          <a:ln/>
-        </p:spPr>
-        <p:txBody>
-          <a:bodyPr wrap="square" lIns="0" tIns="0" rIns="0" bIns="0" rtlCol="0" anchor="ctr"/>
-          <a:lstStyle/>
-          <a:p>
-            <a:pPr algn="r" indent="0" marL="0">
-              <a:buNone/>
-            </a:pPr>
-            <a:r>
-              <a:rPr lang="en-US" sz="900" b="1" dirty="0">
-                <a:solidFill>
-                  <a:srgbClr val="2E7D4F"/>
-                </a:solidFill>
-                <a:latin typeface="Arial" pitchFamily="34" charset="0"/>
-                <a:ea typeface="Arial" pitchFamily="34" charset="-122"/>
-                <a:cs typeface="Arial" pitchFamily="34" charset="-120"/>
-              </a:rPr>
-              <a:t>39</a:t>
-            </a:r>
-            <a:endParaRPr lang="en-US" sz="900" dirty="0"/>
-          </a:p>
-        </p:txBody>
-      </p:sp>
-      <p:sp>
-        <p:nvSpPr>
-          <p:cNvPr id="5" name="Shape 3"/>
-          <p:cNvSpPr/>
-          <p:nvPr/>
-        </p:nvSpPr>
-        <p:spPr>
-          <a:xfrm>
-            <a:off x="502920" y="384048"/>
-            <a:ext cx="384048" cy="384048"/>
-          </a:xfrm>
-          <a:prstGeom prst="ellipse">
-            <a:avLst/>
-          </a:prstGeom>
-          <a:solidFill>
-            <a:srgbClr val="64C27B"/>
-          </a:solidFill>
-          <a:ln/>
-        </p:spPr>
-      </p:sp>
-      <p:sp>
-        <p:nvSpPr>
-          <p:cNvPr id="6" name="Text 4"/>
-          <p:cNvSpPr txBox="1"/>
-          <p:nvPr/>
-        </p:nvSpPr>
-        <p:spPr>
-          <a:xfrm>
-            <a:off x="502920" y="384048"/>
-            <a:ext cx="384048" cy="384048"/>
-          </a:xfrm>
-          <a:prstGeom prst="rect">
-            <a:avLst/>
-          </a:prstGeom>
-          <a:noFill/>
-          <a:ln/>
-        </p:spPr>
-        <p:txBody>
-          <a:bodyPr wrap="square" lIns="0" tIns="0" rIns="0" bIns="0" rtlCol="0" anchor="ctr"/>
-          <a:lstStyle/>
-          <a:p>
-            <a:pPr algn="ctr" indent="0" marL="0">
-              <a:buNone/>
-            </a:pPr>
-            <a:r>
-              <a:rPr lang="en-US" sz="1300" b="1" dirty="0">
-                <a:solidFill>
-                  <a:srgbClr val="1B1B1E"/>
-                </a:solidFill>
-                <a:latin typeface="Arial" pitchFamily="34" charset="0"/>
-                <a:ea typeface="Arial" pitchFamily="34" charset="-122"/>
-                <a:cs typeface="Arial" pitchFamily="34" charset="-120"/>
-              </a:rPr>
-              <a:t>39</a:t>
-            </a:r>
-            <a:endParaRPr lang="en-US" sz="1300" dirty="0"/>
-          </a:p>
-        </p:txBody>
-      </p:sp>
-      <p:sp>
-        <p:nvSpPr>
-          <p:cNvPr id="7" name="Text 5"/>
-          <p:cNvSpPr txBox="1"/>
-          <p:nvPr/>
-        </p:nvSpPr>
-        <p:spPr>
-          <a:xfrm>
-            <a:off x="1024128" y="420624"/>
-            <a:ext cx="7589520" cy="292608"/>
-          </a:xfrm>
-          <a:prstGeom prst="rect">
-            <a:avLst/>
-          </a:prstGeom>
-          <a:noFill/>
-          <a:ln/>
-        </p:spPr>
-        <p:txBody>
-          <a:bodyPr wrap="square" lIns="0" tIns="0" rIns="0" bIns="0" rtlCol="0" anchor="ctr"/>
-          <a:lstStyle/>
-          <a:p>
-            <a:pPr indent="0" marL="0">
-              <a:buNone/>
-            </a:pPr>
-            <a:r>
-              <a:rPr lang="en-US" sz="1100" b="1" spc="120" kern="0" dirty="0">
-                <a:solidFill>
-                  <a:srgbClr val="2E7D4F"/>
-                </a:solidFill>
-                <a:latin typeface="Arial" pitchFamily="34" charset="0"/>
-                <a:ea typeface="Arial" pitchFamily="34" charset="-122"/>
-                <a:cs typeface="Arial" pitchFamily="34" charset="-120"/>
-              </a:rPr>
-              <a:t>LAS TRES TRAMPAS</a:t>
-            </a:r>
-            <a:endParaRPr lang="en-US" sz="1100" dirty="0"/>
-          </a:p>
-        </p:txBody>
-      </p:sp>
-      <p:sp>
-        <p:nvSpPr>
-          <p:cNvPr id="8" name="Text 6"/>
-          <p:cNvSpPr txBox="1"/>
-          <p:nvPr/>
-        </p:nvSpPr>
-        <p:spPr>
-          <a:xfrm>
-            <a:off x="502920" y="960120"/>
-            <a:ext cx="8138160" cy="786384"/>
-          </a:xfrm>
-          <a:prstGeom prst="rect">
-            <a:avLst/>
-          </a:prstGeom>
-          <a:noFill/>
-          <a:ln/>
-        </p:spPr>
-        <p:txBody>
-          <a:bodyPr wrap="square" lIns="0" tIns="0" rIns="0" bIns="0" rtlCol="0" anchor="t"/>
-          <a:lstStyle/>
-          <a:p>
-            <a:pPr indent="0" marL="0">
-              <a:buNone/>
-            </a:pPr>
-            <a:r>
-              <a:rPr lang="en-US" sz="2700" b="1" dirty="0">
-                <a:solidFill>
-                  <a:srgbClr val="1B1B1E"/>
-                </a:solidFill>
-                <a:latin typeface="Arial" pitchFamily="34" charset="0"/>
-                <a:ea typeface="Arial" pitchFamily="34" charset="-122"/>
-                <a:cs typeface="Arial" pitchFamily="34" charset="-120"/>
-              </a:rPr>
-              <a:t>Por dónde se cae</a:t>
-            </a:r>
-            <a:endParaRPr lang="en-US" sz="2700" dirty="0"/>
-          </a:p>
-        </p:txBody>
-      </p:sp>
-      <p:sp>
-        <p:nvSpPr>
-          <p:cNvPr id="9" name="Shape 7"/>
-          <p:cNvSpPr/>
-          <p:nvPr/>
-        </p:nvSpPr>
-        <p:spPr>
-          <a:xfrm>
-            <a:off x="502920" y="1828800"/>
-            <a:ext cx="2578608" cy="1335024"/>
-          </a:xfrm>
-          <a:prstGeom prst="roundRect">
-            <a:avLst>
-              <a:gd name="adj" fmla="val 4110"/>
-            </a:avLst>
-          </a:prstGeom>
-          <a:solidFill>
-            <a:srgbClr val="FFFFFF"/>
-          </a:solidFill>
-          <a:ln w="9525">
-            <a:solidFill>
-              <a:srgbClr val="DCE6DE"/>
-            </a:solidFill>
-            <a:prstDash val="solid"/>
-          </a:ln>
-        </p:spPr>
-      </p:sp>
-      <p:sp>
-        <p:nvSpPr>
-          <p:cNvPr id="10" name="Shape 8"/>
-          <p:cNvSpPr/>
-          <p:nvPr/>
-        </p:nvSpPr>
-        <p:spPr>
-          <a:xfrm>
-            <a:off x="649224" y="1975104"/>
-            <a:ext cx="274320" cy="274320"/>
-          </a:xfrm>
-          <a:prstGeom prst="ellipse">
-            <a:avLst/>
-          </a:prstGeom>
-          <a:solidFill>
-            <a:srgbClr val="87D895"/>
-          </a:solidFill>
-          <a:ln/>
-        </p:spPr>
-      </p:sp>
-      <p:sp>
-        <p:nvSpPr>
-          <p:cNvPr id="11" name="Text 9"/>
-          <p:cNvSpPr txBox="1"/>
-          <p:nvPr/>
-        </p:nvSpPr>
-        <p:spPr>
-          <a:xfrm>
-            <a:off x="649224" y="1975104"/>
-            <a:ext cx="274320" cy="274320"/>
-          </a:xfrm>
-          <a:prstGeom prst="rect">
-            <a:avLst/>
-          </a:prstGeom>
-          <a:noFill/>
-          <a:ln/>
-        </p:spPr>
-        <p:txBody>
-          <a:bodyPr wrap="square" lIns="0" tIns="0" rIns="0" bIns="0" rtlCol="0" anchor="ctr"/>
-          <a:lstStyle/>
-          <a:p>
-            <a:pPr algn="ctr" indent="0" marL="0">
-              <a:buNone/>
-            </a:pPr>
-            <a:r>
-              <a:rPr lang="en-US" sz="1100" b="1" dirty="0">
-                <a:solidFill>
-                  <a:srgbClr val="1B1B1E"/>
-                </a:solidFill>
-                <a:latin typeface="Arial" pitchFamily="34" charset="0"/>
-                <a:ea typeface="Arial" pitchFamily="34" charset="-122"/>
-                <a:cs typeface="Arial" pitchFamily="34" charset="-120"/>
-              </a:rPr>
-              <a:t>1</a:t>
-            </a:r>
-            <a:endParaRPr lang="en-US" sz="1100" dirty="0"/>
-          </a:p>
-        </p:txBody>
-      </p:sp>
-      <p:sp>
-        <p:nvSpPr>
-          <p:cNvPr id="12" name="Text 10"/>
-          <p:cNvSpPr txBox="1"/>
-          <p:nvPr/>
-        </p:nvSpPr>
-        <p:spPr>
-          <a:xfrm>
-            <a:off x="1005840" y="1956816"/>
-            <a:ext cx="1920240" cy="329184"/>
-          </a:xfrm>
-          <a:prstGeom prst="rect">
-            <a:avLst/>
-          </a:prstGeom>
-          <a:noFill/>
-          <a:ln/>
-        </p:spPr>
-        <p:txBody>
-          <a:bodyPr wrap="square" lIns="0" tIns="0" rIns="0" bIns="0" rtlCol="0" anchor="t"/>
-          <a:lstStyle/>
-          <a:p>
-            <a:pPr indent="0" marL="0">
-              <a:buNone/>
-            </a:pPr>
-            <a:r>
-              <a:rPr lang="en-US" sz="1200" b="1" dirty="0">
-                <a:solidFill>
-                  <a:srgbClr val="1B1B1E"/>
-                </a:solidFill>
-                <a:latin typeface="Arial" pitchFamily="34" charset="0"/>
-                <a:ea typeface="Arial" pitchFamily="34" charset="-122"/>
-                <a:cs typeface="Arial" pitchFamily="34" charset="-120"/>
-              </a:rPr>
-              <a:t>«Lo partimos en pagos»</a:t>
-            </a:r>
-            <a:endParaRPr lang="en-US" sz="1200" dirty="0"/>
-          </a:p>
-        </p:txBody>
-      </p:sp>
-      <p:sp>
-        <p:nvSpPr>
-          <p:cNvPr id="13" name="Text 11"/>
-          <p:cNvSpPr txBox="1"/>
-          <p:nvPr/>
-        </p:nvSpPr>
-        <p:spPr>
-          <a:xfrm>
-            <a:off x="649224" y="2322576"/>
-            <a:ext cx="2286000" cy="603504"/>
-          </a:xfrm>
-          <a:prstGeom prst="rect">
-            <a:avLst/>
-          </a:prstGeom>
-          <a:noFill/>
-          <a:ln/>
-        </p:spPr>
-        <p:txBody>
-          <a:bodyPr wrap="square" lIns="0" tIns="0" rIns="0" bIns="0" rtlCol="0" anchor="t"/>
-          <a:lstStyle/>
-          <a:p>
-            <a:pPr indent="0" marL="0">
-              <a:buNone/>
-            </a:pPr>
-            <a:r>
-              <a:rPr lang="en-US" sz="950" dirty="0">
-                <a:solidFill>
-                  <a:srgbClr val="4D4D4D"/>
-                </a:solidFill>
-                <a:latin typeface="Arial" pitchFamily="34" charset="0"/>
-                <a:ea typeface="Arial" pitchFamily="34" charset="-122"/>
-                <a:cs typeface="Arial" pitchFamily="34" charset="-120"/>
-              </a:rPr>
-              <a:t>La prohibición aplica al acto individual, ya sea en una o en varias exhibiciones</a:t>
-            </a:r>
-            <a:endParaRPr lang="en-US" sz="950" dirty="0"/>
-          </a:p>
-        </p:txBody>
-      </p:sp>
-      <p:sp>
-        <p:nvSpPr>
-          <p:cNvPr id="14" name="Text 12"/>
-          <p:cNvSpPr txBox="1"/>
-          <p:nvPr/>
-        </p:nvSpPr>
-        <p:spPr>
-          <a:xfrm>
-            <a:off x="649224" y="2935224"/>
-            <a:ext cx="2286000" cy="182880"/>
-          </a:xfrm>
-          <a:prstGeom prst="rect">
-            <a:avLst/>
-          </a:prstGeom>
-          <a:noFill/>
-          <a:ln/>
-        </p:spPr>
-        <p:txBody>
-          <a:bodyPr wrap="square" lIns="0" tIns="0" rIns="0" bIns="0" rtlCol="0" anchor="ctr"/>
-          <a:lstStyle/>
-          <a:p>
-            <a:pPr indent="0" marL="0">
-              <a:buNone/>
-            </a:pPr>
-            <a:r>
-              <a:rPr lang="en-US" sz="850" b="1" dirty="0">
-                <a:solidFill>
-                  <a:srgbClr val="2E7D4F"/>
-                </a:solidFill>
-                <a:latin typeface="Arial" pitchFamily="34" charset="0"/>
-                <a:ea typeface="Arial" pitchFamily="34" charset="-122"/>
-                <a:cs typeface="Arial" pitchFamily="34" charset="-120"/>
-              </a:rPr>
-              <a:t>R 42 fr. I</a:t>
-            </a:r>
-            <a:endParaRPr lang="en-US" sz="850" dirty="0"/>
-          </a:p>
-        </p:txBody>
-      </p:sp>
-      <p:sp>
-        <p:nvSpPr>
-          <p:cNvPr id="15" name="Shape 13"/>
-          <p:cNvSpPr/>
-          <p:nvPr/>
-        </p:nvSpPr>
-        <p:spPr>
-          <a:xfrm>
-            <a:off x="3282696" y="1828800"/>
-            <a:ext cx="2578608" cy="1335024"/>
-          </a:xfrm>
-          <a:prstGeom prst="roundRect">
-            <a:avLst>
-              <a:gd name="adj" fmla="val 4110"/>
-            </a:avLst>
-          </a:prstGeom>
-          <a:solidFill>
-            <a:srgbClr val="FFFFFF"/>
-          </a:solidFill>
-          <a:ln w="9525">
-            <a:solidFill>
-              <a:srgbClr val="DCE6DE"/>
-            </a:solidFill>
-            <a:prstDash val="solid"/>
-          </a:ln>
-        </p:spPr>
-      </p:sp>
-      <p:sp>
-        <p:nvSpPr>
-          <p:cNvPr id="16" name="Shape 14"/>
-          <p:cNvSpPr/>
-          <p:nvPr/>
-        </p:nvSpPr>
-        <p:spPr>
-          <a:xfrm>
-            <a:off x="3429000" y="1975104"/>
-            <a:ext cx="274320" cy="274320"/>
-          </a:xfrm>
-          <a:prstGeom prst="ellipse">
-            <a:avLst/>
-          </a:prstGeom>
-          <a:solidFill>
-            <a:srgbClr val="87D895"/>
-          </a:solidFill>
-          <a:ln/>
-        </p:spPr>
-      </p:sp>
-      <p:sp>
-        <p:nvSpPr>
-          <p:cNvPr id="17" name="Text 15"/>
-          <p:cNvSpPr txBox="1"/>
-          <p:nvPr/>
-        </p:nvSpPr>
-        <p:spPr>
-          <a:xfrm>
-            <a:off x="3429000" y="1975104"/>
-            <a:ext cx="274320" cy="274320"/>
-          </a:xfrm>
-          <a:prstGeom prst="rect">
-            <a:avLst/>
-          </a:prstGeom>
-          <a:noFill/>
-          <a:ln/>
-        </p:spPr>
-        <p:txBody>
-          <a:bodyPr wrap="square" lIns="0" tIns="0" rIns="0" bIns="0" rtlCol="0" anchor="ctr"/>
-          <a:lstStyle/>
-          <a:p>
-            <a:pPr algn="ctr" indent="0" marL="0">
-              <a:buNone/>
-            </a:pPr>
-            <a:r>
-              <a:rPr lang="en-US" sz="1100" b="1" dirty="0">
-                <a:solidFill>
-                  <a:srgbClr val="1B1B1E"/>
-                </a:solidFill>
-                <a:latin typeface="Arial" pitchFamily="34" charset="0"/>
-                <a:ea typeface="Arial" pitchFamily="34" charset="-122"/>
-                <a:cs typeface="Arial" pitchFamily="34" charset="-120"/>
-              </a:rPr>
-              <a:t>2</a:t>
-            </a:r>
-            <a:endParaRPr lang="en-US" sz="1100" dirty="0"/>
-          </a:p>
-        </p:txBody>
-      </p:sp>
-      <p:sp>
-        <p:nvSpPr>
-          <p:cNvPr id="18" name="Text 16"/>
-          <p:cNvSpPr txBox="1"/>
-          <p:nvPr/>
-        </p:nvSpPr>
-        <p:spPr>
-          <a:xfrm>
-            <a:off x="3785616" y="1956816"/>
-            <a:ext cx="1920240" cy="329184"/>
-          </a:xfrm>
-          <a:prstGeom prst="rect">
-            <a:avLst/>
-          </a:prstGeom>
-          <a:noFill/>
-          <a:ln/>
-        </p:spPr>
-        <p:txBody>
-          <a:bodyPr wrap="square" lIns="0" tIns="0" rIns="0" bIns="0" rtlCol="0" anchor="t"/>
-          <a:lstStyle/>
-          <a:p>
-            <a:pPr indent="0" marL="0">
-              <a:buNone/>
-            </a:pPr>
-            <a:r>
-              <a:rPr lang="en-US" sz="1200" b="1" dirty="0">
-                <a:solidFill>
-                  <a:srgbClr val="1B1B1E"/>
-                </a:solidFill>
-                <a:latin typeface="Arial" pitchFamily="34" charset="0"/>
-                <a:ea typeface="Arial" pitchFamily="34" charset="-122"/>
-                <a:cs typeface="Arial" pitchFamily="34" charset="-120"/>
-              </a:rPr>
-              <a:t>«Son tres contratos distintos»</a:t>
-            </a:r>
-            <a:endParaRPr lang="en-US" sz="1200" dirty="0"/>
-          </a:p>
-        </p:txBody>
-      </p:sp>
-      <p:sp>
-        <p:nvSpPr>
-          <p:cNvPr id="19" name="Text 17"/>
-          <p:cNvSpPr txBox="1"/>
-          <p:nvPr/>
-        </p:nvSpPr>
-        <p:spPr>
-          <a:xfrm>
-            <a:off x="3429000" y="2322576"/>
-            <a:ext cx="2286000" cy="603504"/>
-          </a:xfrm>
-          <a:prstGeom prst="rect">
-            <a:avLst/>
-          </a:prstGeom>
-          <a:noFill/>
-          <a:ln/>
-        </p:spPr>
-        <p:txBody>
-          <a:bodyPr wrap="square" lIns="0" tIns="0" rIns="0" bIns="0" rtlCol="0" anchor="t"/>
-          <a:lstStyle/>
-          <a:p>
-            <a:pPr indent="0" marL="0">
-              <a:buNone/>
-            </a:pPr>
-            <a:r>
-              <a:rPr lang="en-US" sz="950" dirty="0">
-                <a:solidFill>
-                  <a:srgbClr val="4D4D4D"/>
-                </a:solidFill>
-                <a:latin typeface="Arial" pitchFamily="34" charset="0"/>
-                <a:ea typeface="Arial" pitchFamily="34" charset="-122"/>
-                <a:cs typeface="Arial" pitchFamily="34" charset="-120"/>
-              </a:rPr>
-              <a:t>Aplica a un conjunto de actos cuando una sola persona aporta los recursos para pagarlos</a:t>
-            </a:r>
-            <a:endParaRPr lang="en-US" sz="950" dirty="0"/>
-          </a:p>
-        </p:txBody>
-      </p:sp>
-      <p:sp>
-        <p:nvSpPr>
-          <p:cNvPr id="20" name="Text 18"/>
-          <p:cNvSpPr txBox="1"/>
-          <p:nvPr/>
-        </p:nvSpPr>
-        <p:spPr>
-          <a:xfrm>
-            <a:off x="3429000" y="2935224"/>
-            <a:ext cx="2286000" cy="182880"/>
-          </a:xfrm>
-          <a:prstGeom prst="rect">
-            <a:avLst/>
-          </a:prstGeom>
-          <a:noFill/>
-          <a:ln/>
-        </p:spPr>
-        <p:txBody>
-          <a:bodyPr wrap="square" lIns="0" tIns="0" rIns="0" bIns="0" rtlCol="0" anchor="ctr"/>
-          <a:lstStyle/>
-          <a:p>
-            <a:pPr indent="0" marL="0">
-              <a:buNone/>
-            </a:pPr>
-            <a:r>
-              <a:rPr lang="en-US" sz="850" b="1" dirty="0">
-                <a:solidFill>
-                  <a:srgbClr val="2E7D4F"/>
-                </a:solidFill>
-                <a:latin typeface="Arial" pitchFamily="34" charset="0"/>
-                <a:ea typeface="Arial" pitchFamily="34" charset="-122"/>
-                <a:cs typeface="Arial" pitchFamily="34" charset="-120"/>
-              </a:rPr>
-              <a:t>R 42 fr. II</a:t>
-            </a:r>
-            <a:endParaRPr lang="en-US" sz="850" dirty="0"/>
-          </a:p>
-        </p:txBody>
-      </p:sp>
-      <p:sp>
-        <p:nvSpPr>
-          <p:cNvPr id="21" name="Shape 19"/>
-          <p:cNvSpPr/>
-          <p:nvPr/>
-        </p:nvSpPr>
-        <p:spPr>
-          <a:xfrm>
-            <a:off x="6062472" y="1828800"/>
-            <a:ext cx="2578608" cy="1335024"/>
-          </a:xfrm>
-          <a:prstGeom prst="roundRect">
-            <a:avLst>
-              <a:gd name="adj" fmla="val 4110"/>
-            </a:avLst>
-          </a:prstGeom>
-          <a:solidFill>
-            <a:srgbClr val="FFFFFF"/>
-          </a:solidFill>
-          <a:ln w="9525">
-            <a:solidFill>
-              <a:srgbClr val="DCE6DE"/>
-            </a:solidFill>
-            <a:prstDash val="solid"/>
-          </a:ln>
-        </p:spPr>
-      </p:sp>
-      <p:sp>
-        <p:nvSpPr>
-          <p:cNvPr id="22" name="Shape 20"/>
-          <p:cNvSpPr/>
-          <p:nvPr/>
-        </p:nvSpPr>
-        <p:spPr>
-          <a:xfrm>
-            <a:off x="6208776" y="1975104"/>
-            <a:ext cx="274320" cy="274320"/>
-          </a:xfrm>
-          <a:prstGeom prst="ellipse">
-            <a:avLst/>
-          </a:prstGeom>
-          <a:solidFill>
-            <a:srgbClr val="87D895"/>
-          </a:solidFill>
-          <a:ln/>
-        </p:spPr>
-      </p:sp>
-      <p:sp>
-        <p:nvSpPr>
-          <p:cNvPr id="23" name="Text 21"/>
-          <p:cNvSpPr txBox="1"/>
-          <p:nvPr/>
-        </p:nvSpPr>
-        <p:spPr>
-          <a:xfrm>
-            <a:off x="6208776" y="1975104"/>
-            <a:ext cx="274320" cy="274320"/>
-          </a:xfrm>
-          <a:prstGeom prst="rect">
-            <a:avLst/>
-          </a:prstGeom>
-          <a:noFill/>
-          <a:ln/>
-        </p:spPr>
-        <p:txBody>
-          <a:bodyPr wrap="square" lIns="0" tIns="0" rIns="0" bIns="0" rtlCol="0" anchor="ctr"/>
-          <a:lstStyle/>
-          <a:p>
-            <a:pPr algn="ctr" indent="0" marL="0">
-              <a:buNone/>
-            </a:pPr>
-            <a:r>
-              <a:rPr lang="en-US" sz="1100" b="1" dirty="0">
-                <a:solidFill>
-                  <a:srgbClr val="1B1B1E"/>
-                </a:solidFill>
-                <a:latin typeface="Arial" pitchFamily="34" charset="0"/>
-                <a:ea typeface="Arial" pitchFamily="34" charset="-122"/>
-                <a:cs typeface="Arial" pitchFamily="34" charset="-120"/>
-              </a:rPr>
-              <a:t>3</a:t>
-            </a:r>
-            <a:endParaRPr lang="en-US" sz="1100" dirty="0"/>
-          </a:p>
-        </p:txBody>
-      </p:sp>
-      <p:sp>
-        <p:nvSpPr>
-          <p:cNvPr id="24" name="Text 22"/>
-          <p:cNvSpPr txBox="1"/>
-          <p:nvPr/>
-        </p:nvSpPr>
-        <p:spPr>
-          <a:xfrm>
-            <a:off x="6565392" y="1956816"/>
-            <a:ext cx="1920240" cy="329184"/>
-          </a:xfrm>
-          <a:prstGeom prst="rect">
-            <a:avLst/>
-          </a:prstGeom>
-          <a:noFill/>
-          <a:ln/>
-        </p:spPr>
-        <p:txBody>
-          <a:bodyPr wrap="square" lIns="0" tIns="0" rIns="0" bIns="0" rtlCol="0" anchor="t"/>
-          <a:lstStyle/>
-          <a:p>
-            <a:pPr indent="0" marL="0">
-              <a:buNone/>
-            </a:pPr>
-            <a:r>
-              <a:rPr lang="en-US" sz="1200" b="1" dirty="0">
-                <a:solidFill>
-                  <a:srgbClr val="1B1B1E"/>
-                </a:solidFill>
-                <a:latin typeface="Arial" pitchFamily="34" charset="0"/>
-                <a:ea typeface="Arial" pitchFamily="34" charset="-122"/>
-                <a:cs typeface="Arial" pitchFamily="34" charset="-120"/>
-              </a:rPr>
-              <a:t>«Me pagó en efectivo y le devolví por transferencia»</a:t>
-            </a:r>
-            <a:endParaRPr lang="en-US" sz="1200" dirty="0"/>
-          </a:p>
-        </p:txBody>
-      </p:sp>
-      <p:sp>
-        <p:nvSpPr>
-          <p:cNvPr id="25" name="Text 23"/>
-          <p:cNvSpPr txBox="1"/>
-          <p:nvPr/>
-        </p:nvSpPr>
-        <p:spPr>
-          <a:xfrm>
-            <a:off x="6208776" y="2322576"/>
-            <a:ext cx="2286000" cy="603504"/>
-          </a:xfrm>
-          <a:prstGeom prst="rect">
-            <a:avLst/>
-          </a:prstGeom>
-          <a:noFill/>
-          <a:ln/>
-        </p:spPr>
-        <p:txBody>
-          <a:bodyPr wrap="square" lIns="0" tIns="0" rIns="0" bIns="0" rtlCol="0" anchor="t"/>
-          <a:lstStyle/>
-          <a:p>
-            <a:pPr indent="0" marL="0">
-              <a:buNone/>
-            </a:pPr>
-            <a:r>
-              <a:rPr lang="en-US" sz="950" dirty="0">
-                <a:solidFill>
-                  <a:srgbClr val="4D4D4D"/>
-                </a:solidFill>
-                <a:latin typeface="Arial" pitchFamily="34" charset="0"/>
-                <a:ea typeface="Arial" pitchFamily="34" charset="-122"/>
-                <a:cs typeface="Arial" pitchFamily="34" charset="-120"/>
-              </a:rPr>
-              <a:t>La devolución va en la misma forma de pago y en la misma moneda</a:t>
-            </a:r>
-            <a:endParaRPr lang="en-US" sz="950" dirty="0"/>
-          </a:p>
-        </p:txBody>
-      </p:sp>
-      <p:sp>
-        <p:nvSpPr>
-          <p:cNvPr id="26" name="Text 24"/>
-          <p:cNvSpPr txBox="1"/>
-          <p:nvPr/>
-        </p:nvSpPr>
-        <p:spPr>
-          <a:xfrm>
-            <a:off x="6208776" y="2935224"/>
-            <a:ext cx="2286000" cy="182880"/>
-          </a:xfrm>
-          <a:prstGeom prst="rect">
-            <a:avLst/>
-          </a:prstGeom>
-          <a:noFill/>
-          <a:ln/>
-        </p:spPr>
-        <p:txBody>
-          <a:bodyPr wrap="square" lIns="0" tIns="0" rIns="0" bIns="0" rtlCol="0" anchor="ctr"/>
-          <a:lstStyle/>
-          <a:p>
-            <a:pPr indent="0" marL="0">
-              <a:buNone/>
-            </a:pPr>
-            <a:r>
-              <a:rPr lang="en-US" sz="850" b="1" dirty="0">
-                <a:solidFill>
-                  <a:srgbClr val="2E7D4F"/>
-                </a:solidFill>
-                <a:latin typeface="Arial" pitchFamily="34" charset="0"/>
-                <a:ea typeface="Arial" pitchFamily="34" charset="-122"/>
-                <a:cs typeface="Arial" pitchFamily="34" charset="-120"/>
-              </a:rPr>
-              <a:t>R 43</a:t>
-            </a:r>
-            <a:endParaRPr lang="en-US" sz="850" dirty="0"/>
-          </a:p>
-        </p:txBody>
-      </p:sp>
-      <p:sp>
-        <p:nvSpPr>
-          <p:cNvPr id="27" name="Shape 25"/>
-          <p:cNvSpPr/>
-          <p:nvPr/>
-        </p:nvSpPr>
-        <p:spPr>
-          <a:xfrm>
-            <a:off x="502920" y="3977640"/>
-            <a:ext cx="8138160" cy="640080"/>
-          </a:xfrm>
-          <a:prstGeom prst="roundRect">
-            <a:avLst>
-              <a:gd name="adj" fmla="val 8571"/>
-            </a:avLst>
-          </a:prstGeom>
-          <a:solidFill>
-            <a:srgbClr val="87D895"/>
-          </a:solidFill>
-          <a:ln/>
-        </p:spPr>
-      </p:sp>
-      <p:sp>
-        <p:nvSpPr>
-          <p:cNvPr id="28" name="Text 26"/>
-          <p:cNvSpPr txBox="1"/>
-          <p:nvPr/>
-        </p:nvSpPr>
-        <p:spPr>
-          <a:xfrm>
-            <a:off x="731520" y="3995928"/>
-            <a:ext cx="7680960" cy="603504"/>
-          </a:xfrm>
-          <a:prstGeom prst="rect">
-            <a:avLst/>
-          </a:prstGeom>
-          <a:noFill/>
-          <a:ln/>
-        </p:spPr>
-        <p:txBody>
-          <a:bodyPr wrap="square" lIns="0" tIns="0" rIns="0" bIns="0" rtlCol="0" anchor="ctr"/>
-          <a:lstStyle/>
-          <a:p>
-            <a:pPr indent="0" marL="0">
-              <a:buNone/>
-            </a:pPr>
-            <a:r>
-              <a:rPr lang="en-US" sz="1200" b="1" dirty="0">
-                <a:solidFill>
-                  <a:srgbClr val="1B1B1E"/>
-                </a:solidFill>
-                <a:latin typeface="Arial" pitchFamily="34" charset="0"/>
-                <a:ea typeface="Arial" pitchFamily="34" charset="-122"/>
-                <a:cs typeface="Arial" pitchFamily="34" charset="-120"/>
-              </a:rPr>
-              <a:t>Fedatarios: en operaciones de 8,025 UMA o más hay que identificar monto, fecha, forma y moneda de pago. Abajo de eso, y si ya se pagó antes de la firma, basta la declaración bajo protesta. · L 33 y R 45</a:t>
             </a:r>
             <a:endParaRPr lang="en-US" sz="1200" dirty="0"/>
           </a:p>
@@ -38848,7 +38937,7 @@
                 <a:ea typeface="Arial" pitchFamily="34" charset="-122"/>
                 <a:cs typeface="Arial" pitchFamily="34" charset="-120"/>
               </a:rPr>
-              <a:t>R 6 · LAS TRES BASES</a:t>
+              <a:t>LAS TRES TRAMPAS</a:t>
             </a:r>
             <a:endParaRPr lang="en-US" sz="1100" dirty="0"/>
           </a:p>
@@ -38887,6 +38976,943 @@
                 <a:ea typeface="Arial" pitchFamily="34" charset="-122"/>
                 <a:cs typeface="Arial" pitchFamily="34" charset="-120"/>
               </a:rPr>
+              <a:t>Por dónde se cae</a:t>
+            </a:r>
+            <a:endParaRPr lang="en-US" sz="2700" dirty="0"/>
+          </a:p>
+        </p:txBody>
+      </p:sp>
+      <p:sp>
+        <p:nvSpPr>
+          <p:cNvPr id="9" name="Shape 7"/>
+          <p:cNvSpPr/>
+          <p:nvPr/>
+        </p:nvSpPr>
+        <p:spPr>
+          <a:xfrm>
+            <a:off x="502920" y="1828800"/>
+            <a:ext cx="2578608" cy="1335024"/>
+          </a:xfrm>
+          <a:prstGeom prst="roundRect">
+            <a:avLst>
+              <a:gd name="adj" fmla="val 4110"/>
+            </a:avLst>
+          </a:prstGeom>
+          <a:solidFill>
+            <a:srgbClr val="FFFFFF"/>
+          </a:solidFill>
+          <a:ln w="9525">
+            <a:solidFill>
+              <a:srgbClr val="DCE6DE"/>
+            </a:solidFill>
+            <a:prstDash val="solid"/>
+          </a:ln>
+        </p:spPr>
+      </p:sp>
+      <p:sp>
+        <p:nvSpPr>
+          <p:cNvPr id="10" name="Shape 8"/>
+          <p:cNvSpPr/>
+          <p:nvPr/>
+        </p:nvSpPr>
+        <p:spPr>
+          <a:xfrm>
+            <a:off x="649224" y="1975104"/>
+            <a:ext cx="274320" cy="274320"/>
+          </a:xfrm>
+          <a:prstGeom prst="ellipse">
+            <a:avLst/>
+          </a:prstGeom>
+          <a:solidFill>
+            <a:srgbClr val="87D895"/>
+          </a:solidFill>
+          <a:ln/>
+        </p:spPr>
+      </p:sp>
+      <p:sp>
+        <p:nvSpPr>
+          <p:cNvPr id="11" name="Text 9"/>
+          <p:cNvSpPr txBox="1"/>
+          <p:nvPr/>
+        </p:nvSpPr>
+        <p:spPr>
+          <a:xfrm>
+            <a:off x="649224" y="1975104"/>
+            <a:ext cx="274320" cy="274320"/>
+          </a:xfrm>
+          <a:prstGeom prst="rect">
+            <a:avLst/>
+          </a:prstGeom>
+          <a:noFill/>
+          <a:ln/>
+        </p:spPr>
+        <p:txBody>
+          <a:bodyPr wrap="square" lIns="0" tIns="0" rIns="0" bIns="0" rtlCol="0" anchor="ctr"/>
+          <a:lstStyle/>
+          <a:p>
+            <a:pPr algn="ctr" indent="0" marL="0">
+              <a:buNone/>
+            </a:pPr>
+            <a:r>
+              <a:rPr lang="en-US" sz="1100" b="1" dirty="0">
+                <a:solidFill>
+                  <a:srgbClr val="1B1B1E"/>
+                </a:solidFill>
+                <a:latin typeface="Arial" pitchFamily="34" charset="0"/>
+                <a:ea typeface="Arial" pitchFamily="34" charset="-122"/>
+                <a:cs typeface="Arial" pitchFamily="34" charset="-120"/>
+              </a:rPr>
+              <a:t>1</a:t>
+            </a:r>
+            <a:endParaRPr lang="en-US" sz="1100" dirty="0"/>
+          </a:p>
+        </p:txBody>
+      </p:sp>
+      <p:sp>
+        <p:nvSpPr>
+          <p:cNvPr id="12" name="Text 10"/>
+          <p:cNvSpPr txBox="1"/>
+          <p:nvPr/>
+        </p:nvSpPr>
+        <p:spPr>
+          <a:xfrm>
+            <a:off x="1005840" y="1956816"/>
+            <a:ext cx="1920240" cy="329184"/>
+          </a:xfrm>
+          <a:prstGeom prst="rect">
+            <a:avLst/>
+          </a:prstGeom>
+          <a:noFill/>
+          <a:ln/>
+        </p:spPr>
+        <p:txBody>
+          <a:bodyPr wrap="square" lIns="0" tIns="0" rIns="0" bIns="0" rtlCol="0" anchor="t"/>
+          <a:lstStyle/>
+          <a:p>
+            <a:pPr indent="0" marL="0">
+              <a:buNone/>
+            </a:pPr>
+            <a:r>
+              <a:rPr lang="en-US" sz="1200" b="1" dirty="0">
+                <a:solidFill>
+                  <a:srgbClr val="1B1B1E"/>
+                </a:solidFill>
+                <a:latin typeface="Arial" pitchFamily="34" charset="0"/>
+                <a:ea typeface="Arial" pitchFamily="34" charset="-122"/>
+                <a:cs typeface="Arial" pitchFamily="34" charset="-120"/>
+              </a:rPr>
+              <a:t>«Lo partimos en pagos»</a:t>
+            </a:r>
+            <a:endParaRPr lang="en-US" sz="1200" dirty="0"/>
+          </a:p>
+        </p:txBody>
+      </p:sp>
+      <p:sp>
+        <p:nvSpPr>
+          <p:cNvPr id="13" name="Text 11"/>
+          <p:cNvSpPr txBox="1"/>
+          <p:nvPr/>
+        </p:nvSpPr>
+        <p:spPr>
+          <a:xfrm>
+            <a:off x="649224" y="2322576"/>
+            <a:ext cx="2286000" cy="603504"/>
+          </a:xfrm>
+          <a:prstGeom prst="rect">
+            <a:avLst/>
+          </a:prstGeom>
+          <a:noFill/>
+          <a:ln/>
+        </p:spPr>
+        <p:txBody>
+          <a:bodyPr wrap="square" lIns="0" tIns="0" rIns="0" bIns="0" rtlCol="0" anchor="t"/>
+          <a:lstStyle/>
+          <a:p>
+            <a:pPr indent="0" marL="0">
+              <a:buNone/>
+            </a:pPr>
+            <a:r>
+              <a:rPr lang="en-US" sz="950" dirty="0">
+                <a:solidFill>
+                  <a:srgbClr val="4D4D4D"/>
+                </a:solidFill>
+                <a:latin typeface="Arial" pitchFamily="34" charset="0"/>
+                <a:ea typeface="Arial" pitchFamily="34" charset="-122"/>
+                <a:cs typeface="Arial" pitchFamily="34" charset="-120"/>
+              </a:rPr>
+              <a:t>La prohibición aplica al acto individual, ya sea en una o en varias exhibiciones</a:t>
+            </a:r>
+            <a:endParaRPr lang="en-US" sz="950" dirty="0"/>
+          </a:p>
+        </p:txBody>
+      </p:sp>
+      <p:sp>
+        <p:nvSpPr>
+          <p:cNvPr id="14" name="Text 12"/>
+          <p:cNvSpPr txBox="1"/>
+          <p:nvPr/>
+        </p:nvSpPr>
+        <p:spPr>
+          <a:xfrm>
+            <a:off x="649224" y="2935224"/>
+            <a:ext cx="2286000" cy="182880"/>
+          </a:xfrm>
+          <a:prstGeom prst="rect">
+            <a:avLst/>
+          </a:prstGeom>
+          <a:noFill/>
+          <a:ln/>
+        </p:spPr>
+        <p:txBody>
+          <a:bodyPr wrap="square" lIns="0" tIns="0" rIns="0" bIns="0" rtlCol="0" anchor="ctr"/>
+          <a:lstStyle/>
+          <a:p>
+            <a:pPr indent="0" marL="0">
+              <a:buNone/>
+            </a:pPr>
+            <a:r>
+              <a:rPr lang="en-US" sz="850" b="1" dirty="0">
+                <a:solidFill>
+                  <a:srgbClr val="2E7D4F"/>
+                </a:solidFill>
+                <a:latin typeface="Arial" pitchFamily="34" charset="0"/>
+                <a:ea typeface="Arial" pitchFamily="34" charset="-122"/>
+                <a:cs typeface="Arial" pitchFamily="34" charset="-120"/>
+              </a:rPr>
+              <a:t>R 42 fr. I</a:t>
+            </a:r>
+            <a:endParaRPr lang="en-US" sz="850" dirty="0"/>
+          </a:p>
+        </p:txBody>
+      </p:sp>
+      <p:sp>
+        <p:nvSpPr>
+          <p:cNvPr id="15" name="Shape 13"/>
+          <p:cNvSpPr/>
+          <p:nvPr/>
+        </p:nvSpPr>
+        <p:spPr>
+          <a:xfrm>
+            <a:off x="3282696" y="1828800"/>
+            <a:ext cx="2578608" cy="1335024"/>
+          </a:xfrm>
+          <a:prstGeom prst="roundRect">
+            <a:avLst>
+              <a:gd name="adj" fmla="val 4110"/>
+            </a:avLst>
+          </a:prstGeom>
+          <a:solidFill>
+            <a:srgbClr val="FFFFFF"/>
+          </a:solidFill>
+          <a:ln w="9525">
+            <a:solidFill>
+              <a:srgbClr val="DCE6DE"/>
+            </a:solidFill>
+            <a:prstDash val="solid"/>
+          </a:ln>
+        </p:spPr>
+      </p:sp>
+      <p:sp>
+        <p:nvSpPr>
+          <p:cNvPr id="16" name="Shape 14"/>
+          <p:cNvSpPr/>
+          <p:nvPr/>
+        </p:nvSpPr>
+        <p:spPr>
+          <a:xfrm>
+            <a:off x="3429000" y="1975104"/>
+            <a:ext cx="274320" cy="274320"/>
+          </a:xfrm>
+          <a:prstGeom prst="ellipse">
+            <a:avLst/>
+          </a:prstGeom>
+          <a:solidFill>
+            <a:srgbClr val="87D895"/>
+          </a:solidFill>
+          <a:ln/>
+        </p:spPr>
+      </p:sp>
+      <p:sp>
+        <p:nvSpPr>
+          <p:cNvPr id="17" name="Text 15"/>
+          <p:cNvSpPr txBox="1"/>
+          <p:nvPr/>
+        </p:nvSpPr>
+        <p:spPr>
+          <a:xfrm>
+            <a:off x="3429000" y="1975104"/>
+            <a:ext cx="274320" cy="274320"/>
+          </a:xfrm>
+          <a:prstGeom prst="rect">
+            <a:avLst/>
+          </a:prstGeom>
+          <a:noFill/>
+          <a:ln/>
+        </p:spPr>
+        <p:txBody>
+          <a:bodyPr wrap="square" lIns="0" tIns="0" rIns="0" bIns="0" rtlCol="0" anchor="ctr"/>
+          <a:lstStyle/>
+          <a:p>
+            <a:pPr algn="ctr" indent="0" marL="0">
+              <a:buNone/>
+            </a:pPr>
+            <a:r>
+              <a:rPr lang="en-US" sz="1100" b="1" dirty="0">
+                <a:solidFill>
+                  <a:srgbClr val="1B1B1E"/>
+                </a:solidFill>
+                <a:latin typeface="Arial" pitchFamily="34" charset="0"/>
+                <a:ea typeface="Arial" pitchFamily="34" charset="-122"/>
+                <a:cs typeface="Arial" pitchFamily="34" charset="-120"/>
+              </a:rPr>
+              <a:t>2</a:t>
+            </a:r>
+            <a:endParaRPr lang="en-US" sz="1100" dirty="0"/>
+          </a:p>
+        </p:txBody>
+      </p:sp>
+      <p:sp>
+        <p:nvSpPr>
+          <p:cNvPr id="18" name="Text 16"/>
+          <p:cNvSpPr txBox="1"/>
+          <p:nvPr/>
+        </p:nvSpPr>
+        <p:spPr>
+          <a:xfrm>
+            <a:off x="3785616" y="1956816"/>
+            <a:ext cx="1920240" cy="329184"/>
+          </a:xfrm>
+          <a:prstGeom prst="rect">
+            <a:avLst/>
+          </a:prstGeom>
+          <a:noFill/>
+          <a:ln/>
+        </p:spPr>
+        <p:txBody>
+          <a:bodyPr wrap="square" lIns="0" tIns="0" rIns="0" bIns="0" rtlCol="0" anchor="t"/>
+          <a:lstStyle/>
+          <a:p>
+            <a:pPr indent="0" marL="0">
+              <a:buNone/>
+            </a:pPr>
+            <a:r>
+              <a:rPr lang="en-US" sz="1200" b="1" dirty="0">
+                <a:solidFill>
+                  <a:srgbClr val="1B1B1E"/>
+                </a:solidFill>
+                <a:latin typeface="Arial" pitchFamily="34" charset="0"/>
+                <a:ea typeface="Arial" pitchFamily="34" charset="-122"/>
+                <a:cs typeface="Arial" pitchFamily="34" charset="-120"/>
+              </a:rPr>
+              <a:t>«Son tres contratos distintos»</a:t>
+            </a:r>
+            <a:endParaRPr lang="en-US" sz="1200" dirty="0"/>
+          </a:p>
+        </p:txBody>
+      </p:sp>
+      <p:sp>
+        <p:nvSpPr>
+          <p:cNvPr id="19" name="Text 17"/>
+          <p:cNvSpPr txBox="1"/>
+          <p:nvPr/>
+        </p:nvSpPr>
+        <p:spPr>
+          <a:xfrm>
+            <a:off x="3429000" y="2322576"/>
+            <a:ext cx="2286000" cy="603504"/>
+          </a:xfrm>
+          <a:prstGeom prst="rect">
+            <a:avLst/>
+          </a:prstGeom>
+          <a:noFill/>
+          <a:ln/>
+        </p:spPr>
+        <p:txBody>
+          <a:bodyPr wrap="square" lIns="0" tIns="0" rIns="0" bIns="0" rtlCol="0" anchor="t"/>
+          <a:lstStyle/>
+          <a:p>
+            <a:pPr indent="0" marL="0">
+              <a:buNone/>
+            </a:pPr>
+            <a:r>
+              <a:rPr lang="en-US" sz="950" dirty="0">
+                <a:solidFill>
+                  <a:srgbClr val="4D4D4D"/>
+                </a:solidFill>
+                <a:latin typeface="Arial" pitchFamily="34" charset="0"/>
+                <a:ea typeface="Arial" pitchFamily="34" charset="-122"/>
+                <a:cs typeface="Arial" pitchFamily="34" charset="-120"/>
+              </a:rPr>
+              <a:t>Aplica a un conjunto de actos cuando una sola persona aporta los recursos para pagarlos</a:t>
+            </a:r>
+            <a:endParaRPr lang="en-US" sz="950" dirty="0"/>
+          </a:p>
+        </p:txBody>
+      </p:sp>
+      <p:sp>
+        <p:nvSpPr>
+          <p:cNvPr id="20" name="Text 18"/>
+          <p:cNvSpPr txBox="1"/>
+          <p:nvPr/>
+        </p:nvSpPr>
+        <p:spPr>
+          <a:xfrm>
+            <a:off x="3429000" y="2935224"/>
+            <a:ext cx="2286000" cy="182880"/>
+          </a:xfrm>
+          <a:prstGeom prst="rect">
+            <a:avLst/>
+          </a:prstGeom>
+          <a:noFill/>
+          <a:ln/>
+        </p:spPr>
+        <p:txBody>
+          <a:bodyPr wrap="square" lIns="0" tIns="0" rIns="0" bIns="0" rtlCol="0" anchor="ctr"/>
+          <a:lstStyle/>
+          <a:p>
+            <a:pPr indent="0" marL="0">
+              <a:buNone/>
+            </a:pPr>
+            <a:r>
+              <a:rPr lang="en-US" sz="850" b="1" dirty="0">
+                <a:solidFill>
+                  <a:srgbClr val="2E7D4F"/>
+                </a:solidFill>
+                <a:latin typeface="Arial" pitchFamily="34" charset="0"/>
+                <a:ea typeface="Arial" pitchFamily="34" charset="-122"/>
+                <a:cs typeface="Arial" pitchFamily="34" charset="-120"/>
+              </a:rPr>
+              <a:t>R 42 fr. II</a:t>
+            </a:r>
+            <a:endParaRPr lang="en-US" sz="850" dirty="0"/>
+          </a:p>
+        </p:txBody>
+      </p:sp>
+      <p:sp>
+        <p:nvSpPr>
+          <p:cNvPr id="21" name="Shape 19"/>
+          <p:cNvSpPr/>
+          <p:nvPr/>
+        </p:nvSpPr>
+        <p:spPr>
+          <a:xfrm>
+            <a:off x="6062472" y="1828800"/>
+            <a:ext cx="2578608" cy="1335024"/>
+          </a:xfrm>
+          <a:prstGeom prst="roundRect">
+            <a:avLst>
+              <a:gd name="adj" fmla="val 4110"/>
+            </a:avLst>
+          </a:prstGeom>
+          <a:solidFill>
+            <a:srgbClr val="FFFFFF"/>
+          </a:solidFill>
+          <a:ln w="9525">
+            <a:solidFill>
+              <a:srgbClr val="DCE6DE"/>
+            </a:solidFill>
+            <a:prstDash val="solid"/>
+          </a:ln>
+        </p:spPr>
+      </p:sp>
+      <p:sp>
+        <p:nvSpPr>
+          <p:cNvPr id="22" name="Shape 20"/>
+          <p:cNvSpPr/>
+          <p:nvPr/>
+        </p:nvSpPr>
+        <p:spPr>
+          <a:xfrm>
+            <a:off x="6208776" y="1975104"/>
+            <a:ext cx="274320" cy="274320"/>
+          </a:xfrm>
+          <a:prstGeom prst="ellipse">
+            <a:avLst/>
+          </a:prstGeom>
+          <a:solidFill>
+            <a:srgbClr val="87D895"/>
+          </a:solidFill>
+          <a:ln/>
+        </p:spPr>
+      </p:sp>
+      <p:sp>
+        <p:nvSpPr>
+          <p:cNvPr id="23" name="Text 21"/>
+          <p:cNvSpPr txBox="1"/>
+          <p:nvPr/>
+        </p:nvSpPr>
+        <p:spPr>
+          <a:xfrm>
+            <a:off x="6208776" y="1975104"/>
+            <a:ext cx="274320" cy="274320"/>
+          </a:xfrm>
+          <a:prstGeom prst="rect">
+            <a:avLst/>
+          </a:prstGeom>
+          <a:noFill/>
+          <a:ln/>
+        </p:spPr>
+        <p:txBody>
+          <a:bodyPr wrap="square" lIns="0" tIns="0" rIns="0" bIns="0" rtlCol="0" anchor="ctr"/>
+          <a:lstStyle/>
+          <a:p>
+            <a:pPr algn="ctr" indent="0" marL="0">
+              <a:buNone/>
+            </a:pPr>
+            <a:r>
+              <a:rPr lang="en-US" sz="1100" b="1" dirty="0">
+                <a:solidFill>
+                  <a:srgbClr val="1B1B1E"/>
+                </a:solidFill>
+                <a:latin typeface="Arial" pitchFamily="34" charset="0"/>
+                <a:ea typeface="Arial" pitchFamily="34" charset="-122"/>
+                <a:cs typeface="Arial" pitchFamily="34" charset="-120"/>
+              </a:rPr>
+              <a:t>3</a:t>
+            </a:r>
+            <a:endParaRPr lang="en-US" sz="1100" dirty="0"/>
+          </a:p>
+        </p:txBody>
+      </p:sp>
+      <p:sp>
+        <p:nvSpPr>
+          <p:cNvPr id="24" name="Text 22"/>
+          <p:cNvSpPr txBox="1"/>
+          <p:nvPr/>
+        </p:nvSpPr>
+        <p:spPr>
+          <a:xfrm>
+            <a:off x="6565392" y="1956816"/>
+            <a:ext cx="1920240" cy="329184"/>
+          </a:xfrm>
+          <a:prstGeom prst="rect">
+            <a:avLst/>
+          </a:prstGeom>
+          <a:noFill/>
+          <a:ln/>
+        </p:spPr>
+        <p:txBody>
+          <a:bodyPr wrap="square" lIns="0" tIns="0" rIns="0" bIns="0" rtlCol="0" anchor="t"/>
+          <a:lstStyle/>
+          <a:p>
+            <a:pPr indent="0" marL="0">
+              <a:buNone/>
+            </a:pPr>
+            <a:r>
+              <a:rPr lang="en-US" sz="1200" b="1" dirty="0">
+                <a:solidFill>
+                  <a:srgbClr val="1B1B1E"/>
+                </a:solidFill>
+                <a:latin typeface="Arial" pitchFamily="34" charset="0"/>
+                <a:ea typeface="Arial" pitchFamily="34" charset="-122"/>
+                <a:cs typeface="Arial" pitchFamily="34" charset="-120"/>
+              </a:rPr>
+              <a:t>«Me pagó en efectivo y le devolví por transferencia»</a:t>
+            </a:r>
+            <a:endParaRPr lang="en-US" sz="1200" dirty="0"/>
+          </a:p>
+        </p:txBody>
+      </p:sp>
+      <p:sp>
+        <p:nvSpPr>
+          <p:cNvPr id="25" name="Text 23"/>
+          <p:cNvSpPr txBox="1"/>
+          <p:nvPr/>
+        </p:nvSpPr>
+        <p:spPr>
+          <a:xfrm>
+            <a:off x="6208776" y="2322576"/>
+            <a:ext cx="2286000" cy="603504"/>
+          </a:xfrm>
+          <a:prstGeom prst="rect">
+            <a:avLst/>
+          </a:prstGeom>
+          <a:noFill/>
+          <a:ln/>
+        </p:spPr>
+        <p:txBody>
+          <a:bodyPr wrap="square" lIns="0" tIns="0" rIns="0" bIns="0" rtlCol="0" anchor="t"/>
+          <a:lstStyle/>
+          <a:p>
+            <a:pPr indent="0" marL="0">
+              <a:buNone/>
+            </a:pPr>
+            <a:r>
+              <a:rPr lang="en-US" sz="950" dirty="0">
+                <a:solidFill>
+                  <a:srgbClr val="4D4D4D"/>
+                </a:solidFill>
+                <a:latin typeface="Arial" pitchFamily="34" charset="0"/>
+                <a:ea typeface="Arial" pitchFamily="34" charset="-122"/>
+                <a:cs typeface="Arial" pitchFamily="34" charset="-120"/>
+              </a:rPr>
+              <a:t>La devolución va en la misma forma de pago y en la misma moneda</a:t>
+            </a:r>
+            <a:endParaRPr lang="en-US" sz="950" dirty="0"/>
+          </a:p>
+        </p:txBody>
+      </p:sp>
+      <p:sp>
+        <p:nvSpPr>
+          <p:cNvPr id="26" name="Text 24"/>
+          <p:cNvSpPr txBox="1"/>
+          <p:nvPr/>
+        </p:nvSpPr>
+        <p:spPr>
+          <a:xfrm>
+            <a:off x="6208776" y="2935224"/>
+            <a:ext cx="2286000" cy="182880"/>
+          </a:xfrm>
+          <a:prstGeom prst="rect">
+            <a:avLst/>
+          </a:prstGeom>
+          <a:noFill/>
+          <a:ln/>
+        </p:spPr>
+        <p:txBody>
+          <a:bodyPr wrap="square" lIns="0" tIns="0" rIns="0" bIns="0" rtlCol="0" anchor="ctr"/>
+          <a:lstStyle/>
+          <a:p>
+            <a:pPr indent="0" marL="0">
+              <a:buNone/>
+            </a:pPr>
+            <a:r>
+              <a:rPr lang="en-US" sz="850" b="1" dirty="0">
+                <a:solidFill>
+                  <a:srgbClr val="2E7D4F"/>
+                </a:solidFill>
+                <a:latin typeface="Arial" pitchFamily="34" charset="0"/>
+                <a:ea typeface="Arial" pitchFamily="34" charset="-122"/>
+                <a:cs typeface="Arial" pitchFamily="34" charset="-120"/>
+              </a:rPr>
+              <a:t>R 43</a:t>
+            </a:r>
+            <a:endParaRPr lang="en-US" sz="850" dirty="0"/>
+          </a:p>
+        </p:txBody>
+      </p:sp>
+      <p:sp>
+        <p:nvSpPr>
+          <p:cNvPr id="27" name="Shape 25"/>
+          <p:cNvSpPr/>
+          <p:nvPr/>
+        </p:nvSpPr>
+        <p:spPr>
+          <a:xfrm>
+            <a:off x="502920" y="3977640"/>
+            <a:ext cx="8138160" cy="640080"/>
+          </a:xfrm>
+          <a:prstGeom prst="roundRect">
+            <a:avLst>
+              <a:gd name="adj" fmla="val 8571"/>
+            </a:avLst>
+          </a:prstGeom>
+          <a:solidFill>
+            <a:srgbClr val="87D895"/>
+          </a:solidFill>
+          <a:ln/>
+        </p:spPr>
+      </p:sp>
+      <p:sp>
+        <p:nvSpPr>
+          <p:cNvPr id="28" name="Text 26"/>
+          <p:cNvSpPr txBox="1"/>
+          <p:nvPr/>
+        </p:nvSpPr>
+        <p:spPr>
+          <a:xfrm>
+            <a:off x="731520" y="3995928"/>
+            <a:ext cx="7680960" cy="603504"/>
+          </a:xfrm>
+          <a:prstGeom prst="rect">
+            <a:avLst/>
+          </a:prstGeom>
+          <a:noFill/>
+          <a:ln/>
+        </p:spPr>
+        <p:txBody>
+          <a:bodyPr wrap="square" lIns="0" tIns="0" rIns="0" bIns="0" rtlCol="0" anchor="ctr"/>
+          <a:lstStyle/>
+          <a:p>
+            <a:pPr indent="0" marL="0">
+              <a:buNone/>
+            </a:pPr>
+            <a:r>
+              <a:rPr lang="en-US" sz="1200" b="1" dirty="0">
+                <a:solidFill>
+                  <a:srgbClr val="1B1B1E"/>
+                </a:solidFill>
+                <a:latin typeface="Arial" pitchFamily="34" charset="0"/>
+                <a:ea typeface="Arial" pitchFamily="34" charset="-122"/>
+                <a:cs typeface="Arial" pitchFamily="34" charset="-120"/>
+              </a:rPr>
+              <a:t>Fedatarios: en operaciones de 8,025 UMA o más hay que identificar monto, fecha, forma y moneda de pago. Abajo de eso, y si ya se pagó antes de la firma, basta la declaración bajo protesta. · L 33 y R 45</a:t>
+            </a:r>
+            <a:endParaRPr lang="en-US" sz="1200" dirty="0"/>
+          </a:p>
+        </p:txBody>
+      </p:sp>
+    </p:spTree>
+  </p:cSld>
+  <p:clrMapOvr>
+    <a:masterClrMapping/>
+  </p:clrMapOvr>
+</p:sld>
+</file>
+
+<file path=ppt/slides/slide41.xml><?xml version="1.0" encoding="utf-8"?>
+<p:sld xmlns:a="http://schemas.openxmlformats.org/drawingml/2006/main" xmlns:r="http://schemas.openxmlformats.org/officeDocument/2006/relationships" xmlns:p="http://schemas.openxmlformats.org/presentationml/2006/main">
+  <p:cSld name="Slide 41">
+    <p:bg>
+      <p:bgPr>
+        <a:solidFill>
+          <a:srgbClr val="F6F8F6"/>
+        </a:solidFill>
+      </p:bgPr>
+    </p:bg>
+    <p:spTree>
+      <p:nvGrpSpPr>
+        <p:cNvPr id="1" name=""/>
+        <p:cNvGrpSpPr/>
+        <p:nvPr/>
+      </p:nvGrpSpPr>
+      <p:grpSpPr>
+        <a:xfrm>
+          <a:off x="0" y="0"/>
+          <a:ext cx="0" cy="0"/>
+          <a:chOff x="0" y="0"/>
+          <a:chExt cx="0" cy="0"/>
+        </a:xfrm>
+      </p:grpSpPr>
+      <p:sp>
+        <p:nvSpPr>
+          <p:cNvPr id="2" name="Shape 0"/>
+          <p:cNvSpPr/>
+          <p:nvPr/>
+        </p:nvSpPr>
+        <p:spPr>
+          <a:xfrm>
+            <a:off x="0" y="4846320"/>
+            <a:ext cx="9144000" cy="18288"/>
+          </a:xfrm>
+          <a:prstGeom prst="rect">
+            <a:avLst/>
+          </a:prstGeom>
+          <a:solidFill>
+            <a:srgbClr val="DCE6DE"/>
+          </a:solidFill>
+          <a:ln/>
+        </p:spPr>
+      </p:sp>
+      <p:sp>
+        <p:nvSpPr>
+          <p:cNvPr id="3" name="Text 1"/>
+          <p:cNvSpPr txBox="1"/>
+          <p:nvPr/>
+        </p:nvSpPr>
+        <p:spPr>
+          <a:xfrm>
+            <a:off x="502920" y="4882896"/>
+            <a:ext cx="6949440" cy="219456"/>
+          </a:xfrm>
+          <a:prstGeom prst="rect">
+            <a:avLst/>
+          </a:prstGeom>
+          <a:noFill/>
+          <a:ln/>
+        </p:spPr>
+        <p:txBody>
+          <a:bodyPr wrap="square" lIns="0" tIns="0" rIns="0" bIns="0" rtlCol="0" anchor="ctr"/>
+          <a:lstStyle/>
+          <a:p>
+            <a:pPr indent="0" marL="0">
+              <a:buNone/>
+            </a:pPr>
+            <a:r>
+              <a:rPr lang="en-US" sz="800" dirty="0">
+                <a:solidFill>
+                  <a:srgbClr val="4D4D4D"/>
+                </a:solidFill>
+                <a:latin typeface="Arial" pitchFamily="34" charset="0"/>
+                <a:ea typeface="Arial" pitchFamily="34" charset="-122"/>
+                <a:cs typeface="Arial" pitchFamily="34" charset="-120"/>
+              </a:rPr>
+              <a:t>Taller Antilavado 360 · Sesión 4 · 8 de septiembre de 2026 · GMC360 / 360Educa</a:t>
+            </a:r>
+            <a:endParaRPr lang="en-US" sz="800" dirty="0"/>
+          </a:p>
+        </p:txBody>
+      </p:sp>
+      <p:sp>
+        <p:nvSpPr>
+          <p:cNvPr id="4" name="Text 2"/>
+          <p:cNvSpPr txBox="1"/>
+          <p:nvPr/>
+        </p:nvSpPr>
+        <p:spPr>
+          <a:xfrm>
+            <a:off x="8138160" y="4864608"/>
+            <a:ext cx="502920" cy="237744"/>
+          </a:xfrm>
+          <a:prstGeom prst="rect">
+            <a:avLst/>
+          </a:prstGeom>
+          <a:noFill/>
+          <a:ln/>
+        </p:spPr>
+        <p:txBody>
+          <a:bodyPr wrap="square" lIns="0" tIns="0" rIns="0" bIns="0" rtlCol="0" anchor="ctr"/>
+          <a:lstStyle/>
+          <a:p>
+            <a:pPr algn="r" indent="0" marL="0">
+              <a:buNone/>
+            </a:pPr>
+            <a:r>
+              <a:rPr lang="en-US" sz="900" b="1" dirty="0">
+                <a:solidFill>
+                  <a:srgbClr val="2E7D4F"/>
+                </a:solidFill>
+                <a:latin typeface="Arial" pitchFamily="34" charset="0"/>
+                <a:ea typeface="Arial" pitchFamily="34" charset="-122"/>
+                <a:cs typeface="Arial" pitchFamily="34" charset="-120"/>
+              </a:rPr>
+              <a:t>41</a:t>
+            </a:r>
+            <a:endParaRPr lang="en-US" sz="900" dirty="0"/>
+          </a:p>
+        </p:txBody>
+      </p:sp>
+      <p:sp>
+        <p:nvSpPr>
+          <p:cNvPr id="5" name="Shape 3"/>
+          <p:cNvSpPr/>
+          <p:nvPr/>
+        </p:nvSpPr>
+        <p:spPr>
+          <a:xfrm>
+            <a:off x="502920" y="384048"/>
+            <a:ext cx="384048" cy="384048"/>
+          </a:xfrm>
+          <a:prstGeom prst="ellipse">
+            <a:avLst/>
+          </a:prstGeom>
+          <a:solidFill>
+            <a:srgbClr val="64C27B"/>
+          </a:solidFill>
+          <a:ln/>
+        </p:spPr>
+      </p:sp>
+      <p:sp>
+        <p:nvSpPr>
+          <p:cNvPr id="6" name="Text 4"/>
+          <p:cNvSpPr txBox="1"/>
+          <p:nvPr/>
+        </p:nvSpPr>
+        <p:spPr>
+          <a:xfrm>
+            <a:off x="502920" y="384048"/>
+            <a:ext cx="384048" cy="384048"/>
+          </a:xfrm>
+          <a:prstGeom prst="rect">
+            <a:avLst/>
+          </a:prstGeom>
+          <a:noFill/>
+          <a:ln/>
+        </p:spPr>
+        <p:txBody>
+          <a:bodyPr wrap="square" lIns="0" tIns="0" rIns="0" bIns="0" rtlCol="0" anchor="ctr"/>
+          <a:lstStyle/>
+          <a:p>
+            <a:pPr algn="ctr" indent="0" marL="0">
+              <a:buNone/>
+            </a:pPr>
+            <a:r>
+              <a:rPr lang="en-US" sz="1300" b="1" dirty="0">
+                <a:solidFill>
+                  <a:srgbClr val="1B1B1E"/>
+                </a:solidFill>
+                <a:latin typeface="Arial" pitchFamily="34" charset="0"/>
+                <a:ea typeface="Arial" pitchFamily="34" charset="-122"/>
+                <a:cs typeface="Arial" pitchFamily="34" charset="-120"/>
+              </a:rPr>
+              <a:t>41</a:t>
+            </a:r>
+            <a:endParaRPr lang="en-US" sz="1300" dirty="0"/>
+          </a:p>
+        </p:txBody>
+      </p:sp>
+      <p:sp>
+        <p:nvSpPr>
+          <p:cNvPr id="7" name="Text 5"/>
+          <p:cNvSpPr txBox="1"/>
+          <p:nvPr/>
+        </p:nvSpPr>
+        <p:spPr>
+          <a:xfrm>
+            <a:off x="1024128" y="420624"/>
+            <a:ext cx="7589520" cy="292608"/>
+          </a:xfrm>
+          <a:prstGeom prst="rect">
+            <a:avLst/>
+          </a:prstGeom>
+          <a:noFill/>
+          <a:ln/>
+        </p:spPr>
+        <p:txBody>
+          <a:bodyPr wrap="square" lIns="0" tIns="0" rIns="0" bIns="0" rtlCol="0" anchor="ctr"/>
+          <a:lstStyle/>
+          <a:p>
+            <a:pPr indent="0" marL="0">
+              <a:buNone/>
+            </a:pPr>
+            <a:r>
+              <a:rPr lang="en-US" sz="1100" b="1" spc="120" kern="0" dirty="0">
+                <a:solidFill>
+                  <a:srgbClr val="2E7D4F"/>
+                </a:solidFill>
+                <a:latin typeface="Arial" pitchFamily="34" charset="0"/>
+                <a:ea typeface="Arial" pitchFamily="34" charset="-122"/>
+                <a:cs typeface="Arial" pitchFamily="34" charset="-120"/>
+              </a:rPr>
+              <a:t>R 6 · LAS TRES BASES</a:t>
+            </a:r>
+            <a:endParaRPr lang="en-US" sz="1100" dirty="0"/>
+          </a:p>
+        </p:txBody>
+      </p:sp>
+      <p:sp>
+        <p:nvSpPr>
+          <p:cNvPr id="8" name="Text 6"/>
+          <p:cNvSpPr txBox="1"/>
+          <p:nvPr/>
+        </p:nvSpPr>
+        <p:spPr>
+          <a:xfrm>
+            <a:off x="502920" y="960120"/>
+            <a:ext cx="8138160" cy="786384"/>
+          </a:xfrm>
+          <a:prstGeom prst="rect">
+            <a:avLst/>
+          </a:prstGeom>
+          <a:noFill/>
+          <a:ln/>
+        </p:spPr>
+        <p:txBody>
+          <a:bodyPr wrap="square" lIns="0" tIns="0" rIns="0" bIns="0" rtlCol="0" anchor="t"/>
+          <a:lstStyle/>
+          <a:p>
+            <a:pPr indent="0" marL="0">
+              <a:buNone/>
+            </a:pPr>
+            <a:r>
+              <a:rPr lang="en-US" sz="2700" b="1" dirty="0">
+                <a:solidFill>
+                  <a:srgbClr val="1B1B1E"/>
+                </a:solidFill>
+                <a:latin typeface="Arial" pitchFamily="34" charset="0"/>
+                <a:ea typeface="Arial" pitchFamily="34" charset="-122"/>
+                <a:cs typeface="Arial" pitchFamily="34" charset="-120"/>
+              </a:rPr>
               <a:t>El mismo acto se mide de tres maneras</a:t>
             </a:r>
             <a:endParaRPr lang="en-US" sz="2700" dirty="0"/>
@@ -38895,7 +39921,7 @@
       </p:sp>
       <p:graphicFrame>
         <p:nvGraphicFramePr>
-          <p:cNvPr id="41" name="Table 0"/>
+          <p:cNvPr id="42" name="Table 0"/>
           <p:cNvGraphicFramePr>
             <a:graphicFrameLocks noGrp="1"/>
           </p:cNvGraphicFramePr>
@@ -39817,612 +40843,6 @@
 </p:sld>
 </file>
 
-<file path=ppt/slides/slide41.xml><?xml version="1.0" encoding="utf-8"?>
-<p:sld xmlns:a="http://schemas.openxmlformats.org/drawingml/2006/main" xmlns:r="http://schemas.openxmlformats.org/officeDocument/2006/relationships" xmlns:p="http://schemas.openxmlformats.org/presentationml/2006/main">
-  <p:cSld name="Slide 41">
-    <p:bg>
-      <p:bgPr>
-        <a:solidFill>
-          <a:srgbClr val="F6F8F6"/>
-        </a:solidFill>
-      </p:bgPr>
-    </p:bg>
-    <p:spTree>
-      <p:nvGrpSpPr>
-        <p:cNvPr id="1" name=""/>
-        <p:cNvGrpSpPr/>
-        <p:nvPr/>
-      </p:nvGrpSpPr>
-      <p:grpSpPr>
-        <a:xfrm>
-          <a:off x="0" y="0"/>
-          <a:ext cx="0" cy="0"/>
-          <a:chOff x="0" y="0"/>
-          <a:chExt cx="0" cy="0"/>
-        </a:xfrm>
-      </p:grpSpPr>
-      <p:sp>
-        <p:nvSpPr>
-          <p:cNvPr id="2" name="Shape 0"/>
-          <p:cNvSpPr/>
-          <p:nvPr/>
-        </p:nvSpPr>
-        <p:spPr>
-          <a:xfrm>
-            <a:off x="0" y="4846320"/>
-            <a:ext cx="9144000" cy="18288"/>
-          </a:xfrm>
-          <a:prstGeom prst="rect">
-            <a:avLst/>
-          </a:prstGeom>
-          <a:solidFill>
-            <a:srgbClr val="DCE6DE"/>
-          </a:solidFill>
-          <a:ln/>
-        </p:spPr>
-      </p:sp>
-      <p:sp>
-        <p:nvSpPr>
-          <p:cNvPr id="3" name="Text 1"/>
-          <p:cNvSpPr txBox="1"/>
-          <p:nvPr/>
-        </p:nvSpPr>
-        <p:spPr>
-          <a:xfrm>
-            <a:off x="502920" y="4882896"/>
-            <a:ext cx="6949440" cy="219456"/>
-          </a:xfrm>
-          <a:prstGeom prst="rect">
-            <a:avLst/>
-          </a:prstGeom>
-          <a:noFill/>
-          <a:ln/>
-        </p:spPr>
-        <p:txBody>
-          <a:bodyPr wrap="square" lIns="0" tIns="0" rIns="0" bIns="0" rtlCol="0" anchor="ctr"/>
-          <a:lstStyle/>
-          <a:p>
-            <a:pPr indent="0" marL="0">
-              <a:buNone/>
-            </a:pPr>
-            <a:r>
-              <a:rPr lang="en-US" sz="800" dirty="0">
-                <a:solidFill>
-                  <a:srgbClr val="4D4D4D"/>
-                </a:solidFill>
-                <a:latin typeface="Arial" pitchFamily="34" charset="0"/>
-                <a:ea typeface="Arial" pitchFamily="34" charset="-122"/>
-                <a:cs typeface="Arial" pitchFamily="34" charset="-120"/>
-              </a:rPr>
-              <a:t>Taller Antilavado 360 · Sesión 4 · 8 de septiembre de 2026 · GMC360 / 360Educa</a:t>
-            </a:r>
-            <a:endParaRPr lang="en-US" sz="800" dirty="0"/>
-          </a:p>
-        </p:txBody>
-      </p:sp>
-      <p:sp>
-        <p:nvSpPr>
-          <p:cNvPr id="4" name="Text 2"/>
-          <p:cNvSpPr txBox="1"/>
-          <p:nvPr/>
-        </p:nvSpPr>
-        <p:spPr>
-          <a:xfrm>
-            <a:off x="8138160" y="4864608"/>
-            <a:ext cx="502920" cy="237744"/>
-          </a:xfrm>
-          <a:prstGeom prst="rect">
-            <a:avLst/>
-          </a:prstGeom>
-          <a:noFill/>
-          <a:ln/>
-        </p:spPr>
-        <p:txBody>
-          <a:bodyPr wrap="square" lIns="0" tIns="0" rIns="0" bIns="0" rtlCol="0" anchor="ctr"/>
-          <a:lstStyle/>
-          <a:p>
-            <a:pPr algn="r" indent="0" marL="0">
-              <a:buNone/>
-            </a:pPr>
-            <a:r>
-              <a:rPr lang="en-US" sz="900" b="1" dirty="0">
-                <a:solidFill>
-                  <a:srgbClr val="2E7D4F"/>
-                </a:solidFill>
-                <a:latin typeface="Arial" pitchFamily="34" charset="0"/>
-                <a:ea typeface="Arial" pitchFamily="34" charset="-122"/>
-                <a:cs typeface="Arial" pitchFamily="34" charset="-120"/>
-              </a:rPr>
-              <a:t>41</a:t>
-            </a:r>
-            <a:endParaRPr lang="en-US" sz="900" dirty="0"/>
-          </a:p>
-        </p:txBody>
-      </p:sp>
-      <p:sp>
-        <p:nvSpPr>
-          <p:cNvPr id="5" name="Shape 3"/>
-          <p:cNvSpPr/>
-          <p:nvPr/>
-        </p:nvSpPr>
-        <p:spPr>
-          <a:xfrm>
-            <a:off x="502920" y="384048"/>
-            <a:ext cx="384048" cy="384048"/>
-          </a:xfrm>
-          <a:prstGeom prst="ellipse">
-            <a:avLst/>
-          </a:prstGeom>
-          <a:solidFill>
-            <a:srgbClr val="64C27B"/>
-          </a:solidFill>
-          <a:ln/>
-        </p:spPr>
-      </p:sp>
-      <p:sp>
-        <p:nvSpPr>
-          <p:cNvPr id="6" name="Text 4"/>
-          <p:cNvSpPr txBox="1"/>
-          <p:nvPr/>
-        </p:nvSpPr>
-        <p:spPr>
-          <a:xfrm>
-            <a:off x="502920" y="384048"/>
-            <a:ext cx="384048" cy="384048"/>
-          </a:xfrm>
-          <a:prstGeom prst="rect">
-            <a:avLst/>
-          </a:prstGeom>
-          <a:noFill/>
-          <a:ln/>
-        </p:spPr>
-        <p:txBody>
-          <a:bodyPr wrap="square" lIns="0" tIns="0" rIns="0" bIns="0" rtlCol="0" anchor="ctr"/>
-          <a:lstStyle/>
-          <a:p>
-            <a:pPr algn="ctr" indent="0" marL="0">
-              <a:buNone/>
-            </a:pPr>
-            <a:r>
-              <a:rPr lang="en-US" sz="1300" b="1" dirty="0">
-                <a:solidFill>
-                  <a:srgbClr val="1B1B1E"/>
-                </a:solidFill>
-                <a:latin typeface="Arial" pitchFamily="34" charset="0"/>
-                <a:ea typeface="Arial" pitchFamily="34" charset="-122"/>
-                <a:cs typeface="Arial" pitchFamily="34" charset="-120"/>
-              </a:rPr>
-              <a:t>41</a:t>
-            </a:r>
-            <a:endParaRPr lang="en-US" sz="1300" dirty="0"/>
-          </a:p>
-        </p:txBody>
-      </p:sp>
-      <p:sp>
-        <p:nvSpPr>
-          <p:cNvPr id="7" name="Text 5"/>
-          <p:cNvSpPr txBox="1"/>
-          <p:nvPr/>
-        </p:nvSpPr>
-        <p:spPr>
-          <a:xfrm>
-            <a:off x="1024128" y="420624"/>
-            <a:ext cx="7589520" cy="292608"/>
-          </a:xfrm>
-          <a:prstGeom prst="rect">
-            <a:avLst/>
-          </a:prstGeom>
-          <a:noFill/>
-          <a:ln/>
-        </p:spPr>
-        <p:txBody>
-          <a:bodyPr wrap="square" lIns="0" tIns="0" rIns="0" bIns="0" rtlCol="0" anchor="ctr"/>
-          <a:lstStyle/>
-          <a:p>
-            <a:pPr indent="0" marL="0">
-              <a:buNone/>
-            </a:pPr>
-            <a:r>
-              <a:rPr lang="en-US" sz="1100" b="1" spc="120" kern="0" dirty="0">
-                <a:solidFill>
-                  <a:srgbClr val="2E7D4F"/>
-                </a:solidFill>
-                <a:latin typeface="Arial" pitchFamily="34" charset="0"/>
-                <a:ea typeface="Arial" pitchFamily="34" charset="-122"/>
-                <a:cs typeface="Arial" pitchFamily="34" charset="-120"/>
-              </a:rPr>
-              <a:t>EL CASO QUE SE VAN A LLEVAR</a:t>
-            </a:r>
-            <a:endParaRPr lang="en-US" sz="1100" dirty="0"/>
-          </a:p>
-        </p:txBody>
-      </p:sp>
-      <p:sp>
-        <p:nvSpPr>
-          <p:cNvPr id="8" name="Text 6"/>
-          <p:cNvSpPr txBox="1"/>
-          <p:nvPr/>
-        </p:nvSpPr>
-        <p:spPr>
-          <a:xfrm>
-            <a:off x="502920" y="960120"/>
-            <a:ext cx="8138160" cy="786384"/>
-          </a:xfrm>
-          <a:prstGeom prst="rect">
-            <a:avLst/>
-          </a:prstGeom>
-          <a:noFill/>
-          <a:ln/>
-        </p:spPr>
-        <p:txBody>
-          <a:bodyPr wrap="square" lIns="0" tIns="0" rIns="0" bIns="0" rtlCol="0" anchor="t"/>
-          <a:lstStyle/>
-          <a:p>
-            <a:pPr indent="0" marL="0">
-              <a:buNone/>
-            </a:pPr>
-            <a:r>
-              <a:rPr lang="en-US" sz="2700" b="1" dirty="0">
-                <a:solidFill>
-                  <a:srgbClr val="1B1B1E"/>
-                </a:solidFill>
-                <a:latin typeface="Arial" pitchFamily="34" charset="0"/>
-                <a:ea typeface="Arial" pitchFamily="34" charset="-122"/>
-                <a:cs typeface="Arial" pitchFamily="34" charset="-120"/>
-              </a:rPr>
-              <a:t>Un coche de $340,000 más IVA</a:t>
-            </a:r>
-            <a:endParaRPr lang="en-US" sz="2700" dirty="0"/>
-          </a:p>
-        </p:txBody>
-      </p:sp>
-      <p:sp>
-        <p:nvSpPr>
-          <p:cNvPr id="9" name="Shape 7"/>
-          <p:cNvSpPr/>
-          <p:nvPr/>
-        </p:nvSpPr>
-        <p:spPr>
-          <a:xfrm>
-            <a:off x="502920" y="1920240"/>
-            <a:ext cx="3931920" cy="1463040"/>
-          </a:xfrm>
-          <a:prstGeom prst="roundRect">
-            <a:avLst>
-              <a:gd name="adj" fmla="val 5000"/>
-            </a:avLst>
-          </a:prstGeom>
-          <a:solidFill>
-            <a:srgbClr val="FFFFFF"/>
-          </a:solidFill>
-          <a:ln w="9525">
-            <a:solidFill>
-              <a:srgbClr val="DCE6DE"/>
-            </a:solidFill>
-            <a:prstDash val="solid"/>
-          </a:ln>
-        </p:spPr>
-      </p:sp>
-      <p:sp>
-        <p:nvSpPr>
-          <p:cNvPr id="10" name="Text 8"/>
-          <p:cNvSpPr txBox="1"/>
-          <p:nvPr/>
-        </p:nvSpPr>
-        <p:spPr>
-          <a:xfrm>
-            <a:off x="685800" y="2066544"/>
-            <a:ext cx="3566160" cy="658368"/>
-          </a:xfrm>
-          <a:prstGeom prst="rect">
-            <a:avLst/>
-          </a:prstGeom>
-          <a:noFill/>
-          <a:ln/>
-        </p:spPr>
-        <p:txBody>
-          <a:bodyPr wrap="square" lIns="0" tIns="0" rIns="0" bIns="0" rtlCol="0" anchor="ctr"/>
-          <a:lstStyle/>
-          <a:p>
-            <a:pPr indent="0" marL="0">
-              <a:buNone/>
-            </a:pPr>
-            <a:r>
-              <a:rPr lang="en-US" sz="3000" b="1" dirty="0">
-                <a:solidFill>
-                  <a:srgbClr val="2E7D4F"/>
-                </a:solidFill>
-                <a:latin typeface="Arial" pitchFamily="34" charset="0"/>
-                <a:ea typeface="Arial" pitchFamily="34" charset="-122"/>
-                <a:cs typeface="Arial" pitchFamily="34" charset="-120"/>
-              </a:rPr>
-              <a:t>$340,000</a:t>
-            </a:r>
-            <a:endParaRPr lang="en-US" sz="3000" dirty="0"/>
-          </a:p>
-        </p:txBody>
-      </p:sp>
-      <p:sp>
-        <p:nvSpPr>
-          <p:cNvPr id="11" name="Text 9"/>
-          <p:cNvSpPr txBox="1"/>
-          <p:nvPr/>
-        </p:nvSpPr>
-        <p:spPr>
-          <a:xfrm>
-            <a:off x="685800" y="2761488"/>
-            <a:ext cx="3566160" cy="512064"/>
-          </a:xfrm>
-          <a:prstGeom prst="rect">
-            <a:avLst/>
-          </a:prstGeom>
-          <a:noFill/>
-          <a:ln/>
-        </p:spPr>
-        <p:txBody>
-          <a:bodyPr wrap="square" lIns="0" tIns="0" rIns="0" bIns="0" rtlCol="0" anchor="t"/>
-          <a:lstStyle/>
-          <a:p>
-            <a:pPr indent="0" marL="0">
-              <a:buNone/>
-            </a:pPr>
-            <a:r>
-              <a:rPr lang="en-US" sz="1100" dirty="0">
-                <a:solidFill>
-                  <a:srgbClr val="4D4D4D"/>
-                </a:solidFill>
-                <a:latin typeface="Arial" pitchFamily="34" charset="0"/>
-                <a:ea typeface="Arial" pitchFamily="34" charset="-122"/>
-                <a:cs typeface="Arial" pitchFamily="34" charset="-120"/>
-              </a:rPr>
-              <a:t>BASE 1 · para identificar y avisar (sin IVA)</a:t>
-            </a:r>
-            <a:endParaRPr lang="en-US" sz="1100" dirty="0"/>
-          </a:p>
-          <a:p>
-            <a:pPr indent="0" marL="0">
-              <a:buNone/>
-            </a:pPr>
-            <a:r>
-              <a:rPr lang="en-US" sz="1100" dirty="0">
-                <a:solidFill>
-                  <a:srgbClr val="4D4D4D"/>
-                </a:solidFill>
-                <a:latin typeface="Arial" pitchFamily="34" charset="0"/>
-                <a:ea typeface="Arial" pitchFamily="34" charset="-122"/>
-                <a:cs typeface="Arial" pitchFamily="34" charset="-120"/>
-              </a:rPr>
-              <a:t>Umbral de identificación de la fracción VIII: $376,565.10</a:t>
-            </a:r>
-            <a:endParaRPr lang="en-US" sz="1100" dirty="0"/>
-          </a:p>
-          <a:p>
-            <a:pPr indent="0" marL="0">
-              <a:buNone/>
-            </a:pPr>
-            <a:r>
-              <a:rPr lang="en-US" sz="1100" dirty="0">
-                <a:solidFill>
-                  <a:srgbClr val="4D4D4D"/>
-                </a:solidFill>
-                <a:latin typeface="Arial" pitchFamily="34" charset="0"/>
-                <a:ea typeface="Arial" pitchFamily="34" charset="-122"/>
-                <a:cs typeface="Arial" pitchFamily="34" charset="-120"/>
-              </a:rPr>
-              <a:t>ESTÁ POR DEBAJO. No nace la obligación por esa vía</a:t>
-            </a:r>
-            <a:endParaRPr lang="en-US" sz="1100" dirty="0"/>
-          </a:p>
-        </p:txBody>
-      </p:sp>
-      <p:sp>
-        <p:nvSpPr>
-          <p:cNvPr id="12" name="Shape 10"/>
-          <p:cNvSpPr/>
-          <p:nvPr/>
-        </p:nvSpPr>
-        <p:spPr>
-          <a:xfrm>
-            <a:off x="4709160" y="1920240"/>
-            <a:ext cx="3931920" cy="1463040"/>
-          </a:xfrm>
-          <a:prstGeom prst="roundRect">
-            <a:avLst>
-              <a:gd name="adj" fmla="val 5000"/>
-            </a:avLst>
-          </a:prstGeom>
-          <a:solidFill>
-            <a:srgbClr val="FFFFFF"/>
-          </a:solidFill>
-          <a:ln w="9525">
-            <a:solidFill>
-              <a:srgbClr val="DCE6DE"/>
-            </a:solidFill>
-            <a:prstDash val="solid"/>
-          </a:ln>
-        </p:spPr>
-      </p:sp>
-      <p:sp>
-        <p:nvSpPr>
-          <p:cNvPr id="13" name="Text 11"/>
-          <p:cNvSpPr txBox="1"/>
-          <p:nvPr/>
-        </p:nvSpPr>
-        <p:spPr>
-          <a:xfrm>
-            <a:off x="4892040" y="2066544"/>
-            <a:ext cx="3566160" cy="658368"/>
-          </a:xfrm>
-          <a:prstGeom prst="rect">
-            <a:avLst/>
-          </a:prstGeom>
-          <a:noFill/>
-          <a:ln/>
-        </p:spPr>
-        <p:txBody>
-          <a:bodyPr wrap="square" lIns="0" tIns="0" rIns="0" bIns="0" rtlCol="0" anchor="ctr"/>
-          <a:lstStyle/>
-          <a:p>
-            <a:pPr indent="0" marL="0">
-              <a:buNone/>
-            </a:pPr>
-            <a:r>
-              <a:rPr lang="en-US" sz="3000" b="1" dirty="0">
-                <a:solidFill>
-                  <a:srgbClr val="B3261E"/>
-                </a:solidFill>
-                <a:latin typeface="Arial" pitchFamily="34" charset="0"/>
-                <a:ea typeface="Arial" pitchFamily="34" charset="-122"/>
-                <a:cs typeface="Arial" pitchFamily="34" charset="-120"/>
-              </a:rPr>
-              <a:t>$394,400</a:t>
-            </a:r>
-            <a:endParaRPr lang="en-US" sz="3000" dirty="0"/>
-          </a:p>
-        </p:txBody>
-      </p:sp>
-      <p:sp>
-        <p:nvSpPr>
-          <p:cNvPr id="14" name="Text 12"/>
-          <p:cNvSpPr txBox="1"/>
-          <p:nvPr/>
-        </p:nvSpPr>
-        <p:spPr>
-          <a:xfrm>
-            <a:off x="4892040" y="2761488"/>
-            <a:ext cx="3566160" cy="512064"/>
-          </a:xfrm>
-          <a:prstGeom prst="rect">
-            <a:avLst/>
-          </a:prstGeom>
-          <a:noFill/>
-          <a:ln/>
-        </p:spPr>
-        <p:txBody>
-          <a:bodyPr wrap="square" lIns="0" tIns="0" rIns="0" bIns="0" rtlCol="0" anchor="t"/>
-          <a:lstStyle/>
-          <a:p>
-            <a:pPr indent="0" marL="0">
-              <a:buNone/>
-            </a:pPr>
-            <a:r>
-              <a:rPr lang="en-US" sz="1100" dirty="0">
-                <a:solidFill>
-                  <a:srgbClr val="4D4D4D"/>
-                </a:solidFill>
-                <a:latin typeface="Arial" pitchFamily="34" charset="0"/>
-                <a:ea typeface="Arial" pitchFamily="34" charset="-122"/>
-                <a:cs typeface="Arial" pitchFamily="34" charset="-120"/>
-              </a:rPr>
-              <a:t>BASE 3 · para el tope de efectivo (con IVA)</a:t>
-            </a:r>
-            <a:endParaRPr lang="en-US" sz="1100" dirty="0"/>
-          </a:p>
-          <a:p>
-            <a:pPr indent="0" marL="0">
-              <a:buNone/>
-            </a:pPr>
-            <a:r>
-              <a:rPr lang="en-US" sz="1100" dirty="0">
-                <a:solidFill>
-                  <a:srgbClr val="4D4D4D"/>
-                </a:solidFill>
-                <a:latin typeface="Arial" pitchFamily="34" charset="0"/>
-                <a:ea typeface="Arial" pitchFamily="34" charset="-122"/>
-                <a:cs typeface="Arial" pitchFamily="34" charset="-120"/>
-              </a:rPr>
-              <a:t>Tope del artículo 32, fracción II: $376,565.10</a:t>
-            </a:r>
-            <a:endParaRPr lang="en-US" sz="1100" dirty="0"/>
-          </a:p>
-          <a:p>
-            <a:pPr indent="0" marL="0">
-              <a:buNone/>
-            </a:pPr>
-            <a:r>
-              <a:rPr lang="en-US" sz="1100" dirty="0">
-                <a:solidFill>
-                  <a:srgbClr val="4D4D4D"/>
-                </a:solidFill>
-                <a:latin typeface="Arial" pitchFamily="34" charset="0"/>
-                <a:ea typeface="Arial" pitchFamily="34" charset="-122"/>
-                <a:cs typeface="Arial" pitchFamily="34" charset="-120"/>
-              </a:rPr>
-              <a:t>ESTÁ POR ENCIMA. Pagarlo en efectivo está prohibido</a:t>
-            </a:r>
-            <a:endParaRPr lang="en-US" sz="1100" dirty="0"/>
-          </a:p>
-        </p:txBody>
-      </p:sp>
-      <p:sp>
-        <p:nvSpPr>
-          <p:cNvPr id="15" name="Shape 13"/>
-          <p:cNvSpPr/>
-          <p:nvPr/>
-        </p:nvSpPr>
-        <p:spPr>
-          <a:xfrm>
-            <a:off x="502920" y="3703320"/>
-            <a:ext cx="8138160" cy="640080"/>
-          </a:xfrm>
-          <a:prstGeom prst="roundRect">
-            <a:avLst>
-              <a:gd name="adj" fmla="val 8571"/>
-            </a:avLst>
-          </a:prstGeom>
-          <a:solidFill>
-            <a:srgbClr val="87D895"/>
-          </a:solidFill>
-          <a:ln/>
-        </p:spPr>
-      </p:sp>
-      <p:sp>
-        <p:nvSpPr>
-          <p:cNvPr id="16" name="Text 14"/>
-          <p:cNvSpPr txBox="1"/>
-          <p:nvPr/>
-        </p:nvSpPr>
-        <p:spPr>
-          <a:xfrm>
-            <a:off x="731520" y="3721608"/>
-            <a:ext cx="7680960" cy="603504"/>
-          </a:xfrm>
-          <a:prstGeom prst="rect">
-            <a:avLst/>
-          </a:prstGeom>
-          <a:noFill/>
-          <a:ln/>
-        </p:spPr>
-        <p:txBody>
-          <a:bodyPr wrap="square" lIns="0" tIns="0" rIns="0" bIns="0" rtlCol="0" anchor="ctr"/>
-          <a:lstStyle/>
-          <a:p>
-            <a:pPr indent="0" marL="0">
-              <a:buNone/>
-            </a:pPr>
-            <a:r>
-              <a:rPr lang="en-US" sz="1200" b="1" dirty="0">
-                <a:solidFill>
-                  <a:srgbClr val="1B1B1E"/>
-                </a:solidFill>
-                <a:latin typeface="Arial" pitchFamily="34" charset="0"/>
-                <a:ea typeface="Arial" pitchFamily="34" charset="-122"/>
-                <a:cs typeface="Arial" pitchFamily="34" charset="-120"/>
-              </a:rPr>
-              <a:t>El mismo coche, el mismo día, el mismo cliente. Y la diferencia entre las dos respuestas es un impuesto.</a:t>
-            </a:r>
-            <a:endParaRPr lang="en-US" sz="1200" dirty="0"/>
-          </a:p>
-        </p:txBody>
-      </p:sp>
-    </p:spTree>
-  </p:cSld>
-  <p:clrMapOvr>
-    <a:masterClrMapping/>
-  </p:clrMapOvr>
-</p:sld>
-</file>
-
 <file path=ppt/slides/slide42.xml><?xml version="1.0" encoding="utf-8"?>
 <p:sld xmlns:a="http://schemas.openxmlformats.org/drawingml/2006/main" xmlns:r="http://schemas.openxmlformats.org/officeDocument/2006/relationships" xmlns:p="http://schemas.openxmlformats.org/presentationml/2006/main">
   <p:cSld name="Slide 42">
@@ -40637,7 +41057,7 @@
                 <a:ea typeface="Arial" pitchFamily="34" charset="-122"/>
                 <a:cs typeface="Arial" pitchFamily="34" charset="-120"/>
               </a:rPr>
-              <a:t>CIERRE</a:t>
+              <a:t>EL CASO QUE SE VAN A LLEVAR</a:t>
             </a:r>
             <a:endParaRPr lang="en-US" sz="1100" dirty="0"/>
           </a:p>
@@ -40676,7 +41096,7 @@
                 <a:ea typeface="Arial" pitchFamily="34" charset="-122"/>
                 <a:cs typeface="Arial" pitchFamily="34" charset="-120"/>
               </a:rPr>
-              <a:t>La tarea, cuatro cosas</a:t>
+              <a:t>Un coche de $340,000 más IVA</a:t>
             </a:r>
             <a:endParaRPr lang="en-US" sz="2700" dirty="0"/>
           </a:p>
@@ -40690,12 +41110,12 @@
         </p:nvSpPr>
         <p:spPr>
           <a:xfrm>
-            <a:off x="502920" y="1828800"/>
-            <a:ext cx="3968496" cy="1335024"/>
+            <a:off x="502920" y="1920240"/>
+            <a:ext cx="3931920" cy="1463040"/>
           </a:xfrm>
           <a:prstGeom prst="roundRect">
             <a:avLst>
-              <a:gd name="adj" fmla="val 4110"/>
+              <a:gd name="adj" fmla="val 5000"/>
             </a:avLst>
           </a:prstGeom>
           <a:solidFill>
@@ -40711,155 +41131,130 @@
       </p:sp>
       <p:sp>
         <p:nvSpPr>
-          <p:cNvPr id="10" name="Shape 8"/>
+          <p:cNvPr id="10" name="Text 8"/>
+          <p:cNvSpPr txBox="1"/>
+          <p:nvPr/>
+        </p:nvSpPr>
+        <p:spPr>
+          <a:xfrm>
+            <a:off x="685800" y="2066544"/>
+            <a:ext cx="3566160" cy="658368"/>
+          </a:xfrm>
+          <a:prstGeom prst="rect">
+            <a:avLst/>
+          </a:prstGeom>
+          <a:noFill/>
+          <a:ln/>
+        </p:spPr>
+        <p:txBody>
+          <a:bodyPr wrap="square" lIns="0" tIns="0" rIns="0" bIns="0" rtlCol="0" anchor="ctr"/>
+          <a:lstStyle/>
+          <a:p>
+            <a:pPr indent="0" marL="0">
+              <a:buNone/>
+            </a:pPr>
+            <a:r>
+              <a:rPr lang="en-US" sz="3000" b="1" dirty="0">
+                <a:solidFill>
+                  <a:srgbClr val="2E7D4F"/>
+                </a:solidFill>
+                <a:latin typeface="Arial" pitchFamily="34" charset="0"/>
+                <a:ea typeface="Arial" pitchFamily="34" charset="-122"/>
+                <a:cs typeface="Arial" pitchFamily="34" charset="-120"/>
+              </a:rPr>
+              <a:t>$340,000</a:t>
+            </a:r>
+            <a:endParaRPr lang="en-US" sz="3000" dirty="0"/>
+          </a:p>
+        </p:txBody>
+      </p:sp>
+      <p:sp>
+        <p:nvSpPr>
+          <p:cNvPr id="11" name="Text 9"/>
+          <p:cNvSpPr txBox="1"/>
+          <p:nvPr/>
+        </p:nvSpPr>
+        <p:spPr>
+          <a:xfrm>
+            <a:off x="685800" y="2761488"/>
+            <a:ext cx="3566160" cy="512064"/>
+          </a:xfrm>
+          <a:prstGeom prst="rect">
+            <a:avLst/>
+          </a:prstGeom>
+          <a:noFill/>
+          <a:ln/>
+        </p:spPr>
+        <p:txBody>
+          <a:bodyPr wrap="square" lIns="0" tIns="0" rIns="0" bIns="0" rtlCol="0" anchor="t"/>
+          <a:lstStyle/>
+          <a:p>
+            <a:pPr indent="0" marL="0">
+              <a:buNone/>
+            </a:pPr>
+            <a:r>
+              <a:rPr lang="en-US" sz="1100" dirty="0">
+                <a:solidFill>
+                  <a:srgbClr val="4D4D4D"/>
+                </a:solidFill>
+                <a:latin typeface="Arial" pitchFamily="34" charset="0"/>
+                <a:ea typeface="Arial" pitchFamily="34" charset="-122"/>
+                <a:cs typeface="Arial" pitchFamily="34" charset="-120"/>
+              </a:rPr>
+              <a:t>BASE 1 · para identificar y avisar (sin IVA)</a:t>
+            </a:r>
+            <a:endParaRPr lang="en-US" sz="1100" dirty="0"/>
+          </a:p>
+          <a:p>
+            <a:pPr indent="0" marL="0">
+              <a:buNone/>
+            </a:pPr>
+            <a:r>
+              <a:rPr lang="en-US" sz="1100" dirty="0">
+                <a:solidFill>
+                  <a:srgbClr val="4D4D4D"/>
+                </a:solidFill>
+                <a:latin typeface="Arial" pitchFamily="34" charset="0"/>
+                <a:ea typeface="Arial" pitchFamily="34" charset="-122"/>
+                <a:cs typeface="Arial" pitchFamily="34" charset="-120"/>
+              </a:rPr>
+              <a:t>Umbral de identificación de la fracción VIII: $376,565.10</a:t>
+            </a:r>
+            <a:endParaRPr lang="en-US" sz="1100" dirty="0"/>
+          </a:p>
+          <a:p>
+            <a:pPr indent="0" marL="0">
+              <a:buNone/>
+            </a:pPr>
+            <a:r>
+              <a:rPr lang="en-US" sz="1100" dirty="0">
+                <a:solidFill>
+                  <a:srgbClr val="4D4D4D"/>
+                </a:solidFill>
+                <a:latin typeface="Arial" pitchFamily="34" charset="0"/>
+                <a:ea typeface="Arial" pitchFamily="34" charset="-122"/>
+                <a:cs typeface="Arial" pitchFamily="34" charset="-120"/>
+              </a:rPr>
+              <a:t>ESTÁ POR DEBAJO. No nace la obligación por esa vía</a:t>
+            </a:r>
+            <a:endParaRPr lang="en-US" sz="1100" dirty="0"/>
+          </a:p>
+        </p:txBody>
+      </p:sp>
+      <p:sp>
+        <p:nvSpPr>
+          <p:cNvPr id="12" name="Shape 10"/>
           <p:cNvSpPr/>
           <p:nvPr/>
         </p:nvSpPr>
         <p:spPr>
           <a:xfrm>
-            <a:off x="649224" y="1975104"/>
-            <a:ext cx="274320" cy="274320"/>
-          </a:xfrm>
-          <a:prstGeom prst="ellipse">
-            <a:avLst/>
-          </a:prstGeom>
-          <a:solidFill>
-            <a:srgbClr val="87D895"/>
-          </a:solidFill>
-          <a:ln/>
-        </p:spPr>
-      </p:sp>
-      <p:sp>
-        <p:nvSpPr>
-          <p:cNvPr id="11" name="Text 9"/>
-          <p:cNvSpPr txBox="1"/>
-          <p:nvPr/>
-        </p:nvSpPr>
-        <p:spPr>
-          <a:xfrm>
-            <a:off x="649224" y="1975104"/>
-            <a:ext cx="274320" cy="274320"/>
-          </a:xfrm>
-          <a:prstGeom prst="rect">
-            <a:avLst/>
-          </a:prstGeom>
-          <a:noFill/>
-          <a:ln/>
-        </p:spPr>
-        <p:txBody>
-          <a:bodyPr wrap="square" lIns="0" tIns="0" rIns="0" bIns="0" rtlCol="0" anchor="ctr"/>
-          <a:lstStyle/>
-          <a:p>
-            <a:pPr algn="ctr" indent="0" marL="0">
-              <a:buNone/>
-            </a:pPr>
-            <a:r>
-              <a:rPr lang="en-US" sz="1100" b="1" dirty="0">
-                <a:solidFill>
-                  <a:srgbClr val="1B1B1E"/>
-                </a:solidFill>
-                <a:latin typeface="Arial" pitchFamily="34" charset="0"/>
-                <a:ea typeface="Arial" pitchFamily="34" charset="-122"/>
-                <a:cs typeface="Arial" pitchFamily="34" charset="-120"/>
-              </a:rPr>
-              <a:t>1</a:t>
-            </a:r>
-            <a:endParaRPr lang="en-US" sz="1100" dirty="0"/>
-          </a:p>
-        </p:txBody>
-      </p:sp>
-      <p:sp>
-        <p:nvSpPr>
-          <p:cNvPr id="12" name="Text 10"/>
-          <p:cNvSpPr txBox="1"/>
-          <p:nvPr/>
-        </p:nvSpPr>
-        <p:spPr>
-          <a:xfrm>
-            <a:off x="1005840" y="1956816"/>
-            <a:ext cx="3310128" cy="329184"/>
-          </a:xfrm>
-          <a:prstGeom prst="rect">
-            <a:avLst/>
-          </a:prstGeom>
-          <a:noFill/>
-          <a:ln/>
-        </p:spPr>
-        <p:txBody>
-          <a:bodyPr wrap="square" lIns="0" tIns="0" rIns="0" bIns="0" rtlCol="0" anchor="t"/>
-          <a:lstStyle/>
-          <a:p>
-            <a:pPr indent="0" marL="0">
-              <a:buNone/>
-            </a:pPr>
-            <a:r>
-              <a:rPr lang="en-US" sz="1200" b="1" dirty="0">
-                <a:solidFill>
-                  <a:srgbClr val="1B1B1E"/>
-                </a:solidFill>
-                <a:latin typeface="Arial" pitchFamily="34" charset="0"/>
-                <a:ea typeface="Arial" pitchFamily="34" charset="-122"/>
-                <a:cs typeface="Arial" pitchFamily="34" charset="-120"/>
-              </a:rPr>
-              <a:t>1 · El renglón del perfil</a:t>
-            </a:r>
-            <a:endParaRPr lang="en-US" sz="1200" dirty="0"/>
-          </a:p>
-        </p:txBody>
-      </p:sp>
-      <p:sp>
-        <p:nvSpPr>
-          <p:cNvPr id="13" name="Text 11"/>
-          <p:cNvSpPr txBox="1"/>
-          <p:nvPr/>
-        </p:nvSpPr>
-        <p:spPr>
-          <a:xfrm>
-            <a:off x="649224" y="2322576"/>
-            <a:ext cx="3675888" cy="603504"/>
-          </a:xfrm>
-          <a:prstGeom prst="rect">
-            <a:avLst/>
-          </a:prstGeom>
-          <a:noFill/>
-          <a:ln/>
-        </p:spPr>
-        <p:txBody>
-          <a:bodyPr wrap="square" lIns="0" tIns="0" rIns="0" bIns="0" rtlCol="0" anchor="t"/>
-          <a:lstStyle/>
-          <a:p>
-            <a:pPr indent="0" marL="0">
-              <a:buNone/>
-            </a:pPr>
-            <a:r>
-              <a:rPr lang="en-US" sz="950" dirty="0">
-                <a:solidFill>
-                  <a:srgbClr val="4D4D4D"/>
-                </a:solidFill>
-                <a:latin typeface="Arial" pitchFamily="34" charset="0"/>
-                <a:ea typeface="Arial" pitchFamily="34" charset="-122"/>
-                <a:cs typeface="Arial" pitchFamily="34" charset="-120"/>
-              </a:rPr>
-              <a:t>Meter el monto máximo mensual estimado al cuestionario de alta. Es de esta semana, no de 2027</a:t>
-            </a:r>
-            <a:endParaRPr lang="en-US" sz="950" dirty="0"/>
-          </a:p>
-        </p:txBody>
-      </p:sp>
-      <p:sp>
-        <p:nvSpPr>
-          <p:cNvPr id="14" name="Shape 12"/>
-          <p:cNvSpPr/>
-          <p:nvPr/>
-        </p:nvSpPr>
-        <p:spPr>
-          <a:xfrm>
-            <a:off x="4672584" y="1828800"/>
-            <a:ext cx="3968496" cy="1335024"/>
+            <a:off x="4709160" y="1920240"/>
+            <a:ext cx="3931920" cy="1463040"/>
           </a:xfrm>
           <a:prstGeom prst="roundRect">
             <a:avLst>
-              <a:gd name="adj" fmla="val 4110"/>
+              <a:gd name="adj" fmla="val 5000"/>
             </a:avLst>
           </a:prstGeom>
           <a:solidFill>
@@ -40875,478 +41270,125 @@
       </p:sp>
       <p:sp>
         <p:nvSpPr>
+          <p:cNvPr id="13" name="Text 11"/>
+          <p:cNvSpPr txBox="1"/>
+          <p:nvPr/>
+        </p:nvSpPr>
+        <p:spPr>
+          <a:xfrm>
+            <a:off x="4892040" y="2066544"/>
+            <a:ext cx="3566160" cy="658368"/>
+          </a:xfrm>
+          <a:prstGeom prst="rect">
+            <a:avLst/>
+          </a:prstGeom>
+          <a:noFill/>
+          <a:ln/>
+        </p:spPr>
+        <p:txBody>
+          <a:bodyPr wrap="square" lIns="0" tIns="0" rIns="0" bIns="0" rtlCol="0" anchor="ctr"/>
+          <a:lstStyle/>
+          <a:p>
+            <a:pPr indent="0" marL="0">
+              <a:buNone/>
+            </a:pPr>
+            <a:r>
+              <a:rPr lang="en-US" sz="3000" b="1" dirty="0">
+                <a:solidFill>
+                  <a:srgbClr val="B3261E"/>
+                </a:solidFill>
+                <a:latin typeface="Arial" pitchFamily="34" charset="0"/>
+                <a:ea typeface="Arial" pitchFamily="34" charset="-122"/>
+                <a:cs typeface="Arial" pitchFamily="34" charset="-120"/>
+              </a:rPr>
+              <a:t>$394,400</a:t>
+            </a:r>
+            <a:endParaRPr lang="en-US" sz="3000" dirty="0"/>
+          </a:p>
+        </p:txBody>
+      </p:sp>
+      <p:sp>
+        <p:nvSpPr>
+          <p:cNvPr id="14" name="Text 12"/>
+          <p:cNvSpPr txBox="1"/>
+          <p:nvPr/>
+        </p:nvSpPr>
+        <p:spPr>
+          <a:xfrm>
+            <a:off x="4892040" y="2761488"/>
+            <a:ext cx="3566160" cy="512064"/>
+          </a:xfrm>
+          <a:prstGeom prst="rect">
+            <a:avLst/>
+          </a:prstGeom>
+          <a:noFill/>
+          <a:ln/>
+        </p:spPr>
+        <p:txBody>
+          <a:bodyPr wrap="square" lIns="0" tIns="0" rIns="0" bIns="0" rtlCol="0" anchor="t"/>
+          <a:lstStyle/>
+          <a:p>
+            <a:pPr indent="0" marL="0">
+              <a:buNone/>
+            </a:pPr>
+            <a:r>
+              <a:rPr lang="en-US" sz="1100" dirty="0">
+                <a:solidFill>
+                  <a:srgbClr val="4D4D4D"/>
+                </a:solidFill>
+                <a:latin typeface="Arial" pitchFamily="34" charset="0"/>
+                <a:ea typeface="Arial" pitchFamily="34" charset="-122"/>
+                <a:cs typeface="Arial" pitchFamily="34" charset="-120"/>
+              </a:rPr>
+              <a:t>BASE 3 · para el tope de efectivo (con IVA)</a:t>
+            </a:r>
+            <a:endParaRPr lang="en-US" sz="1100" dirty="0"/>
+          </a:p>
+          <a:p>
+            <a:pPr indent="0" marL="0">
+              <a:buNone/>
+            </a:pPr>
+            <a:r>
+              <a:rPr lang="en-US" sz="1100" dirty="0">
+                <a:solidFill>
+                  <a:srgbClr val="4D4D4D"/>
+                </a:solidFill>
+                <a:latin typeface="Arial" pitchFamily="34" charset="0"/>
+                <a:ea typeface="Arial" pitchFamily="34" charset="-122"/>
+                <a:cs typeface="Arial" pitchFamily="34" charset="-120"/>
+              </a:rPr>
+              <a:t>Tope del artículo 32, fracción II: $376,565.10</a:t>
+            </a:r>
+            <a:endParaRPr lang="en-US" sz="1100" dirty="0"/>
+          </a:p>
+          <a:p>
+            <a:pPr indent="0" marL="0">
+              <a:buNone/>
+            </a:pPr>
+            <a:r>
+              <a:rPr lang="en-US" sz="1100" dirty="0">
+                <a:solidFill>
+                  <a:srgbClr val="4D4D4D"/>
+                </a:solidFill>
+                <a:latin typeface="Arial" pitchFamily="34" charset="0"/>
+                <a:ea typeface="Arial" pitchFamily="34" charset="-122"/>
+                <a:cs typeface="Arial" pitchFamily="34" charset="-120"/>
+              </a:rPr>
+              <a:t>ESTÁ POR ENCIMA. Pagarlo en efectivo está prohibido</a:t>
+            </a:r>
+            <a:endParaRPr lang="en-US" sz="1100" dirty="0"/>
+          </a:p>
+        </p:txBody>
+      </p:sp>
+      <p:sp>
+        <p:nvSpPr>
           <p:cNvPr id="15" name="Shape 13"/>
           <p:cNvSpPr/>
           <p:nvPr/>
         </p:nvSpPr>
         <p:spPr>
           <a:xfrm>
-            <a:off x="4818888" y="1975104"/>
-            <a:ext cx="274320" cy="274320"/>
-          </a:xfrm>
-          <a:prstGeom prst="ellipse">
-            <a:avLst/>
-          </a:prstGeom>
-          <a:solidFill>
-            <a:srgbClr val="87D895"/>
-          </a:solidFill>
-          <a:ln/>
-        </p:spPr>
-      </p:sp>
-      <p:sp>
-        <p:nvSpPr>
-          <p:cNvPr id="16" name="Text 14"/>
-          <p:cNvSpPr txBox="1"/>
-          <p:nvPr/>
-        </p:nvSpPr>
-        <p:spPr>
-          <a:xfrm>
-            <a:off x="4818888" y="1975104"/>
-            <a:ext cx="274320" cy="274320"/>
-          </a:xfrm>
-          <a:prstGeom prst="rect">
-            <a:avLst/>
-          </a:prstGeom>
-          <a:noFill/>
-          <a:ln/>
-        </p:spPr>
-        <p:txBody>
-          <a:bodyPr wrap="square" lIns="0" tIns="0" rIns="0" bIns="0" rtlCol="0" anchor="ctr"/>
-          <a:lstStyle/>
-          <a:p>
-            <a:pPr algn="ctr" indent="0" marL="0">
-              <a:buNone/>
-            </a:pPr>
-            <a:r>
-              <a:rPr lang="en-US" sz="1100" b="1" dirty="0">
-                <a:solidFill>
-                  <a:srgbClr val="1B1B1E"/>
-                </a:solidFill>
-                <a:latin typeface="Arial" pitchFamily="34" charset="0"/>
-                <a:ea typeface="Arial" pitchFamily="34" charset="-122"/>
-                <a:cs typeface="Arial" pitchFamily="34" charset="-120"/>
-              </a:rPr>
-              <a:t>2</a:t>
-            </a:r>
-            <a:endParaRPr lang="en-US" sz="1100" dirty="0"/>
-          </a:p>
-        </p:txBody>
-      </p:sp>
-      <p:sp>
-        <p:nvSpPr>
-          <p:cNvPr id="17" name="Text 15"/>
-          <p:cNvSpPr txBox="1"/>
-          <p:nvPr/>
-        </p:nvSpPr>
-        <p:spPr>
-          <a:xfrm>
-            <a:off x="5175504" y="1956816"/>
-            <a:ext cx="3310128" cy="329184"/>
-          </a:xfrm>
-          <a:prstGeom prst="rect">
-            <a:avLst/>
-          </a:prstGeom>
-          <a:noFill/>
-          <a:ln/>
-        </p:spPr>
-        <p:txBody>
-          <a:bodyPr wrap="square" lIns="0" tIns="0" rIns="0" bIns="0" rtlCol="0" anchor="t"/>
-          <a:lstStyle/>
-          <a:p>
-            <a:pPr indent="0" marL="0">
-              <a:buNone/>
-            </a:pPr>
-            <a:r>
-              <a:rPr lang="en-US" sz="1200" b="1" dirty="0">
-                <a:solidFill>
-                  <a:srgbClr val="1B1B1E"/>
-                </a:solidFill>
-                <a:latin typeface="Arial" pitchFamily="34" charset="0"/>
-                <a:ea typeface="Arial" pitchFamily="34" charset="-122"/>
-                <a:cs typeface="Arial" pitchFamily="34" charset="-120"/>
-              </a:rPr>
-              <a:t>2 · Terminar el checklist</a:t>
-            </a:r>
-            <a:endParaRPr lang="en-US" sz="1200" dirty="0"/>
-          </a:p>
-        </p:txBody>
-      </p:sp>
-      <p:sp>
-        <p:nvSpPr>
-          <p:cNvPr id="18" name="Text 16"/>
-          <p:cNvSpPr txBox="1"/>
-          <p:nvPr/>
-        </p:nvSpPr>
-        <p:spPr>
-          <a:xfrm>
-            <a:off x="4818888" y="2322576"/>
-            <a:ext cx="3675888" cy="603504"/>
-          </a:xfrm>
-          <a:prstGeom prst="rect">
-            <a:avLst/>
-          </a:prstGeom>
-          <a:noFill/>
-          <a:ln/>
-        </p:spPr>
-        <p:txBody>
-          <a:bodyPr wrap="square" lIns="0" tIns="0" rIns="0" bIns="0" rtlCol="0" anchor="t"/>
-          <a:lstStyle/>
-          <a:p>
-            <a:pPr indent="0" marL="0">
-              <a:buNone/>
-            </a:pPr>
-            <a:r>
-              <a:rPr lang="en-US" sz="950" dirty="0">
-                <a:solidFill>
-                  <a:srgbClr val="4D4D4D"/>
-                </a:solidFill>
-                <a:latin typeface="Arial" pitchFamily="34" charset="0"/>
-                <a:ea typeface="Arial" pitchFamily="34" charset="-122"/>
-                <a:cs typeface="Arial" pitchFamily="34" charset="-120"/>
-              </a:rPr>
-              <a:t>De la estructura que trajo, documentando el nivel en que cerró</a:t>
-            </a:r>
-            <a:endParaRPr lang="en-US" sz="950" dirty="0"/>
-          </a:p>
-        </p:txBody>
-      </p:sp>
-      <p:sp>
-        <p:nvSpPr>
-          <p:cNvPr id="19" name="Shape 17"/>
-          <p:cNvSpPr/>
-          <p:nvPr/>
-        </p:nvSpPr>
-        <p:spPr>
-          <a:xfrm>
-            <a:off x="502920" y="3310128"/>
-            <a:ext cx="3968496" cy="1335024"/>
-          </a:xfrm>
-          <a:prstGeom prst="roundRect">
-            <a:avLst>
-              <a:gd name="adj" fmla="val 4110"/>
-            </a:avLst>
-          </a:prstGeom>
-          <a:solidFill>
-            <a:srgbClr val="FFFFFF"/>
-          </a:solidFill>
-          <a:ln w="9525">
-            <a:solidFill>
-              <a:srgbClr val="DCE6DE"/>
-            </a:solidFill>
-            <a:prstDash val="solid"/>
-          </a:ln>
-        </p:spPr>
-      </p:sp>
-      <p:sp>
-        <p:nvSpPr>
-          <p:cNvPr id="20" name="Shape 18"/>
-          <p:cNvSpPr/>
-          <p:nvPr/>
-        </p:nvSpPr>
-        <p:spPr>
-          <a:xfrm>
-            <a:off x="649224" y="3456432"/>
-            <a:ext cx="274320" cy="274320"/>
-          </a:xfrm>
-          <a:prstGeom prst="ellipse">
-            <a:avLst/>
-          </a:prstGeom>
-          <a:solidFill>
-            <a:srgbClr val="87D895"/>
-          </a:solidFill>
-          <a:ln/>
-        </p:spPr>
-      </p:sp>
-      <p:sp>
-        <p:nvSpPr>
-          <p:cNvPr id="21" name="Text 19"/>
-          <p:cNvSpPr txBox="1"/>
-          <p:nvPr/>
-        </p:nvSpPr>
-        <p:spPr>
-          <a:xfrm>
-            <a:off x="649224" y="3456432"/>
-            <a:ext cx="274320" cy="274320"/>
-          </a:xfrm>
-          <a:prstGeom prst="rect">
-            <a:avLst/>
-          </a:prstGeom>
-          <a:noFill/>
-          <a:ln/>
-        </p:spPr>
-        <p:txBody>
-          <a:bodyPr wrap="square" lIns="0" tIns="0" rIns="0" bIns="0" rtlCol="0" anchor="ctr"/>
-          <a:lstStyle/>
-          <a:p>
-            <a:pPr algn="ctr" indent="0" marL="0">
-              <a:buNone/>
-            </a:pPr>
-            <a:r>
-              <a:rPr lang="en-US" sz="1100" b="1" dirty="0">
-                <a:solidFill>
-                  <a:srgbClr val="1B1B1E"/>
-                </a:solidFill>
-                <a:latin typeface="Arial" pitchFamily="34" charset="0"/>
-                <a:ea typeface="Arial" pitchFamily="34" charset="-122"/>
-                <a:cs typeface="Arial" pitchFamily="34" charset="-120"/>
-              </a:rPr>
-              <a:t>3</a:t>
-            </a:r>
-            <a:endParaRPr lang="en-US" sz="1100" dirty="0"/>
-          </a:p>
-        </p:txBody>
-      </p:sp>
-      <p:sp>
-        <p:nvSpPr>
-          <p:cNvPr id="22" name="Text 20"/>
-          <p:cNvSpPr txBox="1"/>
-          <p:nvPr/>
-        </p:nvSpPr>
-        <p:spPr>
-          <a:xfrm>
-            <a:off x="1005840" y="3438144"/>
-            <a:ext cx="3310128" cy="329184"/>
-          </a:xfrm>
-          <a:prstGeom prst="rect">
-            <a:avLst/>
-          </a:prstGeom>
-          <a:noFill/>
-          <a:ln/>
-        </p:spPr>
-        <p:txBody>
-          <a:bodyPr wrap="square" lIns="0" tIns="0" rIns="0" bIns="0" rtlCol="0" anchor="t"/>
-          <a:lstStyle/>
-          <a:p>
-            <a:pPr indent="0" marL="0">
-              <a:buNone/>
-            </a:pPr>
-            <a:r>
-              <a:rPr lang="en-US" sz="1200" b="1" dirty="0">
-                <a:solidFill>
-                  <a:srgbClr val="1B1B1E"/>
-                </a:solidFill>
-                <a:latin typeface="Arial" pitchFamily="34" charset="0"/>
-                <a:ea typeface="Arial" pitchFamily="34" charset="-122"/>
-                <a:cs typeface="Arial" pitchFamily="34" charset="-120"/>
-              </a:rPr>
-              <a:t>3 · La cuarta alerta</a:t>
-            </a:r>
-            <a:endParaRPr lang="en-US" sz="1200" dirty="0"/>
-          </a:p>
-        </p:txBody>
-      </p:sp>
-      <p:sp>
-        <p:nvSpPr>
-          <p:cNvPr id="23" name="Text 21"/>
-          <p:cNvSpPr txBox="1"/>
-          <p:nvPr/>
-        </p:nvSpPr>
-        <p:spPr>
-          <a:xfrm>
-            <a:off x="649224" y="3803904"/>
-            <a:ext cx="3675888" cy="603504"/>
-          </a:xfrm>
-          <a:prstGeom prst="rect">
-            <a:avLst/>
-          </a:prstGeom>
-          <a:noFill/>
-          <a:ln/>
-        </p:spPr>
-        <p:txBody>
-          <a:bodyPr wrap="square" lIns="0" tIns="0" rIns="0" bIns="0" rtlCol="0" anchor="t"/>
-          <a:lstStyle/>
-          <a:p>
-            <a:pPr indent="0" marL="0">
-              <a:buNone/>
-            </a:pPr>
-            <a:r>
-              <a:rPr lang="en-US" sz="950" dirty="0">
-                <a:solidFill>
-                  <a:srgbClr val="4D4D4D"/>
-                </a:solidFill>
-                <a:latin typeface="Arial" pitchFamily="34" charset="0"/>
-                <a:ea typeface="Arial" pitchFamily="34" charset="-122"/>
-                <a:cs typeface="Arial" pitchFamily="34" charset="-120"/>
-              </a:rPr>
-              <a:t>Configurar la de países y jurisdicciones, que es la que nadie tiene</a:t>
-            </a:r>
-            <a:endParaRPr lang="en-US" sz="950" dirty="0"/>
-          </a:p>
-        </p:txBody>
-      </p:sp>
-      <p:sp>
-        <p:nvSpPr>
-          <p:cNvPr id="24" name="Shape 22"/>
-          <p:cNvSpPr/>
-          <p:nvPr/>
-        </p:nvSpPr>
-        <p:spPr>
-          <a:xfrm>
-            <a:off x="4672584" y="3310128"/>
-            <a:ext cx="3968496" cy="1335024"/>
-          </a:xfrm>
-          <a:prstGeom prst="roundRect">
-            <a:avLst>
-              <a:gd name="adj" fmla="val 4110"/>
-            </a:avLst>
-          </a:prstGeom>
-          <a:solidFill>
-            <a:srgbClr val="FFFFFF"/>
-          </a:solidFill>
-          <a:ln w="9525">
-            <a:solidFill>
-              <a:srgbClr val="DCE6DE"/>
-            </a:solidFill>
-            <a:prstDash val="solid"/>
-          </a:ln>
-        </p:spPr>
-      </p:sp>
-      <p:sp>
-        <p:nvSpPr>
-          <p:cNvPr id="25" name="Shape 23"/>
-          <p:cNvSpPr/>
-          <p:nvPr/>
-        </p:nvSpPr>
-        <p:spPr>
-          <a:xfrm>
-            <a:off x="4818888" y="3456432"/>
-            <a:ext cx="274320" cy="274320"/>
-          </a:xfrm>
-          <a:prstGeom prst="ellipse">
-            <a:avLst/>
-          </a:prstGeom>
-          <a:solidFill>
-            <a:srgbClr val="87D895"/>
-          </a:solidFill>
-          <a:ln/>
-        </p:spPr>
-      </p:sp>
-      <p:sp>
-        <p:nvSpPr>
-          <p:cNvPr id="26" name="Text 24"/>
-          <p:cNvSpPr txBox="1"/>
-          <p:nvPr/>
-        </p:nvSpPr>
-        <p:spPr>
-          <a:xfrm>
-            <a:off x="4818888" y="3456432"/>
-            <a:ext cx="274320" cy="274320"/>
-          </a:xfrm>
-          <a:prstGeom prst="rect">
-            <a:avLst/>
-          </a:prstGeom>
-          <a:noFill/>
-          <a:ln/>
-        </p:spPr>
-        <p:txBody>
-          <a:bodyPr wrap="square" lIns="0" tIns="0" rIns="0" bIns="0" rtlCol="0" anchor="ctr"/>
-          <a:lstStyle/>
-          <a:p>
-            <a:pPr algn="ctr" indent="0" marL="0">
-              <a:buNone/>
-            </a:pPr>
-            <a:r>
-              <a:rPr lang="en-US" sz="1100" b="1" dirty="0">
-                <a:solidFill>
-                  <a:srgbClr val="1B1B1E"/>
-                </a:solidFill>
-                <a:latin typeface="Arial" pitchFamily="34" charset="0"/>
-                <a:ea typeface="Arial" pitchFamily="34" charset="-122"/>
-                <a:cs typeface="Arial" pitchFamily="34" charset="-120"/>
-              </a:rPr>
-              <a:t>4</a:t>
-            </a:r>
-            <a:endParaRPr lang="en-US" sz="1100" dirty="0"/>
-          </a:p>
-        </p:txBody>
-      </p:sp>
-      <p:sp>
-        <p:nvSpPr>
-          <p:cNvPr id="27" name="Text 25"/>
-          <p:cNvSpPr txBox="1"/>
-          <p:nvPr/>
-        </p:nvSpPr>
-        <p:spPr>
-          <a:xfrm>
-            <a:off x="5175504" y="3438144"/>
-            <a:ext cx="3310128" cy="329184"/>
-          </a:xfrm>
-          <a:prstGeom prst="rect">
-            <a:avLst/>
-          </a:prstGeom>
-          <a:noFill/>
-          <a:ln/>
-        </p:spPr>
-        <p:txBody>
-          <a:bodyPr wrap="square" lIns="0" tIns="0" rIns="0" bIns="0" rtlCol="0" anchor="t"/>
-          <a:lstStyle/>
-          <a:p>
-            <a:pPr indent="0" marL="0">
-              <a:buNone/>
-            </a:pPr>
-            <a:r>
-              <a:rPr lang="en-US" sz="1200" b="1" dirty="0">
-                <a:solidFill>
-                  <a:srgbClr val="1B1B1E"/>
-                </a:solidFill>
-                <a:latin typeface="Arial" pitchFamily="34" charset="0"/>
-                <a:ea typeface="Arial" pitchFamily="34" charset="-122"/>
-                <a:cs typeface="Arial" pitchFamily="34" charset="-120"/>
-              </a:rPr>
-              <a:t>4 · La prueba del IVA</a:t>
-            </a:r>
-            <a:endParaRPr lang="en-US" sz="1200" dirty="0"/>
-          </a:p>
-        </p:txBody>
-      </p:sp>
-      <p:sp>
-        <p:nvSpPr>
-          <p:cNvPr id="28" name="Text 26"/>
-          <p:cNvSpPr txBox="1"/>
-          <p:nvPr/>
-        </p:nvSpPr>
-        <p:spPr>
-          <a:xfrm>
-            <a:off x="4818888" y="3803904"/>
-            <a:ext cx="3675888" cy="603504"/>
-          </a:xfrm>
-          <a:prstGeom prst="rect">
-            <a:avLst/>
-          </a:prstGeom>
-          <a:noFill/>
-          <a:ln/>
-        </p:spPr>
-        <p:txBody>
-          <a:bodyPr wrap="square" lIns="0" tIns="0" rIns="0" bIns="0" rtlCol="0" anchor="t"/>
-          <a:lstStyle/>
-          <a:p>
-            <a:pPr indent="0" marL="0">
-              <a:buNone/>
-            </a:pPr>
-            <a:r>
-              <a:rPr lang="en-US" sz="950" dirty="0">
-                <a:solidFill>
-                  <a:srgbClr val="4D4D4D"/>
-                </a:solidFill>
-                <a:latin typeface="Arial" pitchFamily="34" charset="0"/>
-                <a:ea typeface="Arial" pitchFamily="34" charset="-122"/>
-                <a:cs typeface="Arial" pitchFamily="34" charset="-120"/>
-              </a:rPr>
-              <a:t>Sobre su última operación grande: ¿queda del mismo lado en las tres bases?</a:t>
-            </a:r>
-            <a:endParaRPr lang="en-US" sz="950" dirty="0"/>
-          </a:p>
-        </p:txBody>
-      </p:sp>
-      <p:sp>
-        <p:nvSpPr>
-          <p:cNvPr id="29" name="Shape 27"/>
-          <p:cNvSpPr/>
-          <p:nvPr/>
-        </p:nvSpPr>
-        <p:spPr>
-          <a:xfrm>
-            <a:off x="502920" y="3977640"/>
+            <a:off x="502920" y="3703320"/>
             <a:ext cx="8138160" cy="640080"/>
           </a:xfrm>
           <a:prstGeom prst="roundRect">
@@ -41362,13 +41404,13 @@
       </p:sp>
       <p:sp>
         <p:nvSpPr>
-          <p:cNvPr id="30" name="Text 28"/>
-          <p:cNvSpPr txBox="1"/>
-          <p:nvPr/>
-        </p:nvSpPr>
-        <p:spPr>
-          <a:xfrm>
-            <a:off x="731520" y="3995928"/>
+          <p:cNvPr id="16" name="Text 14"/>
+          <p:cNvSpPr txBox="1"/>
+          <p:nvPr/>
+        </p:nvSpPr>
+        <p:spPr>
+          <a:xfrm>
+            <a:off x="731520" y="3721608"/>
             <a:ext cx="7680960" cy="603504"/>
           </a:xfrm>
           <a:prstGeom prst="rect">
@@ -41393,7 +41435,7 @@
                 <a:ea typeface="Arial" pitchFamily="34" charset="-122"/>
                 <a:cs typeface="Arial" pitchFamily="34" charset="-120"/>
               </a:rPr>
-              <a:t>La próxima sesión es el LUNES 14 de septiembre. Vamos fracción por fracción: traigan la duda de su sector.</a:t>
+              <a:t>El mismo coche, el mismo día, el mismo cliente. Y la diferencia entre las dos respuestas es un impuesto.</a:t>
             </a:r>
             <a:endParaRPr lang="en-US" sz="1200" dirty="0"/>
           </a:p>
@@ -41410,6 +41452,990 @@
 <file path=ppt/slides/slide43.xml><?xml version="1.0" encoding="utf-8"?>
 <p:sld xmlns:a="http://schemas.openxmlformats.org/drawingml/2006/main" xmlns:r="http://schemas.openxmlformats.org/officeDocument/2006/relationships" xmlns:p="http://schemas.openxmlformats.org/presentationml/2006/main">
   <p:cSld name="Slide 43">
+    <p:bg>
+      <p:bgPr>
+        <a:solidFill>
+          <a:srgbClr val="F6F8F6"/>
+        </a:solidFill>
+      </p:bgPr>
+    </p:bg>
+    <p:spTree>
+      <p:nvGrpSpPr>
+        <p:cNvPr id="1" name=""/>
+        <p:cNvGrpSpPr/>
+        <p:nvPr/>
+      </p:nvGrpSpPr>
+      <p:grpSpPr>
+        <a:xfrm>
+          <a:off x="0" y="0"/>
+          <a:ext cx="0" cy="0"/>
+          <a:chOff x="0" y="0"/>
+          <a:chExt cx="0" cy="0"/>
+        </a:xfrm>
+      </p:grpSpPr>
+      <p:sp>
+        <p:nvSpPr>
+          <p:cNvPr id="2" name="Shape 0"/>
+          <p:cNvSpPr/>
+          <p:nvPr/>
+        </p:nvSpPr>
+        <p:spPr>
+          <a:xfrm>
+            <a:off x="0" y="4846320"/>
+            <a:ext cx="9144000" cy="18288"/>
+          </a:xfrm>
+          <a:prstGeom prst="rect">
+            <a:avLst/>
+          </a:prstGeom>
+          <a:solidFill>
+            <a:srgbClr val="DCE6DE"/>
+          </a:solidFill>
+          <a:ln/>
+        </p:spPr>
+      </p:sp>
+      <p:sp>
+        <p:nvSpPr>
+          <p:cNvPr id="3" name="Text 1"/>
+          <p:cNvSpPr txBox="1"/>
+          <p:nvPr/>
+        </p:nvSpPr>
+        <p:spPr>
+          <a:xfrm>
+            <a:off x="502920" y="4882896"/>
+            <a:ext cx="6949440" cy="219456"/>
+          </a:xfrm>
+          <a:prstGeom prst="rect">
+            <a:avLst/>
+          </a:prstGeom>
+          <a:noFill/>
+          <a:ln/>
+        </p:spPr>
+        <p:txBody>
+          <a:bodyPr wrap="square" lIns="0" tIns="0" rIns="0" bIns="0" rtlCol="0" anchor="ctr"/>
+          <a:lstStyle/>
+          <a:p>
+            <a:pPr indent="0" marL="0">
+              <a:buNone/>
+            </a:pPr>
+            <a:r>
+              <a:rPr lang="en-US" sz="800" dirty="0">
+                <a:solidFill>
+                  <a:srgbClr val="4D4D4D"/>
+                </a:solidFill>
+                <a:latin typeface="Arial" pitchFamily="34" charset="0"/>
+                <a:ea typeface="Arial" pitchFamily="34" charset="-122"/>
+                <a:cs typeface="Arial" pitchFamily="34" charset="-120"/>
+              </a:rPr>
+              <a:t>Taller Antilavado 360 · Sesión 4 · 8 de septiembre de 2026 · GMC360 / 360Educa</a:t>
+            </a:r>
+            <a:endParaRPr lang="en-US" sz="800" dirty="0"/>
+          </a:p>
+        </p:txBody>
+      </p:sp>
+      <p:sp>
+        <p:nvSpPr>
+          <p:cNvPr id="4" name="Text 2"/>
+          <p:cNvSpPr txBox="1"/>
+          <p:nvPr/>
+        </p:nvSpPr>
+        <p:spPr>
+          <a:xfrm>
+            <a:off x="8138160" y="4864608"/>
+            <a:ext cx="502920" cy="237744"/>
+          </a:xfrm>
+          <a:prstGeom prst="rect">
+            <a:avLst/>
+          </a:prstGeom>
+          <a:noFill/>
+          <a:ln/>
+        </p:spPr>
+        <p:txBody>
+          <a:bodyPr wrap="square" lIns="0" tIns="0" rIns="0" bIns="0" rtlCol="0" anchor="ctr"/>
+          <a:lstStyle/>
+          <a:p>
+            <a:pPr algn="r" indent="0" marL="0">
+              <a:buNone/>
+            </a:pPr>
+            <a:r>
+              <a:rPr lang="en-US" sz="900" b="1" dirty="0">
+                <a:solidFill>
+                  <a:srgbClr val="2E7D4F"/>
+                </a:solidFill>
+                <a:latin typeface="Arial" pitchFamily="34" charset="0"/>
+                <a:ea typeface="Arial" pitchFamily="34" charset="-122"/>
+                <a:cs typeface="Arial" pitchFamily="34" charset="-120"/>
+              </a:rPr>
+              <a:t>43</a:t>
+            </a:r>
+            <a:endParaRPr lang="en-US" sz="900" dirty="0"/>
+          </a:p>
+        </p:txBody>
+      </p:sp>
+      <p:sp>
+        <p:nvSpPr>
+          <p:cNvPr id="5" name="Shape 3"/>
+          <p:cNvSpPr/>
+          <p:nvPr/>
+        </p:nvSpPr>
+        <p:spPr>
+          <a:xfrm>
+            <a:off x="502920" y="384048"/>
+            <a:ext cx="384048" cy="384048"/>
+          </a:xfrm>
+          <a:prstGeom prst="ellipse">
+            <a:avLst/>
+          </a:prstGeom>
+          <a:solidFill>
+            <a:srgbClr val="64C27B"/>
+          </a:solidFill>
+          <a:ln/>
+        </p:spPr>
+      </p:sp>
+      <p:sp>
+        <p:nvSpPr>
+          <p:cNvPr id="6" name="Text 4"/>
+          <p:cNvSpPr txBox="1"/>
+          <p:nvPr/>
+        </p:nvSpPr>
+        <p:spPr>
+          <a:xfrm>
+            <a:off x="502920" y="384048"/>
+            <a:ext cx="384048" cy="384048"/>
+          </a:xfrm>
+          <a:prstGeom prst="rect">
+            <a:avLst/>
+          </a:prstGeom>
+          <a:noFill/>
+          <a:ln/>
+        </p:spPr>
+        <p:txBody>
+          <a:bodyPr wrap="square" lIns="0" tIns="0" rIns="0" bIns="0" rtlCol="0" anchor="ctr"/>
+          <a:lstStyle/>
+          <a:p>
+            <a:pPr algn="ctr" indent="0" marL="0">
+              <a:buNone/>
+            </a:pPr>
+            <a:r>
+              <a:rPr lang="en-US" sz="1300" b="1" dirty="0">
+                <a:solidFill>
+                  <a:srgbClr val="1B1B1E"/>
+                </a:solidFill>
+                <a:latin typeface="Arial" pitchFamily="34" charset="0"/>
+                <a:ea typeface="Arial" pitchFamily="34" charset="-122"/>
+                <a:cs typeface="Arial" pitchFamily="34" charset="-120"/>
+              </a:rPr>
+              <a:t>43</a:t>
+            </a:r>
+            <a:endParaRPr lang="en-US" sz="1300" dirty="0"/>
+          </a:p>
+        </p:txBody>
+      </p:sp>
+      <p:sp>
+        <p:nvSpPr>
+          <p:cNvPr id="7" name="Text 5"/>
+          <p:cNvSpPr txBox="1"/>
+          <p:nvPr/>
+        </p:nvSpPr>
+        <p:spPr>
+          <a:xfrm>
+            <a:off x="1024128" y="420624"/>
+            <a:ext cx="7589520" cy="292608"/>
+          </a:xfrm>
+          <a:prstGeom prst="rect">
+            <a:avLst/>
+          </a:prstGeom>
+          <a:noFill/>
+          <a:ln/>
+        </p:spPr>
+        <p:txBody>
+          <a:bodyPr wrap="square" lIns="0" tIns="0" rIns="0" bIns="0" rtlCol="0" anchor="ctr"/>
+          <a:lstStyle/>
+          <a:p>
+            <a:pPr indent="0" marL="0">
+              <a:buNone/>
+            </a:pPr>
+            <a:r>
+              <a:rPr lang="en-US" sz="1100" b="1" spc="120" kern="0" dirty="0">
+                <a:solidFill>
+                  <a:srgbClr val="2E7D4F"/>
+                </a:solidFill>
+                <a:latin typeface="Arial" pitchFamily="34" charset="0"/>
+                <a:ea typeface="Arial" pitchFamily="34" charset="-122"/>
+                <a:cs typeface="Arial" pitchFamily="34" charset="-120"/>
+              </a:rPr>
+              <a:t>CIERRE</a:t>
+            </a:r>
+            <a:endParaRPr lang="en-US" sz="1100" dirty="0"/>
+          </a:p>
+        </p:txBody>
+      </p:sp>
+      <p:sp>
+        <p:nvSpPr>
+          <p:cNvPr id="8" name="Text 6"/>
+          <p:cNvSpPr txBox="1"/>
+          <p:nvPr/>
+        </p:nvSpPr>
+        <p:spPr>
+          <a:xfrm>
+            <a:off x="502920" y="960120"/>
+            <a:ext cx="8138160" cy="786384"/>
+          </a:xfrm>
+          <a:prstGeom prst="rect">
+            <a:avLst/>
+          </a:prstGeom>
+          <a:noFill/>
+          <a:ln/>
+        </p:spPr>
+        <p:txBody>
+          <a:bodyPr wrap="square" lIns="0" tIns="0" rIns="0" bIns="0" rtlCol="0" anchor="t"/>
+          <a:lstStyle/>
+          <a:p>
+            <a:pPr indent="0" marL="0">
+              <a:buNone/>
+            </a:pPr>
+            <a:r>
+              <a:rPr lang="en-US" sz="2700" b="1" dirty="0">
+                <a:solidFill>
+                  <a:srgbClr val="1B1B1E"/>
+                </a:solidFill>
+                <a:latin typeface="Arial" pitchFamily="34" charset="0"/>
+                <a:ea typeface="Arial" pitchFamily="34" charset="-122"/>
+                <a:cs typeface="Arial" pitchFamily="34" charset="-120"/>
+              </a:rPr>
+              <a:t>La tarea, cuatro cosas</a:t>
+            </a:r>
+            <a:endParaRPr lang="en-US" sz="2700" dirty="0"/>
+          </a:p>
+        </p:txBody>
+      </p:sp>
+      <p:sp>
+        <p:nvSpPr>
+          <p:cNvPr id="9" name="Shape 7"/>
+          <p:cNvSpPr/>
+          <p:nvPr/>
+        </p:nvSpPr>
+        <p:spPr>
+          <a:xfrm>
+            <a:off x="502920" y="1828800"/>
+            <a:ext cx="3968496" cy="1335024"/>
+          </a:xfrm>
+          <a:prstGeom prst="roundRect">
+            <a:avLst>
+              <a:gd name="adj" fmla="val 4110"/>
+            </a:avLst>
+          </a:prstGeom>
+          <a:solidFill>
+            <a:srgbClr val="FFFFFF"/>
+          </a:solidFill>
+          <a:ln w="9525">
+            <a:solidFill>
+              <a:srgbClr val="DCE6DE"/>
+            </a:solidFill>
+            <a:prstDash val="solid"/>
+          </a:ln>
+        </p:spPr>
+      </p:sp>
+      <p:sp>
+        <p:nvSpPr>
+          <p:cNvPr id="10" name="Shape 8"/>
+          <p:cNvSpPr/>
+          <p:nvPr/>
+        </p:nvSpPr>
+        <p:spPr>
+          <a:xfrm>
+            <a:off x="649224" y="1975104"/>
+            <a:ext cx="274320" cy="274320"/>
+          </a:xfrm>
+          <a:prstGeom prst="ellipse">
+            <a:avLst/>
+          </a:prstGeom>
+          <a:solidFill>
+            <a:srgbClr val="87D895"/>
+          </a:solidFill>
+          <a:ln/>
+        </p:spPr>
+      </p:sp>
+      <p:sp>
+        <p:nvSpPr>
+          <p:cNvPr id="11" name="Text 9"/>
+          <p:cNvSpPr txBox="1"/>
+          <p:nvPr/>
+        </p:nvSpPr>
+        <p:spPr>
+          <a:xfrm>
+            <a:off x="649224" y="1975104"/>
+            <a:ext cx="274320" cy="274320"/>
+          </a:xfrm>
+          <a:prstGeom prst="rect">
+            <a:avLst/>
+          </a:prstGeom>
+          <a:noFill/>
+          <a:ln/>
+        </p:spPr>
+        <p:txBody>
+          <a:bodyPr wrap="square" lIns="0" tIns="0" rIns="0" bIns="0" rtlCol="0" anchor="ctr"/>
+          <a:lstStyle/>
+          <a:p>
+            <a:pPr algn="ctr" indent="0" marL="0">
+              <a:buNone/>
+            </a:pPr>
+            <a:r>
+              <a:rPr lang="en-US" sz="1100" b="1" dirty="0">
+                <a:solidFill>
+                  <a:srgbClr val="1B1B1E"/>
+                </a:solidFill>
+                <a:latin typeface="Arial" pitchFamily="34" charset="0"/>
+                <a:ea typeface="Arial" pitchFamily="34" charset="-122"/>
+                <a:cs typeface="Arial" pitchFamily="34" charset="-120"/>
+              </a:rPr>
+              <a:t>1</a:t>
+            </a:r>
+            <a:endParaRPr lang="en-US" sz="1100" dirty="0"/>
+          </a:p>
+        </p:txBody>
+      </p:sp>
+      <p:sp>
+        <p:nvSpPr>
+          <p:cNvPr id="12" name="Text 10"/>
+          <p:cNvSpPr txBox="1"/>
+          <p:nvPr/>
+        </p:nvSpPr>
+        <p:spPr>
+          <a:xfrm>
+            <a:off x="1005840" y="1956816"/>
+            <a:ext cx="3310128" cy="329184"/>
+          </a:xfrm>
+          <a:prstGeom prst="rect">
+            <a:avLst/>
+          </a:prstGeom>
+          <a:noFill/>
+          <a:ln/>
+        </p:spPr>
+        <p:txBody>
+          <a:bodyPr wrap="square" lIns="0" tIns="0" rIns="0" bIns="0" rtlCol="0" anchor="t"/>
+          <a:lstStyle/>
+          <a:p>
+            <a:pPr indent="0" marL="0">
+              <a:buNone/>
+            </a:pPr>
+            <a:r>
+              <a:rPr lang="en-US" sz="1200" b="1" dirty="0">
+                <a:solidFill>
+                  <a:srgbClr val="1B1B1E"/>
+                </a:solidFill>
+                <a:latin typeface="Arial" pitchFamily="34" charset="0"/>
+                <a:ea typeface="Arial" pitchFamily="34" charset="-122"/>
+                <a:cs typeface="Arial" pitchFamily="34" charset="-120"/>
+              </a:rPr>
+              <a:t>1 · El renglón del perfil</a:t>
+            </a:r>
+            <a:endParaRPr lang="en-US" sz="1200" dirty="0"/>
+          </a:p>
+        </p:txBody>
+      </p:sp>
+      <p:sp>
+        <p:nvSpPr>
+          <p:cNvPr id="13" name="Text 11"/>
+          <p:cNvSpPr txBox="1"/>
+          <p:nvPr/>
+        </p:nvSpPr>
+        <p:spPr>
+          <a:xfrm>
+            <a:off x="649224" y="2322576"/>
+            <a:ext cx="3675888" cy="603504"/>
+          </a:xfrm>
+          <a:prstGeom prst="rect">
+            <a:avLst/>
+          </a:prstGeom>
+          <a:noFill/>
+          <a:ln/>
+        </p:spPr>
+        <p:txBody>
+          <a:bodyPr wrap="square" lIns="0" tIns="0" rIns="0" bIns="0" rtlCol="0" anchor="t"/>
+          <a:lstStyle/>
+          <a:p>
+            <a:pPr indent="0" marL="0">
+              <a:buNone/>
+            </a:pPr>
+            <a:r>
+              <a:rPr lang="en-US" sz="950" dirty="0">
+                <a:solidFill>
+                  <a:srgbClr val="4D4D4D"/>
+                </a:solidFill>
+                <a:latin typeface="Arial" pitchFamily="34" charset="0"/>
+                <a:ea typeface="Arial" pitchFamily="34" charset="-122"/>
+                <a:cs typeface="Arial" pitchFamily="34" charset="-120"/>
+              </a:rPr>
+              <a:t>Meter el monto máximo mensual estimado al cuestionario de alta. Es de esta semana, no de 2027</a:t>
+            </a:r>
+            <a:endParaRPr lang="en-US" sz="950" dirty="0"/>
+          </a:p>
+        </p:txBody>
+      </p:sp>
+      <p:sp>
+        <p:nvSpPr>
+          <p:cNvPr id="14" name="Shape 12"/>
+          <p:cNvSpPr/>
+          <p:nvPr/>
+        </p:nvSpPr>
+        <p:spPr>
+          <a:xfrm>
+            <a:off x="4672584" y="1828800"/>
+            <a:ext cx="3968496" cy="1335024"/>
+          </a:xfrm>
+          <a:prstGeom prst="roundRect">
+            <a:avLst>
+              <a:gd name="adj" fmla="val 4110"/>
+            </a:avLst>
+          </a:prstGeom>
+          <a:solidFill>
+            <a:srgbClr val="FFFFFF"/>
+          </a:solidFill>
+          <a:ln w="9525">
+            <a:solidFill>
+              <a:srgbClr val="DCE6DE"/>
+            </a:solidFill>
+            <a:prstDash val="solid"/>
+          </a:ln>
+        </p:spPr>
+      </p:sp>
+      <p:sp>
+        <p:nvSpPr>
+          <p:cNvPr id="15" name="Shape 13"/>
+          <p:cNvSpPr/>
+          <p:nvPr/>
+        </p:nvSpPr>
+        <p:spPr>
+          <a:xfrm>
+            <a:off x="4818888" y="1975104"/>
+            <a:ext cx="274320" cy="274320"/>
+          </a:xfrm>
+          <a:prstGeom prst="ellipse">
+            <a:avLst/>
+          </a:prstGeom>
+          <a:solidFill>
+            <a:srgbClr val="87D895"/>
+          </a:solidFill>
+          <a:ln/>
+        </p:spPr>
+      </p:sp>
+      <p:sp>
+        <p:nvSpPr>
+          <p:cNvPr id="16" name="Text 14"/>
+          <p:cNvSpPr txBox="1"/>
+          <p:nvPr/>
+        </p:nvSpPr>
+        <p:spPr>
+          <a:xfrm>
+            <a:off x="4818888" y="1975104"/>
+            <a:ext cx="274320" cy="274320"/>
+          </a:xfrm>
+          <a:prstGeom prst="rect">
+            <a:avLst/>
+          </a:prstGeom>
+          <a:noFill/>
+          <a:ln/>
+        </p:spPr>
+        <p:txBody>
+          <a:bodyPr wrap="square" lIns="0" tIns="0" rIns="0" bIns="0" rtlCol="0" anchor="ctr"/>
+          <a:lstStyle/>
+          <a:p>
+            <a:pPr algn="ctr" indent="0" marL="0">
+              <a:buNone/>
+            </a:pPr>
+            <a:r>
+              <a:rPr lang="en-US" sz="1100" b="1" dirty="0">
+                <a:solidFill>
+                  <a:srgbClr val="1B1B1E"/>
+                </a:solidFill>
+                <a:latin typeface="Arial" pitchFamily="34" charset="0"/>
+                <a:ea typeface="Arial" pitchFamily="34" charset="-122"/>
+                <a:cs typeface="Arial" pitchFamily="34" charset="-120"/>
+              </a:rPr>
+              <a:t>2</a:t>
+            </a:r>
+            <a:endParaRPr lang="en-US" sz="1100" dirty="0"/>
+          </a:p>
+        </p:txBody>
+      </p:sp>
+      <p:sp>
+        <p:nvSpPr>
+          <p:cNvPr id="17" name="Text 15"/>
+          <p:cNvSpPr txBox="1"/>
+          <p:nvPr/>
+        </p:nvSpPr>
+        <p:spPr>
+          <a:xfrm>
+            <a:off x="5175504" y="1956816"/>
+            <a:ext cx="3310128" cy="329184"/>
+          </a:xfrm>
+          <a:prstGeom prst="rect">
+            <a:avLst/>
+          </a:prstGeom>
+          <a:noFill/>
+          <a:ln/>
+        </p:spPr>
+        <p:txBody>
+          <a:bodyPr wrap="square" lIns="0" tIns="0" rIns="0" bIns="0" rtlCol="0" anchor="t"/>
+          <a:lstStyle/>
+          <a:p>
+            <a:pPr indent="0" marL="0">
+              <a:buNone/>
+            </a:pPr>
+            <a:r>
+              <a:rPr lang="en-US" sz="1200" b="1" dirty="0">
+                <a:solidFill>
+                  <a:srgbClr val="1B1B1E"/>
+                </a:solidFill>
+                <a:latin typeface="Arial" pitchFamily="34" charset="0"/>
+                <a:ea typeface="Arial" pitchFamily="34" charset="-122"/>
+                <a:cs typeface="Arial" pitchFamily="34" charset="-120"/>
+              </a:rPr>
+              <a:t>2 · Terminar el checklist</a:t>
+            </a:r>
+            <a:endParaRPr lang="en-US" sz="1200" dirty="0"/>
+          </a:p>
+        </p:txBody>
+      </p:sp>
+      <p:sp>
+        <p:nvSpPr>
+          <p:cNvPr id="18" name="Text 16"/>
+          <p:cNvSpPr txBox="1"/>
+          <p:nvPr/>
+        </p:nvSpPr>
+        <p:spPr>
+          <a:xfrm>
+            <a:off x="4818888" y="2322576"/>
+            <a:ext cx="3675888" cy="603504"/>
+          </a:xfrm>
+          <a:prstGeom prst="rect">
+            <a:avLst/>
+          </a:prstGeom>
+          <a:noFill/>
+          <a:ln/>
+        </p:spPr>
+        <p:txBody>
+          <a:bodyPr wrap="square" lIns="0" tIns="0" rIns="0" bIns="0" rtlCol="0" anchor="t"/>
+          <a:lstStyle/>
+          <a:p>
+            <a:pPr indent="0" marL="0">
+              <a:buNone/>
+            </a:pPr>
+            <a:r>
+              <a:rPr lang="en-US" sz="950" dirty="0">
+                <a:solidFill>
+                  <a:srgbClr val="4D4D4D"/>
+                </a:solidFill>
+                <a:latin typeface="Arial" pitchFamily="34" charset="0"/>
+                <a:ea typeface="Arial" pitchFamily="34" charset="-122"/>
+                <a:cs typeface="Arial" pitchFamily="34" charset="-120"/>
+              </a:rPr>
+              <a:t>De la estructura que trajo, documentando el nivel en que cerró</a:t>
+            </a:r>
+            <a:endParaRPr lang="en-US" sz="950" dirty="0"/>
+          </a:p>
+        </p:txBody>
+      </p:sp>
+      <p:sp>
+        <p:nvSpPr>
+          <p:cNvPr id="19" name="Shape 17"/>
+          <p:cNvSpPr/>
+          <p:nvPr/>
+        </p:nvSpPr>
+        <p:spPr>
+          <a:xfrm>
+            <a:off x="502920" y="3310128"/>
+            <a:ext cx="3968496" cy="1335024"/>
+          </a:xfrm>
+          <a:prstGeom prst="roundRect">
+            <a:avLst>
+              <a:gd name="adj" fmla="val 4110"/>
+            </a:avLst>
+          </a:prstGeom>
+          <a:solidFill>
+            <a:srgbClr val="FFFFFF"/>
+          </a:solidFill>
+          <a:ln w="9525">
+            <a:solidFill>
+              <a:srgbClr val="DCE6DE"/>
+            </a:solidFill>
+            <a:prstDash val="solid"/>
+          </a:ln>
+        </p:spPr>
+      </p:sp>
+      <p:sp>
+        <p:nvSpPr>
+          <p:cNvPr id="20" name="Shape 18"/>
+          <p:cNvSpPr/>
+          <p:nvPr/>
+        </p:nvSpPr>
+        <p:spPr>
+          <a:xfrm>
+            <a:off x="649224" y="3456432"/>
+            <a:ext cx="274320" cy="274320"/>
+          </a:xfrm>
+          <a:prstGeom prst="ellipse">
+            <a:avLst/>
+          </a:prstGeom>
+          <a:solidFill>
+            <a:srgbClr val="87D895"/>
+          </a:solidFill>
+          <a:ln/>
+        </p:spPr>
+      </p:sp>
+      <p:sp>
+        <p:nvSpPr>
+          <p:cNvPr id="21" name="Text 19"/>
+          <p:cNvSpPr txBox="1"/>
+          <p:nvPr/>
+        </p:nvSpPr>
+        <p:spPr>
+          <a:xfrm>
+            <a:off x="649224" y="3456432"/>
+            <a:ext cx="274320" cy="274320"/>
+          </a:xfrm>
+          <a:prstGeom prst="rect">
+            <a:avLst/>
+          </a:prstGeom>
+          <a:noFill/>
+          <a:ln/>
+        </p:spPr>
+        <p:txBody>
+          <a:bodyPr wrap="square" lIns="0" tIns="0" rIns="0" bIns="0" rtlCol="0" anchor="ctr"/>
+          <a:lstStyle/>
+          <a:p>
+            <a:pPr algn="ctr" indent="0" marL="0">
+              <a:buNone/>
+            </a:pPr>
+            <a:r>
+              <a:rPr lang="en-US" sz="1100" b="1" dirty="0">
+                <a:solidFill>
+                  <a:srgbClr val="1B1B1E"/>
+                </a:solidFill>
+                <a:latin typeface="Arial" pitchFamily="34" charset="0"/>
+                <a:ea typeface="Arial" pitchFamily="34" charset="-122"/>
+                <a:cs typeface="Arial" pitchFamily="34" charset="-120"/>
+              </a:rPr>
+              <a:t>3</a:t>
+            </a:r>
+            <a:endParaRPr lang="en-US" sz="1100" dirty="0"/>
+          </a:p>
+        </p:txBody>
+      </p:sp>
+      <p:sp>
+        <p:nvSpPr>
+          <p:cNvPr id="22" name="Text 20"/>
+          <p:cNvSpPr txBox="1"/>
+          <p:nvPr/>
+        </p:nvSpPr>
+        <p:spPr>
+          <a:xfrm>
+            <a:off x="1005840" y="3438144"/>
+            <a:ext cx="3310128" cy="329184"/>
+          </a:xfrm>
+          <a:prstGeom prst="rect">
+            <a:avLst/>
+          </a:prstGeom>
+          <a:noFill/>
+          <a:ln/>
+        </p:spPr>
+        <p:txBody>
+          <a:bodyPr wrap="square" lIns="0" tIns="0" rIns="0" bIns="0" rtlCol="0" anchor="t"/>
+          <a:lstStyle/>
+          <a:p>
+            <a:pPr indent="0" marL="0">
+              <a:buNone/>
+            </a:pPr>
+            <a:r>
+              <a:rPr lang="en-US" sz="1200" b="1" dirty="0">
+                <a:solidFill>
+                  <a:srgbClr val="1B1B1E"/>
+                </a:solidFill>
+                <a:latin typeface="Arial" pitchFamily="34" charset="0"/>
+                <a:ea typeface="Arial" pitchFamily="34" charset="-122"/>
+                <a:cs typeface="Arial" pitchFamily="34" charset="-120"/>
+              </a:rPr>
+              <a:t>3 · La cuarta alerta</a:t>
+            </a:r>
+            <a:endParaRPr lang="en-US" sz="1200" dirty="0"/>
+          </a:p>
+        </p:txBody>
+      </p:sp>
+      <p:sp>
+        <p:nvSpPr>
+          <p:cNvPr id="23" name="Text 21"/>
+          <p:cNvSpPr txBox="1"/>
+          <p:nvPr/>
+        </p:nvSpPr>
+        <p:spPr>
+          <a:xfrm>
+            <a:off x="649224" y="3803904"/>
+            <a:ext cx="3675888" cy="603504"/>
+          </a:xfrm>
+          <a:prstGeom prst="rect">
+            <a:avLst/>
+          </a:prstGeom>
+          <a:noFill/>
+          <a:ln/>
+        </p:spPr>
+        <p:txBody>
+          <a:bodyPr wrap="square" lIns="0" tIns="0" rIns="0" bIns="0" rtlCol="0" anchor="t"/>
+          <a:lstStyle/>
+          <a:p>
+            <a:pPr indent="0" marL="0">
+              <a:buNone/>
+            </a:pPr>
+            <a:r>
+              <a:rPr lang="en-US" sz="950" dirty="0">
+                <a:solidFill>
+                  <a:srgbClr val="4D4D4D"/>
+                </a:solidFill>
+                <a:latin typeface="Arial" pitchFamily="34" charset="0"/>
+                <a:ea typeface="Arial" pitchFamily="34" charset="-122"/>
+                <a:cs typeface="Arial" pitchFamily="34" charset="-120"/>
+              </a:rPr>
+              <a:t>Configurar la de países y jurisdicciones, que es la que nadie tiene</a:t>
+            </a:r>
+            <a:endParaRPr lang="en-US" sz="950" dirty="0"/>
+          </a:p>
+        </p:txBody>
+      </p:sp>
+      <p:sp>
+        <p:nvSpPr>
+          <p:cNvPr id="24" name="Shape 22"/>
+          <p:cNvSpPr/>
+          <p:nvPr/>
+        </p:nvSpPr>
+        <p:spPr>
+          <a:xfrm>
+            <a:off x="4672584" y="3310128"/>
+            <a:ext cx="3968496" cy="1335024"/>
+          </a:xfrm>
+          <a:prstGeom prst="roundRect">
+            <a:avLst>
+              <a:gd name="adj" fmla="val 4110"/>
+            </a:avLst>
+          </a:prstGeom>
+          <a:solidFill>
+            <a:srgbClr val="FFFFFF"/>
+          </a:solidFill>
+          <a:ln w="9525">
+            <a:solidFill>
+              <a:srgbClr val="DCE6DE"/>
+            </a:solidFill>
+            <a:prstDash val="solid"/>
+          </a:ln>
+        </p:spPr>
+      </p:sp>
+      <p:sp>
+        <p:nvSpPr>
+          <p:cNvPr id="25" name="Shape 23"/>
+          <p:cNvSpPr/>
+          <p:nvPr/>
+        </p:nvSpPr>
+        <p:spPr>
+          <a:xfrm>
+            <a:off x="4818888" y="3456432"/>
+            <a:ext cx="274320" cy="274320"/>
+          </a:xfrm>
+          <a:prstGeom prst="ellipse">
+            <a:avLst/>
+          </a:prstGeom>
+          <a:solidFill>
+            <a:srgbClr val="87D895"/>
+          </a:solidFill>
+          <a:ln/>
+        </p:spPr>
+      </p:sp>
+      <p:sp>
+        <p:nvSpPr>
+          <p:cNvPr id="26" name="Text 24"/>
+          <p:cNvSpPr txBox="1"/>
+          <p:nvPr/>
+        </p:nvSpPr>
+        <p:spPr>
+          <a:xfrm>
+            <a:off x="4818888" y="3456432"/>
+            <a:ext cx="274320" cy="274320"/>
+          </a:xfrm>
+          <a:prstGeom prst="rect">
+            <a:avLst/>
+          </a:prstGeom>
+          <a:noFill/>
+          <a:ln/>
+        </p:spPr>
+        <p:txBody>
+          <a:bodyPr wrap="square" lIns="0" tIns="0" rIns="0" bIns="0" rtlCol="0" anchor="ctr"/>
+          <a:lstStyle/>
+          <a:p>
+            <a:pPr algn="ctr" indent="0" marL="0">
+              <a:buNone/>
+            </a:pPr>
+            <a:r>
+              <a:rPr lang="en-US" sz="1100" b="1" dirty="0">
+                <a:solidFill>
+                  <a:srgbClr val="1B1B1E"/>
+                </a:solidFill>
+                <a:latin typeface="Arial" pitchFamily="34" charset="0"/>
+                <a:ea typeface="Arial" pitchFamily="34" charset="-122"/>
+                <a:cs typeface="Arial" pitchFamily="34" charset="-120"/>
+              </a:rPr>
+              <a:t>4</a:t>
+            </a:r>
+            <a:endParaRPr lang="en-US" sz="1100" dirty="0"/>
+          </a:p>
+        </p:txBody>
+      </p:sp>
+      <p:sp>
+        <p:nvSpPr>
+          <p:cNvPr id="27" name="Text 25"/>
+          <p:cNvSpPr txBox="1"/>
+          <p:nvPr/>
+        </p:nvSpPr>
+        <p:spPr>
+          <a:xfrm>
+            <a:off x="5175504" y="3438144"/>
+            <a:ext cx="3310128" cy="329184"/>
+          </a:xfrm>
+          <a:prstGeom prst="rect">
+            <a:avLst/>
+          </a:prstGeom>
+          <a:noFill/>
+          <a:ln/>
+        </p:spPr>
+        <p:txBody>
+          <a:bodyPr wrap="square" lIns="0" tIns="0" rIns="0" bIns="0" rtlCol="0" anchor="t"/>
+          <a:lstStyle/>
+          <a:p>
+            <a:pPr indent="0" marL="0">
+              <a:buNone/>
+            </a:pPr>
+            <a:r>
+              <a:rPr lang="en-US" sz="1200" b="1" dirty="0">
+                <a:solidFill>
+                  <a:srgbClr val="1B1B1E"/>
+                </a:solidFill>
+                <a:latin typeface="Arial" pitchFamily="34" charset="0"/>
+                <a:ea typeface="Arial" pitchFamily="34" charset="-122"/>
+                <a:cs typeface="Arial" pitchFamily="34" charset="-120"/>
+              </a:rPr>
+              <a:t>4 · La prueba del IVA</a:t>
+            </a:r>
+            <a:endParaRPr lang="en-US" sz="1200" dirty="0"/>
+          </a:p>
+        </p:txBody>
+      </p:sp>
+      <p:sp>
+        <p:nvSpPr>
+          <p:cNvPr id="28" name="Text 26"/>
+          <p:cNvSpPr txBox="1"/>
+          <p:nvPr/>
+        </p:nvSpPr>
+        <p:spPr>
+          <a:xfrm>
+            <a:off x="4818888" y="3803904"/>
+            <a:ext cx="3675888" cy="603504"/>
+          </a:xfrm>
+          <a:prstGeom prst="rect">
+            <a:avLst/>
+          </a:prstGeom>
+          <a:noFill/>
+          <a:ln/>
+        </p:spPr>
+        <p:txBody>
+          <a:bodyPr wrap="square" lIns="0" tIns="0" rIns="0" bIns="0" rtlCol="0" anchor="t"/>
+          <a:lstStyle/>
+          <a:p>
+            <a:pPr indent="0" marL="0">
+              <a:buNone/>
+            </a:pPr>
+            <a:r>
+              <a:rPr lang="en-US" sz="950" dirty="0">
+                <a:solidFill>
+                  <a:srgbClr val="4D4D4D"/>
+                </a:solidFill>
+                <a:latin typeface="Arial" pitchFamily="34" charset="0"/>
+                <a:ea typeface="Arial" pitchFamily="34" charset="-122"/>
+                <a:cs typeface="Arial" pitchFamily="34" charset="-120"/>
+              </a:rPr>
+              <a:t>Sobre su última operación grande: ¿queda del mismo lado en las tres bases?</a:t>
+            </a:r>
+            <a:endParaRPr lang="en-US" sz="950" dirty="0"/>
+          </a:p>
+        </p:txBody>
+      </p:sp>
+      <p:sp>
+        <p:nvSpPr>
+          <p:cNvPr id="29" name="Shape 27"/>
+          <p:cNvSpPr/>
+          <p:nvPr/>
+        </p:nvSpPr>
+        <p:spPr>
+          <a:xfrm>
+            <a:off x="502920" y="3977640"/>
+            <a:ext cx="8138160" cy="640080"/>
+          </a:xfrm>
+          <a:prstGeom prst="roundRect">
+            <a:avLst>
+              <a:gd name="adj" fmla="val 8571"/>
+            </a:avLst>
+          </a:prstGeom>
+          <a:solidFill>
+            <a:srgbClr val="87D895"/>
+          </a:solidFill>
+          <a:ln/>
+        </p:spPr>
+      </p:sp>
+      <p:sp>
+        <p:nvSpPr>
+          <p:cNvPr id="30" name="Text 28"/>
+          <p:cNvSpPr txBox="1"/>
+          <p:nvPr/>
+        </p:nvSpPr>
+        <p:spPr>
+          <a:xfrm>
+            <a:off x="731520" y="3995928"/>
+            <a:ext cx="7680960" cy="603504"/>
+          </a:xfrm>
+          <a:prstGeom prst="rect">
+            <a:avLst/>
+          </a:prstGeom>
+          <a:noFill/>
+          <a:ln/>
+        </p:spPr>
+        <p:txBody>
+          <a:bodyPr wrap="square" lIns="0" tIns="0" rIns="0" bIns="0" rtlCol="0" anchor="ctr"/>
+          <a:lstStyle/>
+          <a:p>
+            <a:pPr indent="0" marL="0">
+              <a:buNone/>
+            </a:pPr>
+            <a:r>
+              <a:rPr lang="en-US" sz="1200" b="1" dirty="0">
+                <a:solidFill>
+                  <a:srgbClr val="1B1B1E"/>
+                </a:solidFill>
+                <a:latin typeface="Arial" pitchFamily="34" charset="0"/>
+                <a:ea typeface="Arial" pitchFamily="34" charset="-122"/>
+                <a:cs typeface="Arial" pitchFamily="34" charset="-120"/>
+              </a:rPr>
+              <a:t>La próxima sesión es el LUNES 14 de septiembre. Vamos fracción por fracción: traigan la duda de su sector.</a:t>
+            </a:r>
+            <a:endParaRPr lang="en-US" sz="1200" dirty="0"/>
+          </a:p>
+        </p:txBody>
+      </p:sp>
+    </p:spTree>
+  </p:cSld>
+  <p:clrMapOvr>
+    <a:masterClrMapping/>
+  </p:clrMapOvr>
+</p:sld>
+</file>
+
+<file path=ppt/slides/slide44.xml><?xml version="1.0" encoding="utf-8"?>
+<p:sld xmlns:a="http://schemas.openxmlformats.org/drawingml/2006/main" xmlns:r="http://schemas.openxmlformats.org/officeDocument/2006/relationships" xmlns:p="http://schemas.openxmlformats.org/presentationml/2006/main">
+  <p:cSld name="Slide 44">
     <p:bg>
       <p:bgPr>
         <a:solidFill>
